--- a/docs/pptx/auc3/jx-auc3-linsubhr-ratio-hosp1.pptx
+++ b/docs/pptx/auc3/jx-auc3-linsubhr-ratio-hosp1.pptx
@@ -2271,7 +2271,7 @@
           </p:nvSpPr>
           <p:spPr>
             <a:xfrm>
-              <a:off x="817517" y="5114368"/>
+              <a:off x="817517" y="5142518"/>
               <a:ext cx="7799693" cy="0"/>
             </a:xfrm>
             <a:custGeom>
@@ -2314,7 +2314,7 @@
           </p:nvSpPr>
           <p:spPr>
             <a:xfrm>
-              <a:off x="817517" y="4244691"/>
+              <a:off x="817517" y="4313054"/>
               <a:ext cx="7799693" cy="0"/>
             </a:xfrm>
             <a:custGeom>
@@ -2357,7 +2357,7 @@
           </p:nvSpPr>
           <p:spPr>
             <a:xfrm>
-              <a:off x="817517" y="3375014"/>
+              <a:off x="817517" y="3483591"/>
               <a:ext cx="7799693" cy="0"/>
             </a:xfrm>
             <a:custGeom>
@@ -2400,7 +2400,7 @@
           </p:nvSpPr>
           <p:spPr>
             <a:xfrm>
-              <a:off x="817517" y="2505337"/>
+              <a:off x="817517" y="2654127"/>
               <a:ext cx="7799693" cy="0"/>
             </a:xfrm>
             <a:custGeom>
@@ -2443,15 +2443,15 @@
           </p:nvSpPr>
           <p:spPr>
             <a:xfrm>
-              <a:off x="1615213" y="1896563"/>
-              <a:ext cx="0" cy="3826579"/>
+              <a:off x="1615213" y="2073503"/>
+              <a:ext cx="0" cy="3649639"/>
             </a:xfrm>
             <a:custGeom>
               <a:avLst/>
               <a:pathLst>
-                <a:path w="0" h="3826579">
+                <a:path w="0" h="3649639">
                   <a:moveTo>
-                    <a:pt x="0" y="3826579"/>
+                    <a:pt x="0" y="3649639"/>
                   </a:moveTo>
                   <a:lnTo>
                     <a:pt x="0" y="0"/>
@@ -2486,15 +2486,15 @@
           </p:nvSpPr>
           <p:spPr>
             <a:xfrm>
-              <a:off x="3387871" y="1896563"/>
-              <a:ext cx="0" cy="3826579"/>
+              <a:off x="3387871" y="2073503"/>
+              <a:ext cx="0" cy="3649639"/>
             </a:xfrm>
             <a:custGeom>
               <a:avLst/>
               <a:pathLst>
-                <a:path w="0" h="3826579">
+                <a:path w="0" h="3649639">
                   <a:moveTo>
-                    <a:pt x="0" y="3826579"/>
+                    <a:pt x="0" y="3649639"/>
                   </a:moveTo>
                   <a:lnTo>
                     <a:pt x="0" y="0"/>
@@ -2529,15 +2529,15 @@
           </p:nvSpPr>
           <p:spPr>
             <a:xfrm>
-              <a:off x="5160528" y="1896563"/>
-              <a:ext cx="0" cy="3826579"/>
+              <a:off x="5160528" y="2073503"/>
+              <a:ext cx="0" cy="3649639"/>
             </a:xfrm>
             <a:custGeom>
               <a:avLst/>
               <a:pathLst>
-                <a:path w="0" h="3826579">
+                <a:path w="0" h="3649639">
                   <a:moveTo>
-                    <a:pt x="0" y="3826579"/>
+                    <a:pt x="0" y="3649639"/>
                   </a:moveTo>
                   <a:lnTo>
                     <a:pt x="0" y="0"/>
@@ -2572,15 +2572,15 @@
           </p:nvSpPr>
           <p:spPr>
             <a:xfrm>
-              <a:off x="6933186" y="1896563"/>
-              <a:ext cx="0" cy="3826579"/>
+              <a:off x="6933186" y="2073503"/>
+              <a:ext cx="0" cy="3649639"/>
             </a:xfrm>
             <a:custGeom>
               <a:avLst/>
               <a:pathLst>
-                <a:path w="0" h="3826579">
+                <a:path w="0" h="3649639">
                   <a:moveTo>
-                    <a:pt x="0" y="3826579"/>
+                    <a:pt x="0" y="3649639"/>
                   </a:moveTo>
                   <a:lnTo>
                     <a:pt x="0" y="0"/>
@@ -2615,7 +2615,7 @@
           </p:nvSpPr>
           <p:spPr>
             <a:xfrm>
-              <a:off x="817517" y="5549207"/>
+              <a:off x="817517" y="5557249"/>
               <a:ext cx="7799693" cy="0"/>
             </a:xfrm>
             <a:custGeom>
@@ -2658,7 +2658,7 @@
           </p:nvSpPr>
           <p:spPr>
             <a:xfrm>
-              <a:off x="817517" y="4679530"/>
+              <a:off x="817517" y="4727786"/>
               <a:ext cx="7799693" cy="0"/>
             </a:xfrm>
             <a:custGeom>
@@ -2701,7 +2701,7 @@
           </p:nvSpPr>
           <p:spPr>
             <a:xfrm>
-              <a:off x="817517" y="3809853"/>
+              <a:off x="817517" y="3898322"/>
               <a:ext cx="7799693" cy="0"/>
             </a:xfrm>
             <a:custGeom>
@@ -2744,7 +2744,7 @@
           </p:nvSpPr>
           <p:spPr>
             <a:xfrm>
-              <a:off x="817517" y="2940175"/>
+              <a:off x="817517" y="3068859"/>
               <a:ext cx="7799693" cy="0"/>
             </a:xfrm>
             <a:custGeom>
@@ -2787,7 +2787,7 @@
           </p:nvSpPr>
           <p:spPr>
             <a:xfrm>
-              <a:off x="817517" y="2070498"/>
+              <a:off x="817517" y="2239395"/>
               <a:ext cx="7799693" cy="0"/>
             </a:xfrm>
             <a:custGeom>
@@ -2830,15 +2830,15 @@
           </p:nvSpPr>
           <p:spPr>
             <a:xfrm>
-              <a:off x="2501542" y="1896563"/>
-              <a:ext cx="0" cy="3826579"/>
+              <a:off x="2501542" y="2073503"/>
+              <a:ext cx="0" cy="3649639"/>
             </a:xfrm>
             <a:custGeom>
               <a:avLst/>
               <a:pathLst>
-                <a:path w="0" h="3826579">
+                <a:path w="0" h="3649639">
                   <a:moveTo>
-                    <a:pt x="0" y="3826579"/>
+                    <a:pt x="0" y="3649639"/>
                   </a:moveTo>
                   <a:lnTo>
                     <a:pt x="0" y="0"/>
@@ -2873,15 +2873,15 @@
           </p:nvSpPr>
           <p:spPr>
             <a:xfrm>
-              <a:off x="4274200" y="1896563"/>
-              <a:ext cx="0" cy="3826579"/>
+              <a:off x="4274200" y="2073503"/>
+              <a:ext cx="0" cy="3649639"/>
             </a:xfrm>
             <a:custGeom>
               <a:avLst/>
               <a:pathLst>
-                <a:path w="0" h="3826579">
+                <a:path w="0" h="3649639">
                   <a:moveTo>
-                    <a:pt x="0" y="3826579"/>
+                    <a:pt x="0" y="3649639"/>
                   </a:moveTo>
                   <a:lnTo>
                     <a:pt x="0" y="0"/>
@@ -2916,15 +2916,15 @@
           </p:nvSpPr>
           <p:spPr>
             <a:xfrm>
-              <a:off x="6046857" y="1896563"/>
-              <a:ext cx="0" cy="3826579"/>
+              <a:off x="6046857" y="2073503"/>
+              <a:ext cx="0" cy="3649639"/>
             </a:xfrm>
             <a:custGeom>
               <a:avLst/>
               <a:pathLst>
-                <a:path w="0" h="3826579">
+                <a:path w="0" h="3649639">
                   <a:moveTo>
-                    <a:pt x="0" y="3826579"/>
+                    <a:pt x="0" y="3649639"/>
                   </a:moveTo>
                   <a:lnTo>
                     <a:pt x="0" y="0"/>
@@ -2959,15 +2959,15 @@
           </p:nvSpPr>
           <p:spPr>
             <a:xfrm>
-              <a:off x="7819515" y="1896563"/>
-              <a:ext cx="0" cy="3826579"/>
+              <a:off x="7819515" y="2073503"/>
+              <a:ext cx="0" cy="3649639"/>
             </a:xfrm>
             <a:custGeom>
               <a:avLst/>
               <a:pathLst>
-                <a:path w="0" h="3826579">
+                <a:path w="0" h="3649639">
                   <a:moveTo>
-                    <a:pt x="0" y="3826579"/>
+                    <a:pt x="0" y="3649639"/>
                   </a:moveTo>
                   <a:lnTo>
                     <a:pt x="0" y="0"/>
@@ -3002,522 +3002,522 @@
           </p:nvSpPr>
           <p:spPr>
             <a:xfrm>
-              <a:off x="817517" y="1896563"/>
-              <a:ext cx="7392041" cy="3638161"/>
+              <a:off x="817517" y="2073503"/>
+              <a:ext cx="7392041" cy="3469934"/>
             </a:xfrm>
             <a:custGeom>
               <a:avLst/>
               <a:pathLst>
-                <a:path w="7392041" h="3638161">
+                <a:path w="7392041" h="3469934">
                   <a:moveTo>
                     <a:pt x="1866714" y="0"/>
                   </a:moveTo>
                   <a:lnTo>
-                    <a:pt x="1907747" y="149557"/>
-                  </a:lnTo>
-                  <a:lnTo>
-                    <a:pt x="1984991" y="410152"/>
-                  </a:lnTo>
-                  <a:lnTo>
-                    <a:pt x="2062234" y="651361"/>
-                  </a:lnTo>
-                  <a:lnTo>
-                    <a:pt x="2139478" y="874626"/>
-                  </a:lnTo>
-                  <a:lnTo>
-                    <a:pt x="2216721" y="1081283"/>
-                  </a:lnTo>
-                  <a:lnTo>
-                    <a:pt x="2293965" y="1272566"/>
-                  </a:lnTo>
-                  <a:lnTo>
-                    <a:pt x="2371209" y="1449620"/>
-                  </a:lnTo>
-                  <a:lnTo>
-                    <a:pt x="2448452" y="1613503"/>
-                  </a:lnTo>
-                  <a:lnTo>
-                    <a:pt x="2525696" y="1765195"/>
-                  </a:lnTo>
-                  <a:lnTo>
-                    <a:pt x="2602939" y="1905602"/>
-                  </a:lnTo>
-                  <a:lnTo>
-                    <a:pt x="2680183" y="2035565"/>
-                  </a:lnTo>
-                  <a:lnTo>
-                    <a:pt x="2757426" y="2155859"/>
-                  </a:lnTo>
-                  <a:lnTo>
-                    <a:pt x="2834670" y="2267205"/>
-                  </a:lnTo>
-                  <a:lnTo>
-                    <a:pt x="2911914" y="2370268"/>
-                  </a:lnTo>
-                  <a:lnTo>
-                    <a:pt x="2989157" y="2465664"/>
-                  </a:lnTo>
-                  <a:lnTo>
-                    <a:pt x="3066401" y="2553963"/>
-                  </a:lnTo>
-                  <a:lnTo>
-                    <a:pt x="3143644" y="2635694"/>
-                  </a:lnTo>
-                  <a:lnTo>
-                    <a:pt x="3220888" y="2711345"/>
-                  </a:lnTo>
-                  <a:lnTo>
-                    <a:pt x="3298131" y="2781368"/>
-                  </a:lnTo>
-                  <a:lnTo>
-                    <a:pt x="3375375" y="2793045"/>
-                  </a:lnTo>
-                  <a:lnTo>
-                    <a:pt x="3452619" y="2803249"/>
-                  </a:lnTo>
-                  <a:lnTo>
-                    <a:pt x="3529862" y="2813331"/>
-                  </a:lnTo>
-                  <a:lnTo>
-                    <a:pt x="3607106" y="2823294"/>
-                  </a:lnTo>
-                  <a:lnTo>
-                    <a:pt x="3684349" y="2833138"/>
-                  </a:lnTo>
-                  <a:lnTo>
-                    <a:pt x="3761593" y="2842866"/>
-                  </a:lnTo>
-                  <a:lnTo>
-                    <a:pt x="3838836" y="2852478"/>
-                  </a:lnTo>
-                  <a:lnTo>
-                    <a:pt x="3916080" y="2861976"/>
-                  </a:lnTo>
-                  <a:lnTo>
-                    <a:pt x="3993324" y="2871361"/>
-                  </a:lnTo>
-                  <a:lnTo>
-                    <a:pt x="4070567" y="2880635"/>
-                  </a:lnTo>
-                  <a:lnTo>
-                    <a:pt x="4147811" y="2889798"/>
-                  </a:lnTo>
-                  <a:lnTo>
-                    <a:pt x="4225054" y="2898853"/>
-                  </a:lnTo>
-                  <a:lnTo>
-                    <a:pt x="4302298" y="2907801"/>
-                  </a:lnTo>
-                  <a:lnTo>
-                    <a:pt x="4379541" y="2916642"/>
-                  </a:lnTo>
-                  <a:lnTo>
-                    <a:pt x="4456785" y="2925379"/>
-                  </a:lnTo>
-                  <a:lnTo>
-                    <a:pt x="4534029" y="2934011"/>
-                  </a:lnTo>
-                  <a:lnTo>
-                    <a:pt x="4611272" y="2942541"/>
-                  </a:lnTo>
-                  <a:lnTo>
-                    <a:pt x="4688516" y="2950970"/>
-                  </a:lnTo>
-                  <a:lnTo>
-                    <a:pt x="4765759" y="2959299"/>
-                  </a:lnTo>
-                  <a:lnTo>
-                    <a:pt x="4843003" y="2967529"/>
-                  </a:lnTo>
-                  <a:lnTo>
-                    <a:pt x="4920246" y="2975661"/>
-                  </a:lnTo>
-                  <a:lnTo>
-                    <a:pt x="4997490" y="2983697"/>
-                  </a:lnTo>
-                  <a:lnTo>
-                    <a:pt x="5074734" y="2991637"/>
-                  </a:lnTo>
-                  <a:lnTo>
-                    <a:pt x="5151977" y="2999484"/>
-                  </a:lnTo>
-                  <a:lnTo>
-                    <a:pt x="5229221" y="3007237"/>
-                  </a:lnTo>
-                  <a:lnTo>
-                    <a:pt x="5306464" y="3014898"/>
-                  </a:lnTo>
-                  <a:lnTo>
-                    <a:pt x="5383708" y="3022468"/>
-                  </a:lnTo>
-                  <a:lnTo>
-                    <a:pt x="5460951" y="3029948"/>
-                  </a:lnTo>
-                  <a:lnTo>
-                    <a:pt x="5538195" y="3037339"/>
-                  </a:lnTo>
-                  <a:lnTo>
-                    <a:pt x="5615439" y="3044643"/>
-                  </a:lnTo>
-                  <a:lnTo>
-                    <a:pt x="5692682" y="3051860"/>
-                  </a:lnTo>
-                  <a:lnTo>
-                    <a:pt x="5769926" y="3058991"/>
-                  </a:lnTo>
-                  <a:lnTo>
-                    <a:pt x="5847169" y="3066038"/>
-                  </a:lnTo>
-                  <a:lnTo>
-                    <a:pt x="5924413" y="3073001"/>
-                  </a:lnTo>
-                  <a:lnTo>
-                    <a:pt x="6001656" y="3079881"/>
-                  </a:lnTo>
-                  <a:lnTo>
-                    <a:pt x="6078900" y="3086680"/>
-                  </a:lnTo>
-                  <a:lnTo>
-                    <a:pt x="6156144" y="3093398"/>
-                  </a:lnTo>
-                  <a:lnTo>
-                    <a:pt x="6233387" y="3100036"/>
-                  </a:lnTo>
-                  <a:lnTo>
-                    <a:pt x="6310631" y="3106595"/>
-                  </a:lnTo>
-                  <a:lnTo>
-                    <a:pt x="6387874" y="3113077"/>
-                  </a:lnTo>
-                  <a:lnTo>
-                    <a:pt x="6465118" y="3119482"/>
-                  </a:lnTo>
-                  <a:lnTo>
-                    <a:pt x="6542361" y="3125810"/>
-                  </a:lnTo>
-                  <a:lnTo>
-                    <a:pt x="6619605" y="3132064"/>
-                  </a:lnTo>
-                  <a:lnTo>
-                    <a:pt x="6696849" y="3138243"/>
-                  </a:lnTo>
-                  <a:lnTo>
-                    <a:pt x="6774092" y="3144349"/>
-                  </a:lnTo>
-                  <a:lnTo>
-                    <a:pt x="6851336" y="3150382"/>
-                  </a:lnTo>
-                  <a:lnTo>
-                    <a:pt x="6928579" y="3156344"/>
-                  </a:lnTo>
-                  <a:lnTo>
-                    <a:pt x="7005823" y="3162235"/>
-                  </a:lnTo>
-                  <a:lnTo>
-                    <a:pt x="7083066" y="3168056"/>
-                  </a:lnTo>
-                  <a:lnTo>
-                    <a:pt x="7160310" y="3173809"/>
-                  </a:lnTo>
-                  <a:lnTo>
-                    <a:pt x="7237554" y="3179492"/>
-                  </a:lnTo>
-                  <a:lnTo>
-                    <a:pt x="7314797" y="3185109"/>
-                  </a:lnTo>
-                  <a:lnTo>
-                    <a:pt x="7392041" y="3190658"/>
-                  </a:lnTo>
-                  <a:lnTo>
-                    <a:pt x="7392041" y="3638161"/>
-                  </a:lnTo>
-                  <a:lnTo>
-                    <a:pt x="7314797" y="3636997"/>
-                  </a:lnTo>
-                  <a:lnTo>
-                    <a:pt x="7237554" y="3635739"/>
-                  </a:lnTo>
-                  <a:lnTo>
-                    <a:pt x="7160310" y="3634381"/>
-                  </a:lnTo>
-                  <a:lnTo>
-                    <a:pt x="7083066" y="3632913"/>
-                  </a:lnTo>
-                  <a:lnTo>
-                    <a:pt x="7005823" y="3631328"/>
-                  </a:lnTo>
-                  <a:lnTo>
-                    <a:pt x="6928579" y="3629614"/>
-                  </a:lnTo>
-                  <a:lnTo>
-                    <a:pt x="6851336" y="3627764"/>
-                  </a:lnTo>
-                  <a:lnTo>
-                    <a:pt x="6774092" y="3625764"/>
-                  </a:lnTo>
-                  <a:lnTo>
-                    <a:pt x="6696849" y="3623604"/>
-                  </a:lnTo>
-                  <a:lnTo>
-                    <a:pt x="6619605" y="3621270"/>
-                  </a:lnTo>
-                  <a:lnTo>
-                    <a:pt x="6542361" y="3618749"/>
-                  </a:lnTo>
-                  <a:lnTo>
-                    <a:pt x="6465118" y="3616024"/>
-                  </a:lnTo>
-                  <a:lnTo>
-                    <a:pt x="6387874" y="3613081"/>
-                  </a:lnTo>
-                  <a:lnTo>
-                    <a:pt x="6310631" y="3609902"/>
-                  </a:lnTo>
-                  <a:lnTo>
-                    <a:pt x="6233387" y="3606467"/>
-                  </a:lnTo>
-                  <a:lnTo>
-                    <a:pt x="6156144" y="3602756"/>
-                  </a:lnTo>
-                  <a:lnTo>
-                    <a:pt x="6078900" y="3598746"/>
-                  </a:lnTo>
-                  <a:lnTo>
-                    <a:pt x="6001656" y="3594415"/>
-                  </a:lnTo>
-                  <a:lnTo>
-                    <a:pt x="5924413" y="3589735"/>
-                  </a:lnTo>
-                  <a:lnTo>
-                    <a:pt x="5847169" y="3584679"/>
-                  </a:lnTo>
-                  <a:lnTo>
-                    <a:pt x="5769926" y="3579217"/>
-                  </a:lnTo>
-                  <a:lnTo>
-                    <a:pt x="5692682" y="3573316"/>
-                  </a:lnTo>
-                  <a:lnTo>
-                    <a:pt x="5615439" y="3566940"/>
-                  </a:lnTo>
-                  <a:lnTo>
-                    <a:pt x="5538195" y="3560052"/>
-                  </a:lnTo>
-                  <a:lnTo>
-                    <a:pt x="5460951" y="3552611"/>
-                  </a:lnTo>
-                  <a:lnTo>
-                    <a:pt x="5383708" y="3544572"/>
-                  </a:lnTo>
-                  <a:lnTo>
-                    <a:pt x="5306464" y="3535886"/>
-                  </a:lnTo>
-                  <a:lnTo>
-                    <a:pt x="5229221" y="3526502"/>
-                  </a:lnTo>
-                  <a:lnTo>
-                    <a:pt x="5151977" y="3516365"/>
-                  </a:lnTo>
-                  <a:lnTo>
-                    <a:pt x="5074734" y="3505412"/>
-                  </a:lnTo>
-                  <a:lnTo>
-                    <a:pt x="4997490" y="3493579"/>
-                  </a:lnTo>
-                  <a:lnTo>
-                    <a:pt x="4920246" y="3480795"/>
-                  </a:lnTo>
-                  <a:lnTo>
-                    <a:pt x="4843003" y="3466984"/>
-                  </a:lnTo>
-                  <a:lnTo>
-                    <a:pt x="4765759" y="3452063"/>
-                  </a:lnTo>
-                  <a:lnTo>
-                    <a:pt x="4688516" y="3435943"/>
-                  </a:lnTo>
-                  <a:lnTo>
-                    <a:pt x="4611272" y="3418527"/>
-                  </a:lnTo>
-                  <a:lnTo>
-                    <a:pt x="4534029" y="3399711"/>
-                  </a:lnTo>
-                  <a:lnTo>
-                    <a:pt x="4456785" y="3379383"/>
-                  </a:lnTo>
-                  <a:lnTo>
-                    <a:pt x="4379541" y="3357422"/>
-                  </a:lnTo>
-                  <a:lnTo>
-                    <a:pt x="4302298" y="3333695"/>
-                  </a:lnTo>
-                  <a:lnTo>
-                    <a:pt x="4225054" y="3308062"/>
-                  </a:lnTo>
-                  <a:lnTo>
-                    <a:pt x="4147811" y="3280368"/>
-                  </a:lnTo>
-                  <a:lnTo>
-                    <a:pt x="4070567" y="3250449"/>
-                  </a:lnTo>
-                  <a:lnTo>
-                    <a:pt x="3993324" y="3218125"/>
-                  </a:lnTo>
-                  <a:lnTo>
-                    <a:pt x="3916080" y="3183204"/>
-                  </a:lnTo>
-                  <a:lnTo>
-                    <a:pt x="3838836" y="3145475"/>
-                  </a:lnTo>
-                  <a:lnTo>
-                    <a:pt x="3761593" y="3104715"/>
-                  </a:lnTo>
-                  <a:lnTo>
-                    <a:pt x="3684349" y="3060679"/>
-                  </a:lnTo>
-                  <a:lnTo>
-                    <a:pt x="3607106" y="3013103"/>
-                  </a:lnTo>
-                  <a:lnTo>
-                    <a:pt x="3529862" y="2961705"/>
-                  </a:lnTo>
-                  <a:lnTo>
-                    <a:pt x="3452619" y="2906175"/>
-                  </a:lnTo>
-                  <a:lnTo>
-                    <a:pt x="3375375" y="2846182"/>
-                  </a:lnTo>
-                  <a:lnTo>
-                    <a:pt x="3298131" y="2782720"/>
-                  </a:lnTo>
-                  <a:lnTo>
-                    <a:pt x="3220888" y="2772269"/>
-                  </a:lnTo>
-                  <a:lnTo>
-                    <a:pt x="3143644" y="2761694"/>
-                  </a:lnTo>
-                  <a:lnTo>
-                    <a:pt x="3066401" y="2750991"/>
-                  </a:lnTo>
-                  <a:lnTo>
-                    <a:pt x="2989157" y="2740160"/>
-                  </a:lnTo>
-                  <a:lnTo>
-                    <a:pt x="2911914" y="2729199"/>
-                  </a:lnTo>
-                  <a:lnTo>
-                    <a:pt x="2834670" y="2718106"/>
-                  </a:lnTo>
-                  <a:lnTo>
-                    <a:pt x="2757426" y="2706880"/>
-                  </a:lnTo>
-                  <a:lnTo>
-                    <a:pt x="2680183" y="2695519"/>
-                  </a:lnTo>
-                  <a:lnTo>
-                    <a:pt x="2602939" y="2684021"/>
-                  </a:lnTo>
-                  <a:lnTo>
-                    <a:pt x="2525696" y="2672385"/>
-                  </a:lnTo>
-                  <a:lnTo>
-                    <a:pt x="2448452" y="2660610"/>
-                  </a:lnTo>
-                  <a:lnTo>
-                    <a:pt x="2371209" y="2648693"/>
-                  </a:lnTo>
-                  <a:lnTo>
-                    <a:pt x="2293965" y="2636633"/>
-                  </a:lnTo>
-                  <a:lnTo>
-                    <a:pt x="2216721" y="2624428"/>
-                  </a:lnTo>
-                  <a:lnTo>
-                    <a:pt x="2139478" y="2612077"/>
-                  </a:lnTo>
-                  <a:lnTo>
-                    <a:pt x="2062234" y="2599577"/>
-                  </a:lnTo>
-                  <a:lnTo>
-                    <a:pt x="1984991" y="2586927"/>
-                  </a:lnTo>
-                  <a:lnTo>
-                    <a:pt x="1907747" y="2574125"/>
-                  </a:lnTo>
-                  <a:lnTo>
-                    <a:pt x="1830504" y="2561169"/>
-                  </a:lnTo>
-                  <a:lnTo>
-                    <a:pt x="1753260" y="2548058"/>
-                  </a:lnTo>
-                  <a:lnTo>
-                    <a:pt x="1676016" y="2534789"/>
-                  </a:lnTo>
-                  <a:lnTo>
-                    <a:pt x="1598773" y="2521360"/>
-                  </a:lnTo>
-                  <a:lnTo>
-                    <a:pt x="1521529" y="2507771"/>
-                  </a:lnTo>
-                  <a:lnTo>
-                    <a:pt x="1444286" y="2494018"/>
-                  </a:lnTo>
-                  <a:lnTo>
-                    <a:pt x="1367042" y="2480100"/>
-                  </a:lnTo>
-                  <a:lnTo>
-                    <a:pt x="1289799" y="2466015"/>
-                  </a:lnTo>
-                  <a:lnTo>
-                    <a:pt x="1212555" y="2451760"/>
-                  </a:lnTo>
-                  <a:lnTo>
-                    <a:pt x="1135311" y="2437334"/>
-                  </a:lnTo>
-                  <a:lnTo>
-                    <a:pt x="1058068" y="2422735"/>
-                  </a:lnTo>
-                  <a:lnTo>
-                    <a:pt x="980824" y="2407961"/>
-                  </a:lnTo>
-                  <a:lnTo>
-                    <a:pt x="903581" y="2393009"/>
-                  </a:lnTo>
-                  <a:lnTo>
-                    <a:pt x="826337" y="2377878"/>
-                  </a:lnTo>
-                  <a:lnTo>
-                    <a:pt x="749094" y="2362564"/>
-                  </a:lnTo>
-                  <a:lnTo>
-                    <a:pt x="671850" y="2347067"/>
-                  </a:lnTo>
-                  <a:lnTo>
-                    <a:pt x="594606" y="2331384"/>
-                  </a:lnTo>
-                  <a:lnTo>
-                    <a:pt x="517363" y="2315512"/>
-                  </a:lnTo>
-                  <a:lnTo>
-                    <a:pt x="440119" y="2299450"/>
-                  </a:lnTo>
-                  <a:lnTo>
-                    <a:pt x="362876" y="2283195"/>
-                  </a:lnTo>
-                  <a:lnTo>
-                    <a:pt x="285632" y="2266744"/>
-                  </a:lnTo>
-                  <a:lnTo>
-                    <a:pt x="208389" y="2250096"/>
-                  </a:lnTo>
-                  <a:lnTo>
-                    <a:pt x="131145" y="2233247"/>
-                  </a:lnTo>
-                  <a:lnTo>
-                    <a:pt x="53901" y="2216197"/>
-                  </a:lnTo>
-                  <a:lnTo>
-                    <a:pt x="0" y="2204156"/>
+                    <a:pt x="1907747" y="142642"/>
+                  </a:lnTo>
+                  <a:lnTo>
+                    <a:pt x="1984991" y="391186"/>
+                  </a:lnTo>
+                  <a:lnTo>
+                    <a:pt x="2062234" y="621242"/>
+                  </a:lnTo>
+                  <a:lnTo>
+                    <a:pt x="2139478" y="834184"/>
+                  </a:lnTo>
+                  <a:lnTo>
+                    <a:pt x="2216721" y="1031285"/>
+                  </a:lnTo>
+                  <a:lnTo>
+                    <a:pt x="2293965" y="1213723"/>
+                  </a:lnTo>
+                  <a:lnTo>
+                    <a:pt x="2371209" y="1382590"/>
+                  </a:lnTo>
+                  <a:lnTo>
+                    <a:pt x="2448452" y="1538895"/>
+                  </a:lnTo>
+                  <a:lnTo>
+                    <a:pt x="2525696" y="1683573"/>
+                  </a:lnTo>
+                  <a:lnTo>
+                    <a:pt x="2602939" y="1817488"/>
+                  </a:lnTo>
+                  <a:lnTo>
+                    <a:pt x="2680183" y="1941441"/>
+                  </a:lnTo>
+                  <a:lnTo>
+                    <a:pt x="2757426" y="2056173"/>
+                  </a:lnTo>
+                  <a:lnTo>
+                    <a:pt x="2834670" y="2162370"/>
+                  </a:lnTo>
+                  <a:lnTo>
+                    <a:pt x="2911914" y="2260667"/>
+                  </a:lnTo>
+                  <a:lnTo>
+                    <a:pt x="2989157" y="2351652"/>
+                  </a:lnTo>
+                  <a:lnTo>
+                    <a:pt x="3066401" y="2435869"/>
+                  </a:lnTo>
+                  <a:lnTo>
+                    <a:pt x="3143644" y="2513820"/>
+                  </a:lnTo>
+                  <a:lnTo>
+                    <a:pt x="3220888" y="2585973"/>
+                  </a:lnTo>
+                  <a:lnTo>
+                    <a:pt x="3298131" y="2652758"/>
+                  </a:lnTo>
+                  <a:lnTo>
+                    <a:pt x="3375375" y="2663896"/>
+                  </a:lnTo>
+                  <a:lnTo>
+                    <a:pt x="3452619" y="2673628"/>
+                  </a:lnTo>
+                  <a:lnTo>
+                    <a:pt x="3529862" y="2683244"/>
+                  </a:lnTo>
+                  <a:lnTo>
+                    <a:pt x="3607106" y="2692746"/>
+                  </a:lnTo>
+                  <a:lnTo>
+                    <a:pt x="3684349" y="2702135"/>
+                  </a:lnTo>
+                  <a:lnTo>
+                    <a:pt x="3761593" y="2711413"/>
+                  </a:lnTo>
+                  <a:lnTo>
+                    <a:pt x="3838836" y="2720580"/>
+                  </a:lnTo>
+                  <a:lnTo>
+                    <a:pt x="3916080" y="2729639"/>
+                  </a:lnTo>
+                  <a:lnTo>
+                    <a:pt x="3993324" y="2738590"/>
+                  </a:lnTo>
+                  <a:lnTo>
+                    <a:pt x="4070567" y="2747435"/>
+                  </a:lnTo>
+                  <a:lnTo>
+                    <a:pt x="4147811" y="2756175"/>
+                  </a:lnTo>
+                  <a:lnTo>
+                    <a:pt x="4225054" y="2764812"/>
+                  </a:lnTo>
+                  <a:lnTo>
+                    <a:pt x="4302298" y="2773345"/>
+                  </a:lnTo>
+                  <a:lnTo>
+                    <a:pt x="4379541" y="2781778"/>
+                  </a:lnTo>
+                  <a:lnTo>
+                    <a:pt x="4456785" y="2790110"/>
+                  </a:lnTo>
+                  <a:lnTo>
+                    <a:pt x="4534029" y="2798344"/>
+                  </a:lnTo>
+                  <a:lnTo>
+                    <a:pt x="4611272" y="2806479"/>
+                  </a:lnTo>
+                  <a:lnTo>
+                    <a:pt x="4688516" y="2814518"/>
+                  </a:lnTo>
+                  <a:lnTo>
+                    <a:pt x="4765759" y="2822462"/>
+                  </a:lnTo>
+                  <a:lnTo>
+                    <a:pt x="4843003" y="2830312"/>
+                  </a:lnTo>
+                  <a:lnTo>
+                    <a:pt x="4920246" y="2838068"/>
+                  </a:lnTo>
+                  <a:lnTo>
+                    <a:pt x="4997490" y="2845732"/>
+                  </a:lnTo>
+                  <a:lnTo>
+                    <a:pt x="5074734" y="2853305"/>
+                  </a:lnTo>
+                  <a:lnTo>
+                    <a:pt x="5151977" y="2860789"/>
+                  </a:lnTo>
+                  <a:lnTo>
+                    <a:pt x="5229221" y="2868183"/>
+                  </a:lnTo>
+                  <a:lnTo>
+                    <a:pt x="5306464" y="2875490"/>
+                  </a:lnTo>
+                  <a:lnTo>
+                    <a:pt x="5383708" y="2882710"/>
+                  </a:lnTo>
+                  <a:lnTo>
+                    <a:pt x="5460951" y="2889844"/>
+                  </a:lnTo>
+                  <a:lnTo>
+                    <a:pt x="5538195" y="2896894"/>
+                  </a:lnTo>
+                  <a:lnTo>
+                    <a:pt x="5615439" y="2903860"/>
+                  </a:lnTo>
+                  <a:lnTo>
+                    <a:pt x="5692682" y="2910743"/>
+                  </a:lnTo>
+                  <a:lnTo>
+                    <a:pt x="5769926" y="2917544"/>
+                  </a:lnTo>
+                  <a:lnTo>
+                    <a:pt x="5847169" y="2924265"/>
+                  </a:lnTo>
+                  <a:lnTo>
+                    <a:pt x="5924413" y="2930906"/>
+                  </a:lnTo>
+                  <a:lnTo>
+                    <a:pt x="6001656" y="2937469"/>
+                  </a:lnTo>
+                  <a:lnTo>
+                    <a:pt x="6078900" y="2943953"/>
+                  </a:lnTo>
+                  <a:lnTo>
+                    <a:pt x="6156144" y="2950360"/>
+                  </a:lnTo>
+                  <a:lnTo>
+                    <a:pt x="6233387" y="2956691"/>
+                  </a:lnTo>
+                  <a:lnTo>
+                    <a:pt x="6310631" y="2962948"/>
+                  </a:lnTo>
+                  <a:lnTo>
+                    <a:pt x="6387874" y="2969129"/>
+                  </a:lnTo>
+                  <a:lnTo>
+                    <a:pt x="6465118" y="2975238"/>
+                  </a:lnTo>
+                  <a:lnTo>
+                    <a:pt x="6542361" y="2981274"/>
+                  </a:lnTo>
+                  <a:lnTo>
+                    <a:pt x="6619605" y="2987238"/>
+                  </a:lnTo>
+                  <a:lnTo>
+                    <a:pt x="6696849" y="2993132"/>
+                  </a:lnTo>
+                  <a:lnTo>
+                    <a:pt x="6774092" y="2998955"/>
+                  </a:lnTo>
+                  <a:lnTo>
+                    <a:pt x="6851336" y="3004710"/>
+                  </a:lnTo>
+                  <a:lnTo>
+                    <a:pt x="6928579" y="3010396"/>
+                  </a:lnTo>
+                  <a:lnTo>
+                    <a:pt x="7005823" y="3016015"/>
+                  </a:lnTo>
+                  <a:lnTo>
+                    <a:pt x="7083066" y="3021567"/>
+                  </a:lnTo>
+                  <a:lnTo>
+                    <a:pt x="7160310" y="3027053"/>
+                  </a:lnTo>
+                  <a:lnTo>
+                    <a:pt x="7237554" y="3032474"/>
+                  </a:lnTo>
+                  <a:lnTo>
+                    <a:pt x="7314797" y="3037830"/>
+                  </a:lnTo>
+                  <a:lnTo>
+                    <a:pt x="7392041" y="3043123"/>
+                  </a:lnTo>
+                  <a:lnTo>
+                    <a:pt x="7392041" y="3469934"/>
+                  </a:lnTo>
+                  <a:lnTo>
+                    <a:pt x="7314797" y="3468824"/>
+                  </a:lnTo>
+                  <a:lnTo>
+                    <a:pt x="7237554" y="3467624"/>
+                  </a:lnTo>
+                  <a:lnTo>
+                    <a:pt x="7160310" y="3466328"/>
+                  </a:lnTo>
+                  <a:lnTo>
+                    <a:pt x="7083066" y="3464929"/>
+                  </a:lnTo>
+                  <a:lnTo>
+                    <a:pt x="7005823" y="3463416"/>
+                  </a:lnTo>
+                  <a:lnTo>
+                    <a:pt x="6928579" y="3461782"/>
+                  </a:lnTo>
+                  <a:lnTo>
+                    <a:pt x="6851336" y="3460017"/>
+                  </a:lnTo>
+                  <a:lnTo>
+                    <a:pt x="6774092" y="3458110"/>
+                  </a:lnTo>
+                  <a:lnTo>
+                    <a:pt x="6696849" y="3456050"/>
+                  </a:lnTo>
+                  <a:lnTo>
+                    <a:pt x="6619605" y="3453824"/>
+                  </a:lnTo>
+                  <a:lnTo>
+                    <a:pt x="6542361" y="3451419"/>
+                  </a:lnTo>
+                  <a:lnTo>
+                    <a:pt x="6465118" y="3448821"/>
+                  </a:lnTo>
+                  <a:lnTo>
+                    <a:pt x="6387874" y="3446014"/>
+                  </a:lnTo>
+                  <a:lnTo>
+                    <a:pt x="6310631" y="3442981"/>
+                  </a:lnTo>
+                  <a:lnTo>
+                    <a:pt x="6233387" y="3439705"/>
+                  </a:lnTo>
+                  <a:lnTo>
+                    <a:pt x="6156144" y="3436166"/>
+                  </a:lnTo>
+                  <a:lnTo>
+                    <a:pt x="6078900" y="3432342"/>
+                  </a:lnTo>
+                  <a:lnTo>
+                    <a:pt x="6001656" y="3428210"/>
+                  </a:lnTo>
+                  <a:lnTo>
+                    <a:pt x="5924413" y="3423747"/>
+                  </a:lnTo>
+                  <a:lnTo>
+                    <a:pt x="5847169" y="3418925"/>
+                  </a:lnTo>
+                  <a:lnTo>
+                    <a:pt x="5769926" y="3413715"/>
+                  </a:lnTo>
+                  <a:lnTo>
+                    <a:pt x="5692682" y="3408087"/>
+                  </a:lnTo>
+                  <a:lnTo>
+                    <a:pt x="5615439" y="3402006"/>
+                  </a:lnTo>
+                  <a:lnTo>
+                    <a:pt x="5538195" y="3395437"/>
+                  </a:lnTo>
+                  <a:lnTo>
+                    <a:pt x="5460951" y="3388340"/>
+                  </a:lnTo>
+                  <a:lnTo>
+                    <a:pt x="5383708" y="3380672"/>
+                  </a:lnTo>
+                  <a:lnTo>
+                    <a:pt x="5306464" y="3372388"/>
+                  </a:lnTo>
+                  <a:lnTo>
+                    <a:pt x="5229221" y="3363438"/>
+                  </a:lnTo>
+                  <a:lnTo>
+                    <a:pt x="5151977" y="3353769"/>
+                  </a:lnTo>
+                  <a:lnTo>
+                    <a:pt x="5074734" y="3343323"/>
+                  </a:lnTo>
+                  <a:lnTo>
+                    <a:pt x="4997490" y="3332037"/>
+                  </a:lnTo>
+                  <a:lnTo>
+                    <a:pt x="4920246" y="3319845"/>
+                  </a:lnTo>
+                  <a:lnTo>
+                    <a:pt x="4843003" y="3306672"/>
+                  </a:lnTo>
+                  <a:lnTo>
+                    <a:pt x="4765759" y="3292441"/>
+                  </a:lnTo>
+                  <a:lnTo>
+                    <a:pt x="4688516" y="3277066"/>
+                  </a:lnTo>
+                  <a:lnTo>
+                    <a:pt x="4611272" y="3260455"/>
+                  </a:lnTo>
+                  <a:lnTo>
+                    <a:pt x="4534029" y="3242510"/>
+                  </a:lnTo>
+                  <a:lnTo>
+                    <a:pt x="4456785" y="3223122"/>
+                  </a:lnTo>
+                  <a:lnTo>
+                    <a:pt x="4379541" y="3202176"/>
+                  </a:lnTo>
+                  <a:lnTo>
+                    <a:pt x="4302298" y="3179546"/>
+                  </a:lnTo>
+                  <a:lnTo>
+                    <a:pt x="4225054" y="3155098"/>
+                  </a:lnTo>
+                  <a:lnTo>
+                    <a:pt x="4147811" y="3128685"/>
+                  </a:lnTo>
+                  <a:lnTo>
+                    <a:pt x="4070567" y="3100150"/>
+                  </a:lnTo>
+                  <a:lnTo>
+                    <a:pt x="3993324" y="3069320"/>
+                  </a:lnTo>
+                  <a:lnTo>
+                    <a:pt x="3916080" y="3036014"/>
+                  </a:lnTo>
+                  <a:lnTo>
+                    <a:pt x="3838836" y="3000030"/>
+                  </a:lnTo>
+                  <a:lnTo>
+                    <a:pt x="3761593" y="2961154"/>
+                  </a:lnTo>
+                  <a:lnTo>
+                    <a:pt x="3684349" y="2919154"/>
+                  </a:lnTo>
+                  <a:lnTo>
+                    <a:pt x="3607106" y="2873779"/>
+                  </a:lnTo>
+                  <a:lnTo>
+                    <a:pt x="3529862" y="2824756"/>
+                  </a:lnTo>
+                  <a:lnTo>
+                    <a:pt x="3452619" y="2771794"/>
+                  </a:lnTo>
+                  <a:lnTo>
+                    <a:pt x="3375375" y="2714576"/>
+                  </a:lnTo>
+                  <a:lnTo>
+                    <a:pt x="3298131" y="2654048"/>
+                  </a:lnTo>
+                  <a:lnTo>
+                    <a:pt x="3220888" y="2644081"/>
+                  </a:lnTo>
+                  <a:lnTo>
+                    <a:pt x="3143644" y="2633994"/>
+                  </a:lnTo>
+                  <a:lnTo>
+                    <a:pt x="3066401" y="2623786"/>
+                  </a:lnTo>
+                  <a:lnTo>
+                    <a:pt x="2989157" y="2613456"/>
+                  </a:lnTo>
+                  <a:lnTo>
+                    <a:pt x="2911914" y="2603002"/>
+                  </a:lnTo>
+                  <a:lnTo>
+                    <a:pt x="2834670" y="2592422"/>
+                  </a:lnTo>
+                  <a:lnTo>
+                    <a:pt x="2757426" y="2581715"/>
+                  </a:lnTo>
+                  <a:lnTo>
+                    <a:pt x="2680183" y="2570879"/>
+                  </a:lnTo>
+                  <a:lnTo>
+                    <a:pt x="2602939" y="2559913"/>
+                  </a:lnTo>
+                  <a:lnTo>
+                    <a:pt x="2525696" y="2548815"/>
+                  </a:lnTo>
+                  <a:lnTo>
+                    <a:pt x="2448452" y="2537584"/>
+                  </a:lnTo>
+                  <a:lnTo>
+                    <a:pt x="2371209" y="2526219"/>
+                  </a:lnTo>
+                  <a:lnTo>
+                    <a:pt x="2293965" y="2514716"/>
+                  </a:lnTo>
+                  <a:lnTo>
+                    <a:pt x="2216721" y="2503076"/>
+                  </a:lnTo>
+                  <a:lnTo>
+                    <a:pt x="2139478" y="2491295"/>
+                  </a:lnTo>
+                  <a:lnTo>
+                    <a:pt x="2062234" y="2479373"/>
+                  </a:lnTo>
+                  <a:lnTo>
+                    <a:pt x="1984991" y="2467308"/>
+                  </a:lnTo>
+                  <a:lnTo>
+                    <a:pt x="1907747" y="2455098"/>
+                  </a:lnTo>
+                  <a:lnTo>
+                    <a:pt x="1830504" y="2442741"/>
+                  </a:lnTo>
+                  <a:lnTo>
+                    <a:pt x="1753260" y="2430236"/>
+                  </a:lnTo>
+                  <a:lnTo>
+                    <a:pt x="1676016" y="2417581"/>
+                  </a:lnTo>
+                  <a:lnTo>
+                    <a:pt x="1598773" y="2404774"/>
+                  </a:lnTo>
+                  <a:lnTo>
+                    <a:pt x="1521529" y="2391812"/>
+                  </a:lnTo>
+                  <a:lnTo>
+                    <a:pt x="1444286" y="2378695"/>
+                  </a:lnTo>
+                  <a:lnTo>
+                    <a:pt x="1367042" y="2365421"/>
+                  </a:lnTo>
+                  <a:lnTo>
+                    <a:pt x="1289799" y="2351987"/>
+                  </a:lnTo>
+                  <a:lnTo>
+                    <a:pt x="1212555" y="2338392"/>
+                  </a:lnTo>
+                  <a:lnTo>
+                    <a:pt x="1135311" y="2324633"/>
+                  </a:lnTo>
+                  <a:lnTo>
+                    <a:pt x="1058068" y="2310709"/>
+                  </a:lnTo>
+                  <a:lnTo>
+                    <a:pt x="980824" y="2296618"/>
+                  </a:lnTo>
+                  <a:lnTo>
+                    <a:pt x="903581" y="2282357"/>
+                  </a:lnTo>
+                  <a:lnTo>
+                    <a:pt x="826337" y="2267925"/>
+                  </a:lnTo>
+                  <a:lnTo>
+                    <a:pt x="749094" y="2253320"/>
+                  </a:lnTo>
+                  <a:lnTo>
+                    <a:pt x="671850" y="2238540"/>
+                  </a:lnTo>
+                  <a:lnTo>
+                    <a:pt x="594606" y="2223582"/>
+                  </a:lnTo>
+                  <a:lnTo>
+                    <a:pt x="517363" y="2208444"/>
+                  </a:lnTo>
+                  <a:lnTo>
+                    <a:pt x="440119" y="2193124"/>
+                  </a:lnTo>
+                  <a:lnTo>
+                    <a:pt x="362876" y="2177620"/>
+                  </a:lnTo>
+                  <a:lnTo>
+                    <a:pt x="285632" y="2161930"/>
+                  </a:lnTo>
+                  <a:lnTo>
+                    <a:pt x="208389" y="2146052"/>
+                  </a:lnTo>
+                  <a:lnTo>
+                    <a:pt x="131145" y="2129983"/>
+                  </a:lnTo>
+                  <a:lnTo>
+                    <a:pt x="53901" y="2113721"/>
+                  </a:lnTo>
+                  <a:lnTo>
+                    <a:pt x="0" y="2102236"/>
                   </a:lnTo>
                   <a:close/>
                 </a:path>
@@ -3543,231 +3543,231 @@
           </p:nvSpPr>
           <p:spPr>
             <a:xfrm>
-              <a:off x="2684232" y="1896563"/>
-              <a:ext cx="5525326" cy="3190658"/>
+              <a:off x="2684232" y="2073503"/>
+              <a:ext cx="5525326" cy="3043123"/>
             </a:xfrm>
             <a:custGeom>
               <a:avLst/>
               <a:pathLst>
-                <a:path w="5525326" h="3190658">
+                <a:path w="5525326" h="3043123">
                   <a:moveTo>
                     <a:pt x="0" y="0"/>
                   </a:moveTo>
                   <a:lnTo>
-                    <a:pt x="41033" y="149557"/>
-                  </a:lnTo>
-                  <a:lnTo>
-                    <a:pt x="118276" y="410152"/>
-                  </a:lnTo>
-                  <a:lnTo>
-                    <a:pt x="195520" y="651361"/>
-                  </a:lnTo>
-                  <a:lnTo>
-                    <a:pt x="272763" y="874626"/>
-                  </a:lnTo>
-                  <a:lnTo>
-                    <a:pt x="350007" y="1081283"/>
-                  </a:lnTo>
-                  <a:lnTo>
-                    <a:pt x="427250" y="1272566"/>
-                  </a:lnTo>
-                  <a:lnTo>
-                    <a:pt x="504494" y="1449620"/>
-                  </a:lnTo>
-                  <a:lnTo>
-                    <a:pt x="581738" y="1613503"/>
-                  </a:lnTo>
-                  <a:lnTo>
-                    <a:pt x="658981" y="1765195"/>
-                  </a:lnTo>
-                  <a:lnTo>
-                    <a:pt x="736225" y="1905602"/>
-                  </a:lnTo>
-                  <a:lnTo>
-                    <a:pt x="813468" y="2035565"/>
-                  </a:lnTo>
-                  <a:lnTo>
-                    <a:pt x="890712" y="2155859"/>
-                  </a:lnTo>
-                  <a:lnTo>
-                    <a:pt x="967955" y="2267205"/>
-                  </a:lnTo>
-                  <a:lnTo>
-                    <a:pt x="1045199" y="2370268"/>
-                  </a:lnTo>
-                  <a:lnTo>
-                    <a:pt x="1122443" y="2465664"/>
-                  </a:lnTo>
-                  <a:lnTo>
-                    <a:pt x="1199686" y="2553963"/>
-                  </a:lnTo>
-                  <a:lnTo>
-                    <a:pt x="1276930" y="2635694"/>
-                  </a:lnTo>
-                  <a:lnTo>
-                    <a:pt x="1354173" y="2711345"/>
-                  </a:lnTo>
-                  <a:lnTo>
-                    <a:pt x="1431417" y="2781368"/>
-                  </a:lnTo>
-                  <a:lnTo>
-                    <a:pt x="1508660" y="2793045"/>
-                  </a:lnTo>
-                  <a:lnTo>
-                    <a:pt x="1585904" y="2803249"/>
-                  </a:lnTo>
-                  <a:lnTo>
-                    <a:pt x="1663148" y="2813331"/>
-                  </a:lnTo>
-                  <a:lnTo>
-                    <a:pt x="1740391" y="2823294"/>
-                  </a:lnTo>
-                  <a:lnTo>
-                    <a:pt x="1817635" y="2833138"/>
-                  </a:lnTo>
-                  <a:lnTo>
-                    <a:pt x="1894878" y="2842866"/>
-                  </a:lnTo>
-                  <a:lnTo>
-                    <a:pt x="1972122" y="2852478"/>
-                  </a:lnTo>
-                  <a:lnTo>
-                    <a:pt x="2049365" y="2861976"/>
-                  </a:lnTo>
-                  <a:lnTo>
-                    <a:pt x="2126609" y="2871361"/>
-                  </a:lnTo>
-                  <a:lnTo>
-                    <a:pt x="2203853" y="2880635"/>
-                  </a:lnTo>
-                  <a:lnTo>
-                    <a:pt x="2281096" y="2889798"/>
-                  </a:lnTo>
-                  <a:lnTo>
-                    <a:pt x="2358340" y="2898853"/>
-                  </a:lnTo>
-                  <a:lnTo>
-                    <a:pt x="2435583" y="2907801"/>
-                  </a:lnTo>
-                  <a:lnTo>
-                    <a:pt x="2512827" y="2916642"/>
-                  </a:lnTo>
-                  <a:lnTo>
-                    <a:pt x="2590070" y="2925379"/>
-                  </a:lnTo>
-                  <a:lnTo>
-                    <a:pt x="2667314" y="2934011"/>
-                  </a:lnTo>
-                  <a:lnTo>
-                    <a:pt x="2744558" y="2942541"/>
-                  </a:lnTo>
-                  <a:lnTo>
-                    <a:pt x="2821801" y="2950970"/>
-                  </a:lnTo>
-                  <a:lnTo>
-                    <a:pt x="2899045" y="2959299"/>
-                  </a:lnTo>
-                  <a:lnTo>
-                    <a:pt x="2976288" y="2967529"/>
-                  </a:lnTo>
-                  <a:lnTo>
-                    <a:pt x="3053532" y="2975661"/>
-                  </a:lnTo>
-                  <a:lnTo>
-                    <a:pt x="3130775" y="2983697"/>
-                  </a:lnTo>
-                  <a:lnTo>
-                    <a:pt x="3208019" y="2991637"/>
-                  </a:lnTo>
-                  <a:lnTo>
-                    <a:pt x="3285263" y="2999484"/>
-                  </a:lnTo>
-                  <a:lnTo>
-                    <a:pt x="3362506" y="3007237"/>
-                  </a:lnTo>
-                  <a:lnTo>
-                    <a:pt x="3439750" y="3014898"/>
-                  </a:lnTo>
-                  <a:lnTo>
-                    <a:pt x="3516993" y="3022468"/>
-                  </a:lnTo>
-                  <a:lnTo>
-                    <a:pt x="3594237" y="3029948"/>
-                  </a:lnTo>
-                  <a:lnTo>
-                    <a:pt x="3671480" y="3037339"/>
-                  </a:lnTo>
-                  <a:lnTo>
-                    <a:pt x="3748724" y="3044643"/>
-                  </a:lnTo>
-                  <a:lnTo>
-                    <a:pt x="3825968" y="3051860"/>
-                  </a:lnTo>
-                  <a:lnTo>
-                    <a:pt x="3903211" y="3058991"/>
-                  </a:lnTo>
-                  <a:lnTo>
-                    <a:pt x="3980455" y="3066038"/>
-                  </a:lnTo>
-                  <a:lnTo>
-                    <a:pt x="4057698" y="3073001"/>
-                  </a:lnTo>
-                  <a:lnTo>
-                    <a:pt x="4134942" y="3079881"/>
-                  </a:lnTo>
-                  <a:lnTo>
-                    <a:pt x="4212185" y="3086680"/>
-                  </a:lnTo>
-                  <a:lnTo>
-                    <a:pt x="4289429" y="3093398"/>
-                  </a:lnTo>
-                  <a:lnTo>
-                    <a:pt x="4366673" y="3100036"/>
-                  </a:lnTo>
-                  <a:lnTo>
-                    <a:pt x="4443916" y="3106595"/>
-                  </a:lnTo>
-                  <a:lnTo>
-                    <a:pt x="4521160" y="3113077"/>
-                  </a:lnTo>
-                  <a:lnTo>
-                    <a:pt x="4598403" y="3119482"/>
-                  </a:lnTo>
-                  <a:lnTo>
-                    <a:pt x="4675647" y="3125810"/>
-                  </a:lnTo>
-                  <a:lnTo>
-                    <a:pt x="4752890" y="3132064"/>
-                  </a:lnTo>
-                  <a:lnTo>
-                    <a:pt x="4830134" y="3138243"/>
-                  </a:lnTo>
-                  <a:lnTo>
-                    <a:pt x="4907378" y="3144349"/>
-                  </a:lnTo>
-                  <a:lnTo>
-                    <a:pt x="4984621" y="3150382"/>
-                  </a:lnTo>
-                  <a:lnTo>
-                    <a:pt x="5061865" y="3156344"/>
-                  </a:lnTo>
-                  <a:lnTo>
-                    <a:pt x="5139108" y="3162235"/>
-                  </a:lnTo>
-                  <a:lnTo>
-                    <a:pt x="5216352" y="3168056"/>
-                  </a:lnTo>
-                  <a:lnTo>
-                    <a:pt x="5293595" y="3173809"/>
-                  </a:lnTo>
-                  <a:lnTo>
-                    <a:pt x="5370839" y="3179492"/>
-                  </a:lnTo>
-                  <a:lnTo>
-                    <a:pt x="5448083" y="3185109"/>
-                  </a:lnTo>
-                  <a:lnTo>
-                    <a:pt x="5525326" y="3190658"/>
+                    <a:pt x="41033" y="142642"/>
+                  </a:lnTo>
+                  <a:lnTo>
+                    <a:pt x="118276" y="391186"/>
+                  </a:lnTo>
+                  <a:lnTo>
+                    <a:pt x="195520" y="621242"/>
+                  </a:lnTo>
+                  <a:lnTo>
+                    <a:pt x="272763" y="834184"/>
+                  </a:lnTo>
+                  <a:lnTo>
+                    <a:pt x="350007" y="1031285"/>
+                  </a:lnTo>
+                  <a:lnTo>
+                    <a:pt x="427250" y="1213723"/>
+                  </a:lnTo>
+                  <a:lnTo>
+                    <a:pt x="504494" y="1382590"/>
+                  </a:lnTo>
+                  <a:lnTo>
+                    <a:pt x="581738" y="1538895"/>
+                  </a:lnTo>
+                  <a:lnTo>
+                    <a:pt x="658981" y="1683573"/>
+                  </a:lnTo>
+                  <a:lnTo>
+                    <a:pt x="736225" y="1817488"/>
+                  </a:lnTo>
+                  <a:lnTo>
+                    <a:pt x="813468" y="1941441"/>
+                  </a:lnTo>
+                  <a:lnTo>
+                    <a:pt x="890712" y="2056173"/>
+                  </a:lnTo>
+                  <a:lnTo>
+                    <a:pt x="967955" y="2162370"/>
+                  </a:lnTo>
+                  <a:lnTo>
+                    <a:pt x="1045199" y="2260667"/>
+                  </a:lnTo>
+                  <a:lnTo>
+                    <a:pt x="1122443" y="2351652"/>
+                  </a:lnTo>
+                  <a:lnTo>
+                    <a:pt x="1199686" y="2435869"/>
+                  </a:lnTo>
+                  <a:lnTo>
+                    <a:pt x="1276930" y="2513820"/>
+                  </a:lnTo>
+                  <a:lnTo>
+                    <a:pt x="1354173" y="2585973"/>
+                  </a:lnTo>
+                  <a:lnTo>
+                    <a:pt x="1431417" y="2652758"/>
+                  </a:lnTo>
+                  <a:lnTo>
+                    <a:pt x="1508660" y="2663896"/>
+                  </a:lnTo>
+                  <a:lnTo>
+                    <a:pt x="1585904" y="2673628"/>
+                  </a:lnTo>
+                  <a:lnTo>
+                    <a:pt x="1663148" y="2683244"/>
+                  </a:lnTo>
+                  <a:lnTo>
+                    <a:pt x="1740391" y="2692746"/>
+                  </a:lnTo>
+                  <a:lnTo>
+                    <a:pt x="1817635" y="2702135"/>
+                  </a:lnTo>
+                  <a:lnTo>
+                    <a:pt x="1894878" y="2711413"/>
+                  </a:lnTo>
+                  <a:lnTo>
+                    <a:pt x="1972122" y="2720580"/>
+                  </a:lnTo>
+                  <a:lnTo>
+                    <a:pt x="2049365" y="2729639"/>
+                  </a:lnTo>
+                  <a:lnTo>
+                    <a:pt x="2126609" y="2738590"/>
+                  </a:lnTo>
+                  <a:lnTo>
+                    <a:pt x="2203853" y="2747435"/>
+                  </a:lnTo>
+                  <a:lnTo>
+                    <a:pt x="2281096" y="2756175"/>
+                  </a:lnTo>
+                  <a:lnTo>
+                    <a:pt x="2358340" y="2764812"/>
+                  </a:lnTo>
+                  <a:lnTo>
+                    <a:pt x="2435583" y="2773345"/>
+                  </a:lnTo>
+                  <a:lnTo>
+                    <a:pt x="2512827" y="2781778"/>
+                  </a:lnTo>
+                  <a:lnTo>
+                    <a:pt x="2590070" y="2790110"/>
+                  </a:lnTo>
+                  <a:lnTo>
+                    <a:pt x="2667314" y="2798344"/>
+                  </a:lnTo>
+                  <a:lnTo>
+                    <a:pt x="2744558" y="2806479"/>
+                  </a:lnTo>
+                  <a:lnTo>
+                    <a:pt x="2821801" y="2814518"/>
+                  </a:lnTo>
+                  <a:lnTo>
+                    <a:pt x="2899045" y="2822462"/>
+                  </a:lnTo>
+                  <a:lnTo>
+                    <a:pt x="2976288" y="2830312"/>
+                  </a:lnTo>
+                  <a:lnTo>
+                    <a:pt x="3053532" y="2838068"/>
+                  </a:lnTo>
+                  <a:lnTo>
+                    <a:pt x="3130775" y="2845732"/>
+                  </a:lnTo>
+                  <a:lnTo>
+                    <a:pt x="3208019" y="2853305"/>
+                  </a:lnTo>
+                  <a:lnTo>
+                    <a:pt x="3285263" y="2860789"/>
+                  </a:lnTo>
+                  <a:lnTo>
+                    <a:pt x="3362506" y="2868183"/>
+                  </a:lnTo>
+                  <a:lnTo>
+                    <a:pt x="3439750" y="2875490"/>
+                  </a:lnTo>
+                  <a:lnTo>
+                    <a:pt x="3516993" y="2882710"/>
+                  </a:lnTo>
+                  <a:lnTo>
+                    <a:pt x="3594237" y="2889844"/>
+                  </a:lnTo>
+                  <a:lnTo>
+                    <a:pt x="3671480" y="2896894"/>
+                  </a:lnTo>
+                  <a:lnTo>
+                    <a:pt x="3748724" y="2903860"/>
+                  </a:lnTo>
+                  <a:lnTo>
+                    <a:pt x="3825968" y="2910743"/>
+                  </a:lnTo>
+                  <a:lnTo>
+                    <a:pt x="3903211" y="2917544"/>
+                  </a:lnTo>
+                  <a:lnTo>
+                    <a:pt x="3980455" y="2924265"/>
+                  </a:lnTo>
+                  <a:lnTo>
+                    <a:pt x="4057698" y="2930906"/>
+                  </a:lnTo>
+                  <a:lnTo>
+                    <a:pt x="4134942" y="2937469"/>
+                  </a:lnTo>
+                  <a:lnTo>
+                    <a:pt x="4212185" y="2943953"/>
+                  </a:lnTo>
+                  <a:lnTo>
+                    <a:pt x="4289429" y="2950360"/>
+                  </a:lnTo>
+                  <a:lnTo>
+                    <a:pt x="4366673" y="2956691"/>
+                  </a:lnTo>
+                  <a:lnTo>
+                    <a:pt x="4443916" y="2962948"/>
+                  </a:lnTo>
+                  <a:lnTo>
+                    <a:pt x="4521160" y="2969129"/>
+                  </a:lnTo>
+                  <a:lnTo>
+                    <a:pt x="4598403" y="2975238"/>
+                  </a:lnTo>
+                  <a:lnTo>
+                    <a:pt x="4675647" y="2981274"/>
+                  </a:lnTo>
+                  <a:lnTo>
+                    <a:pt x="4752890" y="2987238"/>
+                  </a:lnTo>
+                  <a:lnTo>
+                    <a:pt x="4830134" y="2993132"/>
+                  </a:lnTo>
+                  <a:lnTo>
+                    <a:pt x="4907378" y="2998955"/>
+                  </a:lnTo>
+                  <a:lnTo>
+                    <a:pt x="4984621" y="3004710"/>
+                  </a:lnTo>
+                  <a:lnTo>
+                    <a:pt x="5061865" y="3010396"/>
+                  </a:lnTo>
+                  <a:lnTo>
+                    <a:pt x="5139108" y="3016015"/>
+                  </a:lnTo>
+                  <a:lnTo>
+                    <a:pt x="5216352" y="3021567"/>
+                  </a:lnTo>
+                  <a:lnTo>
+                    <a:pt x="5293595" y="3027053"/>
+                  </a:lnTo>
+                  <a:lnTo>
+                    <a:pt x="5370839" y="3032474"/>
+                  </a:lnTo>
+                  <a:lnTo>
+                    <a:pt x="5448083" y="3037830"/>
+                  </a:lnTo>
+                  <a:lnTo>
+                    <a:pt x="5525326" y="3043123"/>
                   </a:lnTo>
                 </a:path>
               </a:pathLst>
@@ -3787,300 +3787,300 @@
           </p:nvSpPr>
           <p:spPr>
             <a:xfrm>
-              <a:off x="817517" y="4100719"/>
-              <a:ext cx="7392041" cy="1434005"/>
+              <a:off x="817517" y="4175739"/>
+              <a:ext cx="7392041" cy="1367697"/>
             </a:xfrm>
             <a:custGeom>
               <a:avLst/>
               <a:pathLst>
-                <a:path w="7392041" h="1434005">
+                <a:path w="7392041" h="1367697">
                   <a:moveTo>
-                    <a:pt x="7392041" y="1434005"/>
+                    <a:pt x="7392041" y="1367697"/>
                   </a:moveTo>
                   <a:lnTo>
-                    <a:pt x="7314797" y="1432841"/>
-                  </a:lnTo>
-                  <a:lnTo>
-                    <a:pt x="7237554" y="1431583"/>
-                  </a:lnTo>
-                  <a:lnTo>
-                    <a:pt x="7160310" y="1430225"/>
-                  </a:lnTo>
-                  <a:lnTo>
-                    <a:pt x="7083066" y="1428757"/>
-                  </a:lnTo>
-                  <a:lnTo>
-                    <a:pt x="7005823" y="1427171"/>
-                  </a:lnTo>
-                  <a:lnTo>
-                    <a:pt x="6928579" y="1425458"/>
-                  </a:lnTo>
-                  <a:lnTo>
-                    <a:pt x="6851336" y="1423607"/>
-                  </a:lnTo>
-                  <a:lnTo>
-                    <a:pt x="6774092" y="1421608"/>
-                  </a:lnTo>
-                  <a:lnTo>
-                    <a:pt x="6696849" y="1419448"/>
-                  </a:lnTo>
-                  <a:lnTo>
-                    <a:pt x="6619605" y="1417114"/>
-                  </a:lnTo>
-                  <a:lnTo>
-                    <a:pt x="6542361" y="1414592"/>
-                  </a:lnTo>
-                  <a:lnTo>
-                    <a:pt x="6465118" y="1411868"/>
-                  </a:lnTo>
-                  <a:lnTo>
-                    <a:pt x="6387874" y="1408925"/>
-                  </a:lnTo>
-                  <a:lnTo>
-                    <a:pt x="6310631" y="1405746"/>
-                  </a:lnTo>
-                  <a:lnTo>
-                    <a:pt x="6233387" y="1402311"/>
-                  </a:lnTo>
-                  <a:lnTo>
-                    <a:pt x="6156144" y="1398599"/>
-                  </a:lnTo>
-                  <a:lnTo>
-                    <a:pt x="6078900" y="1394590"/>
-                  </a:lnTo>
-                  <a:lnTo>
-                    <a:pt x="6001656" y="1390258"/>
-                  </a:lnTo>
-                  <a:lnTo>
-                    <a:pt x="5924413" y="1385579"/>
-                  </a:lnTo>
-                  <a:lnTo>
-                    <a:pt x="5847169" y="1380523"/>
-                  </a:lnTo>
-                  <a:lnTo>
-                    <a:pt x="5769926" y="1375061"/>
-                  </a:lnTo>
-                  <a:lnTo>
-                    <a:pt x="5692682" y="1369159"/>
-                  </a:lnTo>
-                  <a:lnTo>
-                    <a:pt x="5615439" y="1362784"/>
-                  </a:lnTo>
-                  <a:lnTo>
-                    <a:pt x="5538195" y="1355896"/>
-                  </a:lnTo>
-                  <a:lnTo>
-                    <a:pt x="5460951" y="1348455"/>
-                  </a:lnTo>
-                  <a:lnTo>
-                    <a:pt x="5383708" y="1340415"/>
-                  </a:lnTo>
-                  <a:lnTo>
-                    <a:pt x="5306464" y="1331730"/>
-                  </a:lnTo>
-                  <a:lnTo>
-                    <a:pt x="5229221" y="1322346"/>
-                  </a:lnTo>
-                  <a:lnTo>
-                    <a:pt x="5151977" y="1312208"/>
-                  </a:lnTo>
-                  <a:lnTo>
-                    <a:pt x="5074734" y="1301256"/>
-                  </a:lnTo>
-                  <a:lnTo>
-                    <a:pt x="4997490" y="1289423"/>
-                  </a:lnTo>
-                  <a:lnTo>
-                    <a:pt x="4920246" y="1276639"/>
-                  </a:lnTo>
-                  <a:lnTo>
-                    <a:pt x="4843003" y="1262828"/>
-                  </a:lnTo>
-                  <a:lnTo>
-                    <a:pt x="4765759" y="1247907"/>
-                  </a:lnTo>
-                  <a:lnTo>
-                    <a:pt x="4688516" y="1231787"/>
-                  </a:lnTo>
-                  <a:lnTo>
-                    <a:pt x="4611272" y="1214371"/>
-                  </a:lnTo>
-                  <a:lnTo>
-                    <a:pt x="4534029" y="1195555"/>
-                  </a:lnTo>
-                  <a:lnTo>
-                    <a:pt x="4456785" y="1175227"/>
-                  </a:lnTo>
-                  <a:lnTo>
-                    <a:pt x="4379541" y="1153266"/>
-                  </a:lnTo>
-                  <a:lnTo>
-                    <a:pt x="4302298" y="1129539"/>
-                  </a:lnTo>
-                  <a:lnTo>
-                    <a:pt x="4225054" y="1103906"/>
-                  </a:lnTo>
-                  <a:lnTo>
-                    <a:pt x="4147811" y="1076212"/>
-                  </a:lnTo>
-                  <a:lnTo>
-                    <a:pt x="4070567" y="1046293"/>
-                  </a:lnTo>
-                  <a:lnTo>
-                    <a:pt x="3993324" y="1013969"/>
-                  </a:lnTo>
-                  <a:lnTo>
-                    <a:pt x="3916080" y="979047"/>
-                  </a:lnTo>
-                  <a:lnTo>
-                    <a:pt x="3838836" y="941319"/>
-                  </a:lnTo>
-                  <a:lnTo>
-                    <a:pt x="3761593" y="900559"/>
-                  </a:lnTo>
-                  <a:lnTo>
-                    <a:pt x="3684349" y="856523"/>
-                  </a:lnTo>
-                  <a:lnTo>
-                    <a:pt x="3607106" y="808947"/>
-                  </a:lnTo>
-                  <a:lnTo>
-                    <a:pt x="3529862" y="757548"/>
-                  </a:lnTo>
-                  <a:lnTo>
-                    <a:pt x="3452619" y="702019"/>
-                  </a:lnTo>
-                  <a:lnTo>
-                    <a:pt x="3375375" y="642026"/>
-                  </a:lnTo>
-                  <a:lnTo>
-                    <a:pt x="3298131" y="578563"/>
-                  </a:lnTo>
-                  <a:lnTo>
-                    <a:pt x="3220888" y="568113"/>
-                  </a:lnTo>
-                  <a:lnTo>
-                    <a:pt x="3143644" y="557538"/>
-                  </a:lnTo>
-                  <a:lnTo>
-                    <a:pt x="3066401" y="546835"/>
-                  </a:lnTo>
-                  <a:lnTo>
-                    <a:pt x="2989157" y="536004"/>
-                  </a:lnTo>
-                  <a:lnTo>
-                    <a:pt x="2911914" y="525043"/>
-                  </a:lnTo>
-                  <a:lnTo>
-                    <a:pt x="2834670" y="513950"/>
-                  </a:lnTo>
-                  <a:lnTo>
-                    <a:pt x="2757426" y="502724"/>
-                  </a:lnTo>
-                  <a:lnTo>
-                    <a:pt x="2680183" y="491362"/>
-                  </a:lnTo>
-                  <a:lnTo>
-                    <a:pt x="2602939" y="479865"/>
-                  </a:lnTo>
-                  <a:lnTo>
-                    <a:pt x="2525696" y="468229"/>
-                  </a:lnTo>
-                  <a:lnTo>
-                    <a:pt x="2448452" y="456454"/>
-                  </a:lnTo>
-                  <a:lnTo>
-                    <a:pt x="2371209" y="444537"/>
-                  </a:lnTo>
-                  <a:lnTo>
-                    <a:pt x="2293965" y="432477"/>
-                  </a:lnTo>
-                  <a:lnTo>
-                    <a:pt x="2216721" y="420272"/>
-                  </a:lnTo>
-                  <a:lnTo>
-                    <a:pt x="2139478" y="407921"/>
-                  </a:lnTo>
-                  <a:lnTo>
-                    <a:pt x="2062234" y="395421"/>
-                  </a:lnTo>
-                  <a:lnTo>
-                    <a:pt x="1984991" y="382771"/>
-                  </a:lnTo>
-                  <a:lnTo>
-                    <a:pt x="1907747" y="369969"/>
-                  </a:lnTo>
-                  <a:lnTo>
-                    <a:pt x="1830504" y="357013"/>
-                  </a:lnTo>
-                  <a:lnTo>
-                    <a:pt x="1753260" y="343901"/>
-                  </a:lnTo>
-                  <a:lnTo>
-                    <a:pt x="1676016" y="330632"/>
-                  </a:lnTo>
-                  <a:lnTo>
-                    <a:pt x="1598773" y="317204"/>
-                  </a:lnTo>
-                  <a:lnTo>
-                    <a:pt x="1521529" y="303615"/>
-                  </a:lnTo>
-                  <a:lnTo>
-                    <a:pt x="1444286" y="289862"/>
-                  </a:lnTo>
-                  <a:lnTo>
-                    <a:pt x="1367042" y="275944"/>
-                  </a:lnTo>
-                  <a:lnTo>
-                    <a:pt x="1289799" y="261858"/>
-                  </a:lnTo>
-                  <a:lnTo>
-                    <a:pt x="1212555" y="247604"/>
-                  </a:lnTo>
-                  <a:lnTo>
-                    <a:pt x="1135311" y="233178"/>
-                  </a:lnTo>
-                  <a:lnTo>
-                    <a:pt x="1058068" y="218579"/>
-                  </a:lnTo>
-                  <a:lnTo>
-                    <a:pt x="980824" y="203805"/>
-                  </a:lnTo>
-                  <a:lnTo>
-                    <a:pt x="903581" y="188853"/>
-                  </a:lnTo>
-                  <a:lnTo>
-                    <a:pt x="826337" y="173721"/>
-                  </a:lnTo>
-                  <a:lnTo>
-                    <a:pt x="749094" y="158408"/>
-                  </a:lnTo>
-                  <a:lnTo>
-                    <a:pt x="671850" y="142911"/>
-                  </a:lnTo>
-                  <a:lnTo>
-                    <a:pt x="594606" y="127228"/>
-                  </a:lnTo>
-                  <a:lnTo>
-                    <a:pt x="517363" y="111356"/>
-                  </a:lnTo>
-                  <a:lnTo>
-                    <a:pt x="440119" y="95294"/>
-                  </a:lnTo>
-                  <a:lnTo>
-                    <a:pt x="362876" y="79038"/>
-                  </a:lnTo>
-                  <a:lnTo>
-                    <a:pt x="285632" y="62588"/>
-                  </a:lnTo>
-                  <a:lnTo>
-                    <a:pt x="208389" y="45939"/>
-                  </a:lnTo>
-                  <a:lnTo>
-                    <a:pt x="131145" y="29091"/>
-                  </a:lnTo>
-                  <a:lnTo>
-                    <a:pt x="53901" y="12041"/>
+                    <a:pt x="7314797" y="1366587"/>
+                  </a:lnTo>
+                  <a:lnTo>
+                    <a:pt x="7237554" y="1365387"/>
+                  </a:lnTo>
+                  <a:lnTo>
+                    <a:pt x="7160310" y="1364092"/>
+                  </a:lnTo>
+                  <a:lnTo>
+                    <a:pt x="7083066" y="1362692"/>
+                  </a:lnTo>
+                  <a:lnTo>
+                    <a:pt x="7005823" y="1361179"/>
+                  </a:lnTo>
+                  <a:lnTo>
+                    <a:pt x="6928579" y="1359546"/>
+                  </a:lnTo>
+                  <a:lnTo>
+                    <a:pt x="6851336" y="1357780"/>
+                  </a:lnTo>
+                  <a:lnTo>
+                    <a:pt x="6774092" y="1355873"/>
+                  </a:lnTo>
+                  <a:lnTo>
+                    <a:pt x="6696849" y="1353813"/>
+                  </a:lnTo>
+                  <a:lnTo>
+                    <a:pt x="6619605" y="1351587"/>
+                  </a:lnTo>
+                  <a:lnTo>
+                    <a:pt x="6542361" y="1349182"/>
+                  </a:lnTo>
+                  <a:lnTo>
+                    <a:pt x="6465118" y="1346584"/>
+                  </a:lnTo>
+                  <a:lnTo>
+                    <a:pt x="6387874" y="1343777"/>
+                  </a:lnTo>
+                  <a:lnTo>
+                    <a:pt x="6310631" y="1340745"/>
+                  </a:lnTo>
+                  <a:lnTo>
+                    <a:pt x="6233387" y="1337468"/>
+                  </a:lnTo>
+                  <a:lnTo>
+                    <a:pt x="6156144" y="1333929"/>
+                  </a:lnTo>
+                  <a:lnTo>
+                    <a:pt x="6078900" y="1330105"/>
+                  </a:lnTo>
+                  <a:lnTo>
+                    <a:pt x="6001656" y="1325973"/>
+                  </a:lnTo>
+                  <a:lnTo>
+                    <a:pt x="5924413" y="1321510"/>
+                  </a:lnTo>
+                  <a:lnTo>
+                    <a:pt x="5847169" y="1316688"/>
+                  </a:lnTo>
+                  <a:lnTo>
+                    <a:pt x="5769926" y="1311478"/>
+                  </a:lnTo>
+                  <a:lnTo>
+                    <a:pt x="5692682" y="1305850"/>
+                  </a:lnTo>
+                  <a:lnTo>
+                    <a:pt x="5615439" y="1299769"/>
+                  </a:lnTo>
+                  <a:lnTo>
+                    <a:pt x="5538195" y="1293200"/>
+                  </a:lnTo>
+                  <a:lnTo>
+                    <a:pt x="5460951" y="1286103"/>
+                  </a:lnTo>
+                  <a:lnTo>
+                    <a:pt x="5383708" y="1278435"/>
+                  </a:lnTo>
+                  <a:lnTo>
+                    <a:pt x="5306464" y="1270151"/>
+                  </a:lnTo>
+                  <a:lnTo>
+                    <a:pt x="5229221" y="1261201"/>
+                  </a:lnTo>
+                  <a:lnTo>
+                    <a:pt x="5151977" y="1251532"/>
+                  </a:lnTo>
+                  <a:lnTo>
+                    <a:pt x="5074734" y="1241086"/>
+                  </a:lnTo>
+                  <a:lnTo>
+                    <a:pt x="4997490" y="1229801"/>
+                  </a:lnTo>
+                  <a:lnTo>
+                    <a:pt x="4920246" y="1217608"/>
+                  </a:lnTo>
+                  <a:lnTo>
+                    <a:pt x="4843003" y="1204435"/>
+                  </a:lnTo>
+                  <a:lnTo>
+                    <a:pt x="4765759" y="1190204"/>
+                  </a:lnTo>
+                  <a:lnTo>
+                    <a:pt x="4688516" y="1174829"/>
+                  </a:lnTo>
+                  <a:lnTo>
+                    <a:pt x="4611272" y="1158219"/>
+                  </a:lnTo>
+                  <a:lnTo>
+                    <a:pt x="4534029" y="1140273"/>
+                  </a:lnTo>
+                  <a:lnTo>
+                    <a:pt x="4456785" y="1120885"/>
+                  </a:lnTo>
+                  <a:lnTo>
+                    <a:pt x="4379541" y="1099939"/>
+                  </a:lnTo>
+                  <a:lnTo>
+                    <a:pt x="4302298" y="1077310"/>
+                  </a:lnTo>
+                  <a:lnTo>
+                    <a:pt x="4225054" y="1052861"/>
+                  </a:lnTo>
+                  <a:lnTo>
+                    <a:pt x="4147811" y="1026448"/>
+                  </a:lnTo>
+                  <a:lnTo>
+                    <a:pt x="4070567" y="997913"/>
+                  </a:lnTo>
+                  <a:lnTo>
+                    <a:pt x="3993324" y="967084"/>
+                  </a:lnTo>
+                  <a:lnTo>
+                    <a:pt x="3916080" y="933777"/>
+                  </a:lnTo>
+                  <a:lnTo>
+                    <a:pt x="3838836" y="897793"/>
+                  </a:lnTo>
+                  <a:lnTo>
+                    <a:pt x="3761593" y="858917"/>
+                  </a:lnTo>
+                  <a:lnTo>
+                    <a:pt x="3684349" y="816917"/>
+                  </a:lnTo>
+                  <a:lnTo>
+                    <a:pt x="3607106" y="771542"/>
+                  </a:lnTo>
+                  <a:lnTo>
+                    <a:pt x="3529862" y="722520"/>
+                  </a:lnTo>
+                  <a:lnTo>
+                    <a:pt x="3452619" y="669557"/>
+                  </a:lnTo>
+                  <a:lnTo>
+                    <a:pt x="3375375" y="612339"/>
+                  </a:lnTo>
+                  <a:lnTo>
+                    <a:pt x="3298131" y="551811"/>
+                  </a:lnTo>
+                  <a:lnTo>
+                    <a:pt x="3220888" y="541844"/>
+                  </a:lnTo>
+                  <a:lnTo>
+                    <a:pt x="3143644" y="531757"/>
+                  </a:lnTo>
+                  <a:lnTo>
+                    <a:pt x="3066401" y="521550"/>
+                  </a:lnTo>
+                  <a:lnTo>
+                    <a:pt x="2989157" y="511219"/>
+                  </a:lnTo>
+                  <a:lnTo>
+                    <a:pt x="2911914" y="500765"/>
+                  </a:lnTo>
+                  <a:lnTo>
+                    <a:pt x="2834670" y="490185"/>
+                  </a:lnTo>
+                  <a:lnTo>
+                    <a:pt x="2757426" y="479478"/>
+                  </a:lnTo>
+                  <a:lnTo>
+                    <a:pt x="2680183" y="468642"/>
+                  </a:lnTo>
+                  <a:lnTo>
+                    <a:pt x="2602939" y="457676"/>
+                  </a:lnTo>
+                  <a:lnTo>
+                    <a:pt x="2525696" y="446579"/>
+                  </a:lnTo>
+                  <a:lnTo>
+                    <a:pt x="2448452" y="435348"/>
+                  </a:lnTo>
+                  <a:lnTo>
+                    <a:pt x="2371209" y="423982"/>
+                  </a:lnTo>
+                  <a:lnTo>
+                    <a:pt x="2293965" y="412479"/>
+                  </a:lnTo>
+                  <a:lnTo>
+                    <a:pt x="2216721" y="400839"/>
+                  </a:lnTo>
+                  <a:lnTo>
+                    <a:pt x="2139478" y="389058"/>
+                  </a:lnTo>
+                  <a:lnTo>
+                    <a:pt x="2062234" y="377137"/>
+                  </a:lnTo>
+                  <a:lnTo>
+                    <a:pt x="1984991" y="365071"/>
+                  </a:lnTo>
+                  <a:lnTo>
+                    <a:pt x="1907747" y="352861"/>
+                  </a:lnTo>
+                  <a:lnTo>
+                    <a:pt x="1830504" y="340505"/>
+                  </a:lnTo>
+                  <a:lnTo>
+                    <a:pt x="1753260" y="328000"/>
+                  </a:lnTo>
+                  <a:lnTo>
+                    <a:pt x="1676016" y="315344"/>
+                  </a:lnTo>
+                  <a:lnTo>
+                    <a:pt x="1598773" y="302537"/>
+                  </a:lnTo>
+                  <a:lnTo>
+                    <a:pt x="1521529" y="289575"/>
+                  </a:lnTo>
+                  <a:lnTo>
+                    <a:pt x="1444286" y="276459"/>
+                  </a:lnTo>
+                  <a:lnTo>
+                    <a:pt x="1367042" y="263184"/>
+                  </a:lnTo>
+                  <a:lnTo>
+                    <a:pt x="1289799" y="249750"/>
+                  </a:lnTo>
+                  <a:lnTo>
+                    <a:pt x="1212555" y="236155"/>
+                  </a:lnTo>
+                  <a:lnTo>
+                    <a:pt x="1135311" y="222396"/>
+                  </a:lnTo>
+                  <a:lnTo>
+                    <a:pt x="1058068" y="208472"/>
+                  </a:lnTo>
+                  <a:lnTo>
+                    <a:pt x="980824" y="194381"/>
+                  </a:lnTo>
+                  <a:lnTo>
+                    <a:pt x="903581" y="180120"/>
+                  </a:lnTo>
+                  <a:lnTo>
+                    <a:pt x="826337" y="165689"/>
+                  </a:lnTo>
+                  <a:lnTo>
+                    <a:pt x="749094" y="151084"/>
+                  </a:lnTo>
+                  <a:lnTo>
+                    <a:pt x="671850" y="136303"/>
+                  </a:lnTo>
+                  <a:lnTo>
+                    <a:pt x="594606" y="121345"/>
+                  </a:lnTo>
+                  <a:lnTo>
+                    <a:pt x="517363" y="106207"/>
+                  </a:lnTo>
+                  <a:lnTo>
+                    <a:pt x="440119" y="90887"/>
+                  </a:lnTo>
+                  <a:lnTo>
+                    <a:pt x="362876" y="75384"/>
+                  </a:lnTo>
+                  <a:lnTo>
+                    <a:pt x="285632" y="59694"/>
+                  </a:lnTo>
+                  <a:lnTo>
+                    <a:pt x="208389" y="43815"/>
+                  </a:lnTo>
+                  <a:lnTo>
+                    <a:pt x="131145" y="27746"/>
+                  </a:lnTo>
+                  <a:lnTo>
+                    <a:pt x="53901" y="11484"/>
                   </a:lnTo>
                   <a:lnTo>
                     <a:pt x="0" y="0"/>
@@ -4103,273 +4103,273 @@
           </p:nvSpPr>
           <p:spPr>
             <a:xfrm>
-              <a:off x="1633444" y="1896563"/>
-              <a:ext cx="6576114" cy="3570847"/>
+              <a:off x="1633444" y="2073503"/>
+              <a:ext cx="6576114" cy="3405732"/>
             </a:xfrm>
             <a:custGeom>
               <a:avLst/>
               <a:pathLst>
-                <a:path w="6576114" h="3570847">
+                <a:path w="6576114" h="3405732">
                   <a:moveTo>
                     <a:pt x="0" y="0"/>
                   </a:moveTo>
                   <a:lnTo>
-                    <a:pt x="10411" y="22328"/>
-                  </a:lnTo>
-                  <a:lnTo>
-                    <a:pt x="87654" y="180758"/>
-                  </a:lnTo>
-                  <a:lnTo>
-                    <a:pt x="164898" y="332273"/>
-                  </a:lnTo>
-                  <a:lnTo>
-                    <a:pt x="242142" y="477177"/>
-                  </a:lnTo>
-                  <a:lnTo>
-                    <a:pt x="319385" y="615757"/>
-                  </a:lnTo>
-                  <a:lnTo>
-                    <a:pt x="396629" y="748289"/>
-                  </a:lnTo>
-                  <a:lnTo>
-                    <a:pt x="473872" y="875037"/>
-                  </a:lnTo>
-                  <a:lnTo>
-                    <a:pt x="551116" y="996254"/>
-                  </a:lnTo>
-                  <a:lnTo>
-                    <a:pt x="628359" y="1112181"/>
-                  </a:lnTo>
-                  <a:lnTo>
-                    <a:pt x="705603" y="1223048"/>
-                  </a:lnTo>
-                  <a:lnTo>
-                    <a:pt x="782847" y="1329078"/>
-                  </a:lnTo>
-                  <a:lnTo>
-                    <a:pt x="860090" y="1430480"/>
-                  </a:lnTo>
-                  <a:lnTo>
-                    <a:pt x="937334" y="1527457"/>
-                  </a:lnTo>
-                  <a:lnTo>
-                    <a:pt x="1014577" y="1620201"/>
-                  </a:lnTo>
-                  <a:lnTo>
-                    <a:pt x="1091821" y="1708899"/>
-                  </a:lnTo>
-                  <a:lnTo>
-                    <a:pt x="1169064" y="1793725"/>
-                  </a:lnTo>
-                  <a:lnTo>
-                    <a:pt x="1246308" y="1874850"/>
-                  </a:lnTo>
-                  <a:lnTo>
-                    <a:pt x="1323552" y="1952434"/>
-                  </a:lnTo>
-                  <a:lnTo>
-                    <a:pt x="1400795" y="2026632"/>
-                  </a:lnTo>
-                  <a:lnTo>
-                    <a:pt x="1478039" y="2097593"/>
-                  </a:lnTo>
-                  <a:lnTo>
-                    <a:pt x="1555282" y="2165456"/>
-                  </a:lnTo>
-                  <a:lnTo>
-                    <a:pt x="1632526" y="2230358"/>
-                  </a:lnTo>
-                  <a:lnTo>
-                    <a:pt x="1709769" y="2292428"/>
-                  </a:lnTo>
-                  <a:lnTo>
-                    <a:pt x="1787013" y="2351789"/>
-                  </a:lnTo>
-                  <a:lnTo>
-                    <a:pt x="1864257" y="2408559"/>
-                  </a:lnTo>
-                  <a:lnTo>
-                    <a:pt x="1941500" y="2462852"/>
-                  </a:lnTo>
-                  <a:lnTo>
-                    <a:pt x="2018744" y="2514775"/>
-                  </a:lnTo>
-                  <a:lnTo>
-                    <a:pt x="2095987" y="2564433"/>
-                  </a:lnTo>
-                  <a:lnTo>
-                    <a:pt x="2173231" y="2611923"/>
-                  </a:lnTo>
-                  <a:lnTo>
-                    <a:pt x="2250474" y="2657341"/>
-                  </a:lnTo>
-                  <a:lnTo>
-                    <a:pt x="2327718" y="2700776"/>
-                  </a:lnTo>
-                  <a:lnTo>
-                    <a:pt x="2404962" y="2742317"/>
-                  </a:lnTo>
-                  <a:lnTo>
-                    <a:pt x="2482205" y="2782044"/>
-                  </a:lnTo>
-                  <a:lnTo>
-                    <a:pt x="2559449" y="2820038"/>
-                  </a:lnTo>
-                  <a:lnTo>
-                    <a:pt x="2636692" y="2856373"/>
-                  </a:lnTo>
-                  <a:lnTo>
-                    <a:pt x="2713936" y="2891123"/>
-                  </a:lnTo>
-                  <a:lnTo>
-                    <a:pt x="2791179" y="2924356"/>
-                  </a:lnTo>
-                  <a:lnTo>
-                    <a:pt x="2868423" y="2956139"/>
-                  </a:lnTo>
-                  <a:lnTo>
-                    <a:pt x="2945667" y="2986535"/>
-                  </a:lnTo>
-                  <a:lnTo>
-                    <a:pt x="3022910" y="3015605"/>
-                  </a:lnTo>
-                  <a:lnTo>
-                    <a:pt x="3100154" y="3043406"/>
-                  </a:lnTo>
-                  <a:lnTo>
-                    <a:pt x="3177397" y="3069993"/>
-                  </a:lnTo>
-                  <a:lnTo>
-                    <a:pt x="3254641" y="3095420"/>
-                  </a:lnTo>
-                  <a:lnTo>
-                    <a:pt x="3331884" y="3119738"/>
-                  </a:lnTo>
-                  <a:lnTo>
-                    <a:pt x="3409128" y="3142994"/>
-                  </a:lnTo>
-                  <a:lnTo>
-                    <a:pt x="3486372" y="3165236"/>
-                  </a:lnTo>
-                  <a:lnTo>
-                    <a:pt x="3563615" y="3186507"/>
-                  </a:lnTo>
-                  <a:lnTo>
-                    <a:pt x="3640859" y="3206849"/>
-                  </a:lnTo>
-                  <a:lnTo>
-                    <a:pt x="3718102" y="3226304"/>
-                  </a:lnTo>
-                  <a:lnTo>
-                    <a:pt x="3795346" y="3244910"/>
-                  </a:lnTo>
-                  <a:lnTo>
-                    <a:pt x="3872589" y="3262704"/>
-                  </a:lnTo>
-                  <a:lnTo>
-                    <a:pt x="3949833" y="3279721"/>
-                  </a:lnTo>
-                  <a:lnTo>
-                    <a:pt x="4027077" y="3295995"/>
-                  </a:lnTo>
-                  <a:lnTo>
-                    <a:pt x="4104320" y="3311560"/>
-                  </a:lnTo>
-                  <a:lnTo>
-                    <a:pt x="4181564" y="3326445"/>
-                  </a:lnTo>
-                  <a:lnTo>
-                    <a:pt x="4258807" y="3340681"/>
-                  </a:lnTo>
-                  <a:lnTo>
-                    <a:pt x="4336051" y="3354295"/>
-                  </a:lnTo>
-                  <a:lnTo>
-                    <a:pt x="4413294" y="3367315"/>
-                  </a:lnTo>
-                  <a:lnTo>
-                    <a:pt x="4490538" y="3379767"/>
-                  </a:lnTo>
-                  <a:lnTo>
-                    <a:pt x="4567782" y="3391675"/>
-                  </a:lnTo>
-                  <a:lnTo>
-                    <a:pt x="4645025" y="3403064"/>
-                  </a:lnTo>
-                  <a:lnTo>
-                    <a:pt x="4722269" y="3413956"/>
-                  </a:lnTo>
-                  <a:lnTo>
-                    <a:pt x="4799512" y="3424373"/>
-                  </a:lnTo>
-                  <a:lnTo>
-                    <a:pt x="4876756" y="3434334"/>
-                  </a:lnTo>
-                  <a:lnTo>
-                    <a:pt x="4953999" y="3443862"/>
-                  </a:lnTo>
-                  <a:lnTo>
-                    <a:pt x="5031243" y="3452973"/>
-                  </a:lnTo>
-                  <a:lnTo>
-                    <a:pt x="5108487" y="3461687"/>
-                  </a:lnTo>
-                  <a:lnTo>
-                    <a:pt x="5185730" y="3470020"/>
-                  </a:lnTo>
-                  <a:lnTo>
-                    <a:pt x="5262974" y="3477990"/>
-                  </a:lnTo>
-                  <a:lnTo>
-                    <a:pt x="5340217" y="3485612"/>
-                  </a:lnTo>
-                  <a:lnTo>
-                    <a:pt x="5417461" y="3492901"/>
-                  </a:lnTo>
-                  <a:lnTo>
-                    <a:pt x="5494704" y="3499873"/>
-                  </a:lnTo>
-                  <a:lnTo>
-                    <a:pt x="5571948" y="3506540"/>
-                  </a:lnTo>
-                  <a:lnTo>
-                    <a:pt x="5649192" y="3512916"/>
-                  </a:lnTo>
-                  <a:lnTo>
-                    <a:pt x="5726435" y="3519014"/>
-                  </a:lnTo>
-                  <a:lnTo>
-                    <a:pt x="5803679" y="3524845"/>
-                  </a:lnTo>
-                  <a:lnTo>
-                    <a:pt x="5880922" y="3530423"/>
-                  </a:lnTo>
-                  <a:lnTo>
-                    <a:pt x="5958166" y="3535756"/>
-                  </a:lnTo>
-                  <a:lnTo>
-                    <a:pt x="6035409" y="3540857"/>
-                  </a:lnTo>
-                  <a:lnTo>
-                    <a:pt x="6112653" y="3545736"/>
-                  </a:lnTo>
-                  <a:lnTo>
-                    <a:pt x="6189897" y="3550401"/>
-                  </a:lnTo>
-                  <a:lnTo>
-                    <a:pt x="6267140" y="3554863"/>
-                  </a:lnTo>
-                  <a:lnTo>
-                    <a:pt x="6344384" y="3559130"/>
-                  </a:lnTo>
-                  <a:lnTo>
-                    <a:pt x="6421627" y="3563211"/>
-                  </a:lnTo>
-                  <a:lnTo>
-                    <a:pt x="6498871" y="3567114"/>
-                  </a:lnTo>
-                  <a:lnTo>
-                    <a:pt x="6576114" y="3570847"/>
+                    <a:pt x="10411" y="21296"/>
+                  </a:lnTo>
+                  <a:lnTo>
+                    <a:pt x="87654" y="172400"/>
+                  </a:lnTo>
+                  <a:lnTo>
+                    <a:pt x="164898" y="316909"/>
+                  </a:lnTo>
+                  <a:lnTo>
+                    <a:pt x="242142" y="455112"/>
+                  </a:lnTo>
+                  <a:lnTo>
+                    <a:pt x="319385" y="587284"/>
+                  </a:lnTo>
+                  <a:lnTo>
+                    <a:pt x="396629" y="713688"/>
+                  </a:lnTo>
+                  <a:lnTo>
+                    <a:pt x="473872" y="834575"/>
+                  </a:lnTo>
+                  <a:lnTo>
+                    <a:pt x="551116" y="950187"/>
+                  </a:lnTo>
+                  <a:lnTo>
+                    <a:pt x="628359" y="1060754"/>
+                  </a:lnTo>
+                  <a:lnTo>
+                    <a:pt x="705603" y="1166495"/>
+                  </a:lnTo>
+                  <a:lnTo>
+                    <a:pt x="782847" y="1267622"/>
+                  </a:lnTo>
+                  <a:lnTo>
+                    <a:pt x="860090" y="1364335"/>
+                  </a:lnTo>
+                  <a:lnTo>
+                    <a:pt x="937334" y="1456828"/>
+                  </a:lnTo>
+                  <a:lnTo>
+                    <a:pt x="1014577" y="1545284"/>
+                  </a:lnTo>
+                  <a:lnTo>
+                    <a:pt x="1091821" y="1629880"/>
+                  </a:lnTo>
+                  <a:lnTo>
+                    <a:pt x="1169064" y="1710784"/>
+                  </a:lnTo>
+                  <a:lnTo>
+                    <a:pt x="1246308" y="1788157"/>
+                  </a:lnTo>
+                  <a:lnTo>
+                    <a:pt x="1323552" y="1862154"/>
+                  </a:lnTo>
+                  <a:lnTo>
+                    <a:pt x="1400795" y="1932922"/>
+                  </a:lnTo>
+                  <a:lnTo>
+                    <a:pt x="1478039" y="2000601"/>
+                  </a:lnTo>
+                  <a:lnTo>
+                    <a:pt x="1555282" y="2065326"/>
+                  </a:lnTo>
+                  <a:lnTo>
+                    <a:pt x="1632526" y="2127227"/>
+                  </a:lnTo>
+                  <a:lnTo>
+                    <a:pt x="1709769" y="2186427"/>
+                  </a:lnTo>
+                  <a:lnTo>
+                    <a:pt x="1787013" y="2243043"/>
+                  </a:lnTo>
+                  <a:lnTo>
+                    <a:pt x="1864257" y="2297188"/>
+                  </a:lnTo>
+                  <a:lnTo>
+                    <a:pt x="1941500" y="2348970"/>
+                  </a:lnTo>
+                  <a:lnTo>
+                    <a:pt x="2018744" y="2398493"/>
+                  </a:lnTo>
+                  <a:lnTo>
+                    <a:pt x="2095987" y="2445854"/>
+                  </a:lnTo>
+                  <a:lnTo>
+                    <a:pt x="2173231" y="2491149"/>
+                  </a:lnTo>
+                  <a:lnTo>
+                    <a:pt x="2250474" y="2534466"/>
+                  </a:lnTo>
+                  <a:lnTo>
+                    <a:pt x="2327718" y="2575894"/>
+                  </a:lnTo>
+                  <a:lnTo>
+                    <a:pt x="2404962" y="2615513"/>
+                  </a:lnTo>
+                  <a:lnTo>
+                    <a:pt x="2482205" y="2653403"/>
+                  </a:lnTo>
+                  <a:lnTo>
+                    <a:pt x="2559449" y="2689640"/>
+                  </a:lnTo>
+                  <a:lnTo>
+                    <a:pt x="2636692" y="2724295"/>
+                  </a:lnTo>
+                  <a:lnTo>
+                    <a:pt x="2713936" y="2757438"/>
+                  </a:lnTo>
+                  <a:lnTo>
+                    <a:pt x="2791179" y="2789135"/>
+                  </a:lnTo>
+                  <a:lnTo>
+                    <a:pt x="2868423" y="2819448"/>
+                  </a:lnTo>
+                  <a:lnTo>
+                    <a:pt x="2945667" y="2848439"/>
+                  </a:lnTo>
+                  <a:lnTo>
+                    <a:pt x="3022910" y="2876164"/>
+                  </a:lnTo>
+                  <a:lnTo>
+                    <a:pt x="3100154" y="2902680"/>
+                  </a:lnTo>
+                  <a:lnTo>
+                    <a:pt x="3177397" y="2928038"/>
+                  </a:lnTo>
+                  <a:lnTo>
+                    <a:pt x="3254641" y="2952289"/>
+                  </a:lnTo>
+                  <a:lnTo>
+                    <a:pt x="3331884" y="2975482"/>
+                  </a:lnTo>
+                  <a:lnTo>
+                    <a:pt x="3409128" y="2997664"/>
+                  </a:lnTo>
+                  <a:lnTo>
+                    <a:pt x="3486372" y="3018877"/>
+                  </a:lnTo>
+                  <a:lnTo>
+                    <a:pt x="3563615" y="3039164"/>
+                  </a:lnTo>
+                  <a:lnTo>
+                    <a:pt x="3640859" y="3058566"/>
+                  </a:lnTo>
+                  <a:lnTo>
+                    <a:pt x="3718102" y="3077121"/>
+                  </a:lnTo>
+                  <a:lnTo>
+                    <a:pt x="3795346" y="3094866"/>
+                  </a:lnTo>
+                  <a:lnTo>
+                    <a:pt x="3872589" y="3111837"/>
+                  </a:lnTo>
+                  <a:lnTo>
+                    <a:pt x="3949833" y="3128068"/>
+                  </a:lnTo>
+                  <a:lnTo>
+                    <a:pt x="4027077" y="3143590"/>
+                  </a:lnTo>
+                  <a:lnTo>
+                    <a:pt x="4104320" y="3158435"/>
+                  </a:lnTo>
+                  <a:lnTo>
+                    <a:pt x="4181564" y="3172631"/>
+                  </a:lnTo>
+                  <a:lnTo>
+                    <a:pt x="4258807" y="3186209"/>
+                  </a:lnTo>
+                  <a:lnTo>
+                    <a:pt x="4336051" y="3199193"/>
+                  </a:lnTo>
+                  <a:lnTo>
+                    <a:pt x="4413294" y="3211612"/>
+                  </a:lnTo>
+                  <a:lnTo>
+                    <a:pt x="4490538" y="3223488"/>
+                  </a:lnTo>
+                  <a:lnTo>
+                    <a:pt x="4567782" y="3234846"/>
+                  </a:lnTo>
+                  <a:lnTo>
+                    <a:pt x="4645025" y="3245708"/>
+                  </a:lnTo>
+                  <a:lnTo>
+                    <a:pt x="4722269" y="3256096"/>
+                  </a:lnTo>
+                  <a:lnTo>
+                    <a:pt x="4799512" y="3266031"/>
+                  </a:lnTo>
+                  <a:lnTo>
+                    <a:pt x="4876756" y="3275532"/>
+                  </a:lnTo>
+                  <a:lnTo>
+                    <a:pt x="4953999" y="3284619"/>
+                  </a:lnTo>
+                  <a:lnTo>
+                    <a:pt x="5031243" y="3293309"/>
+                  </a:lnTo>
+                  <a:lnTo>
+                    <a:pt x="5108487" y="3301620"/>
+                  </a:lnTo>
+                  <a:lnTo>
+                    <a:pt x="5185730" y="3309568"/>
+                  </a:lnTo>
+                  <a:lnTo>
+                    <a:pt x="5262974" y="3317169"/>
+                  </a:lnTo>
+                  <a:lnTo>
+                    <a:pt x="5340217" y="3324439"/>
+                  </a:lnTo>
+                  <a:lnTo>
+                    <a:pt x="5417461" y="3331391"/>
+                  </a:lnTo>
+                  <a:lnTo>
+                    <a:pt x="5494704" y="3338040"/>
+                  </a:lnTo>
+                  <a:lnTo>
+                    <a:pt x="5571948" y="3344399"/>
+                  </a:lnTo>
+                  <a:lnTo>
+                    <a:pt x="5649192" y="3350480"/>
+                  </a:lnTo>
+                  <a:lnTo>
+                    <a:pt x="5726435" y="3356296"/>
+                  </a:lnTo>
+                  <a:lnTo>
+                    <a:pt x="5803679" y="3361858"/>
+                  </a:lnTo>
+                  <a:lnTo>
+                    <a:pt x="5880922" y="3367177"/>
+                  </a:lnTo>
+                  <a:lnTo>
+                    <a:pt x="5958166" y="3372264"/>
+                  </a:lnTo>
+                  <a:lnTo>
+                    <a:pt x="6035409" y="3377129"/>
+                  </a:lnTo>
+                  <a:lnTo>
+                    <a:pt x="6112653" y="3381782"/>
+                  </a:lnTo>
+                  <a:lnTo>
+                    <a:pt x="6189897" y="3386232"/>
+                  </a:lnTo>
+                  <a:lnTo>
+                    <a:pt x="6267140" y="3390488"/>
+                  </a:lnTo>
+                  <a:lnTo>
+                    <a:pt x="6344384" y="3394558"/>
+                  </a:lnTo>
+                  <a:lnTo>
+                    <a:pt x="6421627" y="3398450"/>
+                  </a:lnTo>
+                  <a:lnTo>
+                    <a:pt x="6498871" y="3402172"/>
+                  </a:lnTo>
+                  <a:lnTo>
+                    <a:pt x="6576114" y="3405732"/>
                   </a:lnTo>
                 </a:path>
               </a:pathLst>
@@ -4398,7 +4398,7 @@
           </p:nvSpPr>
           <p:spPr>
             <a:xfrm>
-              <a:off x="817517" y="4679530"/>
+              <a:off x="817517" y="4727786"/>
               <a:ext cx="7799693" cy="0"/>
             </a:xfrm>
             <a:custGeom>
@@ -4441,15 +4441,15 @@
           </p:nvSpPr>
           <p:spPr>
             <a:xfrm>
-              <a:off x="4117484" y="1896563"/>
-              <a:ext cx="0" cy="3826579"/>
+              <a:off x="4117484" y="2073503"/>
+              <a:ext cx="0" cy="3649639"/>
             </a:xfrm>
             <a:custGeom>
               <a:avLst/>
               <a:pathLst>
-                <a:path w="0" h="3826579">
+                <a:path w="0" h="3649639">
                   <a:moveTo>
-                    <a:pt x="0" y="3826579"/>
+                    <a:pt x="0" y="3649639"/>
                   </a:moveTo>
                   <a:lnTo>
                     <a:pt x="0" y="0"/>
@@ -4484,7 +4484,7 @@
           </p:nvSpPr>
           <p:spPr>
             <a:xfrm>
-              <a:off x="692708" y="5509156"/>
+              <a:off x="692708" y="5517199"/>
               <a:ext cx="62179" cy="80101"/>
             </a:xfrm>
             <a:prstGeom prst="rect">
@@ -4530,7 +4530,7 @@
           </p:nvSpPr>
           <p:spPr>
             <a:xfrm>
-              <a:off x="692708" y="4639479"/>
+              <a:off x="692708" y="4687735"/>
               <a:ext cx="62179" cy="80101"/>
             </a:xfrm>
             <a:prstGeom prst="rect">
@@ -4576,7 +4576,7 @@
           </p:nvSpPr>
           <p:spPr>
             <a:xfrm>
-              <a:off x="692708" y="3769802"/>
+              <a:off x="692708" y="3858272"/>
               <a:ext cx="62179" cy="80101"/>
             </a:xfrm>
             <a:prstGeom prst="rect">
@@ -4622,7 +4622,7 @@
           </p:nvSpPr>
           <p:spPr>
             <a:xfrm>
-              <a:off x="692708" y="2900125"/>
+              <a:off x="692708" y="3028808"/>
               <a:ext cx="62179" cy="80101"/>
             </a:xfrm>
             <a:prstGeom prst="rect">
@@ -4668,7 +4668,7 @@
           </p:nvSpPr>
           <p:spPr>
             <a:xfrm>
-              <a:off x="692708" y="2030448"/>
+              <a:off x="692708" y="2199345"/>
               <a:ext cx="62179" cy="80101"/>
             </a:xfrm>
             <a:prstGeom prst="rect">
@@ -4944,7 +4944,7 @@
           </p:nvSpPr>
           <p:spPr>
             <a:xfrm rot="-5400000">
-              <a:off x="68446" y="3759743"/>
+              <a:off x="68446" y="3848213"/>
               <a:ext cx="1016904" cy="100218"/>
             </a:xfrm>
             <a:prstGeom prst="rect">
@@ -4985,6 +4985,52 @@
         <p:sp>
           <p:nvSpPr>
             <p:cNvPr id="38" name="tx38"/>
+            <p:cNvSpPr/>
+            <p:nvPr/>
+          </p:nvSpPr>
+          <p:spPr>
+            <a:xfrm>
+              <a:off x="817517" y="1896563"/>
+              <a:ext cx="5689762" cy="82021"/>
+            </a:xfrm>
+            <a:prstGeom prst="rect">
+              <a:avLst/>
+            </a:prstGeom>
+            <a:noFill/>
+          </p:spPr>
+          <p:txBody>
+            <a:bodyPr lIns="0" rIns="0" tIns="0" bIns="0" anchorCtr="1" anchor="ctr" wrap="none"/>
+            <a:lstStyle/>
+            <a:p>
+              <a:pPr algn="l" marL="0" marR="0" indent="0">
+                <a:lnSpc>
+                  <a:spcPts val="900"/>
+                </a:lnSpc>
+                <a:spcBef>
+                  <a:spcPts val="0"/>
+                </a:spcBef>
+                <a:spcAft>
+                  <a:spcPts val="0"/>
+                </a:spcAft>
+              </a:pPr>
+              <a:r>
+                <a:rPr sz="900">
+                  <a:solidFill>
+                    <a:srgbClr val="404040">
+                      <a:alpha val="100000"/>
+                    </a:srgbClr>
+                  </a:solidFill>
+                  <a:latin typeface="Helvetica"/>
+                  <a:cs typeface="Helvetica"/>
+                </a:rPr>
+                <a:t>subHR per 0.1 ratio decline: 1.67 (1.15-2.43)  |  per IQR decline (Δ = 0.30): 4.54 (1.50-13.73)  |  IQR: [0.84, 1.14]</a:t>
+              </a:r>
+            </a:p>
+          </p:txBody>
+        </p:sp>
+        <p:sp>
+          <p:nvSpPr>
+            <p:cNvPr id="39" name="tx39"/>
             <p:cNvSpPr/>
             <p:nvPr/>
           </p:nvSpPr>

--- a/docs/pptx/auc3/jx-auc3-linsubhr-ratio-hosp1.pptx
+++ b/docs/pptx/auc3/jx-auc3-linsubhr-ratio-hosp1.pptx
@@ -4991,7 +4991,7 @@
           <p:spPr>
             <a:xfrm>
               <a:off x="817517" y="1896563"/>
-              <a:ext cx="5689762" cy="82021"/>
+              <a:ext cx="6232916" cy="82021"/>
             </a:xfrm>
             <a:prstGeom prst="rect">
               <a:avLst/>
@@ -5023,7 +5023,7 @@
                   <a:latin typeface="Helvetica"/>
                   <a:cs typeface="Helvetica"/>
                 </a:rPr>
-                <a:t>subHR per 0.1 ratio decline: 1.67 (1.15-2.43)  |  per IQR decline (Δ = 0.30): 4.54 (1.50-13.73)  |  IQR: [0.84, 1.14]</a:t>
+                <a:t>subHR per 0.1 ratio decline: 1.67 (1.15-2.43), p = 0.007  |  per IQR decline (Δ = 0.30): 4.54 (1.50-13.73)  |  IQR: [0.84, 1.14]</a:t>
               </a:r>
             </a:p>
           </p:txBody>

--- a/docs/pptx/auc3/jx-auc3-linsubhr-ratio-hosp1.pptx
+++ b/docs/pptx/auc3/jx-auc3-linsubhr-ratio-hosp1.pptx
@@ -2443,7 +2443,7 @@
           </p:nvSpPr>
           <p:spPr>
             <a:xfrm>
-              <a:off x="1615213" y="2073503"/>
+              <a:off x="1531834" y="2073503"/>
               <a:ext cx="0" cy="3649639"/>
             </a:xfrm>
             <a:custGeom>
@@ -2486,7 +2486,7 @@
           </p:nvSpPr>
           <p:spPr>
             <a:xfrm>
-              <a:off x="3387871" y="2073503"/>
+              <a:off x="3586410" y="2073503"/>
               <a:ext cx="0" cy="3649639"/>
             </a:xfrm>
             <a:custGeom>
@@ -2529,7 +2529,7 @@
           </p:nvSpPr>
           <p:spPr>
             <a:xfrm>
-              <a:off x="5160528" y="2073503"/>
+              <a:off x="5640985" y="2073503"/>
               <a:ext cx="0" cy="3649639"/>
             </a:xfrm>
             <a:custGeom>
@@ -2572,7 +2572,7 @@
           </p:nvSpPr>
           <p:spPr>
             <a:xfrm>
-              <a:off x="6933186" y="2073503"/>
+              <a:off x="7695561" y="2073503"/>
               <a:ext cx="0" cy="3649639"/>
             </a:xfrm>
             <a:custGeom>
@@ -2830,7 +2830,7 @@
           </p:nvSpPr>
           <p:spPr>
             <a:xfrm>
-              <a:off x="2501542" y="2073503"/>
+              <a:off x="2559122" y="2073503"/>
               <a:ext cx="0" cy="3649639"/>
             </a:xfrm>
             <a:custGeom>
@@ -2873,7 +2873,7 @@
           </p:nvSpPr>
           <p:spPr>
             <a:xfrm>
-              <a:off x="4274200" y="2073503"/>
+              <a:off x="4613698" y="2073503"/>
               <a:ext cx="0" cy="3649639"/>
             </a:xfrm>
             <a:custGeom>
@@ -2916,7 +2916,7 @@
           </p:nvSpPr>
           <p:spPr>
             <a:xfrm>
-              <a:off x="6046857" y="2073503"/>
+              <a:off x="6668273" y="2073503"/>
               <a:ext cx="0" cy="3649639"/>
             </a:xfrm>
             <a:custGeom>
@@ -2953,571 +2953,537 @@
         </p:sp>
         <p:sp>
           <p:nvSpPr>
-            <p:cNvPr id="20" name="pl20"/>
+            <p:cNvPr id="20" name="pg20"/>
             <p:cNvSpPr/>
             <p:nvPr/>
           </p:nvSpPr>
           <p:spPr>
             <a:xfrm>
-              <a:off x="7819515" y="2073503"/>
-              <a:ext cx="0" cy="3649639"/>
+              <a:off x="1172049" y="2073503"/>
+              <a:ext cx="7090630" cy="3469934"/>
             </a:xfrm>
             <a:custGeom>
               <a:avLst/>
               <a:pathLst>
-                <a:path w="0" h="3649639">
+                <a:path w="7090630" h="3469934">
                   <a:moveTo>
-                    <a:pt x="0" y="3649639"/>
+                    <a:pt x="1967383" y="0"/>
                   </a:moveTo>
                   <a:lnTo>
-                    <a:pt x="0" y="0"/>
-                  </a:lnTo>
-                  <a:lnTo>
-                    <a:pt x="0" y="0"/>
-                  </a:lnTo>
-                </a:path>
-              </a:pathLst>
-            </a:custGeom>
-            <a:ln w="13550" cap="flat">
-              <a:solidFill>
-                <a:srgbClr val="EBEBEB">
-                  <a:alpha val="100000"/>
-                </a:srgbClr>
-              </a:solidFill>
-              <a:prstDash val="solid"/>
-              <a:round/>
-            </a:ln>
-          </p:spPr>
-          <p:txBody>
-            <a:bodyPr/>
-            <a:lstStyle/>
-            <a:p/>
-          </p:txBody>
-        </p:sp>
-        <p:sp>
-          <p:nvSpPr>
-            <p:cNvPr id="21" name="pg21"/>
-            <p:cNvSpPr/>
-            <p:nvPr/>
-          </p:nvSpPr>
-          <p:spPr>
-            <a:xfrm>
-              <a:off x="817517" y="2073503"/>
-              <a:ext cx="7392041" cy="3469934"/>
-            </a:xfrm>
-            <a:custGeom>
-              <a:avLst/>
-              <a:pathLst>
-                <a:path w="7392041" h="3469934">
-                  <a:moveTo>
-                    <a:pt x="1866714" y="0"/>
-                  </a:moveTo>
-                  <a:lnTo>
-                    <a:pt x="1907747" y="142642"/>
-                  </a:lnTo>
-                  <a:lnTo>
-                    <a:pt x="1984991" y="391186"/>
-                  </a:lnTo>
-                  <a:lnTo>
-                    <a:pt x="2062234" y="621242"/>
-                  </a:lnTo>
-                  <a:lnTo>
-                    <a:pt x="2139478" y="834184"/>
-                  </a:lnTo>
-                  <a:lnTo>
-                    <a:pt x="2216721" y="1031285"/>
-                  </a:lnTo>
-                  <a:lnTo>
-                    <a:pt x="2293965" y="1213723"/>
-                  </a:lnTo>
-                  <a:lnTo>
-                    <a:pt x="2371209" y="1382590"/>
-                  </a:lnTo>
-                  <a:lnTo>
-                    <a:pt x="2448452" y="1538895"/>
-                  </a:lnTo>
-                  <a:lnTo>
-                    <a:pt x="2525696" y="1683573"/>
-                  </a:lnTo>
-                  <a:lnTo>
-                    <a:pt x="2602939" y="1817488"/>
-                  </a:lnTo>
-                  <a:lnTo>
-                    <a:pt x="2680183" y="1941441"/>
-                  </a:lnTo>
-                  <a:lnTo>
-                    <a:pt x="2757426" y="2056173"/>
-                  </a:lnTo>
-                  <a:lnTo>
-                    <a:pt x="2834670" y="2162370"/>
-                  </a:lnTo>
-                  <a:lnTo>
-                    <a:pt x="2911914" y="2260667"/>
-                  </a:lnTo>
-                  <a:lnTo>
-                    <a:pt x="2989157" y="2351652"/>
-                  </a:lnTo>
-                  <a:lnTo>
-                    <a:pt x="3066401" y="2435869"/>
-                  </a:lnTo>
-                  <a:lnTo>
-                    <a:pt x="3143644" y="2513820"/>
-                  </a:lnTo>
-                  <a:lnTo>
-                    <a:pt x="3220888" y="2585973"/>
-                  </a:lnTo>
-                  <a:lnTo>
-                    <a:pt x="3298131" y="2652758"/>
-                  </a:lnTo>
-                  <a:lnTo>
-                    <a:pt x="3375375" y="2663896"/>
-                  </a:lnTo>
-                  <a:lnTo>
-                    <a:pt x="3452619" y="2673628"/>
-                  </a:lnTo>
-                  <a:lnTo>
-                    <a:pt x="3529862" y="2683244"/>
-                  </a:lnTo>
-                  <a:lnTo>
-                    <a:pt x="3607106" y="2692746"/>
-                  </a:lnTo>
-                  <a:lnTo>
-                    <a:pt x="3684349" y="2702135"/>
-                  </a:lnTo>
-                  <a:lnTo>
-                    <a:pt x="3761593" y="2711413"/>
-                  </a:lnTo>
-                  <a:lnTo>
-                    <a:pt x="3838836" y="2720580"/>
-                  </a:lnTo>
-                  <a:lnTo>
-                    <a:pt x="3916080" y="2729639"/>
-                  </a:lnTo>
-                  <a:lnTo>
-                    <a:pt x="3993324" y="2738590"/>
-                  </a:lnTo>
-                  <a:lnTo>
-                    <a:pt x="4070567" y="2747435"/>
-                  </a:lnTo>
-                  <a:lnTo>
-                    <a:pt x="4147811" y="2756175"/>
-                  </a:lnTo>
-                  <a:lnTo>
-                    <a:pt x="4225054" y="2764812"/>
-                  </a:lnTo>
-                  <a:lnTo>
-                    <a:pt x="4302298" y="2773345"/>
-                  </a:lnTo>
-                  <a:lnTo>
-                    <a:pt x="4379541" y="2781778"/>
-                  </a:lnTo>
-                  <a:lnTo>
-                    <a:pt x="4456785" y="2790110"/>
-                  </a:lnTo>
-                  <a:lnTo>
-                    <a:pt x="4534029" y="2798344"/>
-                  </a:lnTo>
-                  <a:lnTo>
-                    <a:pt x="4611272" y="2806479"/>
-                  </a:lnTo>
-                  <a:lnTo>
-                    <a:pt x="4688516" y="2814518"/>
-                  </a:lnTo>
-                  <a:lnTo>
-                    <a:pt x="4765759" y="2822462"/>
-                  </a:lnTo>
-                  <a:lnTo>
-                    <a:pt x="4843003" y="2830312"/>
-                  </a:lnTo>
-                  <a:lnTo>
-                    <a:pt x="4920246" y="2838068"/>
-                  </a:lnTo>
-                  <a:lnTo>
-                    <a:pt x="4997490" y="2845732"/>
-                  </a:lnTo>
-                  <a:lnTo>
-                    <a:pt x="5074734" y="2853305"/>
-                  </a:lnTo>
-                  <a:lnTo>
-                    <a:pt x="5151977" y="2860789"/>
-                  </a:lnTo>
-                  <a:lnTo>
-                    <a:pt x="5229221" y="2868183"/>
-                  </a:lnTo>
-                  <a:lnTo>
-                    <a:pt x="5306464" y="2875490"/>
-                  </a:lnTo>
-                  <a:lnTo>
-                    <a:pt x="5383708" y="2882710"/>
-                  </a:lnTo>
-                  <a:lnTo>
-                    <a:pt x="5460951" y="2889844"/>
-                  </a:lnTo>
-                  <a:lnTo>
-                    <a:pt x="5538195" y="2896894"/>
-                  </a:lnTo>
-                  <a:lnTo>
-                    <a:pt x="5615439" y="2903860"/>
-                  </a:lnTo>
-                  <a:lnTo>
-                    <a:pt x="5692682" y="2910743"/>
-                  </a:lnTo>
-                  <a:lnTo>
-                    <a:pt x="5769926" y="2917544"/>
-                  </a:lnTo>
-                  <a:lnTo>
-                    <a:pt x="5847169" y="2924265"/>
-                  </a:lnTo>
-                  <a:lnTo>
-                    <a:pt x="5924413" y="2930906"/>
-                  </a:lnTo>
-                  <a:lnTo>
-                    <a:pt x="6001656" y="2937469"/>
-                  </a:lnTo>
-                  <a:lnTo>
-                    <a:pt x="6078900" y="2943953"/>
-                  </a:lnTo>
-                  <a:lnTo>
-                    <a:pt x="6156144" y="2950360"/>
-                  </a:lnTo>
-                  <a:lnTo>
-                    <a:pt x="6233387" y="2956691"/>
-                  </a:lnTo>
-                  <a:lnTo>
-                    <a:pt x="6310631" y="2962948"/>
-                  </a:lnTo>
-                  <a:lnTo>
-                    <a:pt x="6387874" y="2969129"/>
-                  </a:lnTo>
-                  <a:lnTo>
-                    <a:pt x="6465118" y="2975238"/>
-                  </a:lnTo>
-                  <a:lnTo>
-                    <a:pt x="6542361" y="2981274"/>
-                  </a:lnTo>
-                  <a:lnTo>
-                    <a:pt x="6619605" y="2987238"/>
-                  </a:lnTo>
-                  <a:lnTo>
-                    <a:pt x="6696849" y="2993132"/>
-                  </a:lnTo>
-                  <a:lnTo>
-                    <a:pt x="6774092" y="2998955"/>
-                  </a:lnTo>
-                  <a:lnTo>
-                    <a:pt x="6851336" y="3004710"/>
-                  </a:lnTo>
-                  <a:lnTo>
-                    <a:pt x="6928579" y="3010396"/>
-                  </a:lnTo>
-                  <a:lnTo>
-                    <a:pt x="7005823" y="3016015"/>
-                  </a:lnTo>
-                  <a:lnTo>
-                    <a:pt x="7083066" y="3021567"/>
-                  </a:lnTo>
-                  <a:lnTo>
-                    <a:pt x="7160310" y="3027053"/>
-                  </a:lnTo>
-                  <a:lnTo>
-                    <a:pt x="7237554" y="3032474"/>
-                  </a:lnTo>
-                  <a:lnTo>
-                    <a:pt x="7314797" y="3037830"/>
-                  </a:lnTo>
-                  <a:lnTo>
-                    <a:pt x="7392041" y="3043123"/>
-                  </a:lnTo>
-                  <a:lnTo>
-                    <a:pt x="7392041" y="3469934"/>
-                  </a:lnTo>
-                  <a:lnTo>
-                    <a:pt x="7314797" y="3468824"/>
-                  </a:lnTo>
-                  <a:lnTo>
-                    <a:pt x="7237554" y="3467624"/>
-                  </a:lnTo>
-                  <a:lnTo>
-                    <a:pt x="7160310" y="3466328"/>
-                  </a:lnTo>
-                  <a:lnTo>
-                    <a:pt x="7083066" y="3464929"/>
-                  </a:lnTo>
-                  <a:lnTo>
-                    <a:pt x="7005823" y="3463416"/>
-                  </a:lnTo>
-                  <a:lnTo>
-                    <a:pt x="6928579" y="3461782"/>
-                  </a:lnTo>
-                  <a:lnTo>
-                    <a:pt x="6851336" y="3460017"/>
-                  </a:lnTo>
-                  <a:lnTo>
-                    <a:pt x="6774092" y="3458110"/>
-                  </a:lnTo>
-                  <a:lnTo>
-                    <a:pt x="6696849" y="3456050"/>
-                  </a:lnTo>
-                  <a:lnTo>
-                    <a:pt x="6619605" y="3453824"/>
-                  </a:lnTo>
-                  <a:lnTo>
-                    <a:pt x="6542361" y="3451419"/>
-                  </a:lnTo>
-                  <a:lnTo>
-                    <a:pt x="6465118" y="3448821"/>
-                  </a:lnTo>
-                  <a:lnTo>
-                    <a:pt x="6387874" y="3446014"/>
-                  </a:lnTo>
-                  <a:lnTo>
-                    <a:pt x="6310631" y="3442981"/>
-                  </a:lnTo>
-                  <a:lnTo>
-                    <a:pt x="6233387" y="3439705"/>
-                  </a:lnTo>
-                  <a:lnTo>
-                    <a:pt x="6156144" y="3436166"/>
-                  </a:lnTo>
-                  <a:lnTo>
-                    <a:pt x="6078900" y="3432342"/>
-                  </a:lnTo>
-                  <a:lnTo>
-                    <a:pt x="6001656" y="3428210"/>
-                  </a:lnTo>
-                  <a:lnTo>
-                    <a:pt x="5924413" y="3423747"/>
-                  </a:lnTo>
-                  <a:lnTo>
-                    <a:pt x="5847169" y="3418925"/>
-                  </a:lnTo>
-                  <a:lnTo>
-                    <a:pt x="5769926" y="3413715"/>
-                  </a:lnTo>
-                  <a:lnTo>
-                    <a:pt x="5692682" y="3408087"/>
-                  </a:lnTo>
-                  <a:lnTo>
-                    <a:pt x="5615439" y="3402006"/>
-                  </a:lnTo>
-                  <a:lnTo>
-                    <a:pt x="5538195" y="3395437"/>
-                  </a:lnTo>
-                  <a:lnTo>
-                    <a:pt x="5460951" y="3388340"/>
-                  </a:lnTo>
-                  <a:lnTo>
-                    <a:pt x="5383708" y="3380672"/>
-                  </a:lnTo>
-                  <a:lnTo>
-                    <a:pt x="5306464" y="3372388"/>
-                  </a:lnTo>
-                  <a:lnTo>
-                    <a:pt x="5229221" y="3363438"/>
-                  </a:lnTo>
-                  <a:lnTo>
-                    <a:pt x="5151977" y="3353769"/>
-                  </a:lnTo>
-                  <a:lnTo>
-                    <a:pt x="5074734" y="3343323"/>
-                  </a:lnTo>
-                  <a:lnTo>
-                    <a:pt x="4997490" y="3332037"/>
-                  </a:lnTo>
-                  <a:lnTo>
-                    <a:pt x="4920246" y="3319845"/>
-                  </a:lnTo>
-                  <a:lnTo>
-                    <a:pt x="4843003" y="3306672"/>
-                  </a:lnTo>
-                  <a:lnTo>
-                    <a:pt x="4765759" y="3292441"/>
-                  </a:lnTo>
-                  <a:lnTo>
-                    <a:pt x="4688516" y="3277066"/>
-                  </a:lnTo>
-                  <a:lnTo>
-                    <a:pt x="4611272" y="3260455"/>
-                  </a:lnTo>
-                  <a:lnTo>
-                    <a:pt x="4534029" y="3242510"/>
-                  </a:lnTo>
-                  <a:lnTo>
-                    <a:pt x="4456785" y="3223122"/>
-                  </a:lnTo>
-                  <a:lnTo>
-                    <a:pt x="4379541" y="3202176"/>
-                  </a:lnTo>
-                  <a:lnTo>
-                    <a:pt x="4302298" y="3179546"/>
-                  </a:lnTo>
-                  <a:lnTo>
-                    <a:pt x="4225054" y="3155098"/>
-                  </a:lnTo>
-                  <a:lnTo>
-                    <a:pt x="4147811" y="3128685"/>
-                  </a:lnTo>
-                  <a:lnTo>
-                    <a:pt x="4070567" y="3100150"/>
-                  </a:lnTo>
-                  <a:lnTo>
-                    <a:pt x="3993324" y="3069320"/>
-                  </a:lnTo>
-                  <a:lnTo>
-                    <a:pt x="3916080" y="3036014"/>
-                  </a:lnTo>
-                  <a:lnTo>
-                    <a:pt x="3838836" y="3000030"/>
-                  </a:lnTo>
-                  <a:lnTo>
-                    <a:pt x="3761593" y="2961154"/>
-                  </a:lnTo>
-                  <a:lnTo>
-                    <a:pt x="3684349" y="2919154"/>
-                  </a:lnTo>
-                  <a:lnTo>
-                    <a:pt x="3607106" y="2873779"/>
-                  </a:lnTo>
-                  <a:lnTo>
-                    <a:pt x="3529862" y="2824756"/>
-                  </a:lnTo>
-                  <a:lnTo>
-                    <a:pt x="3452619" y="2771794"/>
-                  </a:lnTo>
-                  <a:lnTo>
-                    <a:pt x="3375375" y="2714576"/>
-                  </a:lnTo>
-                  <a:lnTo>
-                    <a:pt x="3298131" y="2654048"/>
-                  </a:lnTo>
-                  <a:lnTo>
-                    <a:pt x="3220888" y="2644081"/>
-                  </a:lnTo>
-                  <a:lnTo>
-                    <a:pt x="3143644" y="2633994"/>
-                  </a:lnTo>
-                  <a:lnTo>
-                    <a:pt x="3066401" y="2623786"/>
-                  </a:lnTo>
-                  <a:lnTo>
-                    <a:pt x="2989157" y="2613456"/>
-                  </a:lnTo>
-                  <a:lnTo>
-                    <a:pt x="2911914" y="2603002"/>
-                  </a:lnTo>
-                  <a:lnTo>
-                    <a:pt x="2834670" y="2592422"/>
-                  </a:lnTo>
-                  <a:lnTo>
-                    <a:pt x="2757426" y="2581715"/>
-                  </a:lnTo>
-                  <a:lnTo>
-                    <a:pt x="2680183" y="2570879"/>
-                  </a:lnTo>
-                  <a:lnTo>
-                    <a:pt x="2602939" y="2559913"/>
-                  </a:lnTo>
-                  <a:lnTo>
-                    <a:pt x="2525696" y="2548815"/>
-                  </a:lnTo>
-                  <a:lnTo>
-                    <a:pt x="2448452" y="2537584"/>
-                  </a:lnTo>
-                  <a:lnTo>
-                    <a:pt x="2371209" y="2526219"/>
-                  </a:lnTo>
-                  <a:lnTo>
-                    <a:pt x="2293965" y="2514716"/>
-                  </a:lnTo>
-                  <a:lnTo>
-                    <a:pt x="2216721" y="2503076"/>
-                  </a:lnTo>
-                  <a:lnTo>
-                    <a:pt x="2139478" y="2491295"/>
-                  </a:lnTo>
-                  <a:lnTo>
-                    <a:pt x="2062234" y="2479373"/>
-                  </a:lnTo>
-                  <a:lnTo>
-                    <a:pt x="1984991" y="2467308"/>
-                  </a:lnTo>
-                  <a:lnTo>
-                    <a:pt x="1907747" y="2455098"/>
-                  </a:lnTo>
-                  <a:lnTo>
-                    <a:pt x="1830504" y="2442741"/>
-                  </a:lnTo>
-                  <a:lnTo>
-                    <a:pt x="1753260" y="2430236"/>
-                  </a:lnTo>
-                  <a:lnTo>
-                    <a:pt x="1676016" y="2417581"/>
-                  </a:lnTo>
-                  <a:lnTo>
-                    <a:pt x="1598773" y="2404774"/>
-                  </a:lnTo>
-                  <a:lnTo>
-                    <a:pt x="1521529" y="2391812"/>
-                  </a:lnTo>
-                  <a:lnTo>
-                    <a:pt x="1444286" y="2378695"/>
-                  </a:lnTo>
-                  <a:lnTo>
-                    <a:pt x="1367042" y="2365421"/>
-                  </a:lnTo>
-                  <a:lnTo>
-                    <a:pt x="1289799" y="2351987"/>
-                  </a:lnTo>
-                  <a:lnTo>
-                    <a:pt x="1212555" y="2338392"/>
-                  </a:lnTo>
-                  <a:lnTo>
-                    <a:pt x="1135311" y="2324633"/>
-                  </a:lnTo>
-                  <a:lnTo>
-                    <a:pt x="1058068" y="2310709"/>
-                  </a:lnTo>
-                  <a:lnTo>
-                    <a:pt x="980824" y="2296618"/>
-                  </a:lnTo>
-                  <a:lnTo>
-                    <a:pt x="903581" y="2282357"/>
-                  </a:lnTo>
-                  <a:lnTo>
-                    <a:pt x="826337" y="2267925"/>
-                  </a:lnTo>
-                  <a:lnTo>
-                    <a:pt x="749094" y="2253320"/>
-                  </a:lnTo>
-                  <a:lnTo>
-                    <a:pt x="671850" y="2238540"/>
-                  </a:lnTo>
-                  <a:lnTo>
-                    <a:pt x="594606" y="2223582"/>
-                  </a:lnTo>
-                  <a:lnTo>
-                    <a:pt x="517363" y="2208444"/>
-                  </a:lnTo>
-                  <a:lnTo>
-                    <a:pt x="440119" y="2193124"/>
-                  </a:lnTo>
-                  <a:lnTo>
-                    <a:pt x="362876" y="2177620"/>
-                  </a:lnTo>
-                  <a:lnTo>
-                    <a:pt x="285632" y="2161930"/>
-                  </a:lnTo>
-                  <a:lnTo>
-                    <a:pt x="208389" y="2146052"/>
-                  </a:lnTo>
-                  <a:lnTo>
-                    <a:pt x="131145" y="2129983"/>
-                  </a:lnTo>
-                  <a:lnTo>
-                    <a:pt x="53901" y="2113721"/>
-                  </a:lnTo>
-                  <a:lnTo>
-                    <a:pt x="0" y="2102236"/>
+                    <a:pt x="2005430" y="142642"/>
+                  </a:lnTo>
+                  <a:lnTo>
+                    <a:pt x="2077053" y="391186"/>
+                  </a:lnTo>
+                  <a:lnTo>
+                    <a:pt x="2148675" y="621242"/>
+                  </a:lnTo>
+                  <a:lnTo>
+                    <a:pt x="2220298" y="834184"/>
+                  </a:lnTo>
+                  <a:lnTo>
+                    <a:pt x="2291920" y="1031285"/>
+                  </a:lnTo>
+                  <a:lnTo>
+                    <a:pt x="2363543" y="1213723"/>
+                  </a:lnTo>
+                  <a:lnTo>
+                    <a:pt x="2435165" y="1382590"/>
+                  </a:lnTo>
+                  <a:lnTo>
+                    <a:pt x="2506788" y="1538895"/>
+                  </a:lnTo>
+                  <a:lnTo>
+                    <a:pt x="2578410" y="1683573"/>
+                  </a:lnTo>
+                  <a:lnTo>
+                    <a:pt x="2650033" y="1817488"/>
+                  </a:lnTo>
+                  <a:lnTo>
+                    <a:pt x="2721655" y="1941441"/>
+                  </a:lnTo>
+                  <a:lnTo>
+                    <a:pt x="2793278" y="2056173"/>
+                  </a:lnTo>
+                  <a:lnTo>
+                    <a:pt x="2864901" y="2162370"/>
+                  </a:lnTo>
+                  <a:lnTo>
+                    <a:pt x="2936523" y="2260667"/>
+                  </a:lnTo>
+                  <a:lnTo>
+                    <a:pt x="3008146" y="2351652"/>
+                  </a:lnTo>
+                  <a:lnTo>
+                    <a:pt x="3079768" y="2435869"/>
+                  </a:lnTo>
+                  <a:lnTo>
+                    <a:pt x="3151391" y="2513820"/>
+                  </a:lnTo>
+                  <a:lnTo>
+                    <a:pt x="3223013" y="2585973"/>
+                  </a:lnTo>
+                  <a:lnTo>
+                    <a:pt x="3294636" y="2652758"/>
+                  </a:lnTo>
+                  <a:lnTo>
+                    <a:pt x="3366258" y="2663896"/>
+                  </a:lnTo>
+                  <a:lnTo>
+                    <a:pt x="3437881" y="2673628"/>
+                  </a:lnTo>
+                  <a:lnTo>
+                    <a:pt x="3509503" y="2683244"/>
+                  </a:lnTo>
+                  <a:lnTo>
+                    <a:pt x="3581126" y="2692746"/>
+                  </a:lnTo>
+                  <a:lnTo>
+                    <a:pt x="3652748" y="2702135"/>
+                  </a:lnTo>
+                  <a:lnTo>
+                    <a:pt x="3724371" y="2711413"/>
+                  </a:lnTo>
+                  <a:lnTo>
+                    <a:pt x="3795993" y="2720580"/>
+                  </a:lnTo>
+                  <a:lnTo>
+                    <a:pt x="3867616" y="2729639"/>
+                  </a:lnTo>
+                  <a:lnTo>
+                    <a:pt x="3939238" y="2738590"/>
+                  </a:lnTo>
+                  <a:lnTo>
+                    <a:pt x="4010861" y="2747435"/>
+                  </a:lnTo>
+                  <a:lnTo>
+                    <a:pt x="4082483" y="2756175"/>
+                  </a:lnTo>
+                  <a:lnTo>
+                    <a:pt x="4154106" y="2764812"/>
+                  </a:lnTo>
+                  <a:lnTo>
+                    <a:pt x="4225729" y="2773345"/>
+                  </a:lnTo>
+                  <a:lnTo>
+                    <a:pt x="4297351" y="2781778"/>
+                  </a:lnTo>
+                  <a:lnTo>
+                    <a:pt x="4368974" y="2790110"/>
+                  </a:lnTo>
+                  <a:lnTo>
+                    <a:pt x="4440596" y="2798344"/>
+                  </a:lnTo>
+                  <a:lnTo>
+                    <a:pt x="4512219" y="2806479"/>
+                  </a:lnTo>
+                  <a:lnTo>
+                    <a:pt x="4583841" y="2814518"/>
+                  </a:lnTo>
+                  <a:lnTo>
+                    <a:pt x="4655464" y="2822462"/>
+                  </a:lnTo>
+                  <a:lnTo>
+                    <a:pt x="4727086" y="2830312"/>
+                  </a:lnTo>
+                  <a:lnTo>
+                    <a:pt x="4798709" y="2838068"/>
+                  </a:lnTo>
+                  <a:lnTo>
+                    <a:pt x="4870331" y="2845732"/>
+                  </a:lnTo>
+                  <a:lnTo>
+                    <a:pt x="4941954" y="2853305"/>
+                  </a:lnTo>
+                  <a:lnTo>
+                    <a:pt x="5013576" y="2860789"/>
+                  </a:lnTo>
+                  <a:lnTo>
+                    <a:pt x="5085199" y="2868183"/>
+                  </a:lnTo>
+                  <a:lnTo>
+                    <a:pt x="5156821" y="2875490"/>
+                  </a:lnTo>
+                  <a:lnTo>
+                    <a:pt x="5228444" y="2882710"/>
+                  </a:lnTo>
+                  <a:lnTo>
+                    <a:pt x="5300066" y="2889844"/>
+                  </a:lnTo>
+                  <a:lnTo>
+                    <a:pt x="5371689" y="2896894"/>
+                  </a:lnTo>
+                  <a:lnTo>
+                    <a:pt x="5443311" y="2903860"/>
+                  </a:lnTo>
+                  <a:lnTo>
+                    <a:pt x="5514934" y="2910743"/>
+                  </a:lnTo>
+                  <a:lnTo>
+                    <a:pt x="5586557" y="2917544"/>
+                  </a:lnTo>
+                  <a:lnTo>
+                    <a:pt x="5658179" y="2924265"/>
+                  </a:lnTo>
+                  <a:lnTo>
+                    <a:pt x="5729802" y="2930906"/>
+                  </a:lnTo>
+                  <a:lnTo>
+                    <a:pt x="5801424" y="2937469"/>
+                  </a:lnTo>
+                  <a:lnTo>
+                    <a:pt x="5873047" y="2943953"/>
+                  </a:lnTo>
+                  <a:lnTo>
+                    <a:pt x="5944669" y="2950360"/>
+                  </a:lnTo>
+                  <a:lnTo>
+                    <a:pt x="6016292" y="2956691"/>
+                  </a:lnTo>
+                  <a:lnTo>
+                    <a:pt x="6087914" y="2962948"/>
+                  </a:lnTo>
+                  <a:lnTo>
+                    <a:pt x="6159537" y="2969129"/>
+                  </a:lnTo>
+                  <a:lnTo>
+                    <a:pt x="6231159" y="2975238"/>
+                  </a:lnTo>
+                  <a:lnTo>
+                    <a:pt x="6302782" y="2981274"/>
+                  </a:lnTo>
+                  <a:lnTo>
+                    <a:pt x="6374404" y="2987238"/>
+                  </a:lnTo>
+                  <a:lnTo>
+                    <a:pt x="6446027" y="2993132"/>
+                  </a:lnTo>
+                  <a:lnTo>
+                    <a:pt x="6517649" y="2998955"/>
+                  </a:lnTo>
+                  <a:lnTo>
+                    <a:pt x="6589272" y="3004710"/>
+                  </a:lnTo>
+                  <a:lnTo>
+                    <a:pt x="6660894" y="3010396"/>
+                  </a:lnTo>
+                  <a:lnTo>
+                    <a:pt x="6732517" y="3016015"/>
+                  </a:lnTo>
+                  <a:lnTo>
+                    <a:pt x="6804139" y="3021567"/>
+                  </a:lnTo>
+                  <a:lnTo>
+                    <a:pt x="6875762" y="3027053"/>
+                  </a:lnTo>
+                  <a:lnTo>
+                    <a:pt x="6947385" y="3032474"/>
+                  </a:lnTo>
+                  <a:lnTo>
+                    <a:pt x="7019007" y="3037830"/>
+                  </a:lnTo>
+                  <a:lnTo>
+                    <a:pt x="7090630" y="3043123"/>
+                  </a:lnTo>
+                  <a:lnTo>
+                    <a:pt x="7090630" y="3469934"/>
+                  </a:lnTo>
+                  <a:lnTo>
+                    <a:pt x="7019007" y="3468824"/>
+                  </a:lnTo>
+                  <a:lnTo>
+                    <a:pt x="6947385" y="3467624"/>
+                  </a:lnTo>
+                  <a:lnTo>
+                    <a:pt x="6875762" y="3466328"/>
+                  </a:lnTo>
+                  <a:lnTo>
+                    <a:pt x="6804139" y="3464929"/>
+                  </a:lnTo>
+                  <a:lnTo>
+                    <a:pt x="6732517" y="3463416"/>
+                  </a:lnTo>
+                  <a:lnTo>
+                    <a:pt x="6660894" y="3461782"/>
+                  </a:lnTo>
+                  <a:lnTo>
+                    <a:pt x="6589272" y="3460017"/>
+                  </a:lnTo>
+                  <a:lnTo>
+                    <a:pt x="6517649" y="3458110"/>
+                  </a:lnTo>
+                  <a:lnTo>
+                    <a:pt x="6446027" y="3456050"/>
+                  </a:lnTo>
+                  <a:lnTo>
+                    <a:pt x="6374404" y="3453824"/>
+                  </a:lnTo>
+                  <a:lnTo>
+                    <a:pt x="6302782" y="3451419"/>
+                  </a:lnTo>
+                  <a:lnTo>
+                    <a:pt x="6231159" y="3448821"/>
+                  </a:lnTo>
+                  <a:lnTo>
+                    <a:pt x="6159537" y="3446014"/>
+                  </a:lnTo>
+                  <a:lnTo>
+                    <a:pt x="6087914" y="3442981"/>
+                  </a:lnTo>
+                  <a:lnTo>
+                    <a:pt x="6016292" y="3439705"/>
+                  </a:lnTo>
+                  <a:lnTo>
+                    <a:pt x="5944669" y="3436166"/>
+                  </a:lnTo>
+                  <a:lnTo>
+                    <a:pt x="5873047" y="3432342"/>
+                  </a:lnTo>
+                  <a:lnTo>
+                    <a:pt x="5801424" y="3428210"/>
+                  </a:lnTo>
+                  <a:lnTo>
+                    <a:pt x="5729802" y="3423747"/>
+                  </a:lnTo>
+                  <a:lnTo>
+                    <a:pt x="5658179" y="3418925"/>
+                  </a:lnTo>
+                  <a:lnTo>
+                    <a:pt x="5586557" y="3413715"/>
+                  </a:lnTo>
+                  <a:lnTo>
+                    <a:pt x="5514934" y="3408087"/>
+                  </a:lnTo>
+                  <a:lnTo>
+                    <a:pt x="5443311" y="3402006"/>
+                  </a:lnTo>
+                  <a:lnTo>
+                    <a:pt x="5371689" y="3395437"/>
+                  </a:lnTo>
+                  <a:lnTo>
+                    <a:pt x="5300066" y="3388340"/>
+                  </a:lnTo>
+                  <a:lnTo>
+                    <a:pt x="5228444" y="3380672"/>
+                  </a:lnTo>
+                  <a:lnTo>
+                    <a:pt x="5156821" y="3372388"/>
+                  </a:lnTo>
+                  <a:lnTo>
+                    <a:pt x="5085199" y="3363438"/>
+                  </a:lnTo>
+                  <a:lnTo>
+                    <a:pt x="5013576" y="3353769"/>
+                  </a:lnTo>
+                  <a:lnTo>
+                    <a:pt x="4941954" y="3343323"/>
+                  </a:lnTo>
+                  <a:lnTo>
+                    <a:pt x="4870331" y="3332037"/>
+                  </a:lnTo>
+                  <a:lnTo>
+                    <a:pt x="4798709" y="3319845"/>
+                  </a:lnTo>
+                  <a:lnTo>
+                    <a:pt x="4727086" y="3306672"/>
+                  </a:lnTo>
+                  <a:lnTo>
+                    <a:pt x="4655464" y="3292441"/>
+                  </a:lnTo>
+                  <a:lnTo>
+                    <a:pt x="4583841" y="3277066"/>
+                  </a:lnTo>
+                  <a:lnTo>
+                    <a:pt x="4512219" y="3260455"/>
+                  </a:lnTo>
+                  <a:lnTo>
+                    <a:pt x="4440596" y="3242510"/>
+                  </a:lnTo>
+                  <a:lnTo>
+                    <a:pt x="4368974" y="3223122"/>
+                  </a:lnTo>
+                  <a:lnTo>
+                    <a:pt x="4297351" y="3202176"/>
+                  </a:lnTo>
+                  <a:lnTo>
+                    <a:pt x="4225729" y="3179546"/>
+                  </a:lnTo>
+                  <a:lnTo>
+                    <a:pt x="4154106" y="3155098"/>
+                  </a:lnTo>
+                  <a:lnTo>
+                    <a:pt x="4082483" y="3128685"/>
+                  </a:lnTo>
+                  <a:lnTo>
+                    <a:pt x="4010861" y="3100150"/>
+                  </a:lnTo>
+                  <a:lnTo>
+                    <a:pt x="3939238" y="3069320"/>
+                  </a:lnTo>
+                  <a:lnTo>
+                    <a:pt x="3867616" y="3036014"/>
+                  </a:lnTo>
+                  <a:lnTo>
+                    <a:pt x="3795993" y="3000030"/>
+                  </a:lnTo>
+                  <a:lnTo>
+                    <a:pt x="3724371" y="2961154"/>
+                  </a:lnTo>
+                  <a:lnTo>
+                    <a:pt x="3652748" y="2919154"/>
+                  </a:lnTo>
+                  <a:lnTo>
+                    <a:pt x="3581126" y="2873779"/>
+                  </a:lnTo>
+                  <a:lnTo>
+                    <a:pt x="3509503" y="2824756"/>
+                  </a:lnTo>
+                  <a:lnTo>
+                    <a:pt x="3437881" y="2771794"/>
+                  </a:lnTo>
+                  <a:lnTo>
+                    <a:pt x="3366258" y="2714576"/>
+                  </a:lnTo>
+                  <a:lnTo>
+                    <a:pt x="3294636" y="2654048"/>
+                  </a:lnTo>
+                  <a:lnTo>
+                    <a:pt x="3223013" y="2644081"/>
+                  </a:lnTo>
+                  <a:lnTo>
+                    <a:pt x="3151391" y="2633994"/>
+                  </a:lnTo>
+                  <a:lnTo>
+                    <a:pt x="3079768" y="2623786"/>
+                  </a:lnTo>
+                  <a:lnTo>
+                    <a:pt x="3008146" y="2613456"/>
+                  </a:lnTo>
+                  <a:lnTo>
+                    <a:pt x="2936523" y="2603002"/>
+                  </a:lnTo>
+                  <a:lnTo>
+                    <a:pt x="2864901" y="2592422"/>
+                  </a:lnTo>
+                  <a:lnTo>
+                    <a:pt x="2793278" y="2581715"/>
+                  </a:lnTo>
+                  <a:lnTo>
+                    <a:pt x="2721655" y="2570879"/>
+                  </a:lnTo>
+                  <a:lnTo>
+                    <a:pt x="2650033" y="2559913"/>
+                  </a:lnTo>
+                  <a:lnTo>
+                    <a:pt x="2578410" y="2548815"/>
+                  </a:lnTo>
+                  <a:lnTo>
+                    <a:pt x="2506788" y="2537584"/>
+                  </a:lnTo>
+                  <a:lnTo>
+                    <a:pt x="2435165" y="2526219"/>
+                  </a:lnTo>
+                  <a:lnTo>
+                    <a:pt x="2363543" y="2514716"/>
+                  </a:lnTo>
+                  <a:lnTo>
+                    <a:pt x="2291920" y="2503076"/>
+                  </a:lnTo>
+                  <a:lnTo>
+                    <a:pt x="2220298" y="2491295"/>
+                  </a:lnTo>
+                  <a:lnTo>
+                    <a:pt x="2148675" y="2479373"/>
+                  </a:lnTo>
+                  <a:lnTo>
+                    <a:pt x="2077053" y="2467308"/>
+                  </a:lnTo>
+                  <a:lnTo>
+                    <a:pt x="2005430" y="2455098"/>
+                  </a:lnTo>
+                  <a:lnTo>
+                    <a:pt x="1933808" y="2442741"/>
+                  </a:lnTo>
+                  <a:lnTo>
+                    <a:pt x="1862185" y="2430236"/>
+                  </a:lnTo>
+                  <a:lnTo>
+                    <a:pt x="1790563" y="2417581"/>
+                  </a:lnTo>
+                  <a:lnTo>
+                    <a:pt x="1718940" y="2404774"/>
+                  </a:lnTo>
+                  <a:lnTo>
+                    <a:pt x="1647318" y="2391812"/>
+                  </a:lnTo>
+                  <a:lnTo>
+                    <a:pt x="1575695" y="2378695"/>
+                  </a:lnTo>
+                  <a:lnTo>
+                    <a:pt x="1504073" y="2365421"/>
+                  </a:lnTo>
+                  <a:lnTo>
+                    <a:pt x="1432450" y="2351987"/>
+                  </a:lnTo>
+                  <a:lnTo>
+                    <a:pt x="1360827" y="2338392"/>
+                  </a:lnTo>
+                  <a:lnTo>
+                    <a:pt x="1289205" y="2324633"/>
+                  </a:lnTo>
+                  <a:lnTo>
+                    <a:pt x="1217582" y="2310709"/>
+                  </a:lnTo>
+                  <a:lnTo>
+                    <a:pt x="1145960" y="2296618"/>
+                  </a:lnTo>
+                  <a:lnTo>
+                    <a:pt x="1074337" y="2282357"/>
+                  </a:lnTo>
+                  <a:lnTo>
+                    <a:pt x="1002715" y="2267925"/>
+                  </a:lnTo>
+                  <a:lnTo>
+                    <a:pt x="931092" y="2253320"/>
+                  </a:lnTo>
+                  <a:lnTo>
+                    <a:pt x="859470" y="2238540"/>
+                  </a:lnTo>
+                  <a:lnTo>
+                    <a:pt x="787847" y="2223582"/>
+                  </a:lnTo>
+                  <a:lnTo>
+                    <a:pt x="716225" y="2208444"/>
+                  </a:lnTo>
+                  <a:lnTo>
+                    <a:pt x="644602" y="2193124"/>
+                  </a:lnTo>
+                  <a:lnTo>
+                    <a:pt x="572980" y="2177620"/>
+                  </a:lnTo>
+                  <a:lnTo>
+                    <a:pt x="501357" y="2161930"/>
+                  </a:lnTo>
+                  <a:lnTo>
+                    <a:pt x="429735" y="2146052"/>
+                  </a:lnTo>
+                  <a:lnTo>
+                    <a:pt x="358112" y="2129983"/>
+                  </a:lnTo>
+                  <a:lnTo>
+                    <a:pt x="286490" y="2113721"/>
+                  </a:lnTo>
+                  <a:lnTo>
+                    <a:pt x="214867" y="2097263"/>
+                  </a:lnTo>
+                  <a:lnTo>
+                    <a:pt x="143245" y="2080608"/>
+                  </a:lnTo>
+                  <a:lnTo>
+                    <a:pt x="71622" y="2063753"/>
+                  </a:lnTo>
+                  <a:lnTo>
+                    <a:pt x="0" y="2046695"/>
                   </a:lnTo>
                   <a:close/>
                 </a:path>
@@ -3537,237 +3503,562 @@
         </p:sp>
         <p:sp>
           <p:nvSpPr>
+            <p:cNvPr id="21" name="pl21"/>
+            <p:cNvSpPr/>
+            <p:nvPr/>
+          </p:nvSpPr>
+          <p:spPr>
+            <a:xfrm>
+              <a:off x="3139433" y="2073503"/>
+              <a:ext cx="5123246" cy="3043123"/>
+            </a:xfrm>
+            <a:custGeom>
+              <a:avLst/>
+              <a:pathLst>
+                <a:path w="5123246" h="3043123">
+                  <a:moveTo>
+                    <a:pt x="0" y="0"/>
+                  </a:moveTo>
+                  <a:lnTo>
+                    <a:pt x="38047" y="142642"/>
+                  </a:lnTo>
+                  <a:lnTo>
+                    <a:pt x="109669" y="391186"/>
+                  </a:lnTo>
+                  <a:lnTo>
+                    <a:pt x="181292" y="621242"/>
+                  </a:lnTo>
+                  <a:lnTo>
+                    <a:pt x="252914" y="834184"/>
+                  </a:lnTo>
+                  <a:lnTo>
+                    <a:pt x="324537" y="1031285"/>
+                  </a:lnTo>
+                  <a:lnTo>
+                    <a:pt x="396159" y="1213723"/>
+                  </a:lnTo>
+                  <a:lnTo>
+                    <a:pt x="467782" y="1382590"/>
+                  </a:lnTo>
+                  <a:lnTo>
+                    <a:pt x="539404" y="1538895"/>
+                  </a:lnTo>
+                  <a:lnTo>
+                    <a:pt x="611027" y="1683573"/>
+                  </a:lnTo>
+                  <a:lnTo>
+                    <a:pt x="682649" y="1817488"/>
+                  </a:lnTo>
+                  <a:lnTo>
+                    <a:pt x="754272" y="1941441"/>
+                  </a:lnTo>
+                  <a:lnTo>
+                    <a:pt x="825894" y="2056173"/>
+                  </a:lnTo>
+                  <a:lnTo>
+                    <a:pt x="897517" y="2162370"/>
+                  </a:lnTo>
+                  <a:lnTo>
+                    <a:pt x="969139" y="2260667"/>
+                  </a:lnTo>
+                  <a:lnTo>
+                    <a:pt x="1040762" y="2351652"/>
+                  </a:lnTo>
+                  <a:lnTo>
+                    <a:pt x="1112384" y="2435869"/>
+                  </a:lnTo>
+                  <a:lnTo>
+                    <a:pt x="1184007" y="2513820"/>
+                  </a:lnTo>
+                  <a:lnTo>
+                    <a:pt x="1255629" y="2585973"/>
+                  </a:lnTo>
+                  <a:lnTo>
+                    <a:pt x="1327252" y="2652758"/>
+                  </a:lnTo>
+                  <a:lnTo>
+                    <a:pt x="1398875" y="2663896"/>
+                  </a:lnTo>
+                  <a:lnTo>
+                    <a:pt x="1470497" y="2673628"/>
+                  </a:lnTo>
+                  <a:lnTo>
+                    <a:pt x="1542120" y="2683244"/>
+                  </a:lnTo>
+                  <a:lnTo>
+                    <a:pt x="1613742" y="2692746"/>
+                  </a:lnTo>
+                  <a:lnTo>
+                    <a:pt x="1685365" y="2702135"/>
+                  </a:lnTo>
+                  <a:lnTo>
+                    <a:pt x="1756987" y="2711413"/>
+                  </a:lnTo>
+                  <a:lnTo>
+                    <a:pt x="1828610" y="2720580"/>
+                  </a:lnTo>
+                  <a:lnTo>
+                    <a:pt x="1900232" y="2729639"/>
+                  </a:lnTo>
+                  <a:lnTo>
+                    <a:pt x="1971855" y="2738590"/>
+                  </a:lnTo>
+                  <a:lnTo>
+                    <a:pt x="2043477" y="2747435"/>
+                  </a:lnTo>
+                  <a:lnTo>
+                    <a:pt x="2115100" y="2756175"/>
+                  </a:lnTo>
+                  <a:lnTo>
+                    <a:pt x="2186722" y="2764812"/>
+                  </a:lnTo>
+                  <a:lnTo>
+                    <a:pt x="2258345" y="2773345"/>
+                  </a:lnTo>
+                  <a:lnTo>
+                    <a:pt x="2329967" y="2781778"/>
+                  </a:lnTo>
+                  <a:lnTo>
+                    <a:pt x="2401590" y="2790110"/>
+                  </a:lnTo>
+                  <a:lnTo>
+                    <a:pt x="2473212" y="2798344"/>
+                  </a:lnTo>
+                  <a:lnTo>
+                    <a:pt x="2544835" y="2806479"/>
+                  </a:lnTo>
+                  <a:lnTo>
+                    <a:pt x="2616457" y="2814518"/>
+                  </a:lnTo>
+                  <a:lnTo>
+                    <a:pt x="2688080" y="2822462"/>
+                  </a:lnTo>
+                  <a:lnTo>
+                    <a:pt x="2759703" y="2830312"/>
+                  </a:lnTo>
+                  <a:lnTo>
+                    <a:pt x="2831325" y="2838068"/>
+                  </a:lnTo>
+                  <a:lnTo>
+                    <a:pt x="2902948" y="2845732"/>
+                  </a:lnTo>
+                  <a:lnTo>
+                    <a:pt x="2974570" y="2853305"/>
+                  </a:lnTo>
+                  <a:lnTo>
+                    <a:pt x="3046193" y="2860789"/>
+                  </a:lnTo>
+                  <a:lnTo>
+                    <a:pt x="3117815" y="2868183"/>
+                  </a:lnTo>
+                  <a:lnTo>
+                    <a:pt x="3189438" y="2875490"/>
+                  </a:lnTo>
+                  <a:lnTo>
+                    <a:pt x="3261060" y="2882710"/>
+                  </a:lnTo>
+                  <a:lnTo>
+                    <a:pt x="3332683" y="2889844"/>
+                  </a:lnTo>
+                  <a:lnTo>
+                    <a:pt x="3404305" y="2896894"/>
+                  </a:lnTo>
+                  <a:lnTo>
+                    <a:pt x="3475928" y="2903860"/>
+                  </a:lnTo>
+                  <a:lnTo>
+                    <a:pt x="3547550" y="2910743"/>
+                  </a:lnTo>
+                  <a:lnTo>
+                    <a:pt x="3619173" y="2917544"/>
+                  </a:lnTo>
+                  <a:lnTo>
+                    <a:pt x="3690795" y="2924265"/>
+                  </a:lnTo>
+                  <a:lnTo>
+                    <a:pt x="3762418" y="2930906"/>
+                  </a:lnTo>
+                  <a:lnTo>
+                    <a:pt x="3834040" y="2937469"/>
+                  </a:lnTo>
+                  <a:lnTo>
+                    <a:pt x="3905663" y="2943953"/>
+                  </a:lnTo>
+                  <a:lnTo>
+                    <a:pt x="3977285" y="2950360"/>
+                  </a:lnTo>
+                  <a:lnTo>
+                    <a:pt x="4048908" y="2956691"/>
+                  </a:lnTo>
+                  <a:lnTo>
+                    <a:pt x="4120531" y="2962948"/>
+                  </a:lnTo>
+                  <a:lnTo>
+                    <a:pt x="4192153" y="2969129"/>
+                  </a:lnTo>
+                  <a:lnTo>
+                    <a:pt x="4263776" y="2975238"/>
+                  </a:lnTo>
+                  <a:lnTo>
+                    <a:pt x="4335398" y="2981274"/>
+                  </a:lnTo>
+                  <a:lnTo>
+                    <a:pt x="4407021" y="2987238"/>
+                  </a:lnTo>
+                  <a:lnTo>
+                    <a:pt x="4478643" y="2993132"/>
+                  </a:lnTo>
+                  <a:lnTo>
+                    <a:pt x="4550266" y="2998955"/>
+                  </a:lnTo>
+                  <a:lnTo>
+                    <a:pt x="4621888" y="3004710"/>
+                  </a:lnTo>
+                  <a:lnTo>
+                    <a:pt x="4693511" y="3010396"/>
+                  </a:lnTo>
+                  <a:lnTo>
+                    <a:pt x="4765133" y="3016015"/>
+                  </a:lnTo>
+                  <a:lnTo>
+                    <a:pt x="4836756" y="3021567"/>
+                  </a:lnTo>
+                  <a:lnTo>
+                    <a:pt x="4908378" y="3027053"/>
+                  </a:lnTo>
+                  <a:lnTo>
+                    <a:pt x="4980001" y="3032474"/>
+                  </a:lnTo>
+                  <a:lnTo>
+                    <a:pt x="5051623" y="3037830"/>
+                  </a:lnTo>
+                  <a:lnTo>
+                    <a:pt x="5123246" y="3043123"/>
+                  </a:lnTo>
+                </a:path>
+              </a:pathLst>
+            </a:custGeom>
+          </p:spPr>
+          <p:txBody>
+            <a:bodyPr/>
+            <a:lstStyle/>
+            <a:p/>
+          </p:txBody>
+        </p:sp>
+        <p:sp>
+          <p:nvSpPr>
             <p:cNvPr id="22" name="pl22"/>
             <p:cNvSpPr/>
             <p:nvPr/>
           </p:nvSpPr>
           <p:spPr>
             <a:xfrm>
-              <a:off x="2684232" y="2073503"/>
-              <a:ext cx="5525326" cy="3043123"/>
+              <a:off x="1172049" y="4120198"/>
+              <a:ext cx="7090630" cy="1423238"/>
             </a:xfrm>
             <a:custGeom>
               <a:avLst/>
               <a:pathLst>
-                <a:path w="5525326" h="3043123">
+                <a:path w="7090630" h="1423238">
                   <a:moveTo>
+                    <a:pt x="7090630" y="1423238"/>
+                  </a:moveTo>
+                  <a:lnTo>
+                    <a:pt x="7019007" y="1422128"/>
+                  </a:lnTo>
+                  <a:lnTo>
+                    <a:pt x="6947385" y="1420929"/>
+                  </a:lnTo>
+                  <a:lnTo>
+                    <a:pt x="6875762" y="1419633"/>
+                  </a:lnTo>
+                  <a:lnTo>
+                    <a:pt x="6804139" y="1418233"/>
+                  </a:lnTo>
+                  <a:lnTo>
+                    <a:pt x="6732517" y="1416721"/>
+                  </a:lnTo>
+                  <a:lnTo>
+                    <a:pt x="6660894" y="1415087"/>
+                  </a:lnTo>
+                  <a:lnTo>
+                    <a:pt x="6589272" y="1413322"/>
+                  </a:lnTo>
+                  <a:lnTo>
+                    <a:pt x="6517649" y="1411415"/>
+                  </a:lnTo>
+                  <a:lnTo>
+                    <a:pt x="6446027" y="1409354"/>
+                  </a:lnTo>
+                  <a:lnTo>
+                    <a:pt x="6374404" y="1407128"/>
+                  </a:lnTo>
+                  <a:lnTo>
+                    <a:pt x="6302782" y="1404724"/>
+                  </a:lnTo>
+                  <a:lnTo>
+                    <a:pt x="6231159" y="1402125"/>
+                  </a:lnTo>
+                  <a:lnTo>
+                    <a:pt x="6159537" y="1399319"/>
+                  </a:lnTo>
+                  <a:lnTo>
+                    <a:pt x="6087914" y="1396286"/>
+                  </a:lnTo>
+                  <a:lnTo>
+                    <a:pt x="6016292" y="1393010"/>
+                  </a:lnTo>
+                  <a:lnTo>
+                    <a:pt x="5944669" y="1389470"/>
+                  </a:lnTo>
+                  <a:lnTo>
+                    <a:pt x="5873047" y="1385646"/>
+                  </a:lnTo>
+                  <a:lnTo>
+                    <a:pt x="5801424" y="1381515"/>
+                  </a:lnTo>
+                  <a:lnTo>
+                    <a:pt x="5729802" y="1377052"/>
+                  </a:lnTo>
+                  <a:lnTo>
+                    <a:pt x="5658179" y="1372229"/>
+                  </a:lnTo>
+                  <a:lnTo>
+                    <a:pt x="5586557" y="1367020"/>
+                  </a:lnTo>
+                  <a:lnTo>
+                    <a:pt x="5514934" y="1361392"/>
+                  </a:lnTo>
+                  <a:lnTo>
+                    <a:pt x="5443311" y="1355311"/>
+                  </a:lnTo>
+                  <a:lnTo>
+                    <a:pt x="5371689" y="1348742"/>
+                  </a:lnTo>
+                  <a:lnTo>
+                    <a:pt x="5300066" y="1341644"/>
+                  </a:lnTo>
+                  <a:lnTo>
+                    <a:pt x="5228444" y="1333976"/>
+                  </a:lnTo>
+                  <a:lnTo>
+                    <a:pt x="5156821" y="1325693"/>
+                  </a:lnTo>
+                  <a:lnTo>
+                    <a:pt x="5085199" y="1316743"/>
+                  </a:lnTo>
+                  <a:lnTo>
+                    <a:pt x="5013576" y="1307074"/>
+                  </a:lnTo>
+                  <a:lnTo>
+                    <a:pt x="4941954" y="1296628"/>
+                  </a:lnTo>
+                  <a:lnTo>
+                    <a:pt x="4870331" y="1285342"/>
+                  </a:lnTo>
+                  <a:lnTo>
+                    <a:pt x="4798709" y="1273149"/>
+                  </a:lnTo>
+                  <a:lnTo>
+                    <a:pt x="4727086" y="1259977"/>
+                  </a:lnTo>
+                  <a:lnTo>
+                    <a:pt x="4655464" y="1245746"/>
+                  </a:lnTo>
+                  <a:lnTo>
+                    <a:pt x="4583841" y="1230371"/>
+                  </a:lnTo>
+                  <a:lnTo>
+                    <a:pt x="4512219" y="1213760"/>
+                  </a:lnTo>
+                  <a:lnTo>
+                    <a:pt x="4440596" y="1195814"/>
+                  </a:lnTo>
+                  <a:lnTo>
+                    <a:pt x="4368974" y="1176427"/>
+                  </a:lnTo>
+                  <a:lnTo>
+                    <a:pt x="4297351" y="1155481"/>
+                  </a:lnTo>
+                  <a:lnTo>
+                    <a:pt x="4225729" y="1132851"/>
+                  </a:lnTo>
+                  <a:lnTo>
+                    <a:pt x="4154106" y="1108403"/>
+                  </a:lnTo>
+                  <a:lnTo>
+                    <a:pt x="4082483" y="1081990"/>
+                  </a:lnTo>
+                  <a:lnTo>
+                    <a:pt x="4010861" y="1053454"/>
+                  </a:lnTo>
+                  <a:lnTo>
+                    <a:pt x="3939238" y="1022625"/>
+                  </a:lnTo>
+                  <a:lnTo>
+                    <a:pt x="3867616" y="989318"/>
+                  </a:lnTo>
+                  <a:lnTo>
+                    <a:pt x="3795993" y="953335"/>
+                  </a:lnTo>
+                  <a:lnTo>
+                    <a:pt x="3724371" y="914459"/>
+                  </a:lnTo>
+                  <a:lnTo>
+                    <a:pt x="3652748" y="872459"/>
+                  </a:lnTo>
+                  <a:lnTo>
+                    <a:pt x="3581126" y="827083"/>
+                  </a:lnTo>
+                  <a:lnTo>
+                    <a:pt x="3509503" y="778061"/>
+                  </a:lnTo>
+                  <a:lnTo>
+                    <a:pt x="3437881" y="725099"/>
+                  </a:lnTo>
+                  <a:lnTo>
+                    <a:pt x="3366258" y="667880"/>
+                  </a:lnTo>
+                  <a:lnTo>
+                    <a:pt x="3294636" y="607352"/>
+                  </a:lnTo>
+                  <a:lnTo>
+                    <a:pt x="3223013" y="597385"/>
+                  </a:lnTo>
+                  <a:lnTo>
+                    <a:pt x="3151391" y="587299"/>
+                  </a:lnTo>
+                  <a:lnTo>
+                    <a:pt x="3079768" y="577091"/>
+                  </a:lnTo>
+                  <a:lnTo>
+                    <a:pt x="3008146" y="566761"/>
+                  </a:lnTo>
+                  <a:lnTo>
+                    <a:pt x="2936523" y="556306"/>
+                  </a:lnTo>
+                  <a:lnTo>
+                    <a:pt x="2864901" y="545726"/>
+                  </a:lnTo>
+                  <a:lnTo>
+                    <a:pt x="2793278" y="535019"/>
+                  </a:lnTo>
+                  <a:lnTo>
+                    <a:pt x="2721655" y="524184"/>
+                  </a:lnTo>
+                  <a:lnTo>
+                    <a:pt x="2650033" y="513218"/>
+                  </a:lnTo>
+                  <a:lnTo>
+                    <a:pt x="2578410" y="502120"/>
+                  </a:lnTo>
+                  <a:lnTo>
+                    <a:pt x="2506788" y="490889"/>
+                  </a:lnTo>
+                  <a:lnTo>
+                    <a:pt x="2435165" y="479523"/>
+                  </a:lnTo>
+                  <a:lnTo>
+                    <a:pt x="2363543" y="468021"/>
+                  </a:lnTo>
+                  <a:lnTo>
+                    <a:pt x="2291920" y="456380"/>
+                  </a:lnTo>
+                  <a:lnTo>
+                    <a:pt x="2220298" y="444600"/>
+                  </a:lnTo>
+                  <a:lnTo>
+                    <a:pt x="2148675" y="432678"/>
+                  </a:lnTo>
+                  <a:lnTo>
+                    <a:pt x="2077053" y="420613"/>
+                  </a:lnTo>
+                  <a:lnTo>
+                    <a:pt x="2005430" y="408403"/>
+                  </a:lnTo>
+                  <a:lnTo>
+                    <a:pt x="1933808" y="396046"/>
+                  </a:lnTo>
+                  <a:lnTo>
+                    <a:pt x="1862185" y="383541"/>
+                  </a:lnTo>
+                  <a:lnTo>
+                    <a:pt x="1790563" y="370886"/>
+                  </a:lnTo>
+                  <a:lnTo>
+                    <a:pt x="1718940" y="358078"/>
+                  </a:lnTo>
+                  <a:lnTo>
+                    <a:pt x="1647318" y="345117"/>
+                  </a:lnTo>
+                  <a:lnTo>
+                    <a:pt x="1575695" y="332000"/>
+                  </a:lnTo>
+                  <a:lnTo>
+                    <a:pt x="1504073" y="318726"/>
+                  </a:lnTo>
+                  <a:lnTo>
+                    <a:pt x="1432450" y="305292"/>
+                  </a:lnTo>
+                  <a:lnTo>
+                    <a:pt x="1360827" y="291696"/>
+                  </a:lnTo>
+                  <a:lnTo>
+                    <a:pt x="1289205" y="277938"/>
+                  </a:lnTo>
+                  <a:lnTo>
+                    <a:pt x="1217582" y="264014"/>
+                  </a:lnTo>
+                  <a:lnTo>
+                    <a:pt x="1145960" y="249922"/>
+                  </a:lnTo>
+                  <a:lnTo>
+                    <a:pt x="1074337" y="235662"/>
+                  </a:lnTo>
+                  <a:lnTo>
+                    <a:pt x="1002715" y="221230"/>
+                  </a:lnTo>
+                  <a:lnTo>
+                    <a:pt x="931092" y="206625"/>
+                  </a:lnTo>
+                  <a:lnTo>
+                    <a:pt x="859470" y="191844"/>
+                  </a:lnTo>
+                  <a:lnTo>
+                    <a:pt x="787847" y="176886"/>
+                  </a:lnTo>
+                  <a:lnTo>
+                    <a:pt x="716225" y="161748"/>
+                  </a:lnTo>
+                  <a:lnTo>
+                    <a:pt x="644602" y="146429"/>
+                  </a:lnTo>
+                  <a:lnTo>
+                    <a:pt x="572980" y="130925"/>
+                  </a:lnTo>
+                  <a:lnTo>
+                    <a:pt x="501357" y="115235"/>
+                  </a:lnTo>
+                  <a:lnTo>
+                    <a:pt x="429735" y="99357"/>
+                  </a:lnTo>
+                  <a:lnTo>
+                    <a:pt x="358112" y="83288"/>
+                  </a:lnTo>
+                  <a:lnTo>
+                    <a:pt x="286490" y="67025"/>
+                  </a:lnTo>
+                  <a:lnTo>
+                    <a:pt x="214867" y="50568"/>
+                  </a:lnTo>
+                  <a:lnTo>
+                    <a:pt x="143245" y="33913"/>
+                  </a:lnTo>
+                  <a:lnTo>
+                    <a:pt x="71622" y="17057"/>
+                  </a:lnTo>
+                  <a:lnTo>
                     <a:pt x="0" y="0"/>
-                  </a:moveTo>
-                  <a:lnTo>
-                    <a:pt x="41033" y="142642"/>
-                  </a:lnTo>
-                  <a:lnTo>
-                    <a:pt x="118276" y="391186"/>
-                  </a:lnTo>
-                  <a:lnTo>
-                    <a:pt x="195520" y="621242"/>
-                  </a:lnTo>
-                  <a:lnTo>
-                    <a:pt x="272763" y="834184"/>
-                  </a:lnTo>
-                  <a:lnTo>
-                    <a:pt x="350007" y="1031285"/>
-                  </a:lnTo>
-                  <a:lnTo>
-                    <a:pt x="427250" y="1213723"/>
-                  </a:lnTo>
-                  <a:lnTo>
-                    <a:pt x="504494" y="1382590"/>
-                  </a:lnTo>
-                  <a:lnTo>
-                    <a:pt x="581738" y="1538895"/>
-                  </a:lnTo>
-                  <a:lnTo>
-                    <a:pt x="658981" y="1683573"/>
-                  </a:lnTo>
-                  <a:lnTo>
-                    <a:pt x="736225" y="1817488"/>
-                  </a:lnTo>
-                  <a:lnTo>
-                    <a:pt x="813468" y="1941441"/>
-                  </a:lnTo>
-                  <a:lnTo>
-                    <a:pt x="890712" y="2056173"/>
-                  </a:lnTo>
-                  <a:lnTo>
-                    <a:pt x="967955" y="2162370"/>
-                  </a:lnTo>
-                  <a:lnTo>
-                    <a:pt x="1045199" y="2260667"/>
-                  </a:lnTo>
-                  <a:lnTo>
-                    <a:pt x="1122443" y="2351652"/>
-                  </a:lnTo>
-                  <a:lnTo>
-                    <a:pt x="1199686" y="2435869"/>
-                  </a:lnTo>
-                  <a:lnTo>
-                    <a:pt x="1276930" y="2513820"/>
-                  </a:lnTo>
-                  <a:lnTo>
-                    <a:pt x="1354173" y="2585973"/>
-                  </a:lnTo>
-                  <a:lnTo>
-                    <a:pt x="1431417" y="2652758"/>
-                  </a:lnTo>
-                  <a:lnTo>
-                    <a:pt x="1508660" y="2663896"/>
-                  </a:lnTo>
-                  <a:lnTo>
-                    <a:pt x="1585904" y="2673628"/>
-                  </a:lnTo>
-                  <a:lnTo>
-                    <a:pt x="1663148" y="2683244"/>
-                  </a:lnTo>
-                  <a:lnTo>
-                    <a:pt x="1740391" y="2692746"/>
-                  </a:lnTo>
-                  <a:lnTo>
-                    <a:pt x="1817635" y="2702135"/>
-                  </a:lnTo>
-                  <a:lnTo>
-                    <a:pt x="1894878" y="2711413"/>
-                  </a:lnTo>
-                  <a:lnTo>
-                    <a:pt x="1972122" y="2720580"/>
-                  </a:lnTo>
-                  <a:lnTo>
-                    <a:pt x="2049365" y="2729639"/>
-                  </a:lnTo>
-                  <a:lnTo>
-                    <a:pt x="2126609" y="2738590"/>
-                  </a:lnTo>
-                  <a:lnTo>
-                    <a:pt x="2203853" y="2747435"/>
-                  </a:lnTo>
-                  <a:lnTo>
-                    <a:pt x="2281096" y="2756175"/>
-                  </a:lnTo>
-                  <a:lnTo>
-                    <a:pt x="2358340" y="2764812"/>
-                  </a:lnTo>
-                  <a:lnTo>
-                    <a:pt x="2435583" y="2773345"/>
-                  </a:lnTo>
-                  <a:lnTo>
-                    <a:pt x="2512827" y="2781778"/>
-                  </a:lnTo>
-                  <a:lnTo>
-                    <a:pt x="2590070" y="2790110"/>
-                  </a:lnTo>
-                  <a:lnTo>
-                    <a:pt x="2667314" y="2798344"/>
-                  </a:lnTo>
-                  <a:lnTo>
-                    <a:pt x="2744558" y="2806479"/>
-                  </a:lnTo>
-                  <a:lnTo>
-                    <a:pt x="2821801" y="2814518"/>
-                  </a:lnTo>
-                  <a:lnTo>
-                    <a:pt x="2899045" y="2822462"/>
-                  </a:lnTo>
-                  <a:lnTo>
-                    <a:pt x="2976288" y="2830312"/>
-                  </a:lnTo>
-                  <a:lnTo>
-                    <a:pt x="3053532" y="2838068"/>
-                  </a:lnTo>
-                  <a:lnTo>
-                    <a:pt x="3130775" y="2845732"/>
-                  </a:lnTo>
-                  <a:lnTo>
-                    <a:pt x="3208019" y="2853305"/>
-                  </a:lnTo>
-                  <a:lnTo>
-                    <a:pt x="3285263" y="2860789"/>
-                  </a:lnTo>
-                  <a:lnTo>
-                    <a:pt x="3362506" y="2868183"/>
-                  </a:lnTo>
-                  <a:lnTo>
-                    <a:pt x="3439750" y="2875490"/>
-                  </a:lnTo>
-                  <a:lnTo>
-                    <a:pt x="3516993" y="2882710"/>
-                  </a:lnTo>
-                  <a:lnTo>
-                    <a:pt x="3594237" y="2889844"/>
-                  </a:lnTo>
-                  <a:lnTo>
-                    <a:pt x="3671480" y="2896894"/>
-                  </a:lnTo>
-                  <a:lnTo>
-                    <a:pt x="3748724" y="2903860"/>
-                  </a:lnTo>
-                  <a:lnTo>
-                    <a:pt x="3825968" y="2910743"/>
-                  </a:lnTo>
-                  <a:lnTo>
-                    <a:pt x="3903211" y="2917544"/>
-                  </a:lnTo>
-                  <a:lnTo>
-                    <a:pt x="3980455" y="2924265"/>
-                  </a:lnTo>
-                  <a:lnTo>
-                    <a:pt x="4057698" y="2930906"/>
-                  </a:lnTo>
-                  <a:lnTo>
-                    <a:pt x="4134942" y="2937469"/>
-                  </a:lnTo>
-                  <a:lnTo>
-                    <a:pt x="4212185" y="2943953"/>
-                  </a:lnTo>
-                  <a:lnTo>
-                    <a:pt x="4289429" y="2950360"/>
-                  </a:lnTo>
-                  <a:lnTo>
-                    <a:pt x="4366673" y="2956691"/>
-                  </a:lnTo>
-                  <a:lnTo>
-                    <a:pt x="4443916" y="2962948"/>
-                  </a:lnTo>
-                  <a:lnTo>
-                    <a:pt x="4521160" y="2969129"/>
-                  </a:lnTo>
-                  <a:lnTo>
-                    <a:pt x="4598403" y="2975238"/>
-                  </a:lnTo>
-                  <a:lnTo>
-                    <a:pt x="4675647" y="2981274"/>
-                  </a:lnTo>
-                  <a:lnTo>
-                    <a:pt x="4752890" y="2987238"/>
-                  </a:lnTo>
-                  <a:lnTo>
-                    <a:pt x="4830134" y="2993132"/>
-                  </a:lnTo>
-                  <a:lnTo>
-                    <a:pt x="4907378" y="2998955"/>
-                  </a:lnTo>
-                  <a:lnTo>
-                    <a:pt x="4984621" y="3004710"/>
-                  </a:lnTo>
-                  <a:lnTo>
-                    <a:pt x="5061865" y="3010396"/>
-                  </a:lnTo>
-                  <a:lnTo>
-                    <a:pt x="5139108" y="3016015"/>
-                  </a:lnTo>
-                  <a:lnTo>
-                    <a:pt x="5216352" y="3021567"/>
-                  </a:lnTo>
-                  <a:lnTo>
-                    <a:pt x="5293595" y="3027053"/>
-                  </a:lnTo>
-                  <a:lnTo>
-                    <a:pt x="5370839" y="3032474"/>
-                  </a:lnTo>
-                  <a:lnTo>
-                    <a:pt x="5448083" y="3037830"/>
-                  </a:lnTo>
-                  <a:lnTo>
-                    <a:pt x="5525326" y="3043123"/>
                   </a:lnTo>
                 </a:path>
               </a:pathLst>
@@ -3787,589 +4078,273 @@
           </p:nvSpPr>
           <p:spPr>
             <a:xfrm>
-              <a:off x="817517" y="4175739"/>
-              <a:ext cx="7392041" cy="1367697"/>
+              <a:off x="2165110" y="2073503"/>
+              <a:ext cx="6097568" cy="3405732"/>
             </a:xfrm>
             <a:custGeom>
               <a:avLst/>
               <a:pathLst>
-                <a:path w="7392041" h="1367697">
-                  <a:moveTo>
-                    <a:pt x="7392041" y="1367697"/>
-                  </a:moveTo>
-                  <a:lnTo>
-                    <a:pt x="7314797" y="1366587"/>
-                  </a:lnTo>
-                  <a:lnTo>
-                    <a:pt x="7237554" y="1365387"/>
-                  </a:lnTo>
-                  <a:lnTo>
-                    <a:pt x="7160310" y="1364092"/>
-                  </a:lnTo>
-                  <a:lnTo>
-                    <a:pt x="7083066" y="1362692"/>
-                  </a:lnTo>
-                  <a:lnTo>
-                    <a:pt x="7005823" y="1361179"/>
-                  </a:lnTo>
-                  <a:lnTo>
-                    <a:pt x="6928579" y="1359546"/>
-                  </a:lnTo>
-                  <a:lnTo>
-                    <a:pt x="6851336" y="1357780"/>
-                  </a:lnTo>
-                  <a:lnTo>
-                    <a:pt x="6774092" y="1355873"/>
-                  </a:lnTo>
-                  <a:lnTo>
-                    <a:pt x="6696849" y="1353813"/>
-                  </a:lnTo>
-                  <a:lnTo>
-                    <a:pt x="6619605" y="1351587"/>
-                  </a:lnTo>
-                  <a:lnTo>
-                    <a:pt x="6542361" y="1349182"/>
-                  </a:lnTo>
-                  <a:lnTo>
-                    <a:pt x="6465118" y="1346584"/>
-                  </a:lnTo>
-                  <a:lnTo>
-                    <a:pt x="6387874" y="1343777"/>
-                  </a:lnTo>
-                  <a:lnTo>
-                    <a:pt x="6310631" y="1340745"/>
-                  </a:lnTo>
-                  <a:lnTo>
-                    <a:pt x="6233387" y="1337468"/>
-                  </a:lnTo>
-                  <a:lnTo>
-                    <a:pt x="6156144" y="1333929"/>
-                  </a:lnTo>
-                  <a:lnTo>
-                    <a:pt x="6078900" y="1330105"/>
-                  </a:lnTo>
-                  <a:lnTo>
-                    <a:pt x="6001656" y="1325973"/>
-                  </a:lnTo>
-                  <a:lnTo>
-                    <a:pt x="5924413" y="1321510"/>
-                  </a:lnTo>
-                  <a:lnTo>
-                    <a:pt x="5847169" y="1316688"/>
-                  </a:lnTo>
-                  <a:lnTo>
-                    <a:pt x="5769926" y="1311478"/>
-                  </a:lnTo>
-                  <a:lnTo>
-                    <a:pt x="5692682" y="1305850"/>
-                  </a:lnTo>
-                  <a:lnTo>
-                    <a:pt x="5615439" y="1299769"/>
-                  </a:lnTo>
-                  <a:lnTo>
-                    <a:pt x="5538195" y="1293200"/>
-                  </a:lnTo>
-                  <a:lnTo>
-                    <a:pt x="5460951" y="1286103"/>
-                  </a:lnTo>
-                  <a:lnTo>
-                    <a:pt x="5383708" y="1278435"/>
-                  </a:lnTo>
-                  <a:lnTo>
-                    <a:pt x="5306464" y="1270151"/>
-                  </a:lnTo>
-                  <a:lnTo>
-                    <a:pt x="5229221" y="1261201"/>
-                  </a:lnTo>
-                  <a:lnTo>
-                    <a:pt x="5151977" y="1251532"/>
-                  </a:lnTo>
-                  <a:lnTo>
-                    <a:pt x="5074734" y="1241086"/>
-                  </a:lnTo>
-                  <a:lnTo>
-                    <a:pt x="4997490" y="1229801"/>
-                  </a:lnTo>
-                  <a:lnTo>
-                    <a:pt x="4920246" y="1217608"/>
-                  </a:lnTo>
-                  <a:lnTo>
-                    <a:pt x="4843003" y="1204435"/>
-                  </a:lnTo>
-                  <a:lnTo>
-                    <a:pt x="4765759" y="1190204"/>
-                  </a:lnTo>
-                  <a:lnTo>
-                    <a:pt x="4688516" y="1174829"/>
-                  </a:lnTo>
-                  <a:lnTo>
-                    <a:pt x="4611272" y="1158219"/>
-                  </a:lnTo>
-                  <a:lnTo>
-                    <a:pt x="4534029" y="1140273"/>
-                  </a:lnTo>
-                  <a:lnTo>
-                    <a:pt x="4456785" y="1120885"/>
-                  </a:lnTo>
-                  <a:lnTo>
-                    <a:pt x="4379541" y="1099939"/>
-                  </a:lnTo>
-                  <a:lnTo>
-                    <a:pt x="4302298" y="1077310"/>
-                  </a:lnTo>
-                  <a:lnTo>
-                    <a:pt x="4225054" y="1052861"/>
-                  </a:lnTo>
-                  <a:lnTo>
-                    <a:pt x="4147811" y="1026448"/>
-                  </a:lnTo>
-                  <a:lnTo>
-                    <a:pt x="4070567" y="997913"/>
-                  </a:lnTo>
-                  <a:lnTo>
-                    <a:pt x="3993324" y="967084"/>
-                  </a:lnTo>
-                  <a:lnTo>
-                    <a:pt x="3916080" y="933777"/>
-                  </a:lnTo>
-                  <a:lnTo>
-                    <a:pt x="3838836" y="897793"/>
-                  </a:lnTo>
-                  <a:lnTo>
-                    <a:pt x="3761593" y="858917"/>
-                  </a:lnTo>
-                  <a:lnTo>
-                    <a:pt x="3684349" y="816917"/>
-                  </a:lnTo>
-                  <a:lnTo>
-                    <a:pt x="3607106" y="771542"/>
-                  </a:lnTo>
-                  <a:lnTo>
-                    <a:pt x="3529862" y="722520"/>
-                  </a:lnTo>
-                  <a:lnTo>
-                    <a:pt x="3452619" y="669557"/>
-                  </a:lnTo>
-                  <a:lnTo>
-                    <a:pt x="3375375" y="612339"/>
-                  </a:lnTo>
-                  <a:lnTo>
-                    <a:pt x="3298131" y="551811"/>
-                  </a:lnTo>
-                  <a:lnTo>
-                    <a:pt x="3220888" y="541844"/>
-                  </a:lnTo>
-                  <a:lnTo>
-                    <a:pt x="3143644" y="531757"/>
-                  </a:lnTo>
-                  <a:lnTo>
-                    <a:pt x="3066401" y="521550"/>
-                  </a:lnTo>
-                  <a:lnTo>
-                    <a:pt x="2989157" y="511219"/>
-                  </a:lnTo>
-                  <a:lnTo>
-                    <a:pt x="2911914" y="500765"/>
-                  </a:lnTo>
-                  <a:lnTo>
-                    <a:pt x="2834670" y="490185"/>
-                  </a:lnTo>
-                  <a:lnTo>
-                    <a:pt x="2757426" y="479478"/>
-                  </a:lnTo>
-                  <a:lnTo>
-                    <a:pt x="2680183" y="468642"/>
-                  </a:lnTo>
-                  <a:lnTo>
-                    <a:pt x="2602939" y="457676"/>
-                  </a:lnTo>
-                  <a:lnTo>
-                    <a:pt x="2525696" y="446579"/>
-                  </a:lnTo>
-                  <a:lnTo>
-                    <a:pt x="2448452" y="435348"/>
-                  </a:lnTo>
-                  <a:lnTo>
-                    <a:pt x="2371209" y="423982"/>
-                  </a:lnTo>
-                  <a:lnTo>
-                    <a:pt x="2293965" y="412479"/>
-                  </a:lnTo>
-                  <a:lnTo>
-                    <a:pt x="2216721" y="400839"/>
-                  </a:lnTo>
-                  <a:lnTo>
-                    <a:pt x="2139478" y="389058"/>
-                  </a:lnTo>
-                  <a:lnTo>
-                    <a:pt x="2062234" y="377137"/>
-                  </a:lnTo>
-                  <a:lnTo>
-                    <a:pt x="1984991" y="365071"/>
-                  </a:lnTo>
-                  <a:lnTo>
-                    <a:pt x="1907747" y="352861"/>
-                  </a:lnTo>
-                  <a:lnTo>
-                    <a:pt x="1830504" y="340505"/>
-                  </a:lnTo>
-                  <a:lnTo>
-                    <a:pt x="1753260" y="328000"/>
-                  </a:lnTo>
-                  <a:lnTo>
-                    <a:pt x="1676016" y="315344"/>
-                  </a:lnTo>
-                  <a:lnTo>
-                    <a:pt x="1598773" y="302537"/>
-                  </a:lnTo>
-                  <a:lnTo>
-                    <a:pt x="1521529" y="289575"/>
-                  </a:lnTo>
-                  <a:lnTo>
-                    <a:pt x="1444286" y="276459"/>
-                  </a:lnTo>
-                  <a:lnTo>
-                    <a:pt x="1367042" y="263184"/>
-                  </a:lnTo>
-                  <a:lnTo>
-                    <a:pt x="1289799" y="249750"/>
-                  </a:lnTo>
-                  <a:lnTo>
-                    <a:pt x="1212555" y="236155"/>
-                  </a:lnTo>
-                  <a:lnTo>
-                    <a:pt x="1135311" y="222396"/>
-                  </a:lnTo>
-                  <a:lnTo>
-                    <a:pt x="1058068" y="208472"/>
-                  </a:lnTo>
-                  <a:lnTo>
-                    <a:pt x="980824" y="194381"/>
-                  </a:lnTo>
-                  <a:lnTo>
-                    <a:pt x="903581" y="180120"/>
-                  </a:lnTo>
-                  <a:lnTo>
-                    <a:pt x="826337" y="165689"/>
-                  </a:lnTo>
-                  <a:lnTo>
-                    <a:pt x="749094" y="151084"/>
-                  </a:lnTo>
-                  <a:lnTo>
-                    <a:pt x="671850" y="136303"/>
-                  </a:lnTo>
-                  <a:lnTo>
-                    <a:pt x="594606" y="121345"/>
-                  </a:lnTo>
-                  <a:lnTo>
-                    <a:pt x="517363" y="106207"/>
-                  </a:lnTo>
-                  <a:lnTo>
-                    <a:pt x="440119" y="90887"/>
-                  </a:lnTo>
-                  <a:lnTo>
-                    <a:pt x="362876" y="75384"/>
-                  </a:lnTo>
-                  <a:lnTo>
-                    <a:pt x="285632" y="59694"/>
-                  </a:lnTo>
-                  <a:lnTo>
-                    <a:pt x="208389" y="43815"/>
-                  </a:lnTo>
-                  <a:lnTo>
-                    <a:pt x="131145" y="27746"/>
-                  </a:lnTo>
-                  <a:lnTo>
-                    <a:pt x="53901" y="11484"/>
-                  </a:lnTo>
-                  <a:lnTo>
-                    <a:pt x="0" y="0"/>
-                  </a:lnTo>
-                </a:path>
-              </a:pathLst>
-            </a:custGeom>
-          </p:spPr>
-          <p:txBody>
-            <a:bodyPr/>
-            <a:lstStyle/>
-            <a:p/>
-          </p:txBody>
-        </p:sp>
-        <p:sp>
-          <p:nvSpPr>
-            <p:cNvPr id="24" name="pl24"/>
-            <p:cNvSpPr/>
-            <p:nvPr/>
-          </p:nvSpPr>
-          <p:spPr>
-            <a:xfrm>
-              <a:off x="1633444" y="2073503"/>
-              <a:ext cx="6576114" cy="3405732"/>
-            </a:xfrm>
-            <a:custGeom>
-              <a:avLst/>
-              <a:pathLst>
-                <a:path w="6576114" h="3405732">
+                <a:path w="6097568" h="3405732">
                   <a:moveTo>
                     <a:pt x="0" y="0"/>
                   </a:moveTo>
                   <a:lnTo>
-                    <a:pt x="10411" y="21296"/>
-                  </a:lnTo>
-                  <a:lnTo>
-                    <a:pt x="87654" y="172400"/>
-                  </a:lnTo>
-                  <a:lnTo>
-                    <a:pt x="164898" y="316909"/>
-                  </a:lnTo>
-                  <a:lnTo>
-                    <a:pt x="242142" y="455112"/>
-                  </a:lnTo>
-                  <a:lnTo>
-                    <a:pt x="319385" y="587284"/>
-                  </a:lnTo>
-                  <a:lnTo>
-                    <a:pt x="396629" y="713688"/>
-                  </a:lnTo>
-                  <a:lnTo>
-                    <a:pt x="473872" y="834575"/>
-                  </a:lnTo>
-                  <a:lnTo>
-                    <a:pt x="551116" y="950187"/>
-                  </a:lnTo>
-                  <a:lnTo>
-                    <a:pt x="628359" y="1060754"/>
-                  </a:lnTo>
-                  <a:lnTo>
-                    <a:pt x="705603" y="1166495"/>
-                  </a:lnTo>
-                  <a:lnTo>
-                    <a:pt x="782847" y="1267622"/>
-                  </a:lnTo>
-                  <a:lnTo>
-                    <a:pt x="860090" y="1364335"/>
-                  </a:lnTo>
-                  <a:lnTo>
-                    <a:pt x="937334" y="1456828"/>
-                  </a:lnTo>
-                  <a:lnTo>
-                    <a:pt x="1014577" y="1545284"/>
-                  </a:lnTo>
-                  <a:lnTo>
-                    <a:pt x="1091821" y="1629880"/>
-                  </a:lnTo>
-                  <a:lnTo>
-                    <a:pt x="1169064" y="1710784"/>
-                  </a:lnTo>
-                  <a:lnTo>
-                    <a:pt x="1246308" y="1788157"/>
-                  </a:lnTo>
-                  <a:lnTo>
-                    <a:pt x="1323552" y="1862154"/>
-                  </a:lnTo>
-                  <a:lnTo>
-                    <a:pt x="1400795" y="1932922"/>
-                  </a:lnTo>
-                  <a:lnTo>
-                    <a:pt x="1478039" y="2000601"/>
-                  </a:lnTo>
-                  <a:lnTo>
-                    <a:pt x="1555282" y="2065326"/>
-                  </a:lnTo>
-                  <a:lnTo>
-                    <a:pt x="1632526" y="2127227"/>
-                  </a:lnTo>
-                  <a:lnTo>
-                    <a:pt x="1709769" y="2186427"/>
-                  </a:lnTo>
-                  <a:lnTo>
-                    <a:pt x="1787013" y="2243043"/>
-                  </a:lnTo>
-                  <a:lnTo>
-                    <a:pt x="1864257" y="2297188"/>
-                  </a:lnTo>
-                  <a:lnTo>
-                    <a:pt x="1941500" y="2348970"/>
-                  </a:lnTo>
-                  <a:lnTo>
-                    <a:pt x="2018744" y="2398493"/>
-                  </a:lnTo>
-                  <a:lnTo>
-                    <a:pt x="2095987" y="2445854"/>
-                  </a:lnTo>
-                  <a:lnTo>
-                    <a:pt x="2173231" y="2491149"/>
-                  </a:lnTo>
-                  <a:lnTo>
-                    <a:pt x="2250474" y="2534466"/>
-                  </a:lnTo>
-                  <a:lnTo>
-                    <a:pt x="2327718" y="2575894"/>
-                  </a:lnTo>
-                  <a:lnTo>
-                    <a:pt x="2404962" y="2615513"/>
-                  </a:lnTo>
-                  <a:lnTo>
-                    <a:pt x="2482205" y="2653403"/>
-                  </a:lnTo>
-                  <a:lnTo>
-                    <a:pt x="2559449" y="2689640"/>
-                  </a:lnTo>
-                  <a:lnTo>
-                    <a:pt x="2636692" y="2724295"/>
-                  </a:lnTo>
-                  <a:lnTo>
-                    <a:pt x="2713936" y="2757438"/>
-                  </a:lnTo>
-                  <a:lnTo>
-                    <a:pt x="2791179" y="2789135"/>
-                  </a:lnTo>
-                  <a:lnTo>
-                    <a:pt x="2868423" y="2819448"/>
-                  </a:lnTo>
-                  <a:lnTo>
-                    <a:pt x="2945667" y="2848439"/>
-                  </a:lnTo>
-                  <a:lnTo>
-                    <a:pt x="3022910" y="2876164"/>
-                  </a:lnTo>
-                  <a:lnTo>
-                    <a:pt x="3100154" y="2902680"/>
-                  </a:lnTo>
-                  <a:lnTo>
-                    <a:pt x="3177397" y="2928038"/>
-                  </a:lnTo>
-                  <a:lnTo>
-                    <a:pt x="3254641" y="2952289"/>
-                  </a:lnTo>
-                  <a:lnTo>
-                    <a:pt x="3331884" y="2975482"/>
-                  </a:lnTo>
-                  <a:lnTo>
-                    <a:pt x="3409128" y="2997664"/>
-                  </a:lnTo>
-                  <a:lnTo>
-                    <a:pt x="3486372" y="3018877"/>
-                  </a:lnTo>
-                  <a:lnTo>
-                    <a:pt x="3563615" y="3039164"/>
-                  </a:lnTo>
-                  <a:lnTo>
-                    <a:pt x="3640859" y="3058566"/>
-                  </a:lnTo>
-                  <a:lnTo>
-                    <a:pt x="3718102" y="3077121"/>
-                  </a:lnTo>
-                  <a:lnTo>
-                    <a:pt x="3795346" y="3094866"/>
-                  </a:lnTo>
-                  <a:lnTo>
-                    <a:pt x="3872589" y="3111837"/>
-                  </a:lnTo>
-                  <a:lnTo>
-                    <a:pt x="3949833" y="3128068"/>
-                  </a:lnTo>
-                  <a:lnTo>
-                    <a:pt x="4027077" y="3143590"/>
-                  </a:lnTo>
-                  <a:lnTo>
-                    <a:pt x="4104320" y="3158435"/>
-                  </a:lnTo>
-                  <a:lnTo>
-                    <a:pt x="4181564" y="3172631"/>
-                  </a:lnTo>
-                  <a:lnTo>
-                    <a:pt x="4258807" y="3186209"/>
-                  </a:lnTo>
-                  <a:lnTo>
-                    <a:pt x="4336051" y="3199193"/>
-                  </a:lnTo>
-                  <a:lnTo>
-                    <a:pt x="4413294" y="3211612"/>
-                  </a:lnTo>
-                  <a:lnTo>
-                    <a:pt x="4490538" y="3223488"/>
-                  </a:lnTo>
-                  <a:lnTo>
-                    <a:pt x="4567782" y="3234846"/>
-                  </a:lnTo>
-                  <a:lnTo>
-                    <a:pt x="4645025" y="3245708"/>
-                  </a:lnTo>
-                  <a:lnTo>
-                    <a:pt x="4722269" y="3256096"/>
-                  </a:lnTo>
-                  <a:lnTo>
-                    <a:pt x="4799512" y="3266031"/>
-                  </a:lnTo>
-                  <a:lnTo>
-                    <a:pt x="4876756" y="3275532"/>
-                  </a:lnTo>
-                  <a:lnTo>
-                    <a:pt x="4953999" y="3284619"/>
-                  </a:lnTo>
-                  <a:lnTo>
-                    <a:pt x="5031243" y="3293309"/>
-                  </a:lnTo>
-                  <a:lnTo>
-                    <a:pt x="5108487" y="3301620"/>
-                  </a:lnTo>
-                  <a:lnTo>
-                    <a:pt x="5185730" y="3309568"/>
-                  </a:lnTo>
-                  <a:lnTo>
-                    <a:pt x="5262974" y="3317169"/>
-                  </a:lnTo>
-                  <a:lnTo>
-                    <a:pt x="5340217" y="3324439"/>
-                  </a:lnTo>
-                  <a:lnTo>
-                    <a:pt x="5417461" y="3331391"/>
-                  </a:lnTo>
-                  <a:lnTo>
-                    <a:pt x="5494704" y="3338040"/>
-                  </a:lnTo>
-                  <a:lnTo>
-                    <a:pt x="5571948" y="3344399"/>
-                  </a:lnTo>
-                  <a:lnTo>
-                    <a:pt x="5649192" y="3350480"/>
-                  </a:lnTo>
-                  <a:lnTo>
-                    <a:pt x="5726435" y="3356296"/>
-                  </a:lnTo>
-                  <a:lnTo>
-                    <a:pt x="5803679" y="3361858"/>
-                  </a:lnTo>
-                  <a:lnTo>
-                    <a:pt x="5880922" y="3367177"/>
-                  </a:lnTo>
-                  <a:lnTo>
-                    <a:pt x="5958166" y="3372264"/>
-                  </a:lnTo>
-                  <a:lnTo>
-                    <a:pt x="6035409" y="3377129"/>
-                  </a:lnTo>
-                  <a:lnTo>
-                    <a:pt x="6112653" y="3381782"/>
-                  </a:lnTo>
-                  <a:lnTo>
-                    <a:pt x="6189897" y="3386232"/>
-                  </a:lnTo>
-                  <a:lnTo>
-                    <a:pt x="6267140" y="3390488"/>
-                  </a:lnTo>
-                  <a:lnTo>
-                    <a:pt x="6344384" y="3394558"/>
-                  </a:lnTo>
-                  <a:lnTo>
-                    <a:pt x="6421627" y="3398450"/>
-                  </a:lnTo>
-                  <a:lnTo>
-                    <a:pt x="6498871" y="3402172"/>
-                  </a:lnTo>
-                  <a:lnTo>
-                    <a:pt x="6576114" y="3405732"/>
+                    <a:pt x="9653" y="21296"/>
+                  </a:lnTo>
+                  <a:lnTo>
+                    <a:pt x="81276" y="172400"/>
+                  </a:lnTo>
+                  <a:lnTo>
+                    <a:pt x="152898" y="316909"/>
+                  </a:lnTo>
+                  <a:lnTo>
+                    <a:pt x="224521" y="455112"/>
+                  </a:lnTo>
+                  <a:lnTo>
+                    <a:pt x="296143" y="587284"/>
+                  </a:lnTo>
+                  <a:lnTo>
+                    <a:pt x="367766" y="713688"/>
+                  </a:lnTo>
+                  <a:lnTo>
+                    <a:pt x="439388" y="834575"/>
+                  </a:lnTo>
+                  <a:lnTo>
+                    <a:pt x="511011" y="950187"/>
+                  </a:lnTo>
+                  <a:lnTo>
+                    <a:pt x="582633" y="1060754"/>
+                  </a:lnTo>
+                  <a:lnTo>
+                    <a:pt x="654256" y="1166495"/>
+                  </a:lnTo>
+                  <a:lnTo>
+                    <a:pt x="725878" y="1267622"/>
+                  </a:lnTo>
+                  <a:lnTo>
+                    <a:pt x="797501" y="1364335"/>
+                  </a:lnTo>
+                  <a:lnTo>
+                    <a:pt x="869124" y="1456828"/>
+                  </a:lnTo>
+                  <a:lnTo>
+                    <a:pt x="940746" y="1545284"/>
+                  </a:lnTo>
+                  <a:lnTo>
+                    <a:pt x="1012369" y="1629880"/>
+                  </a:lnTo>
+                  <a:lnTo>
+                    <a:pt x="1083991" y="1710784"/>
+                  </a:lnTo>
+                  <a:lnTo>
+                    <a:pt x="1155614" y="1788157"/>
+                  </a:lnTo>
+                  <a:lnTo>
+                    <a:pt x="1227236" y="1862154"/>
+                  </a:lnTo>
+                  <a:lnTo>
+                    <a:pt x="1298859" y="1932922"/>
+                  </a:lnTo>
+                  <a:lnTo>
+                    <a:pt x="1370481" y="2000601"/>
+                  </a:lnTo>
+                  <a:lnTo>
+                    <a:pt x="1442104" y="2065326"/>
+                  </a:lnTo>
+                  <a:lnTo>
+                    <a:pt x="1513726" y="2127227"/>
+                  </a:lnTo>
+                  <a:lnTo>
+                    <a:pt x="1585349" y="2186427"/>
+                  </a:lnTo>
+                  <a:lnTo>
+                    <a:pt x="1656971" y="2243043"/>
+                  </a:lnTo>
+                  <a:lnTo>
+                    <a:pt x="1728594" y="2297188"/>
+                  </a:lnTo>
+                  <a:lnTo>
+                    <a:pt x="1800216" y="2348970"/>
+                  </a:lnTo>
+                  <a:lnTo>
+                    <a:pt x="1871839" y="2398493"/>
+                  </a:lnTo>
+                  <a:lnTo>
+                    <a:pt x="1943461" y="2445854"/>
+                  </a:lnTo>
+                  <a:lnTo>
+                    <a:pt x="2015084" y="2491149"/>
+                  </a:lnTo>
+                  <a:lnTo>
+                    <a:pt x="2086706" y="2534466"/>
+                  </a:lnTo>
+                  <a:lnTo>
+                    <a:pt x="2158329" y="2575894"/>
+                  </a:lnTo>
+                  <a:lnTo>
+                    <a:pt x="2229952" y="2615513"/>
+                  </a:lnTo>
+                  <a:lnTo>
+                    <a:pt x="2301574" y="2653403"/>
+                  </a:lnTo>
+                  <a:lnTo>
+                    <a:pt x="2373197" y="2689640"/>
+                  </a:lnTo>
+                  <a:lnTo>
+                    <a:pt x="2444819" y="2724295"/>
+                  </a:lnTo>
+                  <a:lnTo>
+                    <a:pt x="2516442" y="2757438"/>
+                  </a:lnTo>
+                  <a:lnTo>
+                    <a:pt x="2588064" y="2789135"/>
+                  </a:lnTo>
+                  <a:lnTo>
+                    <a:pt x="2659687" y="2819448"/>
+                  </a:lnTo>
+                  <a:lnTo>
+                    <a:pt x="2731309" y="2848439"/>
+                  </a:lnTo>
+                  <a:lnTo>
+                    <a:pt x="2802932" y="2876164"/>
+                  </a:lnTo>
+                  <a:lnTo>
+                    <a:pt x="2874554" y="2902680"/>
+                  </a:lnTo>
+                  <a:lnTo>
+                    <a:pt x="2946177" y="2928038"/>
+                  </a:lnTo>
+                  <a:lnTo>
+                    <a:pt x="3017799" y="2952289"/>
+                  </a:lnTo>
+                  <a:lnTo>
+                    <a:pt x="3089422" y="2975482"/>
+                  </a:lnTo>
+                  <a:lnTo>
+                    <a:pt x="3161044" y="2997664"/>
+                  </a:lnTo>
+                  <a:lnTo>
+                    <a:pt x="3232667" y="3018877"/>
+                  </a:lnTo>
+                  <a:lnTo>
+                    <a:pt x="3304289" y="3039164"/>
+                  </a:lnTo>
+                  <a:lnTo>
+                    <a:pt x="3375912" y="3058566"/>
+                  </a:lnTo>
+                  <a:lnTo>
+                    <a:pt x="3447534" y="3077121"/>
+                  </a:lnTo>
+                  <a:lnTo>
+                    <a:pt x="3519157" y="3094866"/>
+                  </a:lnTo>
+                  <a:lnTo>
+                    <a:pt x="3590780" y="3111837"/>
+                  </a:lnTo>
+                  <a:lnTo>
+                    <a:pt x="3662402" y="3128068"/>
+                  </a:lnTo>
+                  <a:lnTo>
+                    <a:pt x="3734025" y="3143590"/>
+                  </a:lnTo>
+                  <a:lnTo>
+                    <a:pt x="3805647" y="3158435"/>
+                  </a:lnTo>
+                  <a:lnTo>
+                    <a:pt x="3877270" y="3172631"/>
+                  </a:lnTo>
+                  <a:lnTo>
+                    <a:pt x="3948892" y="3186209"/>
+                  </a:lnTo>
+                  <a:lnTo>
+                    <a:pt x="4020515" y="3199193"/>
+                  </a:lnTo>
+                  <a:lnTo>
+                    <a:pt x="4092137" y="3211612"/>
+                  </a:lnTo>
+                  <a:lnTo>
+                    <a:pt x="4163760" y="3223488"/>
+                  </a:lnTo>
+                  <a:lnTo>
+                    <a:pt x="4235382" y="3234846"/>
+                  </a:lnTo>
+                  <a:lnTo>
+                    <a:pt x="4307005" y="3245708"/>
+                  </a:lnTo>
+                  <a:lnTo>
+                    <a:pt x="4378627" y="3256096"/>
+                  </a:lnTo>
+                  <a:lnTo>
+                    <a:pt x="4450250" y="3266031"/>
+                  </a:lnTo>
+                  <a:lnTo>
+                    <a:pt x="4521872" y="3275532"/>
+                  </a:lnTo>
+                  <a:lnTo>
+                    <a:pt x="4593495" y="3284619"/>
+                  </a:lnTo>
+                  <a:lnTo>
+                    <a:pt x="4665117" y="3293309"/>
+                  </a:lnTo>
+                  <a:lnTo>
+                    <a:pt x="4736740" y="3301620"/>
+                  </a:lnTo>
+                  <a:lnTo>
+                    <a:pt x="4808362" y="3309568"/>
+                  </a:lnTo>
+                  <a:lnTo>
+                    <a:pt x="4879985" y="3317169"/>
+                  </a:lnTo>
+                  <a:lnTo>
+                    <a:pt x="4951608" y="3324439"/>
+                  </a:lnTo>
+                  <a:lnTo>
+                    <a:pt x="5023230" y="3331391"/>
+                  </a:lnTo>
+                  <a:lnTo>
+                    <a:pt x="5094853" y="3338040"/>
+                  </a:lnTo>
+                  <a:lnTo>
+                    <a:pt x="5166475" y="3344399"/>
+                  </a:lnTo>
+                  <a:lnTo>
+                    <a:pt x="5238098" y="3350480"/>
+                  </a:lnTo>
+                  <a:lnTo>
+                    <a:pt x="5309720" y="3356296"/>
+                  </a:lnTo>
+                  <a:lnTo>
+                    <a:pt x="5381343" y="3361858"/>
+                  </a:lnTo>
+                  <a:lnTo>
+                    <a:pt x="5452965" y="3367177"/>
+                  </a:lnTo>
+                  <a:lnTo>
+                    <a:pt x="5524588" y="3372264"/>
+                  </a:lnTo>
+                  <a:lnTo>
+                    <a:pt x="5596210" y="3377129"/>
+                  </a:lnTo>
+                  <a:lnTo>
+                    <a:pt x="5667833" y="3381782"/>
+                  </a:lnTo>
+                  <a:lnTo>
+                    <a:pt x="5739455" y="3386232"/>
+                  </a:lnTo>
+                  <a:lnTo>
+                    <a:pt x="5811078" y="3390488"/>
+                  </a:lnTo>
+                  <a:lnTo>
+                    <a:pt x="5882700" y="3394558"/>
+                  </a:lnTo>
+                  <a:lnTo>
+                    <a:pt x="5954323" y="3398450"/>
+                  </a:lnTo>
+                  <a:lnTo>
+                    <a:pt x="6025945" y="3402172"/>
+                  </a:lnTo>
+                  <a:lnTo>
+                    <a:pt x="6097568" y="3405732"/>
                   </a:lnTo>
                 </a:path>
               </a:pathLst>
@@ -4392,7 +4367,7 @@
         </p:sp>
         <p:sp>
           <p:nvSpPr>
-            <p:cNvPr id="25" name="pl25"/>
+            <p:cNvPr id="24" name="pl24"/>
             <p:cNvSpPr/>
             <p:nvPr/>
           </p:nvSpPr>
@@ -4435,13 +4410,13 @@
         </p:sp>
         <p:sp>
           <p:nvSpPr>
-            <p:cNvPr id="26" name="pl26"/>
+            <p:cNvPr id="25" name="pl25"/>
             <p:cNvSpPr/>
             <p:nvPr/>
           </p:nvSpPr>
           <p:spPr>
             <a:xfrm>
-              <a:off x="4117484" y="2073503"/>
+              <a:off x="4468386" y="2073503"/>
               <a:ext cx="0" cy="3649639"/>
             </a:xfrm>
             <a:custGeom>
@@ -4478,7 +4453,7 @@
         </p:sp>
         <p:sp>
           <p:nvSpPr>
-            <p:cNvPr id="27" name="tx27"/>
+            <p:cNvPr id="26" name="tx26"/>
             <p:cNvSpPr/>
             <p:nvPr/>
           </p:nvSpPr>
@@ -4524,7 +4499,7 @@
         </p:sp>
         <p:sp>
           <p:nvSpPr>
-            <p:cNvPr id="28" name="tx28"/>
+            <p:cNvPr id="27" name="tx27"/>
             <p:cNvSpPr/>
             <p:nvPr/>
           </p:nvSpPr>
@@ -4570,7 +4545,7 @@
         </p:sp>
         <p:sp>
           <p:nvSpPr>
-            <p:cNvPr id="29" name="tx29"/>
+            <p:cNvPr id="28" name="tx28"/>
             <p:cNvSpPr/>
             <p:nvPr/>
           </p:nvSpPr>
@@ -4616,7 +4591,7 @@
         </p:sp>
         <p:sp>
           <p:nvSpPr>
-            <p:cNvPr id="30" name="tx30"/>
+            <p:cNvPr id="29" name="tx29"/>
             <p:cNvSpPr/>
             <p:nvPr/>
           </p:nvSpPr>
@@ -4662,7 +4637,7 @@
         </p:sp>
         <p:sp>
           <p:nvSpPr>
-            <p:cNvPr id="31" name="tx31"/>
+            <p:cNvPr id="30" name="tx30"/>
             <p:cNvSpPr/>
             <p:nvPr/>
           </p:nvSpPr>
@@ -4708,14 +4683,14 @@
         </p:sp>
         <p:sp>
           <p:nvSpPr>
-            <p:cNvPr id="32" name="tx32"/>
+            <p:cNvPr id="31" name="tx31"/>
             <p:cNvSpPr/>
             <p:nvPr/>
           </p:nvSpPr>
           <p:spPr>
             <a:xfrm>
-              <a:off x="2423864" y="5785772"/>
-              <a:ext cx="155356" cy="80101"/>
+              <a:off x="2478335" y="5785772"/>
+              <a:ext cx="161574" cy="80101"/>
             </a:xfrm>
             <a:prstGeom prst="rect">
               <a:avLst/>
@@ -4747,21 +4722,21 @@
                   <a:latin typeface="Helvetica"/>
                   <a:cs typeface="Helvetica"/>
                 </a:rPr>
-                <a:t>0.8</a:t>
+                <a:t>-25</a:t>
               </a:r>
             </a:p>
           </p:txBody>
         </p:sp>
         <p:sp>
           <p:nvSpPr>
-            <p:cNvPr id="33" name="tx33"/>
+            <p:cNvPr id="32" name="tx32"/>
             <p:cNvSpPr/>
             <p:nvPr/>
           </p:nvSpPr>
           <p:spPr>
             <a:xfrm>
-              <a:off x="4196521" y="5785772"/>
-              <a:ext cx="155356" cy="80101"/>
+              <a:off x="4582608" y="5785772"/>
+              <a:ext cx="62179" cy="80101"/>
             </a:xfrm>
             <a:prstGeom prst="rect">
               <a:avLst/>
@@ -4793,21 +4768,21 @@
                   <a:latin typeface="Helvetica"/>
                   <a:cs typeface="Helvetica"/>
                 </a:rPr>
-                <a:t>1.0</a:t>
+                <a:t>0</a:t>
               </a:r>
             </a:p>
           </p:txBody>
         </p:sp>
         <p:sp>
           <p:nvSpPr>
-            <p:cNvPr id="34" name="tx34"/>
+            <p:cNvPr id="33" name="tx33"/>
             <p:cNvSpPr/>
             <p:nvPr/>
           </p:nvSpPr>
           <p:spPr>
             <a:xfrm>
-              <a:off x="5969179" y="5785772"/>
-              <a:ext cx="155356" cy="80101"/>
+              <a:off x="6606094" y="5785772"/>
+              <a:ext cx="124358" cy="80101"/>
             </a:xfrm>
             <a:prstGeom prst="rect">
               <a:avLst/>
@@ -4839,67 +4814,21 @@
                   <a:latin typeface="Helvetica"/>
                   <a:cs typeface="Helvetica"/>
                 </a:rPr>
-                <a:t>1.2</a:t>
+                <a:t>25</a:t>
               </a:r>
             </a:p>
           </p:txBody>
         </p:sp>
         <p:sp>
           <p:nvSpPr>
-            <p:cNvPr id="35" name="tx35"/>
+            <p:cNvPr id="34" name="tx34"/>
             <p:cNvSpPr/>
             <p:nvPr/>
           </p:nvSpPr>
           <p:spPr>
             <a:xfrm>
-              <a:off x="7741836" y="5785772"/>
-              <a:ext cx="155356" cy="80101"/>
-            </a:xfrm>
-            <a:prstGeom prst="rect">
-              <a:avLst/>
-            </a:prstGeom>
-            <a:noFill/>
-          </p:spPr>
-          <p:txBody>
-            <a:bodyPr lIns="0" rIns="0" tIns="0" bIns="0" anchorCtr="1" anchor="ctr" wrap="none"/>
-            <a:lstStyle/>
-            <a:p>
-              <a:pPr algn="l" marL="0" marR="0" indent="0">
-                <a:lnSpc>
-                  <a:spcPts val="880"/>
-                </a:lnSpc>
-                <a:spcBef>
-                  <a:spcPts val="0"/>
-                </a:spcBef>
-                <a:spcAft>
-                  <a:spcPts val="0"/>
-                </a:spcAft>
-              </a:pPr>
-              <a:r>
-                <a:rPr sz="880">
-                  <a:solidFill>
-                    <a:srgbClr val="4D4D4D">
-                      <a:alpha val="100000"/>
-                    </a:srgbClr>
-                  </a:solidFill>
-                  <a:latin typeface="Helvetica"/>
-                  <a:cs typeface="Helvetica"/>
-                </a:rPr>
-                <a:t>1.4</a:t>
-              </a:r>
-            </a:p>
-          </p:txBody>
-        </p:sp>
-        <p:sp>
-          <p:nvSpPr>
-            <p:cNvPr id="36" name="tx36"/>
-            <p:cNvSpPr/>
-            <p:nvPr/>
-          </p:nvSpPr>
-          <p:spPr>
-            <a:xfrm>
-              <a:off x="3879271" y="5925448"/>
-              <a:ext cx="1676186" cy="100218"/>
+              <a:off x="2928340" y="5925448"/>
+              <a:ext cx="3578047" cy="100218"/>
             </a:xfrm>
             <a:prstGeom prst="rect">
               <a:avLst/>
@@ -4931,14 +4860,14 @@
                   <a:latin typeface="Helvetica"/>
                   <a:cs typeface="Helvetica"/>
                 </a:rPr>
-                <a:t>CKD-EPI Cr-Cys / CG ratio</a:t>
+                <a:t>eGFR difference (%): 100 × (CKD-EPI Cr-Cys − CG) / CG</a:t>
               </a:r>
             </a:p>
           </p:txBody>
         </p:sp>
         <p:sp>
           <p:nvSpPr>
-            <p:cNvPr id="37" name="tx37"/>
+            <p:cNvPr id="35" name="tx35"/>
             <p:cNvSpPr/>
             <p:nvPr/>
           </p:nvSpPr>
@@ -4984,14 +4913,14 @@
         </p:sp>
         <p:sp>
           <p:nvSpPr>
-            <p:cNvPr id="38" name="tx38"/>
+            <p:cNvPr id="36" name="tx36"/>
             <p:cNvSpPr/>
             <p:nvPr/>
           </p:nvSpPr>
           <p:spPr>
             <a:xfrm>
               <a:off x="817517" y="1896563"/>
-              <a:ext cx="6232916" cy="82021"/>
+              <a:ext cx="6385163" cy="82021"/>
             </a:xfrm>
             <a:prstGeom prst="rect">
               <a:avLst/>
@@ -5023,14 +4952,14 @@
                   <a:latin typeface="Helvetica"/>
                   <a:cs typeface="Helvetica"/>
                 </a:rPr>
-                <a:t>subHR per 0.1 ratio decline: 1.67 (1.15-2.43), p = 0.007  |  per IQR decline (Δ = 0.30): 4.54 (1.50-13.73)  |  IQR: [0.84, 1.14]</a:t>
+                <a:t>subHR per 10 % decline: 1.67 (1.15-2.43), p = 0.007  |  per IQR decline (Δ = 29.5 %): 4.54 (1.50-13.73)  |  IQR: [-15.6, 13.9] %</a:t>
               </a:r>
             </a:p>
           </p:txBody>
         </p:sp>
         <p:sp>
           <p:nvSpPr>
-            <p:cNvPr id="39" name="tx39"/>
+            <p:cNvPr id="37" name="tx37"/>
             <p:cNvSpPr/>
             <p:nvPr/>
           </p:nvSpPr>

--- a/docs/pptx/auc3/jx-auc3-linsubhr-ratio-hosp1.pptx
+++ b/docs/pptx/auc3/jx-auc3-linsubhr-ratio-hosp1.pptx
@@ -2265,34 +2265,26 @@
         </p:sp>
         <p:sp>
           <p:nvSpPr>
-            <p:cNvPr id="4" name="pl4"/>
+            <p:cNvPr id="4" name="rc4"/>
             <p:cNvSpPr/>
             <p:nvPr/>
           </p:nvSpPr>
           <p:spPr>
             <a:xfrm>
-              <a:off x="817517" y="5142518"/>
-              <a:ext cx="7799693" cy="0"/>
+              <a:off x="457200" y="1600200"/>
+              <a:ext cx="8229600" cy="4525962"/>
             </a:xfrm>
-            <a:custGeom>
+            <a:prstGeom prst="rect">
               <a:avLst/>
-              <a:pathLst>
-                <a:path w="7799693" h="0">
-                  <a:moveTo>
-                    <a:pt x="0" y="0"/>
-                  </a:moveTo>
-                  <a:lnTo>
-                    <a:pt x="7799693" y="0"/>
-                  </a:lnTo>
-                  <a:lnTo>
-                    <a:pt x="7799693" y="0"/>
-                  </a:lnTo>
-                </a:path>
-              </a:pathLst>
-            </a:custGeom>
-            <a:ln w="6775" cap="flat">
+            </a:prstGeom>
+            <a:solidFill>
+              <a:srgbClr val="FFFFFF">
+                <a:alpha val="100000"/>
+              </a:srgbClr>
+            </a:solidFill>
+            <a:ln w="13550" cap="rnd">
               <a:solidFill>
-                <a:srgbClr val="EBEBEB">
+                <a:srgbClr val="FFFFFF">
                   <a:alpha val="100000"/>
                 </a:srgbClr>
               </a:solidFill>
@@ -2314,21 +2306,21 @@
           </p:nvSpPr>
           <p:spPr>
             <a:xfrm>
-              <a:off x="817517" y="4313054"/>
-              <a:ext cx="7799693" cy="0"/>
+              <a:off x="887106" y="3250627"/>
+              <a:ext cx="7660515" cy="0"/>
             </a:xfrm>
             <a:custGeom>
               <a:avLst/>
               <a:pathLst>
-                <a:path w="7799693" h="0">
+                <a:path w="7660515" h="0">
                   <a:moveTo>
                     <a:pt x="0" y="0"/>
                   </a:moveTo>
                   <a:lnTo>
-                    <a:pt x="7799693" y="0"/>
-                  </a:lnTo>
-                  <a:lnTo>
-                    <a:pt x="7799693" y="0"/>
+                    <a:pt x="7660515" y="0"/>
+                  </a:lnTo>
+                  <a:lnTo>
+                    <a:pt x="7660515" y="0"/>
                   </a:lnTo>
                 </a:path>
               </a:pathLst>
@@ -2357,21 +2349,21 @@
           </p:nvSpPr>
           <p:spPr>
             <a:xfrm>
-              <a:off x="817517" y="3483591"/>
-              <a:ext cx="7799693" cy="0"/>
+              <a:off x="887106" y="2951293"/>
+              <a:ext cx="7660515" cy="0"/>
             </a:xfrm>
             <a:custGeom>
               <a:avLst/>
               <a:pathLst>
-                <a:path w="7799693" h="0">
+                <a:path w="7660515" h="0">
                   <a:moveTo>
                     <a:pt x="0" y="0"/>
                   </a:moveTo>
                   <a:lnTo>
-                    <a:pt x="7799693" y="0"/>
-                  </a:lnTo>
-                  <a:lnTo>
-                    <a:pt x="7799693" y="0"/>
+                    <a:pt x="7660515" y="0"/>
+                  </a:lnTo>
+                  <a:lnTo>
+                    <a:pt x="7660515" y="0"/>
                   </a:lnTo>
                 </a:path>
               </a:pathLst>
@@ -2400,21 +2392,21 @@
           </p:nvSpPr>
           <p:spPr>
             <a:xfrm>
-              <a:off x="817517" y="2654127"/>
-              <a:ext cx="7799693" cy="0"/>
+              <a:off x="887106" y="2651959"/>
+              <a:ext cx="7660515" cy="0"/>
             </a:xfrm>
             <a:custGeom>
               <a:avLst/>
               <a:pathLst>
-                <a:path w="7799693" h="0">
+                <a:path w="7660515" h="0">
                   <a:moveTo>
                     <a:pt x="0" y="0"/>
                   </a:moveTo>
                   <a:lnTo>
-                    <a:pt x="7799693" y="0"/>
-                  </a:lnTo>
-                  <a:lnTo>
-                    <a:pt x="7799693" y="0"/>
+                    <a:pt x="7660515" y="0"/>
+                  </a:lnTo>
+                  <a:lnTo>
+                    <a:pt x="7660515" y="0"/>
                   </a:lnTo>
                 </a:path>
               </a:pathLst>
@@ -2443,21 +2435,21 @@
           </p:nvSpPr>
           <p:spPr>
             <a:xfrm>
-              <a:off x="1531834" y="2073503"/>
-              <a:ext cx="0" cy="3649639"/>
+              <a:off x="887106" y="2352625"/>
+              <a:ext cx="7660515" cy="0"/>
             </a:xfrm>
             <a:custGeom>
               <a:avLst/>
               <a:pathLst>
-                <a:path w="0" h="3649639">
+                <a:path w="7660515" h="0">
                   <a:moveTo>
-                    <a:pt x="0" y="3649639"/>
+                    <a:pt x="0" y="0"/>
                   </a:moveTo>
                   <a:lnTo>
-                    <a:pt x="0" y="0"/>
-                  </a:lnTo>
-                  <a:lnTo>
-                    <a:pt x="0" y="0"/>
+                    <a:pt x="7660515" y="0"/>
+                  </a:lnTo>
+                  <a:lnTo>
+                    <a:pt x="7660515" y="0"/>
                   </a:lnTo>
                 </a:path>
               </a:pathLst>
@@ -2486,15 +2478,15 @@
           </p:nvSpPr>
           <p:spPr>
             <a:xfrm>
-              <a:off x="3586410" y="2073503"/>
-              <a:ext cx="0" cy="3649639"/>
+              <a:off x="1588677" y="2143092"/>
+              <a:ext cx="0" cy="1317069"/>
             </a:xfrm>
             <a:custGeom>
               <a:avLst/>
               <a:pathLst>
-                <a:path w="0" h="3649639">
+                <a:path w="0" h="1317069">
                   <a:moveTo>
-                    <a:pt x="0" y="3649639"/>
+                    <a:pt x="0" y="1317069"/>
                   </a:moveTo>
                   <a:lnTo>
                     <a:pt x="0" y="0"/>
@@ -2529,15 +2521,15 @@
           </p:nvSpPr>
           <p:spPr>
             <a:xfrm>
-              <a:off x="5640985" y="2073503"/>
-              <a:ext cx="0" cy="3649639"/>
+              <a:off x="3606590" y="2143092"/>
+              <a:ext cx="0" cy="1317069"/>
             </a:xfrm>
             <a:custGeom>
               <a:avLst/>
               <a:pathLst>
-                <a:path w="0" h="3649639">
+                <a:path w="0" h="1317069">
                   <a:moveTo>
-                    <a:pt x="0" y="3649639"/>
+                    <a:pt x="0" y="1317069"/>
                   </a:moveTo>
                   <a:lnTo>
                     <a:pt x="0" y="0"/>
@@ -2572,15 +2564,15 @@
           </p:nvSpPr>
           <p:spPr>
             <a:xfrm>
-              <a:off x="7695561" y="2073503"/>
-              <a:ext cx="0" cy="3649639"/>
+              <a:off x="5624504" y="2143092"/>
+              <a:ext cx="0" cy="1317069"/>
             </a:xfrm>
             <a:custGeom>
               <a:avLst/>
               <a:pathLst>
-                <a:path w="0" h="3649639">
+                <a:path w="0" h="1317069">
                   <a:moveTo>
-                    <a:pt x="0" y="3649639"/>
+                    <a:pt x="0" y="1317069"/>
                   </a:moveTo>
                   <a:lnTo>
                     <a:pt x="0" y="0"/>
@@ -2615,26 +2607,26 @@
           </p:nvSpPr>
           <p:spPr>
             <a:xfrm>
-              <a:off x="817517" y="5557249"/>
-              <a:ext cx="7799693" cy="0"/>
+              <a:off x="7642418" y="2143092"/>
+              <a:ext cx="0" cy="1317069"/>
             </a:xfrm>
             <a:custGeom>
               <a:avLst/>
               <a:pathLst>
-                <a:path w="7799693" h="0">
+                <a:path w="0" h="1317069">
                   <a:moveTo>
+                    <a:pt x="0" y="1317069"/>
+                  </a:moveTo>
+                  <a:lnTo>
                     <a:pt x="0" y="0"/>
-                  </a:moveTo>
-                  <a:lnTo>
-                    <a:pt x="7799693" y="0"/>
-                  </a:lnTo>
-                  <a:lnTo>
-                    <a:pt x="7799693" y="0"/>
+                  </a:lnTo>
+                  <a:lnTo>
+                    <a:pt x="0" y="0"/>
                   </a:lnTo>
                 </a:path>
               </a:pathLst>
             </a:custGeom>
-            <a:ln w="13550" cap="flat">
+            <a:ln w="6775" cap="flat">
               <a:solidFill>
                 <a:srgbClr val="EBEBEB">
                   <a:alpha val="100000"/>
@@ -2658,21 +2650,21 @@
           </p:nvSpPr>
           <p:spPr>
             <a:xfrm>
-              <a:off x="817517" y="4727786"/>
-              <a:ext cx="7799693" cy="0"/>
+              <a:off x="887106" y="3400294"/>
+              <a:ext cx="7660515" cy="0"/>
             </a:xfrm>
             <a:custGeom>
               <a:avLst/>
               <a:pathLst>
-                <a:path w="7799693" h="0">
+                <a:path w="7660515" h="0">
                   <a:moveTo>
                     <a:pt x="0" y="0"/>
                   </a:moveTo>
                   <a:lnTo>
-                    <a:pt x="7799693" y="0"/>
-                  </a:lnTo>
-                  <a:lnTo>
-                    <a:pt x="7799693" y="0"/>
+                    <a:pt x="7660515" y="0"/>
+                  </a:lnTo>
+                  <a:lnTo>
+                    <a:pt x="7660515" y="0"/>
                   </a:lnTo>
                 </a:path>
               </a:pathLst>
@@ -2701,21 +2693,21 @@
           </p:nvSpPr>
           <p:spPr>
             <a:xfrm>
-              <a:off x="817517" y="3898322"/>
-              <a:ext cx="7799693" cy="0"/>
+              <a:off x="887106" y="3100960"/>
+              <a:ext cx="7660515" cy="0"/>
             </a:xfrm>
             <a:custGeom>
               <a:avLst/>
               <a:pathLst>
-                <a:path w="7799693" h="0">
+                <a:path w="7660515" h="0">
                   <a:moveTo>
                     <a:pt x="0" y="0"/>
                   </a:moveTo>
                   <a:lnTo>
-                    <a:pt x="7799693" y="0"/>
-                  </a:lnTo>
-                  <a:lnTo>
-                    <a:pt x="7799693" y="0"/>
+                    <a:pt x="7660515" y="0"/>
+                  </a:lnTo>
+                  <a:lnTo>
+                    <a:pt x="7660515" y="0"/>
                   </a:lnTo>
                 </a:path>
               </a:pathLst>
@@ -2744,21 +2736,21 @@
           </p:nvSpPr>
           <p:spPr>
             <a:xfrm>
-              <a:off x="817517" y="3068859"/>
-              <a:ext cx="7799693" cy="0"/>
+              <a:off x="887106" y="2801626"/>
+              <a:ext cx="7660515" cy="0"/>
             </a:xfrm>
             <a:custGeom>
               <a:avLst/>
               <a:pathLst>
-                <a:path w="7799693" h="0">
+                <a:path w="7660515" h="0">
                   <a:moveTo>
                     <a:pt x="0" y="0"/>
                   </a:moveTo>
                   <a:lnTo>
-                    <a:pt x="7799693" y="0"/>
-                  </a:lnTo>
-                  <a:lnTo>
-                    <a:pt x="7799693" y="0"/>
+                    <a:pt x="7660515" y="0"/>
+                  </a:lnTo>
+                  <a:lnTo>
+                    <a:pt x="7660515" y="0"/>
                   </a:lnTo>
                 </a:path>
               </a:pathLst>
@@ -2787,21 +2779,21 @@
           </p:nvSpPr>
           <p:spPr>
             <a:xfrm>
-              <a:off x="817517" y="2239395"/>
-              <a:ext cx="7799693" cy="0"/>
+              <a:off x="887106" y="2502292"/>
+              <a:ext cx="7660515" cy="0"/>
             </a:xfrm>
             <a:custGeom>
               <a:avLst/>
               <a:pathLst>
-                <a:path w="7799693" h="0">
+                <a:path w="7660515" h="0">
                   <a:moveTo>
                     <a:pt x="0" y="0"/>
                   </a:moveTo>
                   <a:lnTo>
-                    <a:pt x="7799693" y="0"/>
-                  </a:lnTo>
-                  <a:lnTo>
-                    <a:pt x="7799693" y="0"/>
+                    <a:pt x="7660515" y="0"/>
+                  </a:lnTo>
+                  <a:lnTo>
+                    <a:pt x="7660515" y="0"/>
                   </a:lnTo>
                 </a:path>
               </a:pathLst>
@@ -2830,21 +2822,21 @@
           </p:nvSpPr>
           <p:spPr>
             <a:xfrm>
-              <a:off x="2559122" y="2073503"/>
-              <a:ext cx="0" cy="3649639"/>
+              <a:off x="887106" y="2202958"/>
+              <a:ext cx="7660515" cy="0"/>
             </a:xfrm>
             <a:custGeom>
               <a:avLst/>
               <a:pathLst>
-                <a:path w="0" h="3649639">
+                <a:path w="7660515" h="0">
                   <a:moveTo>
-                    <a:pt x="0" y="3649639"/>
+                    <a:pt x="0" y="0"/>
                   </a:moveTo>
                   <a:lnTo>
-                    <a:pt x="0" y="0"/>
-                  </a:lnTo>
-                  <a:lnTo>
-                    <a:pt x="0" y="0"/>
+                    <a:pt x="7660515" y="0"/>
+                  </a:lnTo>
+                  <a:lnTo>
+                    <a:pt x="7660515" y="0"/>
                   </a:lnTo>
                 </a:path>
               </a:pathLst>
@@ -2873,15 +2865,15 @@
           </p:nvSpPr>
           <p:spPr>
             <a:xfrm>
-              <a:off x="4613698" y="2073503"/>
-              <a:ext cx="0" cy="3649639"/>
+              <a:off x="2597634" y="2143092"/>
+              <a:ext cx="0" cy="1317069"/>
             </a:xfrm>
             <a:custGeom>
               <a:avLst/>
               <a:pathLst>
-                <a:path w="0" h="3649639">
+                <a:path w="0" h="1317069">
                   <a:moveTo>
-                    <a:pt x="0" y="3649639"/>
+                    <a:pt x="0" y="1317069"/>
                   </a:moveTo>
                   <a:lnTo>
                     <a:pt x="0" y="0"/>
@@ -2916,15 +2908,15 @@
           </p:nvSpPr>
           <p:spPr>
             <a:xfrm>
-              <a:off x="6668273" y="2073503"/>
-              <a:ext cx="0" cy="3649639"/>
+              <a:off x="4615547" y="2143092"/>
+              <a:ext cx="0" cy="1317069"/>
             </a:xfrm>
             <a:custGeom>
               <a:avLst/>
               <a:pathLst>
-                <a:path w="0" h="3649639">
+                <a:path w="0" h="1317069">
                   <a:moveTo>
-                    <a:pt x="0" y="3649639"/>
+                    <a:pt x="0" y="1317069"/>
                   </a:moveTo>
                   <a:lnTo>
                     <a:pt x="0" y="0"/>
@@ -2953,537 +2945,580 @@
         </p:sp>
         <p:sp>
           <p:nvSpPr>
-            <p:cNvPr id="20" name="pg20"/>
+            <p:cNvPr id="20" name="pl20"/>
             <p:cNvSpPr/>
             <p:nvPr/>
           </p:nvSpPr>
           <p:spPr>
             <a:xfrm>
-              <a:off x="1172049" y="2073503"/>
-              <a:ext cx="7090630" cy="3469934"/>
+              <a:off x="6633461" y="2143092"/>
+              <a:ext cx="0" cy="1317069"/>
             </a:xfrm>
             <a:custGeom>
               <a:avLst/>
               <a:pathLst>
-                <a:path w="7090630" h="3469934">
+                <a:path w="0" h="1317069">
                   <a:moveTo>
-                    <a:pt x="1967383" y="0"/>
+                    <a:pt x="0" y="1317069"/>
                   </a:moveTo>
                   <a:lnTo>
-                    <a:pt x="2005430" y="142642"/>
-                  </a:lnTo>
-                  <a:lnTo>
-                    <a:pt x="2077053" y="391186"/>
-                  </a:lnTo>
-                  <a:lnTo>
-                    <a:pt x="2148675" y="621242"/>
-                  </a:lnTo>
-                  <a:lnTo>
-                    <a:pt x="2220298" y="834184"/>
-                  </a:lnTo>
-                  <a:lnTo>
-                    <a:pt x="2291920" y="1031285"/>
-                  </a:lnTo>
-                  <a:lnTo>
-                    <a:pt x="2363543" y="1213723"/>
-                  </a:lnTo>
-                  <a:lnTo>
-                    <a:pt x="2435165" y="1382590"/>
-                  </a:lnTo>
-                  <a:lnTo>
-                    <a:pt x="2506788" y="1538895"/>
-                  </a:lnTo>
-                  <a:lnTo>
-                    <a:pt x="2578410" y="1683573"/>
-                  </a:lnTo>
-                  <a:lnTo>
-                    <a:pt x="2650033" y="1817488"/>
-                  </a:lnTo>
-                  <a:lnTo>
-                    <a:pt x="2721655" y="1941441"/>
-                  </a:lnTo>
-                  <a:lnTo>
-                    <a:pt x="2793278" y="2056173"/>
-                  </a:lnTo>
-                  <a:lnTo>
-                    <a:pt x="2864901" y="2162370"/>
-                  </a:lnTo>
-                  <a:lnTo>
-                    <a:pt x="2936523" y="2260667"/>
-                  </a:lnTo>
-                  <a:lnTo>
-                    <a:pt x="3008146" y="2351652"/>
-                  </a:lnTo>
-                  <a:lnTo>
-                    <a:pt x="3079768" y="2435869"/>
-                  </a:lnTo>
-                  <a:lnTo>
-                    <a:pt x="3151391" y="2513820"/>
-                  </a:lnTo>
-                  <a:lnTo>
-                    <a:pt x="3223013" y="2585973"/>
-                  </a:lnTo>
-                  <a:lnTo>
-                    <a:pt x="3294636" y="2652758"/>
-                  </a:lnTo>
-                  <a:lnTo>
-                    <a:pt x="3366258" y="2663896"/>
-                  </a:lnTo>
-                  <a:lnTo>
-                    <a:pt x="3437881" y="2673628"/>
-                  </a:lnTo>
-                  <a:lnTo>
-                    <a:pt x="3509503" y="2683244"/>
-                  </a:lnTo>
-                  <a:lnTo>
-                    <a:pt x="3581126" y="2692746"/>
-                  </a:lnTo>
-                  <a:lnTo>
-                    <a:pt x="3652748" y="2702135"/>
-                  </a:lnTo>
-                  <a:lnTo>
-                    <a:pt x="3724371" y="2711413"/>
-                  </a:lnTo>
-                  <a:lnTo>
-                    <a:pt x="3795993" y="2720580"/>
-                  </a:lnTo>
-                  <a:lnTo>
-                    <a:pt x="3867616" y="2729639"/>
-                  </a:lnTo>
-                  <a:lnTo>
-                    <a:pt x="3939238" y="2738590"/>
-                  </a:lnTo>
-                  <a:lnTo>
-                    <a:pt x="4010861" y="2747435"/>
-                  </a:lnTo>
-                  <a:lnTo>
-                    <a:pt x="4082483" y="2756175"/>
-                  </a:lnTo>
-                  <a:lnTo>
-                    <a:pt x="4154106" y="2764812"/>
-                  </a:lnTo>
-                  <a:lnTo>
-                    <a:pt x="4225729" y="2773345"/>
-                  </a:lnTo>
-                  <a:lnTo>
-                    <a:pt x="4297351" y="2781778"/>
-                  </a:lnTo>
-                  <a:lnTo>
-                    <a:pt x="4368974" y="2790110"/>
-                  </a:lnTo>
-                  <a:lnTo>
-                    <a:pt x="4440596" y="2798344"/>
-                  </a:lnTo>
-                  <a:lnTo>
-                    <a:pt x="4512219" y="2806479"/>
-                  </a:lnTo>
-                  <a:lnTo>
-                    <a:pt x="4583841" y="2814518"/>
-                  </a:lnTo>
-                  <a:lnTo>
-                    <a:pt x="4655464" y="2822462"/>
-                  </a:lnTo>
-                  <a:lnTo>
-                    <a:pt x="4727086" y="2830312"/>
-                  </a:lnTo>
-                  <a:lnTo>
-                    <a:pt x="4798709" y="2838068"/>
-                  </a:lnTo>
-                  <a:lnTo>
-                    <a:pt x="4870331" y="2845732"/>
-                  </a:lnTo>
-                  <a:lnTo>
-                    <a:pt x="4941954" y="2853305"/>
-                  </a:lnTo>
-                  <a:lnTo>
-                    <a:pt x="5013576" y="2860789"/>
-                  </a:lnTo>
-                  <a:lnTo>
-                    <a:pt x="5085199" y="2868183"/>
-                  </a:lnTo>
-                  <a:lnTo>
-                    <a:pt x="5156821" y="2875490"/>
-                  </a:lnTo>
-                  <a:lnTo>
-                    <a:pt x="5228444" y="2882710"/>
-                  </a:lnTo>
-                  <a:lnTo>
-                    <a:pt x="5300066" y="2889844"/>
-                  </a:lnTo>
-                  <a:lnTo>
-                    <a:pt x="5371689" y="2896894"/>
-                  </a:lnTo>
-                  <a:lnTo>
-                    <a:pt x="5443311" y="2903860"/>
-                  </a:lnTo>
-                  <a:lnTo>
-                    <a:pt x="5514934" y="2910743"/>
-                  </a:lnTo>
-                  <a:lnTo>
-                    <a:pt x="5586557" y="2917544"/>
-                  </a:lnTo>
-                  <a:lnTo>
-                    <a:pt x="5658179" y="2924265"/>
-                  </a:lnTo>
-                  <a:lnTo>
-                    <a:pt x="5729802" y="2930906"/>
-                  </a:lnTo>
-                  <a:lnTo>
-                    <a:pt x="5801424" y="2937469"/>
-                  </a:lnTo>
-                  <a:lnTo>
-                    <a:pt x="5873047" y="2943953"/>
-                  </a:lnTo>
-                  <a:lnTo>
-                    <a:pt x="5944669" y="2950360"/>
-                  </a:lnTo>
-                  <a:lnTo>
-                    <a:pt x="6016292" y="2956691"/>
-                  </a:lnTo>
-                  <a:lnTo>
-                    <a:pt x="6087914" y="2962948"/>
-                  </a:lnTo>
-                  <a:lnTo>
-                    <a:pt x="6159537" y="2969129"/>
-                  </a:lnTo>
-                  <a:lnTo>
-                    <a:pt x="6231159" y="2975238"/>
-                  </a:lnTo>
-                  <a:lnTo>
-                    <a:pt x="6302782" y="2981274"/>
-                  </a:lnTo>
-                  <a:lnTo>
-                    <a:pt x="6374404" y="2987238"/>
-                  </a:lnTo>
-                  <a:lnTo>
-                    <a:pt x="6446027" y="2993132"/>
-                  </a:lnTo>
-                  <a:lnTo>
-                    <a:pt x="6517649" y="2998955"/>
-                  </a:lnTo>
-                  <a:lnTo>
-                    <a:pt x="6589272" y="3004710"/>
-                  </a:lnTo>
-                  <a:lnTo>
-                    <a:pt x="6660894" y="3010396"/>
-                  </a:lnTo>
-                  <a:lnTo>
-                    <a:pt x="6732517" y="3016015"/>
-                  </a:lnTo>
-                  <a:lnTo>
-                    <a:pt x="6804139" y="3021567"/>
-                  </a:lnTo>
-                  <a:lnTo>
-                    <a:pt x="6875762" y="3027053"/>
-                  </a:lnTo>
-                  <a:lnTo>
-                    <a:pt x="6947385" y="3032474"/>
-                  </a:lnTo>
-                  <a:lnTo>
-                    <a:pt x="7019007" y="3037830"/>
-                  </a:lnTo>
-                  <a:lnTo>
-                    <a:pt x="7090630" y="3043123"/>
-                  </a:lnTo>
-                  <a:lnTo>
-                    <a:pt x="7090630" y="3469934"/>
-                  </a:lnTo>
-                  <a:lnTo>
-                    <a:pt x="7019007" y="3468824"/>
-                  </a:lnTo>
-                  <a:lnTo>
-                    <a:pt x="6947385" y="3467624"/>
-                  </a:lnTo>
-                  <a:lnTo>
-                    <a:pt x="6875762" y="3466328"/>
-                  </a:lnTo>
-                  <a:lnTo>
-                    <a:pt x="6804139" y="3464929"/>
-                  </a:lnTo>
-                  <a:lnTo>
-                    <a:pt x="6732517" y="3463416"/>
-                  </a:lnTo>
-                  <a:lnTo>
-                    <a:pt x="6660894" y="3461782"/>
-                  </a:lnTo>
-                  <a:lnTo>
-                    <a:pt x="6589272" y="3460017"/>
-                  </a:lnTo>
-                  <a:lnTo>
-                    <a:pt x="6517649" y="3458110"/>
-                  </a:lnTo>
-                  <a:lnTo>
-                    <a:pt x="6446027" y="3456050"/>
-                  </a:lnTo>
-                  <a:lnTo>
-                    <a:pt x="6374404" y="3453824"/>
-                  </a:lnTo>
-                  <a:lnTo>
-                    <a:pt x="6302782" y="3451419"/>
-                  </a:lnTo>
-                  <a:lnTo>
-                    <a:pt x="6231159" y="3448821"/>
-                  </a:lnTo>
-                  <a:lnTo>
-                    <a:pt x="6159537" y="3446014"/>
-                  </a:lnTo>
-                  <a:lnTo>
-                    <a:pt x="6087914" y="3442981"/>
-                  </a:lnTo>
-                  <a:lnTo>
-                    <a:pt x="6016292" y="3439705"/>
-                  </a:lnTo>
-                  <a:lnTo>
-                    <a:pt x="5944669" y="3436166"/>
-                  </a:lnTo>
-                  <a:lnTo>
-                    <a:pt x="5873047" y="3432342"/>
-                  </a:lnTo>
-                  <a:lnTo>
-                    <a:pt x="5801424" y="3428210"/>
-                  </a:lnTo>
-                  <a:lnTo>
-                    <a:pt x="5729802" y="3423747"/>
-                  </a:lnTo>
-                  <a:lnTo>
-                    <a:pt x="5658179" y="3418925"/>
-                  </a:lnTo>
-                  <a:lnTo>
-                    <a:pt x="5586557" y="3413715"/>
-                  </a:lnTo>
-                  <a:lnTo>
-                    <a:pt x="5514934" y="3408087"/>
-                  </a:lnTo>
-                  <a:lnTo>
-                    <a:pt x="5443311" y="3402006"/>
-                  </a:lnTo>
-                  <a:lnTo>
-                    <a:pt x="5371689" y="3395437"/>
-                  </a:lnTo>
-                  <a:lnTo>
-                    <a:pt x="5300066" y="3388340"/>
-                  </a:lnTo>
-                  <a:lnTo>
-                    <a:pt x="5228444" y="3380672"/>
-                  </a:lnTo>
-                  <a:lnTo>
-                    <a:pt x="5156821" y="3372388"/>
-                  </a:lnTo>
-                  <a:lnTo>
-                    <a:pt x="5085199" y="3363438"/>
-                  </a:lnTo>
-                  <a:lnTo>
-                    <a:pt x="5013576" y="3353769"/>
-                  </a:lnTo>
-                  <a:lnTo>
-                    <a:pt x="4941954" y="3343323"/>
-                  </a:lnTo>
-                  <a:lnTo>
-                    <a:pt x="4870331" y="3332037"/>
-                  </a:lnTo>
-                  <a:lnTo>
-                    <a:pt x="4798709" y="3319845"/>
-                  </a:lnTo>
-                  <a:lnTo>
-                    <a:pt x="4727086" y="3306672"/>
-                  </a:lnTo>
-                  <a:lnTo>
-                    <a:pt x="4655464" y="3292441"/>
-                  </a:lnTo>
-                  <a:lnTo>
-                    <a:pt x="4583841" y="3277066"/>
-                  </a:lnTo>
-                  <a:lnTo>
-                    <a:pt x="4512219" y="3260455"/>
-                  </a:lnTo>
-                  <a:lnTo>
-                    <a:pt x="4440596" y="3242510"/>
-                  </a:lnTo>
-                  <a:lnTo>
-                    <a:pt x="4368974" y="3223122"/>
-                  </a:lnTo>
-                  <a:lnTo>
-                    <a:pt x="4297351" y="3202176"/>
-                  </a:lnTo>
-                  <a:lnTo>
-                    <a:pt x="4225729" y="3179546"/>
-                  </a:lnTo>
-                  <a:lnTo>
-                    <a:pt x="4154106" y="3155098"/>
-                  </a:lnTo>
-                  <a:lnTo>
-                    <a:pt x="4082483" y="3128685"/>
-                  </a:lnTo>
-                  <a:lnTo>
-                    <a:pt x="4010861" y="3100150"/>
-                  </a:lnTo>
-                  <a:lnTo>
-                    <a:pt x="3939238" y="3069320"/>
-                  </a:lnTo>
-                  <a:lnTo>
-                    <a:pt x="3867616" y="3036014"/>
-                  </a:lnTo>
-                  <a:lnTo>
-                    <a:pt x="3795993" y="3000030"/>
-                  </a:lnTo>
-                  <a:lnTo>
-                    <a:pt x="3724371" y="2961154"/>
-                  </a:lnTo>
-                  <a:lnTo>
-                    <a:pt x="3652748" y="2919154"/>
-                  </a:lnTo>
-                  <a:lnTo>
-                    <a:pt x="3581126" y="2873779"/>
-                  </a:lnTo>
-                  <a:lnTo>
-                    <a:pt x="3509503" y="2824756"/>
-                  </a:lnTo>
-                  <a:lnTo>
-                    <a:pt x="3437881" y="2771794"/>
-                  </a:lnTo>
-                  <a:lnTo>
-                    <a:pt x="3366258" y="2714576"/>
-                  </a:lnTo>
-                  <a:lnTo>
-                    <a:pt x="3294636" y="2654048"/>
-                  </a:lnTo>
-                  <a:lnTo>
-                    <a:pt x="3223013" y="2644081"/>
-                  </a:lnTo>
-                  <a:lnTo>
-                    <a:pt x="3151391" y="2633994"/>
-                  </a:lnTo>
-                  <a:lnTo>
-                    <a:pt x="3079768" y="2623786"/>
-                  </a:lnTo>
-                  <a:lnTo>
-                    <a:pt x="3008146" y="2613456"/>
-                  </a:lnTo>
-                  <a:lnTo>
-                    <a:pt x="2936523" y="2603002"/>
-                  </a:lnTo>
-                  <a:lnTo>
-                    <a:pt x="2864901" y="2592422"/>
-                  </a:lnTo>
-                  <a:lnTo>
-                    <a:pt x="2793278" y="2581715"/>
-                  </a:lnTo>
-                  <a:lnTo>
-                    <a:pt x="2721655" y="2570879"/>
-                  </a:lnTo>
-                  <a:lnTo>
-                    <a:pt x="2650033" y="2559913"/>
-                  </a:lnTo>
-                  <a:lnTo>
-                    <a:pt x="2578410" y="2548815"/>
-                  </a:lnTo>
-                  <a:lnTo>
-                    <a:pt x="2506788" y="2537584"/>
-                  </a:lnTo>
-                  <a:lnTo>
-                    <a:pt x="2435165" y="2526219"/>
-                  </a:lnTo>
-                  <a:lnTo>
-                    <a:pt x="2363543" y="2514716"/>
-                  </a:lnTo>
-                  <a:lnTo>
-                    <a:pt x="2291920" y="2503076"/>
-                  </a:lnTo>
-                  <a:lnTo>
-                    <a:pt x="2220298" y="2491295"/>
-                  </a:lnTo>
-                  <a:lnTo>
-                    <a:pt x="2148675" y="2479373"/>
-                  </a:lnTo>
-                  <a:lnTo>
-                    <a:pt x="2077053" y="2467308"/>
-                  </a:lnTo>
-                  <a:lnTo>
-                    <a:pt x="2005430" y="2455098"/>
-                  </a:lnTo>
-                  <a:lnTo>
-                    <a:pt x="1933808" y="2442741"/>
-                  </a:lnTo>
-                  <a:lnTo>
-                    <a:pt x="1862185" y="2430236"/>
-                  </a:lnTo>
-                  <a:lnTo>
-                    <a:pt x="1790563" y="2417581"/>
-                  </a:lnTo>
-                  <a:lnTo>
-                    <a:pt x="1718940" y="2404774"/>
-                  </a:lnTo>
-                  <a:lnTo>
-                    <a:pt x="1647318" y="2391812"/>
-                  </a:lnTo>
-                  <a:lnTo>
-                    <a:pt x="1575695" y="2378695"/>
-                  </a:lnTo>
-                  <a:lnTo>
-                    <a:pt x="1504073" y="2365421"/>
-                  </a:lnTo>
-                  <a:lnTo>
-                    <a:pt x="1432450" y="2351987"/>
-                  </a:lnTo>
-                  <a:lnTo>
-                    <a:pt x="1360827" y="2338392"/>
-                  </a:lnTo>
-                  <a:lnTo>
-                    <a:pt x="1289205" y="2324633"/>
-                  </a:lnTo>
-                  <a:lnTo>
-                    <a:pt x="1217582" y="2310709"/>
-                  </a:lnTo>
-                  <a:lnTo>
-                    <a:pt x="1145960" y="2296618"/>
-                  </a:lnTo>
-                  <a:lnTo>
-                    <a:pt x="1074337" y="2282357"/>
-                  </a:lnTo>
-                  <a:lnTo>
-                    <a:pt x="1002715" y="2267925"/>
-                  </a:lnTo>
-                  <a:lnTo>
-                    <a:pt x="931092" y="2253320"/>
-                  </a:lnTo>
-                  <a:lnTo>
-                    <a:pt x="859470" y="2238540"/>
-                  </a:lnTo>
-                  <a:lnTo>
-                    <a:pt x="787847" y="2223582"/>
-                  </a:lnTo>
-                  <a:lnTo>
-                    <a:pt x="716225" y="2208444"/>
-                  </a:lnTo>
-                  <a:lnTo>
-                    <a:pt x="644602" y="2193124"/>
-                  </a:lnTo>
-                  <a:lnTo>
-                    <a:pt x="572980" y="2177620"/>
-                  </a:lnTo>
-                  <a:lnTo>
-                    <a:pt x="501357" y="2161930"/>
-                  </a:lnTo>
-                  <a:lnTo>
-                    <a:pt x="429735" y="2146052"/>
-                  </a:lnTo>
-                  <a:lnTo>
-                    <a:pt x="358112" y="2129983"/>
-                  </a:lnTo>
-                  <a:lnTo>
-                    <a:pt x="286490" y="2113721"/>
-                  </a:lnTo>
-                  <a:lnTo>
-                    <a:pt x="214867" y="2097263"/>
-                  </a:lnTo>
-                  <a:lnTo>
-                    <a:pt x="143245" y="2080608"/>
-                  </a:lnTo>
-                  <a:lnTo>
-                    <a:pt x="71622" y="2063753"/>
-                  </a:lnTo>
-                  <a:lnTo>
-                    <a:pt x="0" y="2046695"/>
+                    <a:pt x="0" y="0"/>
+                  </a:lnTo>
+                  <a:lnTo>
+                    <a:pt x="0" y="0"/>
+                  </a:lnTo>
+                </a:path>
+              </a:pathLst>
+            </a:custGeom>
+            <a:ln w="13550" cap="flat">
+              <a:solidFill>
+                <a:srgbClr val="EBEBEB">
+                  <a:alpha val="100000"/>
+                </a:srgbClr>
+              </a:solidFill>
+              <a:prstDash val="solid"/>
+              <a:round/>
+            </a:ln>
+          </p:spPr>
+          <p:txBody>
+            <a:bodyPr/>
+            <a:lstStyle/>
+            <a:p/>
+          </p:txBody>
+        </p:sp>
+        <p:sp>
+          <p:nvSpPr>
+            <p:cNvPr id="21" name="pg21"/>
+            <p:cNvSpPr/>
+            <p:nvPr/>
+          </p:nvSpPr>
+          <p:spPr>
+            <a:xfrm>
+              <a:off x="1235312" y="2143092"/>
+              <a:ext cx="6964104" cy="1252217"/>
+            </a:xfrm>
+            <a:custGeom>
+              <a:avLst/>
+              <a:pathLst>
+                <a:path w="6964104" h="1252217">
+                  <a:moveTo>
+                    <a:pt x="1932277" y="0"/>
+                  </a:moveTo>
+                  <a:lnTo>
+                    <a:pt x="1969645" y="51476"/>
+                  </a:lnTo>
+                  <a:lnTo>
+                    <a:pt x="2039990" y="141170"/>
+                  </a:lnTo>
+                  <a:lnTo>
+                    <a:pt x="2110334" y="224191"/>
+                  </a:lnTo>
+                  <a:lnTo>
+                    <a:pt x="2180679" y="301037"/>
+                  </a:lnTo>
+                  <a:lnTo>
+                    <a:pt x="2251023" y="372166"/>
+                  </a:lnTo>
+                  <a:lnTo>
+                    <a:pt x="2321368" y="438004"/>
+                  </a:lnTo>
+                  <a:lnTo>
+                    <a:pt x="2391712" y="498944"/>
+                  </a:lnTo>
+                  <a:lnTo>
+                    <a:pt x="2462057" y="555351"/>
+                  </a:lnTo>
+                  <a:lnTo>
+                    <a:pt x="2532401" y="607562"/>
+                  </a:lnTo>
+                  <a:lnTo>
+                    <a:pt x="2602746" y="655888"/>
+                  </a:lnTo>
+                  <a:lnTo>
+                    <a:pt x="2673090" y="700620"/>
+                  </a:lnTo>
+                  <a:lnTo>
+                    <a:pt x="2743435" y="742024"/>
+                  </a:lnTo>
+                  <a:lnTo>
+                    <a:pt x="2813779" y="780348"/>
+                  </a:lnTo>
+                  <a:lnTo>
+                    <a:pt x="2884124" y="815821"/>
+                  </a:lnTo>
+                  <a:lnTo>
+                    <a:pt x="2954468" y="848656"/>
+                  </a:lnTo>
+                  <a:lnTo>
+                    <a:pt x="3024813" y="879047"/>
+                  </a:lnTo>
+                  <a:lnTo>
+                    <a:pt x="3095157" y="907178"/>
+                  </a:lnTo>
+                  <a:lnTo>
+                    <a:pt x="3165502" y="933217"/>
+                  </a:lnTo>
+                  <a:lnTo>
+                    <a:pt x="3235846" y="957318"/>
+                  </a:lnTo>
+                  <a:lnTo>
+                    <a:pt x="3306191" y="961337"/>
+                  </a:lnTo>
+                  <a:lnTo>
+                    <a:pt x="3376535" y="964849"/>
+                  </a:lnTo>
+                  <a:lnTo>
+                    <a:pt x="3446880" y="968319"/>
+                  </a:lnTo>
+                  <a:lnTo>
+                    <a:pt x="3517224" y="971748"/>
+                  </a:lnTo>
+                  <a:lnTo>
+                    <a:pt x="3587569" y="975137"/>
+                  </a:lnTo>
+                  <a:lnTo>
+                    <a:pt x="3657913" y="978485"/>
+                  </a:lnTo>
+                  <a:lnTo>
+                    <a:pt x="3728257" y="981793"/>
+                  </a:lnTo>
+                  <a:lnTo>
+                    <a:pt x="3798602" y="985062"/>
+                  </a:lnTo>
+                  <a:lnTo>
+                    <a:pt x="3868946" y="988292"/>
+                  </a:lnTo>
+                  <a:lnTo>
+                    <a:pt x="3939291" y="991484"/>
+                  </a:lnTo>
+                  <a:lnTo>
+                    <a:pt x="4009635" y="994638"/>
+                  </a:lnTo>
+                  <a:lnTo>
+                    <a:pt x="4079980" y="997755"/>
+                  </a:lnTo>
+                  <a:lnTo>
+                    <a:pt x="4150324" y="1000835"/>
+                  </a:lnTo>
+                  <a:lnTo>
+                    <a:pt x="4220669" y="1003878"/>
+                  </a:lnTo>
+                  <a:lnTo>
+                    <a:pt x="4291013" y="1006885"/>
+                  </a:lnTo>
+                  <a:lnTo>
+                    <a:pt x="4361358" y="1009856"/>
+                  </a:lnTo>
+                  <a:lnTo>
+                    <a:pt x="4431702" y="1012792"/>
+                  </a:lnTo>
+                  <a:lnTo>
+                    <a:pt x="4502047" y="1015693"/>
+                  </a:lnTo>
+                  <a:lnTo>
+                    <a:pt x="4572391" y="1018560"/>
+                  </a:lnTo>
+                  <a:lnTo>
+                    <a:pt x="4642736" y="1021393"/>
+                  </a:lnTo>
+                  <a:lnTo>
+                    <a:pt x="4713080" y="1024192"/>
+                  </a:lnTo>
+                  <a:lnTo>
+                    <a:pt x="4783425" y="1026957"/>
+                  </a:lnTo>
+                  <a:lnTo>
+                    <a:pt x="4853769" y="1029690"/>
+                  </a:lnTo>
+                  <a:lnTo>
+                    <a:pt x="4924114" y="1032391"/>
+                  </a:lnTo>
+                  <a:lnTo>
+                    <a:pt x="4994458" y="1035059"/>
+                  </a:lnTo>
+                  <a:lnTo>
+                    <a:pt x="5064803" y="1037696"/>
+                  </a:lnTo>
+                  <a:lnTo>
+                    <a:pt x="5135147" y="1040302"/>
+                  </a:lnTo>
+                  <a:lnTo>
+                    <a:pt x="5205492" y="1042876"/>
+                  </a:lnTo>
+                  <a:lnTo>
+                    <a:pt x="5275836" y="1045420"/>
+                  </a:lnTo>
+                  <a:lnTo>
+                    <a:pt x="5346181" y="1047934"/>
+                  </a:lnTo>
+                  <a:lnTo>
+                    <a:pt x="5416525" y="1050418"/>
+                  </a:lnTo>
+                  <a:lnTo>
+                    <a:pt x="5486870" y="1052873"/>
+                  </a:lnTo>
+                  <a:lnTo>
+                    <a:pt x="5557214" y="1055298"/>
+                  </a:lnTo>
+                  <a:lnTo>
+                    <a:pt x="5627559" y="1057695"/>
+                  </a:lnTo>
+                  <a:lnTo>
+                    <a:pt x="5697903" y="1060063"/>
+                  </a:lnTo>
+                  <a:lnTo>
+                    <a:pt x="5768248" y="1062403"/>
+                  </a:lnTo>
+                  <a:lnTo>
+                    <a:pt x="5838592" y="1064715"/>
+                  </a:lnTo>
+                  <a:lnTo>
+                    <a:pt x="5908937" y="1067000"/>
+                  </a:lnTo>
+                  <a:lnTo>
+                    <a:pt x="5979281" y="1069258"/>
+                  </a:lnTo>
+                  <a:lnTo>
+                    <a:pt x="6049626" y="1071489"/>
+                  </a:lnTo>
+                  <a:lnTo>
+                    <a:pt x="6119970" y="1073693"/>
+                  </a:lnTo>
+                  <a:lnTo>
+                    <a:pt x="6190315" y="1075871"/>
+                  </a:lnTo>
+                  <a:lnTo>
+                    <a:pt x="6260659" y="1078024"/>
+                  </a:lnTo>
+                  <a:lnTo>
+                    <a:pt x="6331004" y="1080151"/>
+                  </a:lnTo>
+                  <a:lnTo>
+                    <a:pt x="6401348" y="1082252"/>
+                  </a:lnTo>
+                  <a:lnTo>
+                    <a:pt x="6471693" y="1084329"/>
+                  </a:lnTo>
+                  <a:lnTo>
+                    <a:pt x="6542037" y="1086381"/>
+                  </a:lnTo>
+                  <a:lnTo>
+                    <a:pt x="6612382" y="1088408"/>
+                  </a:lnTo>
+                  <a:lnTo>
+                    <a:pt x="6682726" y="1090412"/>
+                  </a:lnTo>
+                  <a:lnTo>
+                    <a:pt x="6753071" y="1092392"/>
+                  </a:lnTo>
+                  <a:lnTo>
+                    <a:pt x="6823415" y="1094348"/>
+                  </a:lnTo>
+                  <a:lnTo>
+                    <a:pt x="6893760" y="1096281"/>
+                  </a:lnTo>
+                  <a:lnTo>
+                    <a:pt x="6964104" y="1098191"/>
+                  </a:lnTo>
+                  <a:lnTo>
+                    <a:pt x="6964104" y="1252217"/>
+                  </a:lnTo>
+                  <a:lnTo>
+                    <a:pt x="6893760" y="1251816"/>
+                  </a:lnTo>
+                  <a:lnTo>
+                    <a:pt x="6823415" y="1251384"/>
+                  </a:lnTo>
+                  <a:lnTo>
+                    <a:pt x="6753071" y="1250916"/>
+                  </a:lnTo>
+                  <a:lnTo>
+                    <a:pt x="6682726" y="1250411"/>
+                  </a:lnTo>
+                  <a:lnTo>
+                    <a:pt x="6612382" y="1249865"/>
+                  </a:lnTo>
+                  <a:lnTo>
+                    <a:pt x="6542037" y="1249275"/>
+                  </a:lnTo>
+                  <a:lnTo>
+                    <a:pt x="6471693" y="1248638"/>
+                  </a:lnTo>
+                  <a:lnTo>
+                    <a:pt x="6401348" y="1247950"/>
+                  </a:lnTo>
+                  <a:lnTo>
+                    <a:pt x="6331004" y="1247207"/>
+                  </a:lnTo>
+                  <a:lnTo>
+                    <a:pt x="6260659" y="1246403"/>
+                  </a:lnTo>
+                  <a:lnTo>
+                    <a:pt x="6190315" y="1245536"/>
+                  </a:lnTo>
+                  <a:lnTo>
+                    <a:pt x="6119970" y="1244598"/>
+                  </a:lnTo>
+                  <a:lnTo>
+                    <a:pt x="6049626" y="1243585"/>
+                  </a:lnTo>
+                  <a:lnTo>
+                    <a:pt x="5979281" y="1242491"/>
+                  </a:lnTo>
+                  <a:lnTo>
+                    <a:pt x="5908937" y="1241308"/>
+                  </a:lnTo>
+                  <a:lnTo>
+                    <a:pt x="5838592" y="1240031"/>
+                  </a:lnTo>
+                  <a:lnTo>
+                    <a:pt x="5768248" y="1238651"/>
+                  </a:lnTo>
+                  <a:lnTo>
+                    <a:pt x="5697903" y="1237160"/>
+                  </a:lnTo>
+                  <a:lnTo>
+                    <a:pt x="5627559" y="1235549"/>
+                  </a:lnTo>
+                  <a:lnTo>
+                    <a:pt x="5557214" y="1233809"/>
+                  </a:lnTo>
+                  <a:lnTo>
+                    <a:pt x="5486870" y="1231929"/>
+                  </a:lnTo>
+                  <a:lnTo>
+                    <a:pt x="5416525" y="1229898"/>
+                  </a:lnTo>
+                  <a:lnTo>
+                    <a:pt x="5346181" y="1227704"/>
+                  </a:lnTo>
+                  <a:lnTo>
+                    <a:pt x="5275836" y="1225333"/>
+                  </a:lnTo>
+                  <a:lnTo>
+                    <a:pt x="5205492" y="1222772"/>
+                  </a:lnTo>
+                  <a:lnTo>
+                    <a:pt x="5135147" y="1220005"/>
+                  </a:lnTo>
+                  <a:lnTo>
+                    <a:pt x="5064803" y="1217015"/>
+                  </a:lnTo>
+                  <a:lnTo>
+                    <a:pt x="4994458" y="1213785"/>
+                  </a:lnTo>
+                  <a:lnTo>
+                    <a:pt x="4924114" y="1210296"/>
+                  </a:lnTo>
+                  <a:lnTo>
+                    <a:pt x="4853769" y="1206526"/>
+                  </a:lnTo>
+                  <a:lnTo>
+                    <a:pt x="4783425" y="1202454"/>
+                  </a:lnTo>
+                  <a:lnTo>
+                    <a:pt x="4713080" y="1198054"/>
+                  </a:lnTo>
+                  <a:lnTo>
+                    <a:pt x="4642736" y="1193300"/>
+                  </a:lnTo>
+                  <a:lnTo>
+                    <a:pt x="4572391" y="1188164"/>
+                  </a:lnTo>
+                  <a:lnTo>
+                    <a:pt x="4502047" y="1182616"/>
+                  </a:lnTo>
+                  <a:lnTo>
+                    <a:pt x="4431702" y="1176621"/>
+                  </a:lnTo>
+                  <a:lnTo>
+                    <a:pt x="4361358" y="1170145"/>
+                  </a:lnTo>
+                  <a:lnTo>
+                    <a:pt x="4291013" y="1163149"/>
+                  </a:lnTo>
+                  <a:lnTo>
+                    <a:pt x="4220669" y="1155590"/>
+                  </a:lnTo>
+                  <a:lnTo>
+                    <a:pt x="4150324" y="1147423"/>
+                  </a:lnTo>
+                  <a:lnTo>
+                    <a:pt x="4079980" y="1138600"/>
+                  </a:lnTo>
+                  <a:lnTo>
+                    <a:pt x="4009635" y="1129069"/>
+                  </a:lnTo>
+                  <a:lnTo>
+                    <a:pt x="3939291" y="1118771"/>
+                  </a:lnTo>
+                  <a:lnTo>
+                    <a:pt x="3868946" y="1107645"/>
+                  </a:lnTo>
+                  <a:lnTo>
+                    <a:pt x="3798602" y="1095626"/>
+                  </a:lnTo>
+                  <a:lnTo>
+                    <a:pt x="3728257" y="1082640"/>
+                  </a:lnTo>
+                  <a:lnTo>
+                    <a:pt x="3657913" y="1068611"/>
+                  </a:lnTo>
+                  <a:lnTo>
+                    <a:pt x="3587569" y="1053454"/>
+                  </a:lnTo>
+                  <a:lnTo>
+                    <a:pt x="3517224" y="1037079"/>
+                  </a:lnTo>
+                  <a:lnTo>
+                    <a:pt x="3446880" y="1019388"/>
+                  </a:lnTo>
+                  <a:lnTo>
+                    <a:pt x="3376535" y="1000275"/>
+                  </a:lnTo>
+                  <a:lnTo>
+                    <a:pt x="3306191" y="979626"/>
+                  </a:lnTo>
+                  <a:lnTo>
+                    <a:pt x="3235846" y="957783"/>
+                  </a:lnTo>
+                  <a:lnTo>
+                    <a:pt x="3165502" y="954186"/>
+                  </a:lnTo>
+                  <a:lnTo>
+                    <a:pt x="3095157" y="950546"/>
+                  </a:lnTo>
+                  <a:lnTo>
+                    <a:pt x="3024813" y="946862"/>
+                  </a:lnTo>
+                  <a:lnTo>
+                    <a:pt x="2954468" y="943135"/>
+                  </a:lnTo>
+                  <a:lnTo>
+                    <a:pt x="2884124" y="939362"/>
+                  </a:lnTo>
+                  <a:lnTo>
+                    <a:pt x="2813779" y="935544"/>
+                  </a:lnTo>
+                  <a:lnTo>
+                    <a:pt x="2743435" y="931680"/>
+                  </a:lnTo>
+                  <a:lnTo>
+                    <a:pt x="2673090" y="927769"/>
+                  </a:lnTo>
+                  <a:lnTo>
+                    <a:pt x="2602746" y="923812"/>
+                  </a:lnTo>
+                  <a:lnTo>
+                    <a:pt x="2532401" y="919807"/>
+                  </a:lnTo>
+                  <a:lnTo>
+                    <a:pt x="2462057" y="915754"/>
+                  </a:lnTo>
+                  <a:lnTo>
+                    <a:pt x="2391712" y="911653"/>
+                  </a:lnTo>
+                  <a:lnTo>
+                    <a:pt x="2321368" y="907502"/>
+                  </a:lnTo>
+                  <a:lnTo>
+                    <a:pt x="2251023" y="903301"/>
+                  </a:lnTo>
+                  <a:lnTo>
+                    <a:pt x="2180679" y="899050"/>
+                  </a:lnTo>
+                  <a:lnTo>
+                    <a:pt x="2110334" y="894747"/>
+                  </a:lnTo>
+                  <a:lnTo>
+                    <a:pt x="2039990" y="890393"/>
+                  </a:lnTo>
+                  <a:lnTo>
+                    <a:pt x="1969645" y="885987"/>
+                  </a:lnTo>
+                  <a:lnTo>
+                    <a:pt x="1899301" y="881528"/>
+                  </a:lnTo>
+                  <a:lnTo>
+                    <a:pt x="1828956" y="877015"/>
+                  </a:lnTo>
+                  <a:lnTo>
+                    <a:pt x="1758612" y="872448"/>
+                  </a:lnTo>
+                  <a:lnTo>
+                    <a:pt x="1688267" y="867826"/>
+                  </a:lnTo>
+                  <a:lnTo>
+                    <a:pt x="1617923" y="863148"/>
+                  </a:lnTo>
+                  <a:lnTo>
+                    <a:pt x="1547578" y="858415"/>
+                  </a:lnTo>
+                  <a:lnTo>
+                    <a:pt x="1477234" y="853624"/>
+                  </a:lnTo>
+                  <a:lnTo>
+                    <a:pt x="1406889" y="848776"/>
+                  </a:lnTo>
+                  <a:lnTo>
+                    <a:pt x="1336545" y="843870"/>
+                  </a:lnTo>
+                  <a:lnTo>
+                    <a:pt x="1266200" y="838905"/>
+                  </a:lnTo>
+                  <a:lnTo>
+                    <a:pt x="1195856" y="833880"/>
+                  </a:lnTo>
+                  <a:lnTo>
+                    <a:pt x="1125511" y="828795"/>
+                  </a:lnTo>
+                  <a:lnTo>
+                    <a:pt x="1055167" y="823649"/>
+                  </a:lnTo>
+                  <a:lnTo>
+                    <a:pt x="984822" y="818441"/>
+                  </a:lnTo>
+                  <a:lnTo>
+                    <a:pt x="914478" y="813170"/>
+                  </a:lnTo>
+                  <a:lnTo>
+                    <a:pt x="844133" y="807836"/>
+                  </a:lnTo>
+                  <a:lnTo>
+                    <a:pt x="773789" y="802438"/>
+                  </a:lnTo>
+                  <a:lnTo>
+                    <a:pt x="703444" y="796975"/>
+                  </a:lnTo>
+                  <a:lnTo>
+                    <a:pt x="633100" y="791447"/>
+                  </a:lnTo>
+                  <a:lnTo>
+                    <a:pt x="562755" y="785852"/>
+                  </a:lnTo>
+                  <a:lnTo>
+                    <a:pt x="492411" y="780190"/>
+                  </a:lnTo>
+                  <a:lnTo>
+                    <a:pt x="422066" y="774459"/>
+                  </a:lnTo>
+                  <a:lnTo>
+                    <a:pt x="351722" y="768660"/>
+                  </a:lnTo>
+                  <a:lnTo>
+                    <a:pt x="281377" y="762792"/>
+                  </a:lnTo>
+                  <a:lnTo>
+                    <a:pt x="211033" y="756853"/>
+                  </a:lnTo>
+                  <a:lnTo>
+                    <a:pt x="140688" y="750842"/>
+                  </a:lnTo>
+                  <a:lnTo>
+                    <a:pt x="70344" y="744759"/>
+                  </a:lnTo>
+                  <a:lnTo>
+                    <a:pt x="0" y="738604"/>
                   </a:lnTo>
                   <a:close/>
                 </a:path>
@@ -3503,562 +3538,237 @@
         </p:sp>
         <p:sp>
           <p:nvSpPr>
-            <p:cNvPr id="21" name="pl21"/>
-            <p:cNvSpPr/>
-            <p:nvPr/>
-          </p:nvSpPr>
-          <p:spPr>
-            <a:xfrm>
-              <a:off x="3139433" y="2073503"/>
-              <a:ext cx="5123246" cy="3043123"/>
-            </a:xfrm>
-            <a:custGeom>
-              <a:avLst/>
-              <a:pathLst>
-                <a:path w="5123246" h="3043123">
-                  <a:moveTo>
-                    <a:pt x="0" y="0"/>
-                  </a:moveTo>
-                  <a:lnTo>
-                    <a:pt x="38047" y="142642"/>
-                  </a:lnTo>
-                  <a:lnTo>
-                    <a:pt x="109669" y="391186"/>
-                  </a:lnTo>
-                  <a:lnTo>
-                    <a:pt x="181292" y="621242"/>
-                  </a:lnTo>
-                  <a:lnTo>
-                    <a:pt x="252914" y="834184"/>
-                  </a:lnTo>
-                  <a:lnTo>
-                    <a:pt x="324537" y="1031285"/>
-                  </a:lnTo>
-                  <a:lnTo>
-                    <a:pt x="396159" y="1213723"/>
-                  </a:lnTo>
-                  <a:lnTo>
-                    <a:pt x="467782" y="1382590"/>
-                  </a:lnTo>
-                  <a:lnTo>
-                    <a:pt x="539404" y="1538895"/>
-                  </a:lnTo>
-                  <a:lnTo>
-                    <a:pt x="611027" y="1683573"/>
-                  </a:lnTo>
-                  <a:lnTo>
-                    <a:pt x="682649" y="1817488"/>
-                  </a:lnTo>
-                  <a:lnTo>
-                    <a:pt x="754272" y="1941441"/>
-                  </a:lnTo>
-                  <a:lnTo>
-                    <a:pt x="825894" y="2056173"/>
-                  </a:lnTo>
-                  <a:lnTo>
-                    <a:pt x="897517" y="2162370"/>
-                  </a:lnTo>
-                  <a:lnTo>
-                    <a:pt x="969139" y="2260667"/>
-                  </a:lnTo>
-                  <a:lnTo>
-                    <a:pt x="1040762" y="2351652"/>
-                  </a:lnTo>
-                  <a:lnTo>
-                    <a:pt x="1112384" y="2435869"/>
-                  </a:lnTo>
-                  <a:lnTo>
-                    <a:pt x="1184007" y="2513820"/>
-                  </a:lnTo>
-                  <a:lnTo>
-                    <a:pt x="1255629" y="2585973"/>
-                  </a:lnTo>
-                  <a:lnTo>
-                    <a:pt x="1327252" y="2652758"/>
-                  </a:lnTo>
-                  <a:lnTo>
-                    <a:pt x="1398875" y="2663896"/>
-                  </a:lnTo>
-                  <a:lnTo>
-                    <a:pt x="1470497" y="2673628"/>
-                  </a:lnTo>
-                  <a:lnTo>
-                    <a:pt x="1542120" y="2683244"/>
-                  </a:lnTo>
-                  <a:lnTo>
-                    <a:pt x="1613742" y="2692746"/>
-                  </a:lnTo>
-                  <a:lnTo>
-                    <a:pt x="1685365" y="2702135"/>
-                  </a:lnTo>
-                  <a:lnTo>
-                    <a:pt x="1756987" y="2711413"/>
-                  </a:lnTo>
-                  <a:lnTo>
-                    <a:pt x="1828610" y="2720580"/>
-                  </a:lnTo>
-                  <a:lnTo>
-                    <a:pt x="1900232" y="2729639"/>
-                  </a:lnTo>
-                  <a:lnTo>
-                    <a:pt x="1971855" y="2738590"/>
-                  </a:lnTo>
-                  <a:lnTo>
-                    <a:pt x="2043477" y="2747435"/>
-                  </a:lnTo>
-                  <a:lnTo>
-                    <a:pt x="2115100" y="2756175"/>
-                  </a:lnTo>
-                  <a:lnTo>
-                    <a:pt x="2186722" y="2764812"/>
-                  </a:lnTo>
-                  <a:lnTo>
-                    <a:pt x="2258345" y="2773345"/>
-                  </a:lnTo>
-                  <a:lnTo>
-                    <a:pt x="2329967" y="2781778"/>
-                  </a:lnTo>
-                  <a:lnTo>
-                    <a:pt x="2401590" y="2790110"/>
-                  </a:lnTo>
-                  <a:lnTo>
-                    <a:pt x="2473212" y="2798344"/>
-                  </a:lnTo>
-                  <a:lnTo>
-                    <a:pt x="2544835" y="2806479"/>
-                  </a:lnTo>
-                  <a:lnTo>
-                    <a:pt x="2616457" y="2814518"/>
-                  </a:lnTo>
-                  <a:lnTo>
-                    <a:pt x="2688080" y="2822462"/>
-                  </a:lnTo>
-                  <a:lnTo>
-                    <a:pt x="2759703" y="2830312"/>
-                  </a:lnTo>
-                  <a:lnTo>
-                    <a:pt x="2831325" y="2838068"/>
-                  </a:lnTo>
-                  <a:lnTo>
-                    <a:pt x="2902948" y="2845732"/>
-                  </a:lnTo>
-                  <a:lnTo>
-                    <a:pt x="2974570" y="2853305"/>
-                  </a:lnTo>
-                  <a:lnTo>
-                    <a:pt x="3046193" y="2860789"/>
-                  </a:lnTo>
-                  <a:lnTo>
-                    <a:pt x="3117815" y="2868183"/>
-                  </a:lnTo>
-                  <a:lnTo>
-                    <a:pt x="3189438" y="2875490"/>
-                  </a:lnTo>
-                  <a:lnTo>
-                    <a:pt x="3261060" y="2882710"/>
-                  </a:lnTo>
-                  <a:lnTo>
-                    <a:pt x="3332683" y="2889844"/>
-                  </a:lnTo>
-                  <a:lnTo>
-                    <a:pt x="3404305" y="2896894"/>
-                  </a:lnTo>
-                  <a:lnTo>
-                    <a:pt x="3475928" y="2903860"/>
-                  </a:lnTo>
-                  <a:lnTo>
-                    <a:pt x="3547550" y="2910743"/>
-                  </a:lnTo>
-                  <a:lnTo>
-                    <a:pt x="3619173" y="2917544"/>
-                  </a:lnTo>
-                  <a:lnTo>
-                    <a:pt x="3690795" y="2924265"/>
-                  </a:lnTo>
-                  <a:lnTo>
-                    <a:pt x="3762418" y="2930906"/>
-                  </a:lnTo>
-                  <a:lnTo>
-                    <a:pt x="3834040" y="2937469"/>
-                  </a:lnTo>
-                  <a:lnTo>
-                    <a:pt x="3905663" y="2943953"/>
-                  </a:lnTo>
-                  <a:lnTo>
-                    <a:pt x="3977285" y="2950360"/>
-                  </a:lnTo>
-                  <a:lnTo>
-                    <a:pt x="4048908" y="2956691"/>
-                  </a:lnTo>
-                  <a:lnTo>
-                    <a:pt x="4120531" y="2962948"/>
-                  </a:lnTo>
-                  <a:lnTo>
-                    <a:pt x="4192153" y="2969129"/>
-                  </a:lnTo>
-                  <a:lnTo>
-                    <a:pt x="4263776" y="2975238"/>
-                  </a:lnTo>
-                  <a:lnTo>
-                    <a:pt x="4335398" y="2981274"/>
-                  </a:lnTo>
-                  <a:lnTo>
-                    <a:pt x="4407021" y="2987238"/>
-                  </a:lnTo>
-                  <a:lnTo>
-                    <a:pt x="4478643" y="2993132"/>
-                  </a:lnTo>
-                  <a:lnTo>
-                    <a:pt x="4550266" y="2998955"/>
-                  </a:lnTo>
-                  <a:lnTo>
-                    <a:pt x="4621888" y="3004710"/>
-                  </a:lnTo>
-                  <a:lnTo>
-                    <a:pt x="4693511" y="3010396"/>
-                  </a:lnTo>
-                  <a:lnTo>
-                    <a:pt x="4765133" y="3016015"/>
-                  </a:lnTo>
-                  <a:lnTo>
-                    <a:pt x="4836756" y="3021567"/>
-                  </a:lnTo>
-                  <a:lnTo>
-                    <a:pt x="4908378" y="3027053"/>
-                  </a:lnTo>
-                  <a:lnTo>
-                    <a:pt x="4980001" y="3032474"/>
-                  </a:lnTo>
-                  <a:lnTo>
-                    <a:pt x="5051623" y="3037830"/>
-                  </a:lnTo>
-                  <a:lnTo>
-                    <a:pt x="5123246" y="3043123"/>
-                  </a:lnTo>
-                </a:path>
-              </a:pathLst>
-            </a:custGeom>
-          </p:spPr>
-          <p:txBody>
-            <a:bodyPr/>
-            <a:lstStyle/>
-            <a:p/>
-          </p:txBody>
-        </p:sp>
-        <p:sp>
-          <p:nvSpPr>
             <p:cNvPr id="22" name="pl22"/>
             <p:cNvSpPr/>
             <p:nvPr/>
           </p:nvSpPr>
           <p:spPr>
             <a:xfrm>
-              <a:off x="1172049" y="4120198"/>
-              <a:ext cx="7090630" cy="1423238"/>
+              <a:off x="3167589" y="2143092"/>
+              <a:ext cx="5031826" cy="1098191"/>
             </a:xfrm>
             <a:custGeom>
               <a:avLst/>
               <a:pathLst>
-                <a:path w="7090630" h="1423238">
+                <a:path w="5031826" h="1098191">
                   <a:moveTo>
-                    <a:pt x="7090630" y="1423238"/>
+                    <a:pt x="0" y="0"/>
                   </a:moveTo>
                   <a:lnTo>
-                    <a:pt x="7019007" y="1422128"/>
-                  </a:lnTo>
-                  <a:lnTo>
-                    <a:pt x="6947385" y="1420929"/>
-                  </a:lnTo>
-                  <a:lnTo>
-                    <a:pt x="6875762" y="1419633"/>
-                  </a:lnTo>
-                  <a:lnTo>
-                    <a:pt x="6804139" y="1418233"/>
-                  </a:lnTo>
-                  <a:lnTo>
-                    <a:pt x="6732517" y="1416721"/>
-                  </a:lnTo>
-                  <a:lnTo>
-                    <a:pt x="6660894" y="1415087"/>
-                  </a:lnTo>
-                  <a:lnTo>
-                    <a:pt x="6589272" y="1413322"/>
-                  </a:lnTo>
-                  <a:lnTo>
-                    <a:pt x="6517649" y="1411415"/>
-                  </a:lnTo>
-                  <a:lnTo>
-                    <a:pt x="6446027" y="1409354"/>
-                  </a:lnTo>
-                  <a:lnTo>
-                    <a:pt x="6374404" y="1407128"/>
-                  </a:lnTo>
-                  <a:lnTo>
-                    <a:pt x="6302782" y="1404724"/>
-                  </a:lnTo>
-                  <a:lnTo>
-                    <a:pt x="6231159" y="1402125"/>
-                  </a:lnTo>
-                  <a:lnTo>
-                    <a:pt x="6159537" y="1399319"/>
-                  </a:lnTo>
-                  <a:lnTo>
-                    <a:pt x="6087914" y="1396286"/>
-                  </a:lnTo>
-                  <a:lnTo>
-                    <a:pt x="6016292" y="1393010"/>
-                  </a:lnTo>
-                  <a:lnTo>
-                    <a:pt x="5944669" y="1389470"/>
-                  </a:lnTo>
-                  <a:lnTo>
-                    <a:pt x="5873047" y="1385646"/>
-                  </a:lnTo>
-                  <a:lnTo>
-                    <a:pt x="5801424" y="1381515"/>
-                  </a:lnTo>
-                  <a:lnTo>
-                    <a:pt x="5729802" y="1377052"/>
-                  </a:lnTo>
-                  <a:lnTo>
-                    <a:pt x="5658179" y="1372229"/>
-                  </a:lnTo>
-                  <a:lnTo>
-                    <a:pt x="5586557" y="1367020"/>
-                  </a:lnTo>
-                  <a:lnTo>
-                    <a:pt x="5514934" y="1361392"/>
-                  </a:lnTo>
-                  <a:lnTo>
-                    <a:pt x="5443311" y="1355311"/>
-                  </a:lnTo>
-                  <a:lnTo>
-                    <a:pt x="5371689" y="1348742"/>
-                  </a:lnTo>
-                  <a:lnTo>
-                    <a:pt x="5300066" y="1341644"/>
-                  </a:lnTo>
-                  <a:lnTo>
-                    <a:pt x="5228444" y="1333976"/>
-                  </a:lnTo>
-                  <a:lnTo>
-                    <a:pt x="5156821" y="1325693"/>
-                  </a:lnTo>
-                  <a:lnTo>
-                    <a:pt x="5085199" y="1316743"/>
-                  </a:lnTo>
-                  <a:lnTo>
-                    <a:pt x="5013576" y="1307074"/>
-                  </a:lnTo>
-                  <a:lnTo>
-                    <a:pt x="4941954" y="1296628"/>
-                  </a:lnTo>
-                  <a:lnTo>
-                    <a:pt x="4870331" y="1285342"/>
-                  </a:lnTo>
-                  <a:lnTo>
-                    <a:pt x="4798709" y="1273149"/>
-                  </a:lnTo>
-                  <a:lnTo>
-                    <a:pt x="4727086" y="1259977"/>
-                  </a:lnTo>
-                  <a:lnTo>
-                    <a:pt x="4655464" y="1245746"/>
-                  </a:lnTo>
-                  <a:lnTo>
-                    <a:pt x="4583841" y="1230371"/>
-                  </a:lnTo>
-                  <a:lnTo>
-                    <a:pt x="4512219" y="1213760"/>
-                  </a:lnTo>
-                  <a:lnTo>
-                    <a:pt x="4440596" y="1195814"/>
-                  </a:lnTo>
-                  <a:lnTo>
-                    <a:pt x="4368974" y="1176427"/>
-                  </a:lnTo>
-                  <a:lnTo>
-                    <a:pt x="4297351" y="1155481"/>
-                  </a:lnTo>
-                  <a:lnTo>
-                    <a:pt x="4225729" y="1132851"/>
-                  </a:lnTo>
-                  <a:lnTo>
-                    <a:pt x="4154106" y="1108403"/>
-                  </a:lnTo>
-                  <a:lnTo>
-                    <a:pt x="4082483" y="1081990"/>
-                  </a:lnTo>
-                  <a:lnTo>
-                    <a:pt x="4010861" y="1053454"/>
-                  </a:lnTo>
-                  <a:lnTo>
-                    <a:pt x="3939238" y="1022625"/>
-                  </a:lnTo>
-                  <a:lnTo>
-                    <a:pt x="3867616" y="989318"/>
-                  </a:lnTo>
-                  <a:lnTo>
-                    <a:pt x="3795993" y="953335"/>
-                  </a:lnTo>
-                  <a:lnTo>
-                    <a:pt x="3724371" y="914459"/>
-                  </a:lnTo>
-                  <a:lnTo>
-                    <a:pt x="3652748" y="872459"/>
-                  </a:lnTo>
-                  <a:lnTo>
-                    <a:pt x="3581126" y="827083"/>
-                  </a:lnTo>
-                  <a:lnTo>
-                    <a:pt x="3509503" y="778061"/>
-                  </a:lnTo>
-                  <a:lnTo>
-                    <a:pt x="3437881" y="725099"/>
-                  </a:lnTo>
-                  <a:lnTo>
-                    <a:pt x="3366258" y="667880"/>
-                  </a:lnTo>
-                  <a:lnTo>
-                    <a:pt x="3294636" y="607352"/>
-                  </a:lnTo>
-                  <a:lnTo>
-                    <a:pt x="3223013" y="597385"/>
-                  </a:lnTo>
-                  <a:lnTo>
-                    <a:pt x="3151391" y="587299"/>
-                  </a:lnTo>
-                  <a:lnTo>
-                    <a:pt x="3079768" y="577091"/>
-                  </a:lnTo>
-                  <a:lnTo>
-                    <a:pt x="3008146" y="566761"/>
-                  </a:lnTo>
-                  <a:lnTo>
-                    <a:pt x="2936523" y="556306"/>
-                  </a:lnTo>
-                  <a:lnTo>
-                    <a:pt x="2864901" y="545726"/>
-                  </a:lnTo>
-                  <a:lnTo>
-                    <a:pt x="2793278" y="535019"/>
-                  </a:lnTo>
-                  <a:lnTo>
-                    <a:pt x="2721655" y="524184"/>
-                  </a:lnTo>
-                  <a:lnTo>
-                    <a:pt x="2650033" y="513218"/>
-                  </a:lnTo>
-                  <a:lnTo>
-                    <a:pt x="2578410" y="502120"/>
-                  </a:lnTo>
-                  <a:lnTo>
-                    <a:pt x="2506788" y="490889"/>
-                  </a:lnTo>
-                  <a:lnTo>
-                    <a:pt x="2435165" y="479523"/>
-                  </a:lnTo>
-                  <a:lnTo>
-                    <a:pt x="2363543" y="468021"/>
-                  </a:lnTo>
-                  <a:lnTo>
-                    <a:pt x="2291920" y="456380"/>
-                  </a:lnTo>
-                  <a:lnTo>
-                    <a:pt x="2220298" y="444600"/>
-                  </a:lnTo>
-                  <a:lnTo>
-                    <a:pt x="2148675" y="432678"/>
-                  </a:lnTo>
-                  <a:lnTo>
-                    <a:pt x="2077053" y="420613"/>
-                  </a:lnTo>
-                  <a:lnTo>
-                    <a:pt x="2005430" y="408403"/>
-                  </a:lnTo>
-                  <a:lnTo>
-                    <a:pt x="1933808" y="396046"/>
-                  </a:lnTo>
-                  <a:lnTo>
-                    <a:pt x="1862185" y="383541"/>
-                  </a:lnTo>
-                  <a:lnTo>
-                    <a:pt x="1790563" y="370886"/>
-                  </a:lnTo>
-                  <a:lnTo>
-                    <a:pt x="1718940" y="358078"/>
-                  </a:lnTo>
-                  <a:lnTo>
-                    <a:pt x="1647318" y="345117"/>
-                  </a:lnTo>
-                  <a:lnTo>
-                    <a:pt x="1575695" y="332000"/>
-                  </a:lnTo>
-                  <a:lnTo>
-                    <a:pt x="1504073" y="318726"/>
-                  </a:lnTo>
-                  <a:lnTo>
-                    <a:pt x="1432450" y="305292"/>
-                  </a:lnTo>
-                  <a:lnTo>
-                    <a:pt x="1360827" y="291696"/>
-                  </a:lnTo>
-                  <a:lnTo>
-                    <a:pt x="1289205" y="277938"/>
-                  </a:lnTo>
-                  <a:lnTo>
-                    <a:pt x="1217582" y="264014"/>
-                  </a:lnTo>
-                  <a:lnTo>
-                    <a:pt x="1145960" y="249922"/>
-                  </a:lnTo>
-                  <a:lnTo>
-                    <a:pt x="1074337" y="235662"/>
-                  </a:lnTo>
-                  <a:lnTo>
-                    <a:pt x="1002715" y="221230"/>
-                  </a:lnTo>
-                  <a:lnTo>
-                    <a:pt x="931092" y="206625"/>
-                  </a:lnTo>
-                  <a:lnTo>
-                    <a:pt x="859470" y="191844"/>
-                  </a:lnTo>
-                  <a:lnTo>
-                    <a:pt x="787847" y="176886"/>
-                  </a:lnTo>
-                  <a:lnTo>
-                    <a:pt x="716225" y="161748"/>
-                  </a:lnTo>
-                  <a:lnTo>
-                    <a:pt x="644602" y="146429"/>
-                  </a:lnTo>
-                  <a:lnTo>
-                    <a:pt x="572980" y="130925"/>
-                  </a:lnTo>
-                  <a:lnTo>
-                    <a:pt x="501357" y="115235"/>
-                  </a:lnTo>
-                  <a:lnTo>
-                    <a:pt x="429735" y="99357"/>
-                  </a:lnTo>
-                  <a:lnTo>
-                    <a:pt x="358112" y="83288"/>
-                  </a:lnTo>
-                  <a:lnTo>
-                    <a:pt x="286490" y="67025"/>
-                  </a:lnTo>
-                  <a:lnTo>
-                    <a:pt x="214867" y="50568"/>
-                  </a:lnTo>
-                  <a:lnTo>
-                    <a:pt x="143245" y="33913"/>
-                  </a:lnTo>
-                  <a:lnTo>
-                    <a:pt x="71622" y="17057"/>
-                  </a:lnTo>
-                  <a:lnTo>
-                    <a:pt x="0" y="0"/>
+                    <a:pt x="37368" y="51476"/>
+                  </a:lnTo>
+                  <a:lnTo>
+                    <a:pt x="107712" y="141170"/>
+                  </a:lnTo>
+                  <a:lnTo>
+                    <a:pt x="178057" y="224191"/>
+                  </a:lnTo>
+                  <a:lnTo>
+                    <a:pt x="248401" y="301037"/>
+                  </a:lnTo>
+                  <a:lnTo>
+                    <a:pt x="318746" y="372166"/>
+                  </a:lnTo>
+                  <a:lnTo>
+                    <a:pt x="389090" y="438004"/>
+                  </a:lnTo>
+                  <a:lnTo>
+                    <a:pt x="459435" y="498944"/>
+                  </a:lnTo>
+                  <a:lnTo>
+                    <a:pt x="529779" y="555351"/>
+                  </a:lnTo>
+                  <a:lnTo>
+                    <a:pt x="600124" y="607562"/>
+                  </a:lnTo>
+                  <a:lnTo>
+                    <a:pt x="670468" y="655888"/>
+                  </a:lnTo>
+                  <a:lnTo>
+                    <a:pt x="740813" y="700620"/>
+                  </a:lnTo>
+                  <a:lnTo>
+                    <a:pt x="811157" y="742024"/>
+                  </a:lnTo>
+                  <a:lnTo>
+                    <a:pt x="881502" y="780348"/>
+                  </a:lnTo>
+                  <a:lnTo>
+                    <a:pt x="951846" y="815821"/>
+                  </a:lnTo>
+                  <a:lnTo>
+                    <a:pt x="1022190" y="848656"/>
+                  </a:lnTo>
+                  <a:lnTo>
+                    <a:pt x="1092535" y="879047"/>
+                  </a:lnTo>
+                  <a:lnTo>
+                    <a:pt x="1162879" y="907178"/>
+                  </a:lnTo>
+                  <a:lnTo>
+                    <a:pt x="1233224" y="933217"/>
+                  </a:lnTo>
+                  <a:lnTo>
+                    <a:pt x="1303568" y="957318"/>
+                  </a:lnTo>
+                  <a:lnTo>
+                    <a:pt x="1373913" y="961337"/>
+                  </a:lnTo>
+                  <a:lnTo>
+                    <a:pt x="1444257" y="964849"/>
+                  </a:lnTo>
+                  <a:lnTo>
+                    <a:pt x="1514602" y="968319"/>
+                  </a:lnTo>
+                  <a:lnTo>
+                    <a:pt x="1584946" y="971748"/>
+                  </a:lnTo>
+                  <a:lnTo>
+                    <a:pt x="1655291" y="975137"/>
+                  </a:lnTo>
+                  <a:lnTo>
+                    <a:pt x="1725635" y="978485"/>
+                  </a:lnTo>
+                  <a:lnTo>
+                    <a:pt x="1795980" y="981793"/>
+                  </a:lnTo>
+                  <a:lnTo>
+                    <a:pt x="1866324" y="985062"/>
+                  </a:lnTo>
+                  <a:lnTo>
+                    <a:pt x="1936669" y="988292"/>
+                  </a:lnTo>
+                  <a:lnTo>
+                    <a:pt x="2007013" y="991484"/>
+                  </a:lnTo>
+                  <a:lnTo>
+                    <a:pt x="2077358" y="994638"/>
+                  </a:lnTo>
+                  <a:lnTo>
+                    <a:pt x="2147702" y="997755"/>
+                  </a:lnTo>
+                  <a:lnTo>
+                    <a:pt x="2218047" y="1000835"/>
+                  </a:lnTo>
+                  <a:lnTo>
+                    <a:pt x="2288391" y="1003878"/>
+                  </a:lnTo>
+                  <a:lnTo>
+                    <a:pt x="2358736" y="1006885"/>
+                  </a:lnTo>
+                  <a:lnTo>
+                    <a:pt x="2429080" y="1009856"/>
+                  </a:lnTo>
+                  <a:lnTo>
+                    <a:pt x="2499425" y="1012792"/>
+                  </a:lnTo>
+                  <a:lnTo>
+                    <a:pt x="2569769" y="1015693"/>
+                  </a:lnTo>
+                  <a:lnTo>
+                    <a:pt x="2640114" y="1018560"/>
+                  </a:lnTo>
+                  <a:lnTo>
+                    <a:pt x="2710458" y="1021393"/>
+                  </a:lnTo>
+                  <a:lnTo>
+                    <a:pt x="2780803" y="1024192"/>
+                  </a:lnTo>
+                  <a:lnTo>
+                    <a:pt x="2851147" y="1026957"/>
+                  </a:lnTo>
+                  <a:lnTo>
+                    <a:pt x="2921492" y="1029690"/>
+                  </a:lnTo>
+                  <a:lnTo>
+                    <a:pt x="2991836" y="1032391"/>
+                  </a:lnTo>
+                  <a:lnTo>
+                    <a:pt x="3062181" y="1035059"/>
+                  </a:lnTo>
+                  <a:lnTo>
+                    <a:pt x="3132525" y="1037696"/>
+                  </a:lnTo>
+                  <a:lnTo>
+                    <a:pt x="3202870" y="1040302"/>
+                  </a:lnTo>
+                  <a:lnTo>
+                    <a:pt x="3273214" y="1042876"/>
+                  </a:lnTo>
+                  <a:lnTo>
+                    <a:pt x="3343559" y="1045420"/>
+                  </a:lnTo>
+                  <a:lnTo>
+                    <a:pt x="3413903" y="1047934"/>
+                  </a:lnTo>
+                  <a:lnTo>
+                    <a:pt x="3484248" y="1050418"/>
+                  </a:lnTo>
+                  <a:lnTo>
+                    <a:pt x="3554592" y="1052873"/>
+                  </a:lnTo>
+                  <a:lnTo>
+                    <a:pt x="3624937" y="1055298"/>
+                  </a:lnTo>
+                  <a:lnTo>
+                    <a:pt x="3695281" y="1057695"/>
+                  </a:lnTo>
+                  <a:lnTo>
+                    <a:pt x="3765626" y="1060063"/>
+                  </a:lnTo>
+                  <a:lnTo>
+                    <a:pt x="3835970" y="1062403"/>
+                  </a:lnTo>
+                  <a:lnTo>
+                    <a:pt x="3906315" y="1064715"/>
+                  </a:lnTo>
+                  <a:lnTo>
+                    <a:pt x="3976659" y="1067000"/>
+                  </a:lnTo>
+                  <a:lnTo>
+                    <a:pt x="4047004" y="1069258"/>
+                  </a:lnTo>
+                  <a:lnTo>
+                    <a:pt x="4117348" y="1071489"/>
+                  </a:lnTo>
+                  <a:lnTo>
+                    <a:pt x="4187693" y="1073693"/>
+                  </a:lnTo>
+                  <a:lnTo>
+                    <a:pt x="4258037" y="1075871"/>
+                  </a:lnTo>
+                  <a:lnTo>
+                    <a:pt x="4328382" y="1078024"/>
+                  </a:lnTo>
+                  <a:lnTo>
+                    <a:pt x="4398726" y="1080151"/>
+                  </a:lnTo>
+                  <a:lnTo>
+                    <a:pt x="4469071" y="1082252"/>
+                  </a:lnTo>
+                  <a:lnTo>
+                    <a:pt x="4539415" y="1084329"/>
+                  </a:lnTo>
+                  <a:lnTo>
+                    <a:pt x="4609760" y="1086381"/>
+                  </a:lnTo>
+                  <a:lnTo>
+                    <a:pt x="4680104" y="1088408"/>
+                  </a:lnTo>
+                  <a:lnTo>
+                    <a:pt x="4750448" y="1090412"/>
+                  </a:lnTo>
+                  <a:lnTo>
+                    <a:pt x="4820793" y="1092392"/>
+                  </a:lnTo>
+                  <a:lnTo>
+                    <a:pt x="4891137" y="1094348"/>
+                  </a:lnTo>
+                  <a:lnTo>
+                    <a:pt x="4961482" y="1096281"/>
+                  </a:lnTo>
+                  <a:lnTo>
+                    <a:pt x="5031826" y="1098191"/>
                   </a:lnTo>
                 </a:path>
               </a:pathLst>
@@ -4078,273 +3788,598 @@
           </p:nvSpPr>
           <p:spPr>
             <a:xfrm>
-              <a:off x="2165110" y="2073503"/>
-              <a:ext cx="6097568" cy="3405732"/>
+              <a:off x="1235312" y="2881696"/>
+              <a:ext cx="6964104" cy="513613"/>
             </a:xfrm>
             <a:custGeom>
               <a:avLst/>
               <a:pathLst>
-                <a:path w="6097568" h="3405732">
+                <a:path w="6964104" h="513613">
+                  <a:moveTo>
+                    <a:pt x="6964104" y="513613"/>
+                  </a:moveTo>
+                  <a:lnTo>
+                    <a:pt x="6893760" y="513212"/>
+                  </a:lnTo>
+                  <a:lnTo>
+                    <a:pt x="6823415" y="512779"/>
+                  </a:lnTo>
+                  <a:lnTo>
+                    <a:pt x="6753071" y="512312"/>
+                  </a:lnTo>
+                  <a:lnTo>
+                    <a:pt x="6682726" y="511807"/>
+                  </a:lnTo>
+                  <a:lnTo>
+                    <a:pt x="6612382" y="511261"/>
+                  </a:lnTo>
+                  <a:lnTo>
+                    <a:pt x="6542037" y="510671"/>
+                  </a:lnTo>
+                  <a:lnTo>
+                    <a:pt x="6471693" y="510034"/>
+                  </a:lnTo>
+                  <a:lnTo>
+                    <a:pt x="6401348" y="509346"/>
+                  </a:lnTo>
+                  <a:lnTo>
+                    <a:pt x="6331004" y="508603"/>
+                  </a:lnTo>
+                  <a:lnTo>
+                    <a:pt x="6260659" y="507799"/>
+                  </a:lnTo>
+                  <a:lnTo>
+                    <a:pt x="6190315" y="506931"/>
+                  </a:lnTo>
+                  <a:lnTo>
+                    <a:pt x="6119970" y="505994"/>
+                  </a:lnTo>
+                  <a:lnTo>
+                    <a:pt x="6049626" y="504981"/>
+                  </a:lnTo>
+                  <a:lnTo>
+                    <a:pt x="5979281" y="503886"/>
+                  </a:lnTo>
+                  <a:lnTo>
+                    <a:pt x="5908937" y="502704"/>
+                  </a:lnTo>
+                  <a:lnTo>
+                    <a:pt x="5838592" y="501427"/>
+                  </a:lnTo>
+                  <a:lnTo>
+                    <a:pt x="5768248" y="500047"/>
+                  </a:lnTo>
+                  <a:lnTo>
+                    <a:pt x="5697903" y="498556"/>
+                  </a:lnTo>
+                  <a:lnTo>
+                    <a:pt x="5627559" y="496945"/>
+                  </a:lnTo>
+                  <a:lnTo>
+                    <a:pt x="5557214" y="495205"/>
+                  </a:lnTo>
+                  <a:lnTo>
+                    <a:pt x="5486870" y="493325"/>
+                  </a:lnTo>
+                  <a:lnTo>
+                    <a:pt x="5416525" y="491294"/>
+                  </a:lnTo>
+                  <a:lnTo>
+                    <a:pt x="5346181" y="489099"/>
+                  </a:lnTo>
+                  <a:lnTo>
+                    <a:pt x="5275836" y="486729"/>
+                  </a:lnTo>
+                  <a:lnTo>
+                    <a:pt x="5205492" y="484168"/>
+                  </a:lnTo>
+                  <a:lnTo>
+                    <a:pt x="5135147" y="481400"/>
+                  </a:lnTo>
+                  <a:lnTo>
+                    <a:pt x="5064803" y="478411"/>
+                  </a:lnTo>
+                  <a:lnTo>
+                    <a:pt x="4994458" y="475181"/>
+                  </a:lnTo>
+                  <a:lnTo>
+                    <a:pt x="4924114" y="471692"/>
+                  </a:lnTo>
+                  <a:lnTo>
+                    <a:pt x="4853769" y="467922"/>
+                  </a:lnTo>
+                  <a:lnTo>
+                    <a:pt x="4783425" y="463849"/>
+                  </a:lnTo>
+                  <a:lnTo>
+                    <a:pt x="4713080" y="459449"/>
+                  </a:lnTo>
+                  <a:lnTo>
+                    <a:pt x="4642736" y="454696"/>
+                  </a:lnTo>
+                  <a:lnTo>
+                    <a:pt x="4572391" y="449560"/>
+                  </a:lnTo>
+                  <a:lnTo>
+                    <a:pt x="4502047" y="444012"/>
+                  </a:lnTo>
+                  <a:lnTo>
+                    <a:pt x="4431702" y="438017"/>
+                  </a:lnTo>
+                  <a:lnTo>
+                    <a:pt x="4361358" y="431541"/>
+                  </a:lnTo>
+                  <a:lnTo>
+                    <a:pt x="4291013" y="424544"/>
+                  </a:lnTo>
+                  <a:lnTo>
+                    <a:pt x="4220669" y="416985"/>
+                  </a:lnTo>
+                  <a:lnTo>
+                    <a:pt x="4150324" y="408819"/>
+                  </a:lnTo>
+                  <a:lnTo>
+                    <a:pt x="4079980" y="399996"/>
+                  </a:lnTo>
+                  <a:lnTo>
+                    <a:pt x="4009635" y="390464"/>
+                  </a:lnTo>
+                  <a:lnTo>
+                    <a:pt x="3939291" y="380167"/>
+                  </a:lnTo>
+                  <a:lnTo>
+                    <a:pt x="3868946" y="369041"/>
+                  </a:lnTo>
+                  <a:lnTo>
+                    <a:pt x="3798602" y="357021"/>
+                  </a:lnTo>
+                  <a:lnTo>
+                    <a:pt x="3728257" y="344036"/>
+                  </a:lnTo>
+                  <a:lnTo>
+                    <a:pt x="3657913" y="330006"/>
+                  </a:lnTo>
+                  <a:lnTo>
+                    <a:pt x="3587569" y="314850"/>
+                  </a:lnTo>
+                  <a:lnTo>
+                    <a:pt x="3517224" y="298475"/>
+                  </a:lnTo>
+                  <a:lnTo>
+                    <a:pt x="3446880" y="280784"/>
+                  </a:lnTo>
+                  <a:lnTo>
+                    <a:pt x="3376535" y="261671"/>
+                  </a:lnTo>
+                  <a:lnTo>
+                    <a:pt x="3306191" y="241022"/>
+                  </a:lnTo>
+                  <a:lnTo>
+                    <a:pt x="3235846" y="219179"/>
+                  </a:lnTo>
+                  <a:lnTo>
+                    <a:pt x="3165502" y="215582"/>
+                  </a:lnTo>
+                  <a:lnTo>
+                    <a:pt x="3095157" y="211942"/>
+                  </a:lnTo>
+                  <a:lnTo>
+                    <a:pt x="3024813" y="208258"/>
+                  </a:lnTo>
+                  <a:lnTo>
+                    <a:pt x="2954468" y="204530"/>
+                  </a:lnTo>
+                  <a:lnTo>
+                    <a:pt x="2884124" y="200758"/>
+                  </a:lnTo>
+                  <a:lnTo>
+                    <a:pt x="2813779" y="196939"/>
+                  </a:lnTo>
+                  <a:lnTo>
+                    <a:pt x="2743435" y="193076"/>
+                  </a:lnTo>
+                  <a:lnTo>
+                    <a:pt x="2673090" y="189165"/>
+                  </a:lnTo>
+                  <a:lnTo>
+                    <a:pt x="2602746" y="185208"/>
+                  </a:lnTo>
+                  <a:lnTo>
+                    <a:pt x="2532401" y="181203"/>
+                  </a:lnTo>
+                  <a:lnTo>
+                    <a:pt x="2462057" y="177150"/>
+                  </a:lnTo>
+                  <a:lnTo>
+                    <a:pt x="2391712" y="173048"/>
+                  </a:lnTo>
+                  <a:lnTo>
+                    <a:pt x="2321368" y="168897"/>
+                  </a:lnTo>
+                  <a:lnTo>
+                    <a:pt x="2251023" y="164697"/>
+                  </a:lnTo>
+                  <a:lnTo>
+                    <a:pt x="2180679" y="160445"/>
+                  </a:lnTo>
+                  <a:lnTo>
+                    <a:pt x="2110334" y="156143"/>
+                  </a:lnTo>
+                  <a:lnTo>
+                    <a:pt x="2039990" y="151789"/>
+                  </a:lnTo>
+                  <a:lnTo>
+                    <a:pt x="1969645" y="147383"/>
+                  </a:lnTo>
+                  <a:lnTo>
+                    <a:pt x="1899301" y="142923"/>
+                  </a:lnTo>
+                  <a:lnTo>
+                    <a:pt x="1828956" y="138411"/>
+                  </a:lnTo>
+                  <a:lnTo>
+                    <a:pt x="1758612" y="133844"/>
+                  </a:lnTo>
+                  <a:lnTo>
+                    <a:pt x="1688267" y="129222"/>
+                  </a:lnTo>
+                  <a:lnTo>
+                    <a:pt x="1617923" y="124544"/>
+                  </a:lnTo>
+                  <a:lnTo>
+                    <a:pt x="1547578" y="119811"/>
+                  </a:lnTo>
+                  <a:lnTo>
+                    <a:pt x="1477234" y="115020"/>
+                  </a:lnTo>
+                  <a:lnTo>
+                    <a:pt x="1406889" y="110172"/>
+                  </a:lnTo>
+                  <a:lnTo>
+                    <a:pt x="1336545" y="105266"/>
+                  </a:lnTo>
+                  <a:lnTo>
+                    <a:pt x="1266200" y="100301"/>
+                  </a:lnTo>
+                  <a:lnTo>
+                    <a:pt x="1195856" y="95276"/>
+                  </a:lnTo>
+                  <a:lnTo>
+                    <a:pt x="1125511" y="90191"/>
+                  </a:lnTo>
+                  <a:lnTo>
+                    <a:pt x="1055167" y="85045"/>
+                  </a:lnTo>
+                  <a:lnTo>
+                    <a:pt x="984822" y="79836"/>
+                  </a:lnTo>
+                  <a:lnTo>
+                    <a:pt x="914478" y="74566"/>
+                  </a:lnTo>
+                  <a:lnTo>
+                    <a:pt x="844133" y="69232"/>
+                  </a:lnTo>
+                  <a:lnTo>
+                    <a:pt x="773789" y="63834"/>
+                  </a:lnTo>
+                  <a:lnTo>
+                    <a:pt x="703444" y="58371"/>
+                  </a:lnTo>
+                  <a:lnTo>
+                    <a:pt x="633100" y="52842"/>
+                  </a:lnTo>
+                  <a:lnTo>
+                    <a:pt x="562755" y="47247"/>
+                  </a:lnTo>
+                  <a:lnTo>
+                    <a:pt x="492411" y="41585"/>
+                  </a:lnTo>
+                  <a:lnTo>
+                    <a:pt x="422066" y="35855"/>
+                  </a:lnTo>
+                  <a:lnTo>
+                    <a:pt x="351722" y="30056"/>
+                  </a:lnTo>
+                  <a:lnTo>
+                    <a:pt x="281377" y="24188"/>
+                  </a:lnTo>
+                  <a:lnTo>
+                    <a:pt x="211033" y="18248"/>
+                  </a:lnTo>
+                  <a:lnTo>
+                    <a:pt x="140688" y="12238"/>
+                  </a:lnTo>
+                  <a:lnTo>
+                    <a:pt x="70344" y="6155"/>
+                  </a:lnTo>
+                  <a:lnTo>
+                    <a:pt x="0" y="0"/>
+                  </a:lnTo>
+                </a:path>
+              </a:pathLst>
+            </a:custGeom>
+          </p:spPr>
+          <p:txBody>
+            <a:bodyPr/>
+            <a:lstStyle/>
+            <a:p/>
+          </p:txBody>
+        </p:sp>
+        <p:sp>
+          <p:nvSpPr>
+            <p:cNvPr id="24" name="pl24"/>
+            <p:cNvSpPr/>
+            <p:nvPr/>
+          </p:nvSpPr>
+          <p:spPr>
+            <a:xfrm>
+              <a:off x="2210653" y="2143092"/>
+              <a:ext cx="5988763" cy="1229048"/>
+            </a:xfrm>
+            <a:custGeom>
+              <a:avLst/>
+              <a:pathLst>
+                <a:path w="5988763" h="1229048">
                   <a:moveTo>
                     <a:pt x="0" y="0"/>
                   </a:moveTo>
                   <a:lnTo>
-                    <a:pt x="9653" y="21296"/>
-                  </a:lnTo>
-                  <a:lnTo>
-                    <a:pt x="81276" y="172400"/>
-                  </a:lnTo>
-                  <a:lnTo>
-                    <a:pt x="152898" y="316909"/>
-                  </a:lnTo>
-                  <a:lnTo>
-                    <a:pt x="224521" y="455112"/>
-                  </a:lnTo>
-                  <a:lnTo>
-                    <a:pt x="296143" y="587284"/>
-                  </a:lnTo>
-                  <a:lnTo>
-                    <a:pt x="367766" y="713688"/>
-                  </a:lnTo>
-                  <a:lnTo>
-                    <a:pt x="439388" y="834575"/>
-                  </a:lnTo>
-                  <a:lnTo>
-                    <a:pt x="511011" y="950187"/>
-                  </a:lnTo>
-                  <a:lnTo>
-                    <a:pt x="582633" y="1060754"/>
-                  </a:lnTo>
-                  <a:lnTo>
-                    <a:pt x="654256" y="1166495"/>
-                  </a:lnTo>
-                  <a:lnTo>
-                    <a:pt x="725878" y="1267622"/>
-                  </a:lnTo>
-                  <a:lnTo>
-                    <a:pt x="797501" y="1364335"/>
-                  </a:lnTo>
-                  <a:lnTo>
-                    <a:pt x="869124" y="1456828"/>
-                  </a:lnTo>
-                  <a:lnTo>
-                    <a:pt x="940746" y="1545284"/>
-                  </a:lnTo>
-                  <a:lnTo>
-                    <a:pt x="1012369" y="1629880"/>
-                  </a:lnTo>
-                  <a:lnTo>
-                    <a:pt x="1083991" y="1710784"/>
-                  </a:lnTo>
-                  <a:lnTo>
-                    <a:pt x="1155614" y="1788157"/>
-                  </a:lnTo>
-                  <a:lnTo>
-                    <a:pt x="1227236" y="1862154"/>
-                  </a:lnTo>
-                  <a:lnTo>
-                    <a:pt x="1298859" y="1932922"/>
-                  </a:lnTo>
-                  <a:lnTo>
-                    <a:pt x="1370481" y="2000601"/>
-                  </a:lnTo>
-                  <a:lnTo>
-                    <a:pt x="1442104" y="2065326"/>
-                  </a:lnTo>
-                  <a:lnTo>
-                    <a:pt x="1513726" y="2127227"/>
-                  </a:lnTo>
-                  <a:lnTo>
-                    <a:pt x="1585349" y="2186427"/>
-                  </a:lnTo>
-                  <a:lnTo>
-                    <a:pt x="1656971" y="2243043"/>
-                  </a:lnTo>
-                  <a:lnTo>
-                    <a:pt x="1728594" y="2297188"/>
-                  </a:lnTo>
-                  <a:lnTo>
-                    <a:pt x="1800216" y="2348970"/>
-                  </a:lnTo>
-                  <a:lnTo>
-                    <a:pt x="1871839" y="2398493"/>
-                  </a:lnTo>
-                  <a:lnTo>
-                    <a:pt x="1943461" y="2445854"/>
-                  </a:lnTo>
-                  <a:lnTo>
-                    <a:pt x="2015084" y="2491149"/>
-                  </a:lnTo>
-                  <a:lnTo>
-                    <a:pt x="2086706" y="2534466"/>
-                  </a:lnTo>
-                  <a:lnTo>
-                    <a:pt x="2158329" y="2575894"/>
-                  </a:lnTo>
-                  <a:lnTo>
-                    <a:pt x="2229952" y="2615513"/>
-                  </a:lnTo>
-                  <a:lnTo>
-                    <a:pt x="2301574" y="2653403"/>
-                  </a:lnTo>
-                  <a:lnTo>
-                    <a:pt x="2373197" y="2689640"/>
-                  </a:lnTo>
-                  <a:lnTo>
-                    <a:pt x="2444819" y="2724295"/>
-                  </a:lnTo>
-                  <a:lnTo>
-                    <a:pt x="2516442" y="2757438"/>
-                  </a:lnTo>
-                  <a:lnTo>
-                    <a:pt x="2588064" y="2789135"/>
-                  </a:lnTo>
-                  <a:lnTo>
-                    <a:pt x="2659687" y="2819448"/>
-                  </a:lnTo>
-                  <a:lnTo>
-                    <a:pt x="2731309" y="2848439"/>
-                  </a:lnTo>
-                  <a:lnTo>
-                    <a:pt x="2802932" y="2876164"/>
-                  </a:lnTo>
-                  <a:lnTo>
-                    <a:pt x="2874554" y="2902680"/>
-                  </a:lnTo>
-                  <a:lnTo>
-                    <a:pt x="2946177" y="2928038"/>
-                  </a:lnTo>
-                  <a:lnTo>
-                    <a:pt x="3017799" y="2952289"/>
-                  </a:lnTo>
-                  <a:lnTo>
-                    <a:pt x="3089422" y="2975482"/>
-                  </a:lnTo>
-                  <a:lnTo>
-                    <a:pt x="3161044" y="2997664"/>
-                  </a:lnTo>
-                  <a:lnTo>
-                    <a:pt x="3232667" y="3018877"/>
-                  </a:lnTo>
-                  <a:lnTo>
-                    <a:pt x="3304289" y="3039164"/>
-                  </a:lnTo>
-                  <a:lnTo>
-                    <a:pt x="3375912" y="3058566"/>
-                  </a:lnTo>
-                  <a:lnTo>
-                    <a:pt x="3447534" y="3077121"/>
-                  </a:lnTo>
-                  <a:lnTo>
-                    <a:pt x="3519157" y="3094866"/>
-                  </a:lnTo>
-                  <a:lnTo>
-                    <a:pt x="3590780" y="3111837"/>
-                  </a:lnTo>
-                  <a:lnTo>
-                    <a:pt x="3662402" y="3128068"/>
-                  </a:lnTo>
-                  <a:lnTo>
-                    <a:pt x="3734025" y="3143590"/>
-                  </a:lnTo>
-                  <a:lnTo>
-                    <a:pt x="3805647" y="3158435"/>
-                  </a:lnTo>
-                  <a:lnTo>
-                    <a:pt x="3877270" y="3172631"/>
-                  </a:lnTo>
-                  <a:lnTo>
-                    <a:pt x="3948892" y="3186209"/>
-                  </a:lnTo>
-                  <a:lnTo>
-                    <a:pt x="4020515" y="3199193"/>
-                  </a:lnTo>
-                  <a:lnTo>
-                    <a:pt x="4092137" y="3211612"/>
-                  </a:lnTo>
-                  <a:lnTo>
-                    <a:pt x="4163760" y="3223488"/>
-                  </a:lnTo>
-                  <a:lnTo>
-                    <a:pt x="4235382" y="3234846"/>
-                  </a:lnTo>
-                  <a:lnTo>
-                    <a:pt x="4307005" y="3245708"/>
-                  </a:lnTo>
-                  <a:lnTo>
-                    <a:pt x="4378627" y="3256096"/>
-                  </a:lnTo>
-                  <a:lnTo>
-                    <a:pt x="4450250" y="3266031"/>
-                  </a:lnTo>
-                  <a:lnTo>
-                    <a:pt x="4521872" y="3275532"/>
-                  </a:lnTo>
-                  <a:lnTo>
-                    <a:pt x="4593495" y="3284619"/>
-                  </a:lnTo>
-                  <a:lnTo>
-                    <a:pt x="4665117" y="3293309"/>
-                  </a:lnTo>
-                  <a:lnTo>
-                    <a:pt x="4736740" y="3301620"/>
-                  </a:lnTo>
-                  <a:lnTo>
-                    <a:pt x="4808362" y="3309568"/>
-                  </a:lnTo>
-                  <a:lnTo>
-                    <a:pt x="4879985" y="3317169"/>
-                  </a:lnTo>
-                  <a:lnTo>
-                    <a:pt x="4951608" y="3324439"/>
-                  </a:lnTo>
-                  <a:lnTo>
-                    <a:pt x="5023230" y="3331391"/>
-                  </a:lnTo>
-                  <a:lnTo>
-                    <a:pt x="5094853" y="3338040"/>
-                  </a:lnTo>
-                  <a:lnTo>
-                    <a:pt x="5166475" y="3344399"/>
-                  </a:lnTo>
-                  <a:lnTo>
-                    <a:pt x="5238098" y="3350480"/>
-                  </a:lnTo>
-                  <a:lnTo>
-                    <a:pt x="5309720" y="3356296"/>
-                  </a:lnTo>
-                  <a:lnTo>
-                    <a:pt x="5381343" y="3361858"/>
-                  </a:lnTo>
-                  <a:lnTo>
-                    <a:pt x="5452965" y="3367177"/>
-                  </a:lnTo>
-                  <a:lnTo>
-                    <a:pt x="5524588" y="3372264"/>
-                  </a:lnTo>
-                  <a:lnTo>
-                    <a:pt x="5596210" y="3377129"/>
-                  </a:lnTo>
-                  <a:lnTo>
-                    <a:pt x="5667833" y="3381782"/>
-                  </a:lnTo>
-                  <a:lnTo>
-                    <a:pt x="5739455" y="3386232"/>
-                  </a:lnTo>
-                  <a:lnTo>
-                    <a:pt x="5811078" y="3390488"/>
-                  </a:lnTo>
-                  <a:lnTo>
-                    <a:pt x="5882700" y="3394558"/>
-                  </a:lnTo>
-                  <a:lnTo>
-                    <a:pt x="5954323" y="3398450"/>
-                  </a:lnTo>
-                  <a:lnTo>
-                    <a:pt x="6025945" y="3402172"/>
-                  </a:lnTo>
-                  <a:lnTo>
-                    <a:pt x="6097568" y="3405732"/>
+                    <a:pt x="9481" y="7685"/>
+                  </a:lnTo>
+                  <a:lnTo>
+                    <a:pt x="79825" y="62215"/>
+                  </a:lnTo>
+                  <a:lnTo>
+                    <a:pt x="150170" y="114365"/>
+                  </a:lnTo>
+                  <a:lnTo>
+                    <a:pt x="220514" y="164239"/>
+                  </a:lnTo>
+                  <a:lnTo>
+                    <a:pt x="290859" y="211937"/>
+                  </a:lnTo>
+                  <a:lnTo>
+                    <a:pt x="361203" y="257553"/>
+                  </a:lnTo>
+                  <a:lnTo>
+                    <a:pt x="431548" y="301178"/>
+                  </a:lnTo>
+                  <a:lnTo>
+                    <a:pt x="501892" y="342900"/>
+                  </a:lnTo>
+                  <a:lnTo>
+                    <a:pt x="572237" y="382801"/>
+                  </a:lnTo>
+                  <a:lnTo>
+                    <a:pt x="642581" y="420960"/>
+                  </a:lnTo>
+                  <a:lnTo>
+                    <a:pt x="712926" y="457454"/>
+                  </a:lnTo>
+                  <a:lnTo>
+                    <a:pt x="783270" y="492356"/>
+                  </a:lnTo>
+                  <a:lnTo>
+                    <a:pt x="853615" y="525734"/>
+                  </a:lnTo>
+                  <a:lnTo>
+                    <a:pt x="923959" y="557656"/>
+                  </a:lnTo>
+                  <a:lnTo>
+                    <a:pt x="994304" y="588185"/>
+                  </a:lnTo>
+                  <a:lnTo>
+                    <a:pt x="1064648" y="617381"/>
+                  </a:lnTo>
+                  <a:lnTo>
+                    <a:pt x="1134993" y="645304"/>
+                  </a:lnTo>
+                  <a:lnTo>
+                    <a:pt x="1205337" y="672007"/>
+                  </a:lnTo>
+                  <a:lnTo>
+                    <a:pt x="1275682" y="697546"/>
+                  </a:lnTo>
+                  <a:lnTo>
+                    <a:pt x="1346026" y="721969"/>
+                  </a:lnTo>
+                  <a:lnTo>
+                    <a:pt x="1416371" y="745327"/>
+                  </a:lnTo>
+                  <a:lnTo>
+                    <a:pt x="1486715" y="767666"/>
+                  </a:lnTo>
+                  <a:lnTo>
+                    <a:pt x="1557060" y="789030"/>
+                  </a:lnTo>
+                  <a:lnTo>
+                    <a:pt x="1627404" y="809461"/>
+                  </a:lnTo>
+                  <a:lnTo>
+                    <a:pt x="1697749" y="829001"/>
+                  </a:lnTo>
+                  <a:lnTo>
+                    <a:pt x="1768093" y="847688"/>
+                  </a:lnTo>
+                  <a:lnTo>
+                    <a:pt x="1838438" y="865559"/>
+                  </a:lnTo>
+                  <a:lnTo>
+                    <a:pt x="1908782" y="882651"/>
+                  </a:lnTo>
+                  <a:lnTo>
+                    <a:pt x="1979127" y="898997"/>
+                  </a:lnTo>
+                  <a:lnTo>
+                    <a:pt x="2049471" y="914629"/>
+                  </a:lnTo>
+                  <a:lnTo>
+                    <a:pt x="2119816" y="929579"/>
+                  </a:lnTo>
+                  <a:lnTo>
+                    <a:pt x="2190160" y="943877"/>
+                  </a:lnTo>
+                  <a:lnTo>
+                    <a:pt x="2260505" y="957550"/>
+                  </a:lnTo>
+                  <a:lnTo>
+                    <a:pt x="2330849" y="970628"/>
+                  </a:lnTo>
+                  <a:lnTo>
+                    <a:pt x="2401194" y="983134"/>
+                  </a:lnTo>
+                  <a:lnTo>
+                    <a:pt x="2471538" y="995094"/>
+                  </a:lnTo>
+                  <a:lnTo>
+                    <a:pt x="2541883" y="1006533"/>
+                  </a:lnTo>
+                  <a:lnTo>
+                    <a:pt x="2612227" y="1017472"/>
+                  </a:lnTo>
+                  <a:lnTo>
+                    <a:pt x="2682572" y="1027934"/>
+                  </a:lnTo>
+                  <a:lnTo>
+                    <a:pt x="2752916" y="1037940"/>
+                  </a:lnTo>
+                  <a:lnTo>
+                    <a:pt x="2823261" y="1047508"/>
+                  </a:lnTo>
+                  <a:lnTo>
+                    <a:pt x="2893605" y="1056660"/>
+                  </a:lnTo>
+                  <a:lnTo>
+                    <a:pt x="2963950" y="1065411"/>
+                  </a:lnTo>
+                  <a:lnTo>
+                    <a:pt x="3034294" y="1073781"/>
+                  </a:lnTo>
+                  <a:lnTo>
+                    <a:pt x="3104639" y="1081786"/>
+                  </a:lnTo>
+                  <a:lnTo>
+                    <a:pt x="3174983" y="1089441"/>
+                  </a:lnTo>
+                  <a:lnTo>
+                    <a:pt x="3245328" y="1096762"/>
+                  </a:lnTo>
+                  <a:lnTo>
+                    <a:pt x="3315672" y="1103764"/>
+                  </a:lnTo>
+                  <a:lnTo>
+                    <a:pt x="3386017" y="1110460"/>
+                  </a:lnTo>
+                  <a:lnTo>
+                    <a:pt x="3456361" y="1116864"/>
+                  </a:lnTo>
+                  <a:lnTo>
+                    <a:pt x="3526705" y="1122989"/>
+                  </a:lnTo>
+                  <a:lnTo>
+                    <a:pt x="3597050" y="1128846"/>
+                  </a:lnTo>
+                  <a:lnTo>
+                    <a:pt x="3667394" y="1134447"/>
+                  </a:lnTo>
+                  <a:lnTo>
+                    <a:pt x="3737739" y="1139804"/>
+                  </a:lnTo>
+                  <a:lnTo>
+                    <a:pt x="3808083" y="1144928"/>
+                  </a:lnTo>
+                  <a:lnTo>
+                    <a:pt x="3878428" y="1149827"/>
+                  </a:lnTo>
+                  <a:lnTo>
+                    <a:pt x="3948772" y="1154513"/>
+                  </a:lnTo>
+                  <a:lnTo>
+                    <a:pt x="4019117" y="1158995"/>
+                  </a:lnTo>
+                  <a:lnTo>
+                    <a:pt x="4089461" y="1163281"/>
+                  </a:lnTo>
+                  <a:lnTo>
+                    <a:pt x="4159806" y="1167379"/>
+                  </a:lnTo>
+                  <a:lnTo>
+                    <a:pt x="4230150" y="1171299"/>
+                  </a:lnTo>
+                  <a:lnTo>
+                    <a:pt x="4300495" y="1175048"/>
+                  </a:lnTo>
+                  <a:lnTo>
+                    <a:pt x="4370839" y="1178633"/>
+                  </a:lnTo>
+                  <a:lnTo>
+                    <a:pt x="4441184" y="1182062"/>
+                  </a:lnTo>
+                  <a:lnTo>
+                    <a:pt x="4511528" y="1185341"/>
+                  </a:lnTo>
+                  <a:lnTo>
+                    <a:pt x="4581873" y="1188477"/>
+                  </a:lnTo>
+                  <a:lnTo>
+                    <a:pt x="4652217" y="1191477"/>
+                  </a:lnTo>
+                  <a:lnTo>
+                    <a:pt x="4722562" y="1194345"/>
+                  </a:lnTo>
+                  <a:lnTo>
+                    <a:pt x="4792906" y="1197088"/>
+                  </a:lnTo>
+                  <a:lnTo>
+                    <a:pt x="4863251" y="1199711"/>
+                  </a:lnTo>
+                  <a:lnTo>
+                    <a:pt x="4933595" y="1202220"/>
+                  </a:lnTo>
+                  <a:lnTo>
+                    <a:pt x="5003940" y="1204620"/>
+                  </a:lnTo>
+                  <a:lnTo>
+                    <a:pt x="5074284" y="1206914"/>
+                  </a:lnTo>
+                  <a:lnTo>
+                    <a:pt x="5144629" y="1209109"/>
+                  </a:lnTo>
+                  <a:lnTo>
+                    <a:pt x="5214973" y="1211208"/>
+                  </a:lnTo>
+                  <a:lnTo>
+                    <a:pt x="5285318" y="1213215"/>
+                  </a:lnTo>
+                  <a:lnTo>
+                    <a:pt x="5355662" y="1215135"/>
+                  </a:lnTo>
+                  <a:lnTo>
+                    <a:pt x="5426007" y="1216971"/>
+                  </a:lnTo>
+                  <a:lnTo>
+                    <a:pt x="5496351" y="1218726"/>
+                  </a:lnTo>
+                  <a:lnTo>
+                    <a:pt x="5566696" y="1220405"/>
+                  </a:lnTo>
+                  <a:lnTo>
+                    <a:pt x="5637040" y="1222011"/>
+                  </a:lnTo>
+                  <a:lnTo>
+                    <a:pt x="5707385" y="1223547"/>
+                  </a:lnTo>
+                  <a:lnTo>
+                    <a:pt x="5777729" y="1225016"/>
+                  </a:lnTo>
+                  <a:lnTo>
+                    <a:pt x="5848074" y="1226420"/>
+                  </a:lnTo>
+                  <a:lnTo>
+                    <a:pt x="5918418" y="1227764"/>
+                  </a:lnTo>
+                  <a:lnTo>
+                    <a:pt x="5988763" y="1229048"/>
                   </a:lnTo>
                 </a:path>
               </a:pathLst>
@@ -4367,27 +4402,27 @@
         </p:sp>
         <p:sp>
           <p:nvSpPr>
-            <p:cNvPr id="24" name="pl24"/>
+            <p:cNvPr id="25" name="pl25"/>
             <p:cNvSpPr/>
             <p:nvPr/>
           </p:nvSpPr>
           <p:spPr>
             <a:xfrm>
-              <a:off x="817517" y="4727786"/>
-              <a:ext cx="7799693" cy="0"/>
+              <a:off x="887106" y="3100960"/>
+              <a:ext cx="7660515" cy="0"/>
             </a:xfrm>
             <a:custGeom>
               <a:avLst/>
               <a:pathLst>
-                <a:path w="7799693" h="0">
+                <a:path w="7660515" h="0">
                   <a:moveTo>
                     <a:pt x="0" y="0"/>
                   </a:moveTo>
                   <a:lnTo>
-                    <a:pt x="7799693" y="0"/>
-                  </a:lnTo>
-                  <a:lnTo>
-                    <a:pt x="7799693" y="0"/>
+                    <a:pt x="7660515" y="0"/>
+                  </a:lnTo>
+                  <a:lnTo>
+                    <a:pt x="7660515" y="0"/>
                   </a:lnTo>
                 </a:path>
               </a:pathLst>
@@ -4410,21 +4445,21 @@
         </p:sp>
         <p:sp>
           <p:nvSpPr>
-            <p:cNvPr id="25" name="pl25"/>
+            <p:cNvPr id="26" name="pl26"/>
             <p:cNvSpPr/>
             <p:nvPr/>
           </p:nvSpPr>
           <p:spPr>
             <a:xfrm>
-              <a:off x="4468386" y="2073503"/>
-              <a:ext cx="0" cy="3649639"/>
+              <a:off x="4472829" y="2143092"/>
+              <a:ext cx="0" cy="1317069"/>
             </a:xfrm>
             <a:custGeom>
               <a:avLst/>
               <a:pathLst>
-                <a:path w="0" h="3649639">
+                <a:path w="0" h="1317069">
                   <a:moveTo>
-                    <a:pt x="0" y="3649639"/>
+                    <a:pt x="0" y="1317069"/>
                   </a:moveTo>
                   <a:lnTo>
                     <a:pt x="0" y="0"/>
@@ -4453,13 +4488,13 @@
         </p:sp>
         <p:sp>
           <p:nvSpPr>
-            <p:cNvPr id="26" name="tx26"/>
+            <p:cNvPr id="27" name="tx27"/>
             <p:cNvSpPr/>
             <p:nvPr/>
           </p:nvSpPr>
           <p:spPr>
             <a:xfrm>
-              <a:off x="692708" y="5517199"/>
+              <a:off x="762297" y="3360243"/>
               <a:ext cx="62179" cy="80101"/>
             </a:xfrm>
             <a:prstGeom prst="rect">
@@ -4499,13 +4534,13 @@
         </p:sp>
         <p:sp>
           <p:nvSpPr>
-            <p:cNvPr id="27" name="tx27"/>
+            <p:cNvPr id="28" name="tx28"/>
             <p:cNvSpPr/>
             <p:nvPr/>
           </p:nvSpPr>
           <p:spPr>
             <a:xfrm>
-              <a:off x="692708" y="4687735"/>
+              <a:off x="762297" y="3060909"/>
               <a:ext cx="62179" cy="80101"/>
             </a:xfrm>
             <a:prstGeom prst="rect">
@@ -4545,13 +4580,13 @@
         </p:sp>
         <p:sp>
           <p:nvSpPr>
-            <p:cNvPr id="28" name="tx28"/>
+            <p:cNvPr id="29" name="tx29"/>
             <p:cNvSpPr/>
             <p:nvPr/>
           </p:nvSpPr>
           <p:spPr>
             <a:xfrm>
-              <a:off x="692708" y="3858272"/>
+              <a:off x="762297" y="2761575"/>
               <a:ext cx="62179" cy="80101"/>
             </a:xfrm>
             <a:prstGeom prst="rect">
@@ -4591,13 +4626,13 @@
         </p:sp>
         <p:sp>
           <p:nvSpPr>
-            <p:cNvPr id="29" name="tx29"/>
+            <p:cNvPr id="30" name="tx30"/>
             <p:cNvSpPr/>
             <p:nvPr/>
           </p:nvSpPr>
           <p:spPr>
             <a:xfrm>
-              <a:off x="692708" y="3028808"/>
+              <a:off x="762297" y="2462242"/>
               <a:ext cx="62179" cy="80101"/>
             </a:xfrm>
             <a:prstGeom prst="rect">
@@ -4637,13 +4672,13 @@
         </p:sp>
         <p:sp>
           <p:nvSpPr>
-            <p:cNvPr id="30" name="tx30"/>
+            <p:cNvPr id="31" name="tx31"/>
             <p:cNvSpPr/>
             <p:nvPr/>
           </p:nvSpPr>
           <p:spPr>
             <a:xfrm>
-              <a:off x="692708" y="2199345"/>
+              <a:off x="762297" y="2162908"/>
               <a:ext cx="62179" cy="80101"/>
             </a:xfrm>
             <a:prstGeom prst="rect">
@@ -4683,13 +4718,13 @@
         </p:sp>
         <p:sp>
           <p:nvSpPr>
-            <p:cNvPr id="31" name="tx31"/>
+            <p:cNvPr id="32" name="tx32"/>
             <p:cNvSpPr/>
             <p:nvPr/>
           </p:nvSpPr>
           <p:spPr>
             <a:xfrm>
-              <a:off x="2478335" y="5785772"/>
+              <a:off x="2516846" y="3522791"/>
               <a:ext cx="161574" cy="80101"/>
             </a:xfrm>
             <a:prstGeom prst="rect">
@@ -4729,13 +4764,13 @@
         </p:sp>
         <p:sp>
           <p:nvSpPr>
-            <p:cNvPr id="32" name="tx32"/>
+            <p:cNvPr id="33" name="tx33"/>
             <p:cNvSpPr/>
             <p:nvPr/>
           </p:nvSpPr>
           <p:spPr>
             <a:xfrm>
-              <a:off x="4582608" y="5785772"/>
+              <a:off x="4584458" y="3522791"/>
               <a:ext cx="62179" cy="80101"/>
             </a:xfrm>
             <a:prstGeom prst="rect">
@@ -4775,13 +4810,13 @@
         </p:sp>
         <p:sp>
           <p:nvSpPr>
-            <p:cNvPr id="33" name="tx33"/>
+            <p:cNvPr id="34" name="tx34"/>
             <p:cNvSpPr/>
             <p:nvPr/>
           </p:nvSpPr>
           <p:spPr>
             <a:xfrm>
-              <a:off x="6606094" y="5785772"/>
+              <a:off x="6571282" y="3522791"/>
               <a:ext cx="124358" cy="80101"/>
             </a:xfrm>
             <a:prstGeom prst="rect">
@@ -4821,13 +4856,13 @@
         </p:sp>
         <p:sp>
           <p:nvSpPr>
-            <p:cNvPr id="34" name="tx34"/>
+            <p:cNvPr id="35" name="tx35"/>
             <p:cNvSpPr/>
             <p:nvPr/>
           </p:nvSpPr>
           <p:spPr>
             <a:xfrm>
-              <a:off x="2928340" y="5925448"/>
+              <a:off x="2928340" y="3662467"/>
               <a:ext cx="3578047" cy="100218"/>
             </a:xfrm>
             <a:prstGeom prst="rect">
@@ -4867,13 +4902,13 @@
         </p:sp>
         <p:sp>
           <p:nvSpPr>
-            <p:cNvPr id="35" name="tx35"/>
+            <p:cNvPr id="36" name="tx36"/>
             <p:cNvSpPr/>
             <p:nvPr/>
           </p:nvSpPr>
           <p:spPr>
             <a:xfrm rot="-5400000">
-              <a:off x="68446" y="3848213"/>
+              <a:off x="138035" y="2751517"/>
               <a:ext cx="1016904" cy="100218"/>
             </a:xfrm>
             <a:prstGeom prst="rect">
@@ -4913,13 +4948,13 @@
         </p:sp>
         <p:sp>
           <p:nvSpPr>
-            <p:cNvPr id="36" name="tx36"/>
+            <p:cNvPr id="37" name="tx37"/>
             <p:cNvSpPr/>
             <p:nvPr/>
           </p:nvSpPr>
           <p:spPr>
             <a:xfrm>
-              <a:off x="817517" y="1896563"/>
+              <a:off x="887106" y="1966152"/>
               <a:ext cx="6385163" cy="82021"/>
             </a:xfrm>
             <a:prstGeom prst="rect">
@@ -4959,13 +4994,3545 @@
         </p:sp>
         <p:sp>
           <p:nvSpPr>
-            <p:cNvPr id="37" name="tx37"/>
+            <p:cNvPr id="38" name="tx38"/>
             <p:cNvSpPr/>
             <p:nvPr/>
           </p:nvSpPr>
           <p:spPr>
             <a:xfrm>
-              <a:off x="817517" y="1669789"/>
+              <a:off x="887106" y="1739378"/>
+              <a:ext cx="3192444" cy="120152"/>
+            </a:xfrm>
+            <a:prstGeom prst="rect">
+              <a:avLst/>
+            </a:prstGeom>
+            <a:noFill/>
+          </p:spPr>
+          <p:txBody>
+            <a:bodyPr lIns="0" rIns="0" tIns="0" bIns="0" anchorCtr="1" anchor="ctr" wrap="none"/>
+            <a:lstStyle/>
+            <a:p>
+              <a:pPr algn="l" marL="0" marR="0" indent="0">
+                <a:lnSpc>
+                  <a:spcPts val="1320"/>
+                </a:lnSpc>
+                <a:spcBef>
+                  <a:spcPts val="0"/>
+                </a:spcBef>
+                <a:spcAft>
+                  <a:spcPts val="0"/>
+                </a:spcAft>
+              </a:pPr>
+              <a:r>
+                <a:rPr sz="1320">
+                  <a:solidFill>
+                    <a:srgbClr val="000000">
+                      <a:alpha val="100000"/>
+                    </a:srgbClr>
+                  </a:solidFill>
+                  <a:latin typeface="Helvetica"/>
+                  <a:cs typeface="Helvetica"/>
+                </a:rPr>
+                <a:t>Nausea/Vomiting/GI (Carboplatin AUC ≥ 3)</a:t>
+              </a:r>
+            </a:p>
+          </p:txBody>
+        </p:sp>
+        <p:sp>
+          <p:nvSpPr>
+            <p:cNvPr id="39" name="pl39"/>
+            <p:cNvSpPr/>
+            <p:nvPr/>
+          </p:nvSpPr>
+          <p:spPr>
+            <a:xfrm>
+              <a:off x="887106" y="5444019"/>
+              <a:ext cx="7660515" cy="0"/>
+            </a:xfrm>
+            <a:custGeom>
+              <a:avLst/>
+              <a:pathLst>
+                <a:path w="7660515" h="0">
+                  <a:moveTo>
+                    <a:pt x="0" y="0"/>
+                  </a:moveTo>
+                  <a:lnTo>
+                    <a:pt x="7660515" y="0"/>
+                  </a:lnTo>
+                  <a:lnTo>
+                    <a:pt x="7660515" y="0"/>
+                  </a:lnTo>
+                </a:path>
+              </a:pathLst>
+            </a:custGeom>
+            <a:ln w="6775" cap="flat">
+              <a:solidFill>
+                <a:srgbClr val="EBEBEB">
+                  <a:alpha val="100000"/>
+                </a:srgbClr>
+              </a:solidFill>
+              <a:prstDash val="solid"/>
+              <a:round/>
+            </a:ln>
+          </p:spPr>
+          <p:txBody>
+            <a:bodyPr/>
+            <a:lstStyle/>
+            <a:p/>
+          </p:txBody>
+        </p:sp>
+        <p:sp>
+          <p:nvSpPr>
+            <p:cNvPr id="40" name="pl40"/>
+            <p:cNvSpPr/>
+            <p:nvPr/>
+          </p:nvSpPr>
+          <p:spPr>
+            <a:xfrm>
+              <a:off x="887106" y="5144686"/>
+              <a:ext cx="7660515" cy="0"/>
+            </a:xfrm>
+            <a:custGeom>
+              <a:avLst/>
+              <a:pathLst>
+                <a:path w="7660515" h="0">
+                  <a:moveTo>
+                    <a:pt x="0" y="0"/>
+                  </a:moveTo>
+                  <a:lnTo>
+                    <a:pt x="7660515" y="0"/>
+                  </a:lnTo>
+                  <a:lnTo>
+                    <a:pt x="7660515" y="0"/>
+                  </a:lnTo>
+                </a:path>
+              </a:pathLst>
+            </a:custGeom>
+            <a:ln w="6775" cap="flat">
+              <a:solidFill>
+                <a:srgbClr val="EBEBEB">
+                  <a:alpha val="100000"/>
+                </a:srgbClr>
+              </a:solidFill>
+              <a:prstDash val="solid"/>
+              <a:round/>
+            </a:ln>
+          </p:spPr>
+          <p:txBody>
+            <a:bodyPr/>
+            <a:lstStyle/>
+            <a:p/>
+          </p:txBody>
+        </p:sp>
+        <p:sp>
+          <p:nvSpPr>
+            <p:cNvPr id="41" name="pl41"/>
+            <p:cNvSpPr/>
+            <p:nvPr/>
+          </p:nvSpPr>
+          <p:spPr>
+            <a:xfrm>
+              <a:off x="887106" y="4845352"/>
+              <a:ext cx="7660515" cy="0"/>
+            </a:xfrm>
+            <a:custGeom>
+              <a:avLst/>
+              <a:pathLst>
+                <a:path w="7660515" h="0">
+                  <a:moveTo>
+                    <a:pt x="0" y="0"/>
+                  </a:moveTo>
+                  <a:lnTo>
+                    <a:pt x="7660515" y="0"/>
+                  </a:lnTo>
+                  <a:lnTo>
+                    <a:pt x="7660515" y="0"/>
+                  </a:lnTo>
+                </a:path>
+              </a:pathLst>
+            </a:custGeom>
+            <a:ln w="6775" cap="flat">
+              <a:solidFill>
+                <a:srgbClr val="EBEBEB">
+                  <a:alpha val="100000"/>
+                </a:srgbClr>
+              </a:solidFill>
+              <a:prstDash val="solid"/>
+              <a:round/>
+            </a:ln>
+          </p:spPr>
+          <p:txBody>
+            <a:bodyPr/>
+            <a:lstStyle/>
+            <a:p/>
+          </p:txBody>
+        </p:sp>
+        <p:sp>
+          <p:nvSpPr>
+            <p:cNvPr id="42" name="pl42"/>
+            <p:cNvSpPr/>
+            <p:nvPr/>
+          </p:nvSpPr>
+          <p:spPr>
+            <a:xfrm>
+              <a:off x="887106" y="4546018"/>
+              <a:ext cx="7660515" cy="0"/>
+            </a:xfrm>
+            <a:custGeom>
+              <a:avLst/>
+              <a:pathLst>
+                <a:path w="7660515" h="0">
+                  <a:moveTo>
+                    <a:pt x="0" y="0"/>
+                  </a:moveTo>
+                  <a:lnTo>
+                    <a:pt x="7660515" y="0"/>
+                  </a:lnTo>
+                  <a:lnTo>
+                    <a:pt x="7660515" y="0"/>
+                  </a:lnTo>
+                </a:path>
+              </a:pathLst>
+            </a:custGeom>
+            <a:ln w="6775" cap="flat">
+              <a:solidFill>
+                <a:srgbClr val="EBEBEB">
+                  <a:alpha val="100000"/>
+                </a:srgbClr>
+              </a:solidFill>
+              <a:prstDash val="solid"/>
+              <a:round/>
+            </a:ln>
+          </p:spPr>
+          <p:txBody>
+            <a:bodyPr/>
+            <a:lstStyle/>
+            <a:p/>
+          </p:txBody>
+        </p:sp>
+        <p:sp>
+          <p:nvSpPr>
+            <p:cNvPr id="43" name="pl43"/>
+            <p:cNvSpPr/>
+            <p:nvPr/>
+          </p:nvSpPr>
+          <p:spPr>
+            <a:xfrm>
+              <a:off x="983303" y="4336484"/>
+              <a:ext cx="0" cy="1317069"/>
+            </a:xfrm>
+            <a:custGeom>
+              <a:avLst/>
+              <a:pathLst>
+                <a:path w="0" h="1317069">
+                  <a:moveTo>
+                    <a:pt x="0" y="1317069"/>
+                  </a:moveTo>
+                  <a:lnTo>
+                    <a:pt x="0" y="0"/>
+                  </a:lnTo>
+                  <a:lnTo>
+                    <a:pt x="0" y="0"/>
+                  </a:lnTo>
+                </a:path>
+              </a:pathLst>
+            </a:custGeom>
+            <a:ln w="6775" cap="flat">
+              <a:solidFill>
+                <a:srgbClr val="EBEBEB">
+                  <a:alpha val="100000"/>
+                </a:srgbClr>
+              </a:solidFill>
+              <a:prstDash val="solid"/>
+              <a:round/>
+            </a:ln>
+          </p:spPr>
+          <p:txBody>
+            <a:bodyPr/>
+            <a:lstStyle/>
+            <a:p/>
+          </p:txBody>
+        </p:sp>
+        <p:sp>
+          <p:nvSpPr>
+            <p:cNvPr id="44" name="pl44"/>
+            <p:cNvSpPr/>
+            <p:nvPr/>
+          </p:nvSpPr>
+          <p:spPr>
+            <a:xfrm>
+              <a:off x="1790468" y="4336484"/>
+              <a:ext cx="0" cy="1317069"/>
+            </a:xfrm>
+            <a:custGeom>
+              <a:avLst/>
+              <a:pathLst>
+                <a:path w="0" h="1317069">
+                  <a:moveTo>
+                    <a:pt x="0" y="1317069"/>
+                  </a:moveTo>
+                  <a:lnTo>
+                    <a:pt x="0" y="0"/>
+                  </a:lnTo>
+                  <a:lnTo>
+                    <a:pt x="0" y="0"/>
+                  </a:lnTo>
+                </a:path>
+              </a:pathLst>
+            </a:custGeom>
+            <a:ln w="6775" cap="flat">
+              <a:solidFill>
+                <a:srgbClr val="EBEBEB">
+                  <a:alpha val="100000"/>
+                </a:srgbClr>
+              </a:solidFill>
+              <a:prstDash val="solid"/>
+              <a:round/>
+            </a:ln>
+          </p:spPr>
+          <p:txBody>
+            <a:bodyPr/>
+            <a:lstStyle/>
+            <a:p/>
+          </p:txBody>
+        </p:sp>
+        <p:sp>
+          <p:nvSpPr>
+            <p:cNvPr id="45" name="pl45"/>
+            <p:cNvSpPr/>
+            <p:nvPr/>
+          </p:nvSpPr>
+          <p:spPr>
+            <a:xfrm>
+              <a:off x="2597634" y="4336484"/>
+              <a:ext cx="0" cy="1317069"/>
+            </a:xfrm>
+            <a:custGeom>
+              <a:avLst/>
+              <a:pathLst>
+                <a:path w="0" h="1317069">
+                  <a:moveTo>
+                    <a:pt x="0" y="1317069"/>
+                  </a:moveTo>
+                  <a:lnTo>
+                    <a:pt x="0" y="0"/>
+                  </a:lnTo>
+                  <a:lnTo>
+                    <a:pt x="0" y="0"/>
+                  </a:lnTo>
+                </a:path>
+              </a:pathLst>
+            </a:custGeom>
+            <a:ln w="6775" cap="flat">
+              <a:solidFill>
+                <a:srgbClr val="EBEBEB">
+                  <a:alpha val="100000"/>
+                </a:srgbClr>
+              </a:solidFill>
+              <a:prstDash val="solid"/>
+              <a:round/>
+            </a:ln>
+          </p:spPr>
+          <p:txBody>
+            <a:bodyPr/>
+            <a:lstStyle/>
+            <a:p/>
+          </p:txBody>
+        </p:sp>
+        <p:sp>
+          <p:nvSpPr>
+            <p:cNvPr id="46" name="pl46"/>
+            <p:cNvSpPr/>
+            <p:nvPr/>
+          </p:nvSpPr>
+          <p:spPr>
+            <a:xfrm>
+              <a:off x="3404799" y="4336484"/>
+              <a:ext cx="0" cy="1317069"/>
+            </a:xfrm>
+            <a:custGeom>
+              <a:avLst/>
+              <a:pathLst>
+                <a:path w="0" h="1317069">
+                  <a:moveTo>
+                    <a:pt x="0" y="1317069"/>
+                  </a:moveTo>
+                  <a:lnTo>
+                    <a:pt x="0" y="0"/>
+                  </a:lnTo>
+                  <a:lnTo>
+                    <a:pt x="0" y="0"/>
+                  </a:lnTo>
+                </a:path>
+              </a:pathLst>
+            </a:custGeom>
+            <a:ln w="6775" cap="flat">
+              <a:solidFill>
+                <a:srgbClr val="EBEBEB">
+                  <a:alpha val="100000"/>
+                </a:srgbClr>
+              </a:solidFill>
+              <a:prstDash val="solid"/>
+              <a:round/>
+            </a:ln>
+          </p:spPr>
+          <p:txBody>
+            <a:bodyPr/>
+            <a:lstStyle/>
+            <a:p/>
+          </p:txBody>
+        </p:sp>
+        <p:sp>
+          <p:nvSpPr>
+            <p:cNvPr id="47" name="pl47"/>
+            <p:cNvSpPr/>
+            <p:nvPr/>
+          </p:nvSpPr>
+          <p:spPr>
+            <a:xfrm>
+              <a:off x="4211965" y="4336484"/>
+              <a:ext cx="0" cy="1317069"/>
+            </a:xfrm>
+            <a:custGeom>
+              <a:avLst/>
+              <a:pathLst>
+                <a:path w="0" h="1317069">
+                  <a:moveTo>
+                    <a:pt x="0" y="1317069"/>
+                  </a:moveTo>
+                  <a:lnTo>
+                    <a:pt x="0" y="0"/>
+                  </a:lnTo>
+                  <a:lnTo>
+                    <a:pt x="0" y="0"/>
+                  </a:lnTo>
+                </a:path>
+              </a:pathLst>
+            </a:custGeom>
+            <a:ln w="6775" cap="flat">
+              <a:solidFill>
+                <a:srgbClr val="EBEBEB">
+                  <a:alpha val="100000"/>
+                </a:srgbClr>
+              </a:solidFill>
+              <a:prstDash val="solid"/>
+              <a:round/>
+            </a:ln>
+          </p:spPr>
+          <p:txBody>
+            <a:bodyPr/>
+            <a:lstStyle/>
+            <a:p/>
+          </p:txBody>
+        </p:sp>
+        <p:sp>
+          <p:nvSpPr>
+            <p:cNvPr id="48" name="pl48"/>
+            <p:cNvSpPr/>
+            <p:nvPr/>
+          </p:nvSpPr>
+          <p:spPr>
+            <a:xfrm>
+              <a:off x="5019130" y="4336484"/>
+              <a:ext cx="0" cy="1317069"/>
+            </a:xfrm>
+            <a:custGeom>
+              <a:avLst/>
+              <a:pathLst>
+                <a:path w="0" h="1317069">
+                  <a:moveTo>
+                    <a:pt x="0" y="1317069"/>
+                  </a:moveTo>
+                  <a:lnTo>
+                    <a:pt x="0" y="0"/>
+                  </a:lnTo>
+                  <a:lnTo>
+                    <a:pt x="0" y="0"/>
+                  </a:lnTo>
+                </a:path>
+              </a:pathLst>
+            </a:custGeom>
+            <a:ln w="6775" cap="flat">
+              <a:solidFill>
+                <a:srgbClr val="EBEBEB">
+                  <a:alpha val="100000"/>
+                </a:srgbClr>
+              </a:solidFill>
+              <a:prstDash val="solid"/>
+              <a:round/>
+            </a:ln>
+          </p:spPr>
+          <p:txBody>
+            <a:bodyPr/>
+            <a:lstStyle/>
+            <a:p/>
+          </p:txBody>
+        </p:sp>
+        <p:sp>
+          <p:nvSpPr>
+            <p:cNvPr id="49" name="pl49"/>
+            <p:cNvSpPr/>
+            <p:nvPr/>
+          </p:nvSpPr>
+          <p:spPr>
+            <a:xfrm>
+              <a:off x="5826296" y="4336484"/>
+              <a:ext cx="0" cy="1317069"/>
+            </a:xfrm>
+            <a:custGeom>
+              <a:avLst/>
+              <a:pathLst>
+                <a:path w="0" h="1317069">
+                  <a:moveTo>
+                    <a:pt x="0" y="1317069"/>
+                  </a:moveTo>
+                  <a:lnTo>
+                    <a:pt x="0" y="0"/>
+                  </a:lnTo>
+                  <a:lnTo>
+                    <a:pt x="0" y="0"/>
+                  </a:lnTo>
+                </a:path>
+              </a:pathLst>
+            </a:custGeom>
+            <a:ln w="6775" cap="flat">
+              <a:solidFill>
+                <a:srgbClr val="EBEBEB">
+                  <a:alpha val="100000"/>
+                </a:srgbClr>
+              </a:solidFill>
+              <a:prstDash val="solid"/>
+              <a:round/>
+            </a:ln>
+          </p:spPr>
+          <p:txBody>
+            <a:bodyPr/>
+            <a:lstStyle/>
+            <a:p/>
+          </p:txBody>
+        </p:sp>
+        <p:sp>
+          <p:nvSpPr>
+            <p:cNvPr id="50" name="pl50"/>
+            <p:cNvSpPr/>
+            <p:nvPr/>
+          </p:nvSpPr>
+          <p:spPr>
+            <a:xfrm>
+              <a:off x="6633461" y="4336484"/>
+              <a:ext cx="0" cy="1317069"/>
+            </a:xfrm>
+            <a:custGeom>
+              <a:avLst/>
+              <a:pathLst>
+                <a:path w="0" h="1317069">
+                  <a:moveTo>
+                    <a:pt x="0" y="1317069"/>
+                  </a:moveTo>
+                  <a:lnTo>
+                    <a:pt x="0" y="0"/>
+                  </a:lnTo>
+                  <a:lnTo>
+                    <a:pt x="0" y="0"/>
+                  </a:lnTo>
+                </a:path>
+              </a:pathLst>
+            </a:custGeom>
+            <a:ln w="6775" cap="flat">
+              <a:solidFill>
+                <a:srgbClr val="EBEBEB">
+                  <a:alpha val="100000"/>
+                </a:srgbClr>
+              </a:solidFill>
+              <a:prstDash val="solid"/>
+              <a:round/>
+            </a:ln>
+          </p:spPr>
+          <p:txBody>
+            <a:bodyPr/>
+            <a:lstStyle/>
+            <a:p/>
+          </p:txBody>
+        </p:sp>
+        <p:sp>
+          <p:nvSpPr>
+            <p:cNvPr id="51" name="pl51"/>
+            <p:cNvSpPr/>
+            <p:nvPr/>
+          </p:nvSpPr>
+          <p:spPr>
+            <a:xfrm>
+              <a:off x="7440627" y="4336484"/>
+              <a:ext cx="0" cy="1317069"/>
+            </a:xfrm>
+            <a:custGeom>
+              <a:avLst/>
+              <a:pathLst>
+                <a:path w="0" h="1317069">
+                  <a:moveTo>
+                    <a:pt x="0" y="1317069"/>
+                  </a:moveTo>
+                  <a:lnTo>
+                    <a:pt x="0" y="0"/>
+                  </a:lnTo>
+                  <a:lnTo>
+                    <a:pt x="0" y="0"/>
+                  </a:lnTo>
+                </a:path>
+              </a:pathLst>
+            </a:custGeom>
+            <a:ln w="6775" cap="flat">
+              <a:solidFill>
+                <a:srgbClr val="EBEBEB">
+                  <a:alpha val="100000"/>
+                </a:srgbClr>
+              </a:solidFill>
+              <a:prstDash val="solid"/>
+              <a:round/>
+            </a:ln>
+          </p:spPr>
+          <p:txBody>
+            <a:bodyPr/>
+            <a:lstStyle/>
+            <a:p/>
+          </p:txBody>
+        </p:sp>
+        <p:sp>
+          <p:nvSpPr>
+            <p:cNvPr id="52" name="pl52"/>
+            <p:cNvSpPr/>
+            <p:nvPr/>
+          </p:nvSpPr>
+          <p:spPr>
+            <a:xfrm>
+              <a:off x="8247792" y="4336484"/>
+              <a:ext cx="0" cy="1317069"/>
+            </a:xfrm>
+            <a:custGeom>
+              <a:avLst/>
+              <a:pathLst>
+                <a:path w="0" h="1317069">
+                  <a:moveTo>
+                    <a:pt x="0" y="1317069"/>
+                  </a:moveTo>
+                  <a:lnTo>
+                    <a:pt x="0" y="0"/>
+                  </a:lnTo>
+                  <a:lnTo>
+                    <a:pt x="0" y="0"/>
+                  </a:lnTo>
+                </a:path>
+              </a:pathLst>
+            </a:custGeom>
+            <a:ln w="6775" cap="flat">
+              <a:solidFill>
+                <a:srgbClr val="EBEBEB">
+                  <a:alpha val="100000"/>
+                </a:srgbClr>
+              </a:solidFill>
+              <a:prstDash val="solid"/>
+              <a:round/>
+            </a:ln>
+          </p:spPr>
+          <p:txBody>
+            <a:bodyPr/>
+            <a:lstStyle/>
+            <a:p/>
+          </p:txBody>
+        </p:sp>
+        <p:sp>
+          <p:nvSpPr>
+            <p:cNvPr id="53" name="pl53"/>
+            <p:cNvSpPr/>
+            <p:nvPr/>
+          </p:nvSpPr>
+          <p:spPr>
+            <a:xfrm>
+              <a:off x="887106" y="5593686"/>
+              <a:ext cx="7660515" cy="0"/>
+            </a:xfrm>
+            <a:custGeom>
+              <a:avLst/>
+              <a:pathLst>
+                <a:path w="7660515" h="0">
+                  <a:moveTo>
+                    <a:pt x="0" y="0"/>
+                  </a:moveTo>
+                  <a:lnTo>
+                    <a:pt x="7660515" y="0"/>
+                  </a:lnTo>
+                  <a:lnTo>
+                    <a:pt x="7660515" y="0"/>
+                  </a:lnTo>
+                </a:path>
+              </a:pathLst>
+            </a:custGeom>
+            <a:ln w="13550" cap="flat">
+              <a:solidFill>
+                <a:srgbClr val="EBEBEB">
+                  <a:alpha val="100000"/>
+                </a:srgbClr>
+              </a:solidFill>
+              <a:prstDash val="solid"/>
+              <a:round/>
+            </a:ln>
+          </p:spPr>
+          <p:txBody>
+            <a:bodyPr/>
+            <a:lstStyle/>
+            <a:p/>
+          </p:txBody>
+        </p:sp>
+        <p:sp>
+          <p:nvSpPr>
+            <p:cNvPr id="54" name="pl54"/>
+            <p:cNvSpPr/>
+            <p:nvPr/>
+          </p:nvSpPr>
+          <p:spPr>
+            <a:xfrm>
+              <a:off x="887106" y="5294352"/>
+              <a:ext cx="7660515" cy="0"/>
+            </a:xfrm>
+            <a:custGeom>
+              <a:avLst/>
+              <a:pathLst>
+                <a:path w="7660515" h="0">
+                  <a:moveTo>
+                    <a:pt x="0" y="0"/>
+                  </a:moveTo>
+                  <a:lnTo>
+                    <a:pt x="7660515" y="0"/>
+                  </a:lnTo>
+                  <a:lnTo>
+                    <a:pt x="7660515" y="0"/>
+                  </a:lnTo>
+                </a:path>
+              </a:pathLst>
+            </a:custGeom>
+            <a:ln w="13550" cap="flat">
+              <a:solidFill>
+                <a:srgbClr val="EBEBEB">
+                  <a:alpha val="100000"/>
+                </a:srgbClr>
+              </a:solidFill>
+              <a:prstDash val="solid"/>
+              <a:round/>
+            </a:ln>
+          </p:spPr>
+          <p:txBody>
+            <a:bodyPr/>
+            <a:lstStyle/>
+            <a:p/>
+          </p:txBody>
+        </p:sp>
+        <p:sp>
+          <p:nvSpPr>
+            <p:cNvPr id="55" name="pl55"/>
+            <p:cNvSpPr/>
+            <p:nvPr/>
+          </p:nvSpPr>
+          <p:spPr>
+            <a:xfrm>
+              <a:off x="887106" y="4995019"/>
+              <a:ext cx="7660515" cy="0"/>
+            </a:xfrm>
+            <a:custGeom>
+              <a:avLst/>
+              <a:pathLst>
+                <a:path w="7660515" h="0">
+                  <a:moveTo>
+                    <a:pt x="0" y="0"/>
+                  </a:moveTo>
+                  <a:lnTo>
+                    <a:pt x="7660515" y="0"/>
+                  </a:lnTo>
+                  <a:lnTo>
+                    <a:pt x="7660515" y="0"/>
+                  </a:lnTo>
+                </a:path>
+              </a:pathLst>
+            </a:custGeom>
+            <a:ln w="13550" cap="flat">
+              <a:solidFill>
+                <a:srgbClr val="EBEBEB">
+                  <a:alpha val="100000"/>
+                </a:srgbClr>
+              </a:solidFill>
+              <a:prstDash val="solid"/>
+              <a:round/>
+            </a:ln>
+          </p:spPr>
+          <p:txBody>
+            <a:bodyPr/>
+            <a:lstStyle/>
+            <a:p/>
+          </p:txBody>
+        </p:sp>
+        <p:sp>
+          <p:nvSpPr>
+            <p:cNvPr id="56" name="pl56"/>
+            <p:cNvSpPr/>
+            <p:nvPr/>
+          </p:nvSpPr>
+          <p:spPr>
+            <a:xfrm>
+              <a:off x="887106" y="4695685"/>
+              <a:ext cx="7660515" cy="0"/>
+            </a:xfrm>
+            <a:custGeom>
+              <a:avLst/>
+              <a:pathLst>
+                <a:path w="7660515" h="0">
+                  <a:moveTo>
+                    <a:pt x="0" y="0"/>
+                  </a:moveTo>
+                  <a:lnTo>
+                    <a:pt x="7660515" y="0"/>
+                  </a:lnTo>
+                  <a:lnTo>
+                    <a:pt x="7660515" y="0"/>
+                  </a:lnTo>
+                </a:path>
+              </a:pathLst>
+            </a:custGeom>
+            <a:ln w="13550" cap="flat">
+              <a:solidFill>
+                <a:srgbClr val="EBEBEB">
+                  <a:alpha val="100000"/>
+                </a:srgbClr>
+              </a:solidFill>
+              <a:prstDash val="solid"/>
+              <a:round/>
+            </a:ln>
+          </p:spPr>
+          <p:txBody>
+            <a:bodyPr/>
+            <a:lstStyle/>
+            <a:p/>
+          </p:txBody>
+        </p:sp>
+        <p:sp>
+          <p:nvSpPr>
+            <p:cNvPr id="57" name="pl57"/>
+            <p:cNvSpPr/>
+            <p:nvPr/>
+          </p:nvSpPr>
+          <p:spPr>
+            <a:xfrm>
+              <a:off x="887106" y="4396351"/>
+              <a:ext cx="7660515" cy="0"/>
+            </a:xfrm>
+            <a:custGeom>
+              <a:avLst/>
+              <a:pathLst>
+                <a:path w="7660515" h="0">
+                  <a:moveTo>
+                    <a:pt x="0" y="0"/>
+                  </a:moveTo>
+                  <a:lnTo>
+                    <a:pt x="7660515" y="0"/>
+                  </a:lnTo>
+                  <a:lnTo>
+                    <a:pt x="7660515" y="0"/>
+                  </a:lnTo>
+                </a:path>
+              </a:pathLst>
+            </a:custGeom>
+            <a:ln w="13550" cap="flat">
+              <a:solidFill>
+                <a:srgbClr val="EBEBEB">
+                  <a:alpha val="100000"/>
+                </a:srgbClr>
+              </a:solidFill>
+              <a:prstDash val="solid"/>
+              <a:round/>
+            </a:ln>
+          </p:spPr>
+          <p:txBody>
+            <a:bodyPr/>
+            <a:lstStyle/>
+            <a:p/>
+          </p:txBody>
+        </p:sp>
+        <p:sp>
+          <p:nvSpPr>
+            <p:cNvPr id="58" name="pl58"/>
+            <p:cNvSpPr/>
+            <p:nvPr/>
+          </p:nvSpPr>
+          <p:spPr>
+            <a:xfrm>
+              <a:off x="1386885" y="4336484"/>
+              <a:ext cx="0" cy="1317069"/>
+            </a:xfrm>
+            <a:custGeom>
+              <a:avLst/>
+              <a:pathLst>
+                <a:path w="0" h="1317069">
+                  <a:moveTo>
+                    <a:pt x="0" y="1317069"/>
+                  </a:moveTo>
+                  <a:lnTo>
+                    <a:pt x="0" y="0"/>
+                  </a:lnTo>
+                  <a:lnTo>
+                    <a:pt x="0" y="0"/>
+                  </a:lnTo>
+                </a:path>
+              </a:pathLst>
+            </a:custGeom>
+            <a:ln w="13550" cap="flat">
+              <a:solidFill>
+                <a:srgbClr val="EBEBEB">
+                  <a:alpha val="100000"/>
+                </a:srgbClr>
+              </a:solidFill>
+              <a:prstDash val="solid"/>
+              <a:round/>
+            </a:ln>
+          </p:spPr>
+          <p:txBody>
+            <a:bodyPr/>
+            <a:lstStyle/>
+            <a:p/>
+          </p:txBody>
+        </p:sp>
+        <p:sp>
+          <p:nvSpPr>
+            <p:cNvPr id="59" name="pl59"/>
+            <p:cNvSpPr/>
+            <p:nvPr/>
+          </p:nvSpPr>
+          <p:spPr>
+            <a:xfrm>
+              <a:off x="2194051" y="4336484"/>
+              <a:ext cx="0" cy="1317069"/>
+            </a:xfrm>
+            <a:custGeom>
+              <a:avLst/>
+              <a:pathLst>
+                <a:path w="0" h="1317069">
+                  <a:moveTo>
+                    <a:pt x="0" y="1317069"/>
+                  </a:moveTo>
+                  <a:lnTo>
+                    <a:pt x="0" y="0"/>
+                  </a:lnTo>
+                  <a:lnTo>
+                    <a:pt x="0" y="0"/>
+                  </a:lnTo>
+                </a:path>
+              </a:pathLst>
+            </a:custGeom>
+            <a:ln w="13550" cap="flat">
+              <a:solidFill>
+                <a:srgbClr val="EBEBEB">
+                  <a:alpha val="100000"/>
+                </a:srgbClr>
+              </a:solidFill>
+              <a:prstDash val="solid"/>
+              <a:round/>
+            </a:ln>
+          </p:spPr>
+          <p:txBody>
+            <a:bodyPr/>
+            <a:lstStyle/>
+            <a:p/>
+          </p:txBody>
+        </p:sp>
+        <p:sp>
+          <p:nvSpPr>
+            <p:cNvPr id="60" name="pl60"/>
+            <p:cNvSpPr/>
+            <p:nvPr/>
+          </p:nvSpPr>
+          <p:spPr>
+            <a:xfrm>
+              <a:off x="3001216" y="4336484"/>
+              <a:ext cx="0" cy="1317069"/>
+            </a:xfrm>
+            <a:custGeom>
+              <a:avLst/>
+              <a:pathLst>
+                <a:path w="0" h="1317069">
+                  <a:moveTo>
+                    <a:pt x="0" y="1317069"/>
+                  </a:moveTo>
+                  <a:lnTo>
+                    <a:pt x="0" y="0"/>
+                  </a:lnTo>
+                  <a:lnTo>
+                    <a:pt x="0" y="0"/>
+                  </a:lnTo>
+                </a:path>
+              </a:pathLst>
+            </a:custGeom>
+            <a:ln w="13550" cap="flat">
+              <a:solidFill>
+                <a:srgbClr val="EBEBEB">
+                  <a:alpha val="100000"/>
+                </a:srgbClr>
+              </a:solidFill>
+              <a:prstDash val="solid"/>
+              <a:round/>
+            </a:ln>
+          </p:spPr>
+          <p:txBody>
+            <a:bodyPr/>
+            <a:lstStyle/>
+            <a:p/>
+          </p:txBody>
+        </p:sp>
+        <p:sp>
+          <p:nvSpPr>
+            <p:cNvPr id="61" name="pl61"/>
+            <p:cNvSpPr/>
+            <p:nvPr/>
+          </p:nvSpPr>
+          <p:spPr>
+            <a:xfrm>
+              <a:off x="3808382" y="4336484"/>
+              <a:ext cx="0" cy="1317069"/>
+            </a:xfrm>
+            <a:custGeom>
+              <a:avLst/>
+              <a:pathLst>
+                <a:path w="0" h="1317069">
+                  <a:moveTo>
+                    <a:pt x="0" y="1317069"/>
+                  </a:moveTo>
+                  <a:lnTo>
+                    <a:pt x="0" y="0"/>
+                  </a:lnTo>
+                  <a:lnTo>
+                    <a:pt x="0" y="0"/>
+                  </a:lnTo>
+                </a:path>
+              </a:pathLst>
+            </a:custGeom>
+            <a:ln w="13550" cap="flat">
+              <a:solidFill>
+                <a:srgbClr val="EBEBEB">
+                  <a:alpha val="100000"/>
+                </a:srgbClr>
+              </a:solidFill>
+              <a:prstDash val="solid"/>
+              <a:round/>
+            </a:ln>
+          </p:spPr>
+          <p:txBody>
+            <a:bodyPr/>
+            <a:lstStyle/>
+            <a:p/>
+          </p:txBody>
+        </p:sp>
+        <p:sp>
+          <p:nvSpPr>
+            <p:cNvPr id="62" name="pl62"/>
+            <p:cNvSpPr/>
+            <p:nvPr/>
+          </p:nvSpPr>
+          <p:spPr>
+            <a:xfrm>
+              <a:off x="4615547" y="4336484"/>
+              <a:ext cx="0" cy="1317069"/>
+            </a:xfrm>
+            <a:custGeom>
+              <a:avLst/>
+              <a:pathLst>
+                <a:path w="0" h="1317069">
+                  <a:moveTo>
+                    <a:pt x="0" y="1317069"/>
+                  </a:moveTo>
+                  <a:lnTo>
+                    <a:pt x="0" y="0"/>
+                  </a:lnTo>
+                  <a:lnTo>
+                    <a:pt x="0" y="0"/>
+                  </a:lnTo>
+                </a:path>
+              </a:pathLst>
+            </a:custGeom>
+            <a:ln w="13550" cap="flat">
+              <a:solidFill>
+                <a:srgbClr val="EBEBEB">
+                  <a:alpha val="100000"/>
+                </a:srgbClr>
+              </a:solidFill>
+              <a:prstDash val="solid"/>
+              <a:round/>
+            </a:ln>
+          </p:spPr>
+          <p:txBody>
+            <a:bodyPr/>
+            <a:lstStyle/>
+            <a:p/>
+          </p:txBody>
+        </p:sp>
+        <p:sp>
+          <p:nvSpPr>
+            <p:cNvPr id="63" name="pl63"/>
+            <p:cNvSpPr/>
+            <p:nvPr/>
+          </p:nvSpPr>
+          <p:spPr>
+            <a:xfrm>
+              <a:off x="5422713" y="4336484"/>
+              <a:ext cx="0" cy="1317069"/>
+            </a:xfrm>
+            <a:custGeom>
+              <a:avLst/>
+              <a:pathLst>
+                <a:path w="0" h="1317069">
+                  <a:moveTo>
+                    <a:pt x="0" y="1317069"/>
+                  </a:moveTo>
+                  <a:lnTo>
+                    <a:pt x="0" y="0"/>
+                  </a:lnTo>
+                  <a:lnTo>
+                    <a:pt x="0" y="0"/>
+                  </a:lnTo>
+                </a:path>
+              </a:pathLst>
+            </a:custGeom>
+            <a:ln w="13550" cap="flat">
+              <a:solidFill>
+                <a:srgbClr val="EBEBEB">
+                  <a:alpha val="100000"/>
+                </a:srgbClr>
+              </a:solidFill>
+              <a:prstDash val="solid"/>
+              <a:round/>
+            </a:ln>
+          </p:spPr>
+          <p:txBody>
+            <a:bodyPr/>
+            <a:lstStyle/>
+            <a:p/>
+          </p:txBody>
+        </p:sp>
+        <p:sp>
+          <p:nvSpPr>
+            <p:cNvPr id="64" name="pl64"/>
+            <p:cNvSpPr/>
+            <p:nvPr/>
+          </p:nvSpPr>
+          <p:spPr>
+            <a:xfrm>
+              <a:off x="6229878" y="4336484"/>
+              <a:ext cx="0" cy="1317069"/>
+            </a:xfrm>
+            <a:custGeom>
+              <a:avLst/>
+              <a:pathLst>
+                <a:path w="0" h="1317069">
+                  <a:moveTo>
+                    <a:pt x="0" y="1317069"/>
+                  </a:moveTo>
+                  <a:lnTo>
+                    <a:pt x="0" y="0"/>
+                  </a:lnTo>
+                  <a:lnTo>
+                    <a:pt x="0" y="0"/>
+                  </a:lnTo>
+                </a:path>
+              </a:pathLst>
+            </a:custGeom>
+            <a:ln w="13550" cap="flat">
+              <a:solidFill>
+                <a:srgbClr val="EBEBEB">
+                  <a:alpha val="100000"/>
+                </a:srgbClr>
+              </a:solidFill>
+              <a:prstDash val="solid"/>
+              <a:round/>
+            </a:ln>
+          </p:spPr>
+          <p:txBody>
+            <a:bodyPr/>
+            <a:lstStyle/>
+            <a:p/>
+          </p:txBody>
+        </p:sp>
+        <p:sp>
+          <p:nvSpPr>
+            <p:cNvPr id="65" name="pl65"/>
+            <p:cNvSpPr/>
+            <p:nvPr/>
+          </p:nvSpPr>
+          <p:spPr>
+            <a:xfrm>
+              <a:off x="7037044" y="4336484"/>
+              <a:ext cx="0" cy="1317069"/>
+            </a:xfrm>
+            <a:custGeom>
+              <a:avLst/>
+              <a:pathLst>
+                <a:path w="0" h="1317069">
+                  <a:moveTo>
+                    <a:pt x="0" y="1317069"/>
+                  </a:moveTo>
+                  <a:lnTo>
+                    <a:pt x="0" y="0"/>
+                  </a:lnTo>
+                  <a:lnTo>
+                    <a:pt x="0" y="0"/>
+                  </a:lnTo>
+                </a:path>
+              </a:pathLst>
+            </a:custGeom>
+            <a:ln w="13550" cap="flat">
+              <a:solidFill>
+                <a:srgbClr val="EBEBEB">
+                  <a:alpha val="100000"/>
+                </a:srgbClr>
+              </a:solidFill>
+              <a:prstDash val="solid"/>
+              <a:round/>
+            </a:ln>
+          </p:spPr>
+          <p:txBody>
+            <a:bodyPr/>
+            <a:lstStyle/>
+            <a:p/>
+          </p:txBody>
+        </p:sp>
+        <p:sp>
+          <p:nvSpPr>
+            <p:cNvPr id="66" name="pl66"/>
+            <p:cNvSpPr/>
+            <p:nvPr/>
+          </p:nvSpPr>
+          <p:spPr>
+            <a:xfrm>
+              <a:off x="7844209" y="4336484"/>
+              <a:ext cx="0" cy="1317069"/>
+            </a:xfrm>
+            <a:custGeom>
+              <a:avLst/>
+              <a:pathLst>
+                <a:path w="0" h="1317069">
+                  <a:moveTo>
+                    <a:pt x="0" y="1317069"/>
+                  </a:moveTo>
+                  <a:lnTo>
+                    <a:pt x="0" y="0"/>
+                  </a:lnTo>
+                  <a:lnTo>
+                    <a:pt x="0" y="0"/>
+                  </a:lnTo>
+                </a:path>
+              </a:pathLst>
+            </a:custGeom>
+            <a:ln w="13550" cap="flat">
+              <a:solidFill>
+                <a:srgbClr val="EBEBEB">
+                  <a:alpha val="100000"/>
+                </a:srgbClr>
+              </a:solidFill>
+              <a:prstDash val="solid"/>
+              <a:round/>
+            </a:ln>
+          </p:spPr>
+          <p:txBody>
+            <a:bodyPr/>
+            <a:lstStyle/>
+            <a:p/>
+          </p:txBody>
+        </p:sp>
+        <p:sp>
+          <p:nvSpPr>
+            <p:cNvPr id="67" name="pg67"/>
+            <p:cNvSpPr/>
+            <p:nvPr/>
+          </p:nvSpPr>
+          <p:spPr>
+            <a:xfrm>
+              <a:off x="1235312" y="4336484"/>
+              <a:ext cx="6964104" cy="1252217"/>
+            </a:xfrm>
+            <a:custGeom>
+              <a:avLst/>
+              <a:pathLst>
+                <a:path w="6964104" h="1252217">
+                  <a:moveTo>
+                    <a:pt x="1932277" y="0"/>
+                  </a:moveTo>
+                  <a:lnTo>
+                    <a:pt x="1969645" y="51476"/>
+                  </a:lnTo>
+                  <a:lnTo>
+                    <a:pt x="2039990" y="141170"/>
+                  </a:lnTo>
+                  <a:lnTo>
+                    <a:pt x="2110334" y="224191"/>
+                  </a:lnTo>
+                  <a:lnTo>
+                    <a:pt x="2180679" y="301037"/>
+                  </a:lnTo>
+                  <a:lnTo>
+                    <a:pt x="2251023" y="372166"/>
+                  </a:lnTo>
+                  <a:lnTo>
+                    <a:pt x="2321368" y="438004"/>
+                  </a:lnTo>
+                  <a:lnTo>
+                    <a:pt x="2391712" y="498944"/>
+                  </a:lnTo>
+                  <a:lnTo>
+                    <a:pt x="2462057" y="555351"/>
+                  </a:lnTo>
+                  <a:lnTo>
+                    <a:pt x="2532401" y="607562"/>
+                  </a:lnTo>
+                  <a:lnTo>
+                    <a:pt x="2602746" y="655888"/>
+                  </a:lnTo>
+                  <a:lnTo>
+                    <a:pt x="2673090" y="700620"/>
+                  </a:lnTo>
+                  <a:lnTo>
+                    <a:pt x="2743435" y="742024"/>
+                  </a:lnTo>
+                  <a:lnTo>
+                    <a:pt x="2813779" y="780348"/>
+                  </a:lnTo>
+                  <a:lnTo>
+                    <a:pt x="2884124" y="815821"/>
+                  </a:lnTo>
+                  <a:lnTo>
+                    <a:pt x="2954468" y="848656"/>
+                  </a:lnTo>
+                  <a:lnTo>
+                    <a:pt x="3024813" y="879047"/>
+                  </a:lnTo>
+                  <a:lnTo>
+                    <a:pt x="3095157" y="907178"/>
+                  </a:lnTo>
+                  <a:lnTo>
+                    <a:pt x="3165502" y="933217"/>
+                  </a:lnTo>
+                  <a:lnTo>
+                    <a:pt x="3235846" y="957318"/>
+                  </a:lnTo>
+                  <a:lnTo>
+                    <a:pt x="3306191" y="961337"/>
+                  </a:lnTo>
+                  <a:lnTo>
+                    <a:pt x="3376535" y="964849"/>
+                  </a:lnTo>
+                  <a:lnTo>
+                    <a:pt x="3446880" y="968319"/>
+                  </a:lnTo>
+                  <a:lnTo>
+                    <a:pt x="3517224" y="971748"/>
+                  </a:lnTo>
+                  <a:lnTo>
+                    <a:pt x="3587569" y="975137"/>
+                  </a:lnTo>
+                  <a:lnTo>
+                    <a:pt x="3657913" y="978485"/>
+                  </a:lnTo>
+                  <a:lnTo>
+                    <a:pt x="3728257" y="981793"/>
+                  </a:lnTo>
+                  <a:lnTo>
+                    <a:pt x="3798602" y="985062"/>
+                  </a:lnTo>
+                  <a:lnTo>
+                    <a:pt x="3868946" y="988292"/>
+                  </a:lnTo>
+                  <a:lnTo>
+                    <a:pt x="3939291" y="991484"/>
+                  </a:lnTo>
+                  <a:lnTo>
+                    <a:pt x="4009635" y="994638"/>
+                  </a:lnTo>
+                  <a:lnTo>
+                    <a:pt x="4079980" y="997755"/>
+                  </a:lnTo>
+                  <a:lnTo>
+                    <a:pt x="4150324" y="1000835"/>
+                  </a:lnTo>
+                  <a:lnTo>
+                    <a:pt x="4220669" y="1003878"/>
+                  </a:lnTo>
+                  <a:lnTo>
+                    <a:pt x="4291013" y="1006885"/>
+                  </a:lnTo>
+                  <a:lnTo>
+                    <a:pt x="4361358" y="1009856"/>
+                  </a:lnTo>
+                  <a:lnTo>
+                    <a:pt x="4431702" y="1012792"/>
+                  </a:lnTo>
+                  <a:lnTo>
+                    <a:pt x="4502047" y="1015693"/>
+                  </a:lnTo>
+                  <a:lnTo>
+                    <a:pt x="4572391" y="1018560"/>
+                  </a:lnTo>
+                  <a:lnTo>
+                    <a:pt x="4642736" y="1021393"/>
+                  </a:lnTo>
+                  <a:lnTo>
+                    <a:pt x="4713080" y="1024192"/>
+                  </a:lnTo>
+                  <a:lnTo>
+                    <a:pt x="4783425" y="1026957"/>
+                  </a:lnTo>
+                  <a:lnTo>
+                    <a:pt x="4853769" y="1029690"/>
+                  </a:lnTo>
+                  <a:lnTo>
+                    <a:pt x="4924114" y="1032391"/>
+                  </a:lnTo>
+                  <a:lnTo>
+                    <a:pt x="4994458" y="1035059"/>
+                  </a:lnTo>
+                  <a:lnTo>
+                    <a:pt x="5064803" y="1037696"/>
+                  </a:lnTo>
+                  <a:lnTo>
+                    <a:pt x="5135147" y="1040302"/>
+                  </a:lnTo>
+                  <a:lnTo>
+                    <a:pt x="5205492" y="1042876"/>
+                  </a:lnTo>
+                  <a:lnTo>
+                    <a:pt x="5275836" y="1045420"/>
+                  </a:lnTo>
+                  <a:lnTo>
+                    <a:pt x="5346181" y="1047934"/>
+                  </a:lnTo>
+                  <a:lnTo>
+                    <a:pt x="5416525" y="1050418"/>
+                  </a:lnTo>
+                  <a:lnTo>
+                    <a:pt x="5486870" y="1052873"/>
+                  </a:lnTo>
+                  <a:lnTo>
+                    <a:pt x="5557214" y="1055298"/>
+                  </a:lnTo>
+                  <a:lnTo>
+                    <a:pt x="5627559" y="1057695"/>
+                  </a:lnTo>
+                  <a:lnTo>
+                    <a:pt x="5697903" y="1060063"/>
+                  </a:lnTo>
+                  <a:lnTo>
+                    <a:pt x="5768248" y="1062403"/>
+                  </a:lnTo>
+                  <a:lnTo>
+                    <a:pt x="5838592" y="1064715"/>
+                  </a:lnTo>
+                  <a:lnTo>
+                    <a:pt x="5908937" y="1067000"/>
+                  </a:lnTo>
+                  <a:lnTo>
+                    <a:pt x="5979281" y="1069258"/>
+                  </a:lnTo>
+                  <a:lnTo>
+                    <a:pt x="6049626" y="1071489"/>
+                  </a:lnTo>
+                  <a:lnTo>
+                    <a:pt x="6119970" y="1073693"/>
+                  </a:lnTo>
+                  <a:lnTo>
+                    <a:pt x="6190315" y="1075871"/>
+                  </a:lnTo>
+                  <a:lnTo>
+                    <a:pt x="6260659" y="1078024"/>
+                  </a:lnTo>
+                  <a:lnTo>
+                    <a:pt x="6331004" y="1080151"/>
+                  </a:lnTo>
+                  <a:lnTo>
+                    <a:pt x="6401348" y="1082252"/>
+                  </a:lnTo>
+                  <a:lnTo>
+                    <a:pt x="6471693" y="1084329"/>
+                  </a:lnTo>
+                  <a:lnTo>
+                    <a:pt x="6542037" y="1086381"/>
+                  </a:lnTo>
+                  <a:lnTo>
+                    <a:pt x="6612382" y="1088408"/>
+                  </a:lnTo>
+                  <a:lnTo>
+                    <a:pt x="6682726" y="1090412"/>
+                  </a:lnTo>
+                  <a:lnTo>
+                    <a:pt x="6753071" y="1092392"/>
+                  </a:lnTo>
+                  <a:lnTo>
+                    <a:pt x="6823415" y="1094348"/>
+                  </a:lnTo>
+                  <a:lnTo>
+                    <a:pt x="6893760" y="1096281"/>
+                  </a:lnTo>
+                  <a:lnTo>
+                    <a:pt x="6964104" y="1098191"/>
+                  </a:lnTo>
+                  <a:lnTo>
+                    <a:pt x="6964104" y="1252217"/>
+                  </a:lnTo>
+                  <a:lnTo>
+                    <a:pt x="6893760" y="1251816"/>
+                  </a:lnTo>
+                  <a:lnTo>
+                    <a:pt x="6823415" y="1251384"/>
+                  </a:lnTo>
+                  <a:lnTo>
+                    <a:pt x="6753071" y="1250916"/>
+                  </a:lnTo>
+                  <a:lnTo>
+                    <a:pt x="6682726" y="1250411"/>
+                  </a:lnTo>
+                  <a:lnTo>
+                    <a:pt x="6612382" y="1249865"/>
+                  </a:lnTo>
+                  <a:lnTo>
+                    <a:pt x="6542037" y="1249275"/>
+                  </a:lnTo>
+                  <a:lnTo>
+                    <a:pt x="6471693" y="1248638"/>
+                  </a:lnTo>
+                  <a:lnTo>
+                    <a:pt x="6401348" y="1247950"/>
+                  </a:lnTo>
+                  <a:lnTo>
+                    <a:pt x="6331004" y="1247207"/>
+                  </a:lnTo>
+                  <a:lnTo>
+                    <a:pt x="6260659" y="1246403"/>
+                  </a:lnTo>
+                  <a:lnTo>
+                    <a:pt x="6190315" y="1245536"/>
+                  </a:lnTo>
+                  <a:lnTo>
+                    <a:pt x="6119970" y="1244598"/>
+                  </a:lnTo>
+                  <a:lnTo>
+                    <a:pt x="6049626" y="1243585"/>
+                  </a:lnTo>
+                  <a:lnTo>
+                    <a:pt x="5979281" y="1242491"/>
+                  </a:lnTo>
+                  <a:lnTo>
+                    <a:pt x="5908937" y="1241308"/>
+                  </a:lnTo>
+                  <a:lnTo>
+                    <a:pt x="5838592" y="1240031"/>
+                  </a:lnTo>
+                  <a:lnTo>
+                    <a:pt x="5768248" y="1238651"/>
+                  </a:lnTo>
+                  <a:lnTo>
+                    <a:pt x="5697903" y="1237160"/>
+                  </a:lnTo>
+                  <a:lnTo>
+                    <a:pt x="5627559" y="1235549"/>
+                  </a:lnTo>
+                  <a:lnTo>
+                    <a:pt x="5557214" y="1233809"/>
+                  </a:lnTo>
+                  <a:lnTo>
+                    <a:pt x="5486870" y="1231929"/>
+                  </a:lnTo>
+                  <a:lnTo>
+                    <a:pt x="5416525" y="1229898"/>
+                  </a:lnTo>
+                  <a:lnTo>
+                    <a:pt x="5346181" y="1227704"/>
+                  </a:lnTo>
+                  <a:lnTo>
+                    <a:pt x="5275836" y="1225333"/>
+                  </a:lnTo>
+                  <a:lnTo>
+                    <a:pt x="5205492" y="1222772"/>
+                  </a:lnTo>
+                  <a:lnTo>
+                    <a:pt x="5135147" y="1220005"/>
+                  </a:lnTo>
+                  <a:lnTo>
+                    <a:pt x="5064803" y="1217015"/>
+                  </a:lnTo>
+                  <a:lnTo>
+                    <a:pt x="4994458" y="1213785"/>
+                  </a:lnTo>
+                  <a:lnTo>
+                    <a:pt x="4924114" y="1210296"/>
+                  </a:lnTo>
+                  <a:lnTo>
+                    <a:pt x="4853769" y="1206526"/>
+                  </a:lnTo>
+                  <a:lnTo>
+                    <a:pt x="4783425" y="1202454"/>
+                  </a:lnTo>
+                  <a:lnTo>
+                    <a:pt x="4713080" y="1198054"/>
+                  </a:lnTo>
+                  <a:lnTo>
+                    <a:pt x="4642736" y="1193300"/>
+                  </a:lnTo>
+                  <a:lnTo>
+                    <a:pt x="4572391" y="1188164"/>
+                  </a:lnTo>
+                  <a:lnTo>
+                    <a:pt x="4502047" y="1182616"/>
+                  </a:lnTo>
+                  <a:lnTo>
+                    <a:pt x="4431702" y="1176621"/>
+                  </a:lnTo>
+                  <a:lnTo>
+                    <a:pt x="4361358" y="1170145"/>
+                  </a:lnTo>
+                  <a:lnTo>
+                    <a:pt x="4291013" y="1163149"/>
+                  </a:lnTo>
+                  <a:lnTo>
+                    <a:pt x="4220669" y="1155590"/>
+                  </a:lnTo>
+                  <a:lnTo>
+                    <a:pt x="4150324" y="1147423"/>
+                  </a:lnTo>
+                  <a:lnTo>
+                    <a:pt x="4079980" y="1138600"/>
+                  </a:lnTo>
+                  <a:lnTo>
+                    <a:pt x="4009635" y="1129069"/>
+                  </a:lnTo>
+                  <a:lnTo>
+                    <a:pt x="3939291" y="1118771"/>
+                  </a:lnTo>
+                  <a:lnTo>
+                    <a:pt x="3868946" y="1107645"/>
+                  </a:lnTo>
+                  <a:lnTo>
+                    <a:pt x="3798602" y="1095626"/>
+                  </a:lnTo>
+                  <a:lnTo>
+                    <a:pt x="3728257" y="1082640"/>
+                  </a:lnTo>
+                  <a:lnTo>
+                    <a:pt x="3657913" y="1068611"/>
+                  </a:lnTo>
+                  <a:lnTo>
+                    <a:pt x="3587569" y="1053454"/>
+                  </a:lnTo>
+                  <a:lnTo>
+                    <a:pt x="3517224" y="1037079"/>
+                  </a:lnTo>
+                  <a:lnTo>
+                    <a:pt x="3446880" y="1019388"/>
+                  </a:lnTo>
+                  <a:lnTo>
+                    <a:pt x="3376535" y="1000275"/>
+                  </a:lnTo>
+                  <a:lnTo>
+                    <a:pt x="3306191" y="979626"/>
+                  </a:lnTo>
+                  <a:lnTo>
+                    <a:pt x="3235846" y="957783"/>
+                  </a:lnTo>
+                  <a:lnTo>
+                    <a:pt x="3165502" y="954186"/>
+                  </a:lnTo>
+                  <a:lnTo>
+                    <a:pt x="3095157" y="950546"/>
+                  </a:lnTo>
+                  <a:lnTo>
+                    <a:pt x="3024813" y="946862"/>
+                  </a:lnTo>
+                  <a:lnTo>
+                    <a:pt x="2954468" y="943135"/>
+                  </a:lnTo>
+                  <a:lnTo>
+                    <a:pt x="2884124" y="939362"/>
+                  </a:lnTo>
+                  <a:lnTo>
+                    <a:pt x="2813779" y="935544"/>
+                  </a:lnTo>
+                  <a:lnTo>
+                    <a:pt x="2743435" y="931680"/>
+                  </a:lnTo>
+                  <a:lnTo>
+                    <a:pt x="2673090" y="927769"/>
+                  </a:lnTo>
+                  <a:lnTo>
+                    <a:pt x="2602746" y="923812"/>
+                  </a:lnTo>
+                  <a:lnTo>
+                    <a:pt x="2532401" y="919807"/>
+                  </a:lnTo>
+                  <a:lnTo>
+                    <a:pt x="2462057" y="915754"/>
+                  </a:lnTo>
+                  <a:lnTo>
+                    <a:pt x="2391712" y="911653"/>
+                  </a:lnTo>
+                  <a:lnTo>
+                    <a:pt x="2321368" y="907502"/>
+                  </a:lnTo>
+                  <a:lnTo>
+                    <a:pt x="2251023" y="903301"/>
+                  </a:lnTo>
+                  <a:lnTo>
+                    <a:pt x="2180679" y="899050"/>
+                  </a:lnTo>
+                  <a:lnTo>
+                    <a:pt x="2110334" y="894747"/>
+                  </a:lnTo>
+                  <a:lnTo>
+                    <a:pt x="2039990" y="890393"/>
+                  </a:lnTo>
+                  <a:lnTo>
+                    <a:pt x="1969645" y="885987"/>
+                  </a:lnTo>
+                  <a:lnTo>
+                    <a:pt x="1899301" y="881528"/>
+                  </a:lnTo>
+                  <a:lnTo>
+                    <a:pt x="1828956" y="877015"/>
+                  </a:lnTo>
+                  <a:lnTo>
+                    <a:pt x="1758612" y="872448"/>
+                  </a:lnTo>
+                  <a:lnTo>
+                    <a:pt x="1688267" y="867826"/>
+                  </a:lnTo>
+                  <a:lnTo>
+                    <a:pt x="1617923" y="863148"/>
+                  </a:lnTo>
+                  <a:lnTo>
+                    <a:pt x="1547578" y="858415"/>
+                  </a:lnTo>
+                  <a:lnTo>
+                    <a:pt x="1477234" y="853624"/>
+                  </a:lnTo>
+                  <a:lnTo>
+                    <a:pt x="1406889" y="848776"/>
+                  </a:lnTo>
+                  <a:lnTo>
+                    <a:pt x="1336545" y="843870"/>
+                  </a:lnTo>
+                  <a:lnTo>
+                    <a:pt x="1266200" y="838905"/>
+                  </a:lnTo>
+                  <a:lnTo>
+                    <a:pt x="1195856" y="833880"/>
+                  </a:lnTo>
+                  <a:lnTo>
+                    <a:pt x="1125511" y="828795"/>
+                  </a:lnTo>
+                  <a:lnTo>
+                    <a:pt x="1055167" y="823649"/>
+                  </a:lnTo>
+                  <a:lnTo>
+                    <a:pt x="984822" y="818441"/>
+                  </a:lnTo>
+                  <a:lnTo>
+                    <a:pt x="914478" y="813170"/>
+                  </a:lnTo>
+                  <a:lnTo>
+                    <a:pt x="844133" y="807836"/>
+                  </a:lnTo>
+                  <a:lnTo>
+                    <a:pt x="773789" y="802438"/>
+                  </a:lnTo>
+                  <a:lnTo>
+                    <a:pt x="703444" y="796975"/>
+                  </a:lnTo>
+                  <a:lnTo>
+                    <a:pt x="633100" y="791447"/>
+                  </a:lnTo>
+                  <a:lnTo>
+                    <a:pt x="562755" y="785852"/>
+                  </a:lnTo>
+                  <a:lnTo>
+                    <a:pt x="492411" y="780190"/>
+                  </a:lnTo>
+                  <a:lnTo>
+                    <a:pt x="422066" y="774459"/>
+                  </a:lnTo>
+                  <a:lnTo>
+                    <a:pt x="351722" y="768660"/>
+                  </a:lnTo>
+                  <a:lnTo>
+                    <a:pt x="281377" y="762792"/>
+                  </a:lnTo>
+                  <a:lnTo>
+                    <a:pt x="211033" y="756853"/>
+                  </a:lnTo>
+                  <a:lnTo>
+                    <a:pt x="140688" y="750842"/>
+                  </a:lnTo>
+                  <a:lnTo>
+                    <a:pt x="70344" y="744759"/>
+                  </a:lnTo>
+                  <a:lnTo>
+                    <a:pt x="0" y="738604"/>
+                  </a:lnTo>
+                  <a:close/>
+                </a:path>
+              </a:pathLst>
+            </a:custGeom>
+            <a:solidFill>
+              <a:srgbClr val="FF8C00">
+                <a:alpha val="20000"/>
+              </a:srgbClr>
+            </a:solidFill>
+          </p:spPr>
+          <p:txBody>
+            <a:bodyPr/>
+            <a:lstStyle/>
+            <a:p/>
+          </p:txBody>
+        </p:sp>
+        <p:sp>
+          <p:nvSpPr>
+            <p:cNvPr id="68" name="pl68"/>
+            <p:cNvSpPr/>
+            <p:nvPr/>
+          </p:nvSpPr>
+          <p:spPr>
+            <a:xfrm>
+              <a:off x="3167589" y="4336484"/>
+              <a:ext cx="5031826" cy="1098191"/>
+            </a:xfrm>
+            <a:custGeom>
+              <a:avLst/>
+              <a:pathLst>
+                <a:path w="5031826" h="1098191">
+                  <a:moveTo>
+                    <a:pt x="0" y="0"/>
+                  </a:moveTo>
+                  <a:lnTo>
+                    <a:pt x="37368" y="51476"/>
+                  </a:lnTo>
+                  <a:lnTo>
+                    <a:pt x="107712" y="141170"/>
+                  </a:lnTo>
+                  <a:lnTo>
+                    <a:pt x="178057" y="224191"/>
+                  </a:lnTo>
+                  <a:lnTo>
+                    <a:pt x="248401" y="301037"/>
+                  </a:lnTo>
+                  <a:lnTo>
+                    <a:pt x="318746" y="372166"/>
+                  </a:lnTo>
+                  <a:lnTo>
+                    <a:pt x="389090" y="438004"/>
+                  </a:lnTo>
+                  <a:lnTo>
+                    <a:pt x="459435" y="498944"/>
+                  </a:lnTo>
+                  <a:lnTo>
+                    <a:pt x="529779" y="555351"/>
+                  </a:lnTo>
+                  <a:lnTo>
+                    <a:pt x="600124" y="607562"/>
+                  </a:lnTo>
+                  <a:lnTo>
+                    <a:pt x="670468" y="655888"/>
+                  </a:lnTo>
+                  <a:lnTo>
+                    <a:pt x="740813" y="700620"/>
+                  </a:lnTo>
+                  <a:lnTo>
+                    <a:pt x="811157" y="742024"/>
+                  </a:lnTo>
+                  <a:lnTo>
+                    <a:pt x="881502" y="780348"/>
+                  </a:lnTo>
+                  <a:lnTo>
+                    <a:pt x="951846" y="815821"/>
+                  </a:lnTo>
+                  <a:lnTo>
+                    <a:pt x="1022190" y="848656"/>
+                  </a:lnTo>
+                  <a:lnTo>
+                    <a:pt x="1092535" y="879047"/>
+                  </a:lnTo>
+                  <a:lnTo>
+                    <a:pt x="1162879" y="907178"/>
+                  </a:lnTo>
+                  <a:lnTo>
+                    <a:pt x="1233224" y="933217"/>
+                  </a:lnTo>
+                  <a:lnTo>
+                    <a:pt x="1303568" y="957318"/>
+                  </a:lnTo>
+                  <a:lnTo>
+                    <a:pt x="1373913" y="961337"/>
+                  </a:lnTo>
+                  <a:lnTo>
+                    <a:pt x="1444257" y="964849"/>
+                  </a:lnTo>
+                  <a:lnTo>
+                    <a:pt x="1514602" y="968319"/>
+                  </a:lnTo>
+                  <a:lnTo>
+                    <a:pt x="1584946" y="971748"/>
+                  </a:lnTo>
+                  <a:lnTo>
+                    <a:pt x="1655291" y="975137"/>
+                  </a:lnTo>
+                  <a:lnTo>
+                    <a:pt x="1725635" y="978485"/>
+                  </a:lnTo>
+                  <a:lnTo>
+                    <a:pt x="1795980" y="981793"/>
+                  </a:lnTo>
+                  <a:lnTo>
+                    <a:pt x="1866324" y="985062"/>
+                  </a:lnTo>
+                  <a:lnTo>
+                    <a:pt x="1936669" y="988292"/>
+                  </a:lnTo>
+                  <a:lnTo>
+                    <a:pt x="2007013" y="991484"/>
+                  </a:lnTo>
+                  <a:lnTo>
+                    <a:pt x="2077358" y="994638"/>
+                  </a:lnTo>
+                  <a:lnTo>
+                    <a:pt x="2147702" y="997755"/>
+                  </a:lnTo>
+                  <a:lnTo>
+                    <a:pt x="2218047" y="1000835"/>
+                  </a:lnTo>
+                  <a:lnTo>
+                    <a:pt x="2288391" y="1003878"/>
+                  </a:lnTo>
+                  <a:lnTo>
+                    <a:pt x="2358736" y="1006885"/>
+                  </a:lnTo>
+                  <a:lnTo>
+                    <a:pt x="2429080" y="1009856"/>
+                  </a:lnTo>
+                  <a:lnTo>
+                    <a:pt x="2499425" y="1012792"/>
+                  </a:lnTo>
+                  <a:lnTo>
+                    <a:pt x="2569769" y="1015693"/>
+                  </a:lnTo>
+                  <a:lnTo>
+                    <a:pt x="2640114" y="1018560"/>
+                  </a:lnTo>
+                  <a:lnTo>
+                    <a:pt x="2710458" y="1021393"/>
+                  </a:lnTo>
+                  <a:lnTo>
+                    <a:pt x="2780803" y="1024192"/>
+                  </a:lnTo>
+                  <a:lnTo>
+                    <a:pt x="2851147" y="1026957"/>
+                  </a:lnTo>
+                  <a:lnTo>
+                    <a:pt x="2921492" y="1029690"/>
+                  </a:lnTo>
+                  <a:lnTo>
+                    <a:pt x="2991836" y="1032391"/>
+                  </a:lnTo>
+                  <a:lnTo>
+                    <a:pt x="3062181" y="1035059"/>
+                  </a:lnTo>
+                  <a:lnTo>
+                    <a:pt x="3132525" y="1037696"/>
+                  </a:lnTo>
+                  <a:lnTo>
+                    <a:pt x="3202870" y="1040302"/>
+                  </a:lnTo>
+                  <a:lnTo>
+                    <a:pt x="3273214" y="1042876"/>
+                  </a:lnTo>
+                  <a:lnTo>
+                    <a:pt x="3343559" y="1045420"/>
+                  </a:lnTo>
+                  <a:lnTo>
+                    <a:pt x="3413903" y="1047934"/>
+                  </a:lnTo>
+                  <a:lnTo>
+                    <a:pt x="3484248" y="1050418"/>
+                  </a:lnTo>
+                  <a:lnTo>
+                    <a:pt x="3554592" y="1052873"/>
+                  </a:lnTo>
+                  <a:lnTo>
+                    <a:pt x="3624937" y="1055298"/>
+                  </a:lnTo>
+                  <a:lnTo>
+                    <a:pt x="3695281" y="1057695"/>
+                  </a:lnTo>
+                  <a:lnTo>
+                    <a:pt x="3765626" y="1060063"/>
+                  </a:lnTo>
+                  <a:lnTo>
+                    <a:pt x="3835970" y="1062403"/>
+                  </a:lnTo>
+                  <a:lnTo>
+                    <a:pt x="3906315" y="1064715"/>
+                  </a:lnTo>
+                  <a:lnTo>
+                    <a:pt x="3976659" y="1067000"/>
+                  </a:lnTo>
+                  <a:lnTo>
+                    <a:pt x="4047004" y="1069258"/>
+                  </a:lnTo>
+                  <a:lnTo>
+                    <a:pt x="4117348" y="1071489"/>
+                  </a:lnTo>
+                  <a:lnTo>
+                    <a:pt x="4187693" y="1073693"/>
+                  </a:lnTo>
+                  <a:lnTo>
+                    <a:pt x="4258037" y="1075871"/>
+                  </a:lnTo>
+                  <a:lnTo>
+                    <a:pt x="4328382" y="1078024"/>
+                  </a:lnTo>
+                  <a:lnTo>
+                    <a:pt x="4398726" y="1080151"/>
+                  </a:lnTo>
+                  <a:lnTo>
+                    <a:pt x="4469071" y="1082252"/>
+                  </a:lnTo>
+                  <a:lnTo>
+                    <a:pt x="4539415" y="1084329"/>
+                  </a:lnTo>
+                  <a:lnTo>
+                    <a:pt x="4609760" y="1086381"/>
+                  </a:lnTo>
+                  <a:lnTo>
+                    <a:pt x="4680104" y="1088408"/>
+                  </a:lnTo>
+                  <a:lnTo>
+                    <a:pt x="4750448" y="1090412"/>
+                  </a:lnTo>
+                  <a:lnTo>
+                    <a:pt x="4820793" y="1092392"/>
+                  </a:lnTo>
+                  <a:lnTo>
+                    <a:pt x="4891137" y="1094348"/>
+                  </a:lnTo>
+                  <a:lnTo>
+                    <a:pt x="4961482" y="1096281"/>
+                  </a:lnTo>
+                  <a:lnTo>
+                    <a:pt x="5031826" y="1098191"/>
+                  </a:lnTo>
+                </a:path>
+              </a:pathLst>
+            </a:custGeom>
+          </p:spPr>
+          <p:txBody>
+            <a:bodyPr/>
+            <a:lstStyle/>
+            <a:p/>
+          </p:txBody>
+        </p:sp>
+        <p:sp>
+          <p:nvSpPr>
+            <p:cNvPr id="69" name="pl69"/>
+            <p:cNvSpPr/>
+            <p:nvPr/>
+          </p:nvSpPr>
+          <p:spPr>
+            <a:xfrm>
+              <a:off x="1235312" y="5075088"/>
+              <a:ext cx="6964104" cy="513613"/>
+            </a:xfrm>
+            <a:custGeom>
+              <a:avLst/>
+              <a:pathLst>
+                <a:path w="6964104" h="513613">
+                  <a:moveTo>
+                    <a:pt x="6964104" y="513613"/>
+                  </a:moveTo>
+                  <a:lnTo>
+                    <a:pt x="6893760" y="513212"/>
+                  </a:lnTo>
+                  <a:lnTo>
+                    <a:pt x="6823415" y="512779"/>
+                  </a:lnTo>
+                  <a:lnTo>
+                    <a:pt x="6753071" y="512312"/>
+                  </a:lnTo>
+                  <a:lnTo>
+                    <a:pt x="6682726" y="511807"/>
+                  </a:lnTo>
+                  <a:lnTo>
+                    <a:pt x="6612382" y="511261"/>
+                  </a:lnTo>
+                  <a:lnTo>
+                    <a:pt x="6542037" y="510671"/>
+                  </a:lnTo>
+                  <a:lnTo>
+                    <a:pt x="6471693" y="510034"/>
+                  </a:lnTo>
+                  <a:lnTo>
+                    <a:pt x="6401348" y="509346"/>
+                  </a:lnTo>
+                  <a:lnTo>
+                    <a:pt x="6331004" y="508603"/>
+                  </a:lnTo>
+                  <a:lnTo>
+                    <a:pt x="6260659" y="507799"/>
+                  </a:lnTo>
+                  <a:lnTo>
+                    <a:pt x="6190315" y="506931"/>
+                  </a:lnTo>
+                  <a:lnTo>
+                    <a:pt x="6119970" y="505994"/>
+                  </a:lnTo>
+                  <a:lnTo>
+                    <a:pt x="6049626" y="504981"/>
+                  </a:lnTo>
+                  <a:lnTo>
+                    <a:pt x="5979281" y="503886"/>
+                  </a:lnTo>
+                  <a:lnTo>
+                    <a:pt x="5908937" y="502704"/>
+                  </a:lnTo>
+                  <a:lnTo>
+                    <a:pt x="5838592" y="501427"/>
+                  </a:lnTo>
+                  <a:lnTo>
+                    <a:pt x="5768248" y="500047"/>
+                  </a:lnTo>
+                  <a:lnTo>
+                    <a:pt x="5697903" y="498556"/>
+                  </a:lnTo>
+                  <a:lnTo>
+                    <a:pt x="5627559" y="496945"/>
+                  </a:lnTo>
+                  <a:lnTo>
+                    <a:pt x="5557214" y="495205"/>
+                  </a:lnTo>
+                  <a:lnTo>
+                    <a:pt x="5486870" y="493325"/>
+                  </a:lnTo>
+                  <a:lnTo>
+                    <a:pt x="5416525" y="491294"/>
+                  </a:lnTo>
+                  <a:lnTo>
+                    <a:pt x="5346181" y="489099"/>
+                  </a:lnTo>
+                  <a:lnTo>
+                    <a:pt x="5275836" y="486729"/>
+                  </a:lnTo>
+                  <a:lnTo>
+                    <a:pt x="5205492" y="484168"/>
+                  </a:lnTo>
+                  <a:lnTo>
+                    <a:pt x="5135147" y="481400"/>
+                  </a:lnTo>
+                  <a:lnTo>
+                    <a:pt x="5064803" y="478411"/>
+                  </a:lnTo>
+                  <a:lnTo>
+                    <a:pt x="4994458" y="475181"/>
+                  </a:lnTo>
+                  <a:lnTo>
+                    <a:pt x="4924114" y="471692"/>
+                  </a:lnTo>
+                  <a:lnTo>
+                    <a:pt x="4853769" y="467922"/>
+                  </a:lnTo>
+                  <a:lnTo>
+                    <a:pt x="4783425" y="463849"/>
+                  </a:lnTo>
+                  <a:lnTo>
+                    <a:pt x="4713080" y="459449"/>
+                  </a:lnTo>
+                  <a:lnTo>
+                    <a:pt x="4642736" y="454696"/>
+                  </a:lnTo>
+                  <a:lnTo>
+                    <a:pt x="4572391" y="449560"/>
+                  </a:lnTo>
+                  <a:lnTo>
+                    <a:pt x="4502047" y="444012"/>
+                  </a:lnTo>
+                  <a:lnTo>
+                    <a:pt x="4431702" y="438017"/>
+                  </a:lnTo>
+                  <a:lnTo>
+                    <a:pt x="4361358" y="431541"/>
+                  </a:lnTo>
+                  <a:lnTo>
+                    <a:pt x="4291013" y="424544"/>
+                  </a:lnTo>
+                  <a:lnTo>
+                    <a:pt x="4220669" y="416985"/>
+                  </a:lnTo>
+                  <a:lnTo>
+                    <a:pt x="4150324" y="408819"/>
+                  </a:lnTo>
+                  <a:lnTo>
+                    <a:pt x="4079980" y="399996"/>
+                  </a:lnTo>
+                  <a:lnTo>
+                    <a:pt x="4009635" y="390464"/>
+                  </a:lnTo>
+                  <a:lnTo>
+                    <a:pt x="3939291" y="380167"/>
+                  </a:lnTo>
+                  <a:lnTo>
+                    <a:pt x="3868946" y="369041"/>
+                  </a:lnTo>
+                  <a:lnTo>
+                    <a:pt x="3798602" y="357021"/>
+                  </a:lnTo>
+                  <a:lnTo>
+                    <a:pt x="3728257" y="344036"/>
+                  </a:lnTo>
+                  <a:lnTo>
+                    <a:pt x="3657913" y="330006"/>
+                  </a:lnTo>
+                  <a:lnTo>
+                    <a:pt x="3587569" y="314850"/>
+                  </a:lnTo>
+                  <a:lnTo>
+                    <a:pt x="3517224" y="298475"/>
+                  </a:lnTo>
+                  <a:lnTo>
+                    <a:pt x="3446880" y="280784"/>
+                  </a:lnTo>
+                  <a:lnTo>
+                    <a:pt x="3376535" y="261671"/>
+                  </a:lnTo>
+                  <a:lnTo>
+                    <a:pt x="3306191" y="241022"/>
+                  </a:lnTo>
+                  <a:lnTo>
+                    <a:pt x="3235846" y="219179"/>
+                  </a:lnTo>
+                  <a:lnTo>
+                    <a:pt x="3165502" y="215582"/>
+                  </a:lnTo>
+                  <a:lnTo>
+                    <a:pt x="3095157" y="211942"/>
+                  </a:lnTo>
+                  <a:lnTo>
+                    <a:pt x="3024813" y="208258"/>
+                  </a:lnTo>
+                  <a:lnTo>
+                    <a:pt x="2954468" y="204530"/>
+                  </a:lnTo>
+                  <a:lnTo>
+                    <a:pt x="2884124" y="200758"/>
+                  </a:lnTo>
+                  <a:lnTo>
+                    <a:pt x="2813779" y="196939"/>
+                  </a:lnTo>
+                  <a:lnTo>
+                    <a:pt x="2743435" y="193076"/>
+                  </a:lnTo>
+                  <a:lnTo>
+                    <a:pt x="2673090" y="189165"/>
+                  </a:lnTo>
+                  <a:lnTo>
+                    <a:pt x="2602746" y="185208"/>
+                  </a:lnTo>
+                  <a:lnTo>
+                    <a:pt x="2532401" y="181203"/>
+                  </a:lnTo>
+                  <a:lnTo>
+                    <a:pt x="2462057" y="177150"/>
+                  </a:lnTo>
+                  <a:lnTo>
+                    <a:pt x="2391712" y="173048"/>
+                  </a:lnTo>
+                  <a:lnTo>
+                    <a:pt x="2321368" y="168897"/>
+                  </a:lnTo>
+                  <a:lnTo>
+                    <a:pt x="2251023" y="164697"/>
+                  </a:lnTo>
+                  <a:lnTo>
+                    <a:pt x="2180679" y="160445"/>
+                  </a:lnTo>
+                  <a:lnTo>
+                    <a:pt x="2110334" y="156143"/>
+                  </a:lnTo>
+                  <a:lnTo>
+                    <a:pt x="2039990" y="151789"/>
+                  </a:lnTo>
+                  <a:lnTo>
+                    <a:pt x="1969645" y="147383"/>
+                  </a:lnTo>
+                  <a:lnTo>
+                    <a:pt x="1899301" y="142923"/>
+                  </a:lnTo>
+                  <a:lnTo>
+                    <a:pt x="1828956" y="138411"/>
+                  </a:lnTo>
+                  <a:lnTo>
+                    <a:pt x="1758612" y="133844"/>
+                  </a:lnTo>
+                  <a:lnTo>
+                    <a:pt x="1688267" y="129222"/>
+                  </a:lnTo>
+                  <a:lnTo>
+                    <a:pt x="1617923" y="124544"/>
+                  </a:lnTo>
+                  <a:lnTo>
+                    <a:pt x="1547578" y="119811"/>
+                  </a:lnTo>
+                  <a:lnTo>
+                    <a:pt x="1477234" y="115020"/>
+                  </a:lnTo>
+                  <a:lnTo>
+                    <a:pt x="1406889" y="110172"/>
+                  </a:lnTo>
+                  <a:lnTo>
+                    <a:pt x="1336545" y="105266"/>
+                  </a:lnTo>
+                  <a:lnTo>
+                    <a:pt x="1266200" y="100301"/>
+                  </a:lnTo>
+                  <a:lnTo>
+                    <a:pt x="1195856" y="95276"/>
+                  </a:lnTo>
+                  <a:lnTo>
+                    <a:pt x="1125511" y="90191"/>
+                  </a:lnTo>
+                  <a:lnTo>
+                    <a:pt x="1055167" y="85045"/>
+                  </a:lnTo>
+                  <a:lnTo>
+                    <a:pt x="984822" y="79836"/>
+                  </a:lnTo>
+                  <a:lnTo>
+                    <a:pt x="914478" y="74566"/>
+                  </a:lnTo>
+                  <a:lnTo>
+                    <a:pt x="844133" y="69232"/>
+                  </a:lnTo>
+                  <a:lnTo>
+                    <a:pt x="773789" y="63834"/>
+                  </a:lnTo>
+                  <a:lnTo>
+                    <a:pt x="703444" y="58371"/>
+                  </a:lnTo>
+                  <a:lnTo>
+                    <a:pt x="633100" y="52842"/>
+                  </a:lnTo>
+                  <a:lnTo>
+                    <a:pt x="562755" y="47247"/>
+                  </a:lnTo>
+                  <a:lnTo>
+                    <a:pt x="492411" y="41585"/>
+                  </a:lnTo>
+                  <a:lnTo>
+                    <a:pt x="422066" y="35855"/>
+                  </a:lnTo>
+                  <a:lnTo>
+                    <a:pt x="351722" y="30056"/>
+                  </a:lnTo>
+                  <a:lnTo>
+                    <a:pt x="281377" y="24188"/>
+                  </a:lnTo>
+                  <a:lnTo>
+                    <a:pt x="211033" y="18248"/>
+                  </a:lnTo>
+                  <a:lnTo>
+                    <a:pt x="140688" y="12238"/>
+                  </a:lnTo>
+                  <a:lnTo>
+                    <a:pt x="70344" y="6155"/>
+                  </a:lnTo>
+                  <a:lnTo>
+                    <a:pt x="0" y="0"/>
+                  </a:lnTo>
+                </a:path>
+              </a:pathLst>
+            </a:custGeom>
+          </p:spPr>
+          <p:txBody>
+            <a:bodyPr/>
+            <a:lstStyle/>
+            <a:p/>
+          </p:txBody>
+        </p:sp>
+        <p:sp>
+          <p:nvSpPr>
+            <p:cNvPr id="70" name="pl70"/>
+            <p:cNvSpPr/>
+            <p:nvPr/>
+          </p:nvSpPr>
+          <p:spPr>
+            <a:xfrm>
+              <a:off x="2210653" y="4336484"/>
+              <a:ext cx="5988763" cy="1229048"/>
+            </a:xfrm>
+            <a:custGeom>
+              <a:avLst/>
+              <a:pathLst>
+                <a:path w="5988763" h="1229048">
+                  <a:moveTo>
+                    <a:pt x="0" y="0"/>
+                  </a:moveTo>
+                  <a:lnTo>
+                    <a:pt x="9481" y="7685"/>
+                  </a:lnTo>
+                  <a:lnTo>
+                    <a:pt x="79825" y="62215"/>
+                  </a:lnTo>
+                  <a:lnTo>
+                    <a:pt x="150170" y="114365"/>
+                  </a:lnTo>
+                  <a:lnTo>
+                    <a:pt x="220514" y="164239"/>
+                  </a:lnTo>
+                  <a:lnTo>
+                    <a:pt x="290859" y="211937"/>
+                  </a:lnTo>
+                  <a:lnTo>
+                    <a:pt x="361203" y="257553"/>
+                  </a:lnTo>
+                  <a:lnTo>
+                    <a:pt x="431548" y="301178"/>
+                  </a:lnTo>
+                  <a:lnTo>
+                    <a:pt x="501892" y="342900"/>
+                  </a:lnTo>
+                  <a:lnTo>
+                    <a:pt x="572237" y="382801"/>
+                  </a:lnTo>
+                  <a:lnTo>
+                    <a:pt x="642581" y="420960"/>
+                  </a:lnTo>
+                  <a:lnTo>
+                    <a:pt x="712926" y="457454"/>
+                  </a:lnTo>
+                  <a:lnTo>
+                    <a:pt x="783270" y="492356"/>
+                  </a:lnTo>
+                  <a:lnTo>
+                    <a:pt x="853615" y="525734"/>
+                  </a:lnTo>
+                  <a:lnTo>
+                    <a:pt x="923959" y="557656"/>
+                  </a:lnTo>
+                  <a:lnTo>
+                    <a:pt x="994304" y="588185"/>
+                  </a:lnTo>
+                  <a:lnTo>
+                    <a:pt x="1064648" y="617381"/>
+                  </a:lnTo>
+                  <a:lnTo>
+                    <a:pt x="1134993" y="645304"/>
+                  </a:lnTo>
+                  <a:lnTo>
+                    <a:pt x="1205337" y="672007"/>
+                  </a:lnTo>
+                  <a:lnTo>
+                    <a:pt x="1275682" y="697546"/>
+                  </a:lnTo>
+                  <a:lnTo>
+                    <a:pt x="1346026" y="721969"/>
+                  </a:lnTo>
+                  <a:lnTo>
+                    <a:pt x="1416371" y="745327"/>
+                  </a:lnTo>
+                  <a:lnTo>
+                    <a:pt x="1486715" y="767666"/>
+                  </a:lnTo>
+                  <a:lnTo>
+                    <a:pt x="1557060" y="789030"/>
+                  </a:lnTo>
+                  <a:lnTo>
+                    <a:pt x="1627404" y="809461"/>
+                  </a:lnTo>
+                  <a:lnTo>
+                    <a:pt x="1697749" y="829001"/>
+                  </a:lnTo>
+                  <a:lnTo>
+                    <a:pt x="1768093" y="847688"/>
+                  </a:lnTo>
+                  <a:lnTo>
+                    <a:pt x="1838438" y="865559"/>
+                  </a:lnTo>
+                  <a:lnTo>
+                    <a:pt x="1908782" y="882651"/>
+                  </a:lnTo>
+                  <a:lnTo>
+                    <a:pt x="1979127" y="898997"/>
+                  </a:lnTo>
+                  <a:lnTo>
+                    <a:pt x="2049471" y="914629"/>
+                  </a:lnTo>
+                  <a:lnTo>
+                    <a:pt x="2119816" y="929579"/>
+                  </a:lnTo>
+                  <a:lnTo>
+                    <a:pt x="2190160" y="943877"/>
+                  </a:lnTo>
+                  <a:lnTo>
+                    <a:pt x="2260505" y="957550"/>
+                  </a:lnTo>
+                  <a:lnTo>
+                    <a:pt x="2330849" y="970628"/>
+                  </a:lnTo>
+                  <a:lnTo>
+                    <a:pt x="2401194" y="983134"/>
+                  </a:lnTo>
+                  <a:lnTo>
+                    <a:pt x="2471538" y="995094"/>
+                  </a:lnTo>
+                  <a:lnTo>
+                    <a:pt x="2541883" y="1006533"/>
+                  </a:lnTo>
+                  <a:lnTo>
+                    <a:pt x="2612227" y="1017472"/>
+                  </a:lnTo>
+                  <a:lnTo>
+                    <a:pt x="2682572" y="1027934"/>
+                  </a:lnTo>
+                  <a:lnTo>
+                    <a:pt x="2752916" y="1037940"/>
+                  </a:lnTo>
+                  <a:lnTo>
+                    <a:pt x="2823261" y="1047508"/>
+                  </a:lnTo>
+                  <a:lnTo>
+                    <a:pt x="2893605" y="1056660"/>
+                  </a:lnTo>
+                  <a:lnTo>
+                    <a:pt x="2963950" y="1065411"/>
+                  </a:lnTo>
+                  <a:lnTo>
+                    <a:pt x="3034294" y="1073781"/>
+                  </a:lnTo>
+                  <a:lnTo>
+                    <a:pt x="3104639" y="1081786"/>
+                  </a:lnTo>
+                  <a:lnTo>
+                    <a:pt x="3174983" y="1089441"/>
+                  </a:lnTo>
+                  <a:lnTo>
+                    <a:pt x="3245328" y="1096762"/>
+                  </a:lnTo>
+                  <a:lnTo>
+                    <a:pt x="3315672" y="1103764"/>
+                  </a:lnTo>
+                  <a:lnTo>
+                    <a:pt x="3386017" y="1110460"/>
+                  </a:lnTo>
+                  <a:lnTo>
+                    <a:pt x="3456361" y="1116864"/>
+                  </a:lnTo>
+                  <a:lnTo>
+                    <a:pt x="3526705" y="1122989"/>
+                  </a:lnTo>
+                  <a:lnTo>
+                    <a:pt x="3597050" y="1128846"/>
+                  </a:lnTo>
+                  <a:lnTo>
+                    <a:pt x="3667394" y="1134447"/>
+                  </a:lnTo>
+                  <a:lnTo>
+                    <a:pt x="3737739" y="1139804"/>
+                  </a:lnTo>
+                  <a:lnTo>
+                    <a:pt x="3808083" y="1144928"/>
+                  </a:lnTo>
+                  <a:lnTo>
+                    <a:pt x="3878428" y="1149827"/>
+                  </a:lnTo>
+                  <a:lnTo>
+                    <a:pt x="3948772" y="1154513"/>
+                  </a:lnTo>
+                  <a:lnTo>
+                    <a:pt x="4019117" y="1158995"/>
+                  </a:lnTo>
+                  <a:lnTo>
+                    <a:pt x="4089461" y="1163281"/>
+                  </a:lnTo>
+                  <a:lnTo>
+                    <a:pt x="4159806" y="1167379"/>
+                  </a:lnTo>
+                  <a:lnTo>
+                    <a:pt x="4230150" y="1171299"/>
+                  </a:lnTo>
+                  <a:lnTo>
+                    <a:pt x="4300495" y="1175048"/>
+                  </a:lnTo>
+                  <a:lnTo>
+                    <a:pt x="4370839" y="1178633"/>
+                  </a:lnTo>
+                  <a:lnTo>
+                    <a:pt x="4441184" y="1182062"/>
+                  </a:lnTo>
+                  <a:lnTo>
+                    <a:pt x="4511528" y="1185341"/>
+                  </a:lnTo>
+                  <a:lnTo>
+                    <a:pt x="4581873" y="1188477"/>
+                  </a:lnTo>
+                  <a:lnTo>
+                    <a:pt x="4652217" y="1191477"/>
+                  </a:lnTo>
+                  <a:lnTo>
+                    <a:pt x="4722562" y="1194345"/>
+                  </a:lnTo>
+                  <a:lnTo>
+                    <a:pt x="4792906" y="1197088"/>
+                  </a:lnTo>
+                  <a:lnTo>
+                    <a:pt x="4863251" y="1199711"/>
+                  </a:lnTo>
+                  <a:lnTo>
+                    <a:pt x="4933595" y="1202220"/>
+                  </a:lnTo>
+                  <a:lnTo>
+                    <a:pt x="5003940" y="1204620"/>
+                  </a:lnTo>
+                  <a:lnTo>
+                    <a:pt x="5074284" y="1206914"/>
+                  </a:lnTo>
+                  <a:lnTo>
+                    <a:pt x="5144629" y="1209109"/>
+                  </a:lnTo>
+                  <a:lnTo>
+                    <a:pt x="5214973" y="1211208"/>
+                  </a:lnTo>
+                  <a:lnTo>
+                    <a:pt x="5285318" y="1213215"/>
+                  </a:lnTo>
+                  <a:lnTo>
+                    <a:pt x="5355662" y="1215135"/>
+                  </a:lnTo>
+                  <a:lnTo>
+                    <a:pt x="5426007" y="1216971"/>
+                  </a:lnTo>
+                  <a:lnTo>
+                    <a:pt x="5496351" y="1218726"/>
+                  </a:lnTo>
+                  <a:lnTo>
+                    <a:pt x="5566696" y="1220405"/>
+                  </a:lnTo>
+                  <a:lnTo>
+                    <a:pt x="5637040" y="1222011"/>
+                  </a:lnTo>
+                  <a:lnTo>
+                    <a:pt x="5707385" y="1223547"/>
+                  </a:lnTo>
+                  <a:lnTo>
+                    <a:pt x="5777729" y="1225016"/>
+                  </a:lnTo>
+                  <a:lnTo>
+                    <a:pt x="5848074" y="1226420"/>
+                  </a:lnTo>
+                  <a:lnTo>
+                    <a:pt x="5918418" y="1227764"/>
+                  </a:lnTo>
+                  <a:lnTo>
+                    <a:pt x="5988763" y="1229048"/>
+                  </a:lnTo>
+                </a:path>
+              </a:pathLst>
+            </a:custGeom>
+            <a:ln w="27101" cap="flat">
+              <a:solidFill>
+                <a:srgbClr val="FF8C00">
+                  <a:alpha val="100000"/>
+                </a:srgbClr>
+              </a:solidFill>
+              <a:prstDash val="solid"/>
+              <a:round/>
+            </a:ln>
+          </p:spPr>
+          <p:txBody>
+            <a:bodyPr/>
+            <a:lstStyle/>
+            <a:p/>
+          </p:txBody>
+        </p:sp>
+        <p:sp>
+          <p:nvSpPr>
+            <p:cNvPr id="71" name="pl71"/>
+            <p:cNvSpPr/>
+            <p:nvPr/>
+          </p:nvSpPr>
+          <p:spPr>
+            <a:xfrm>
+              <a:off x="887106" y="5294352"/>
+              <a:ext cx="7660515" cy="0"/>
+            </a:xfrm>
+            <a:custGeom>
+              <a:avLst/>
+              <a:pathLst>
+                <a:path w="7660515" h="0">
+                  <a:moveTo>
+                    <a:pt x="0" y="0"/>
+                  </a:moveTo>
+                  <a:lnTo>
+                    <a:pt x="7660515" y="0"/>
+                  </a:lnTo>
+                  <a:lnTo>
+                    <a:pt x="7660515" y="0"/>
+                  </a:lnTo>
+                </a:path>
+              </a:pathLst>
+            </a:custGeom>
+            <a:ln w="13550" cap="flat">
+              <a:solidFill>
+                <a:srgbClr val="7F7F7F">
+                  <a:alpha val="100000"/>
+                </a:srgbClr>
+              </a:solidFill>
+              <a:prstDash val="dash"/>
+              <a:round/>
+            </a:ln>
+          </p:spPr>
+          <p:txBody>
+            <a:bodyPr/>
+            <a:lstStyle/>
+            <a:p/>
+          </p:txBody>
+        </p:sp>
+        <p:sp>
+          <p:nvSpPr>
+            <p:cNvPr id="72" name="pl72"/>
+            <p:cNvSpPr/>
+            <p:nvPr/>
+          </p:nvSpPr>
+          <p:spPr>
+            <a:xfrm>
+              <a:off x="4472829" y="4336484"/>
+              <a:ext cx="0" cy="1317069"/>
+            </a:xfrm>
+            <a:custGeom>
+              <a:avLst/>
+              <a:pathLst>
+                <a:path w="0" h="1317069">
+                  <a:moveTo>
+                    <a:pt x="0" y="1317069"/>
+                  </a:moveTo>
+                  <a:lnTo>
+                    <a:pt x="0" y="0"/>
+                  </a:lnTo>
+                  <a:lnTo>
+                    <a:pt x="0" y="0"/>
+                  </a:lnTo>
+                </a:path>
+              </a:pathLst>
+            </a:custGeom>
+            <a:ln w="13550" cap="flat">
+              <a:solidFill>
+                <a:srgbClr val="666666">
+                  <a:alpha val="100000"/>
+                </a:srgbClr>
+              </a:solidFill>
+              <a:prstDash val="dot"/>
+              <a:round/>
+            </a:ln>
+          </p:spPr>
+          <p:txBody>
+            <a:bodyPr/>
+            <a:lstStyle/>
+            <a:p/>
+          </p:txBody>
+        </p:sp>
+        <p:sp>
+          <p:nvSpPr>
+            <p:cNvPr id="73" name="tx73"/>
+            <p:cNvSpPr/>
+            <p:nvPr/>
+          </p:nvSpPr>
+          <p:spPr>
+            <a:xfrm>
+              <a:off x="762297" y="5553636"/>
+              <a:ext cx="62179" cy="80101"/>
+            </a:xfrm>
+            <a:prstGeom prst="rect">
+              <a:avLst/>
+            </a:prstGeom>
+            <a:noFill/>
+          </p:spPr>
+          <p:txBody>
+            <a:bodyPr lIns="0" rIns="0" tIns="0" bIns="0" anchorCtr="1" anchor="ctr" wrap="none"/>
+            <a:lstStyle/>
+            <a:p>
+              <a:pPr algn="l" marL="0" marR="0" indent="0">
+                <a:lnSpc>
+                  <a:spcPts val="880"/>
+                </a:lnSpc>
+                <a:spcBef>
+                  <a:spcPts val="0"/>
+                </a:spcBef>
+                <a:spcAft>
+                  <a:spcPts val="0"/>
+                </a:spcAft>
+              </a:pPr>
+              <a:r>
+                <a:rPr sz="880">
+                  <a:solidFill>
+                    <a:srgbClr val="4D4D4D">
+                      <a:alpha val="100000"/>
+                    </a:srgbClr>
+                  </a:solidFill>
+                  <a:latin typeface="Helvetica"/>
+                  <a:cs typeface="Helvetica"/>
+                </a:rPr>
+                <a:t>0</a:t>
+              </a:r>
+            </a:p>
+          </p:txBody>
+        </p:sp>
+        <p:sp>
+          <p:nvSpPr>
+            <p:cNvPr id="74" name="tx74"/>
+            <p:cNvSpPr/>
+            <p:nvPr/>
+          </p:nvSpPr>
+          <p:spPr>
+            <a:xfrm>
+              <a:off x="762297" y="5254302"/>
+              <a:ext cx="62179" cy="80101"/>
+            </a:xfrm>
+            <a:prstGeom prst="rect">
+              <a:avLst/>
+            </a:prstGeom>
+            <a:noFill/>
+          </p:spPr>
+          <p:txBody>
+            <a:bodyPr lIns="0" rIns="0" tIns="0" bIns="0" anchorCtr="1" anchor="ctr" wrap="none"/>
+            <a:lstStyle/>
+            <a:p>
+              <a:pPr algn="l" marL="0" marR="0" indent="0">
+                <a:lnSpc>
+                  <a:spcPts val="880"/>
+                </a:lnSpc>
+                <a:spcBef>
+                  <a:spcPts val="0"/>
+                </a:spcBef>
+                <a:spcAft>
+                  <a:spcPts val="0"/>
+                </a:spcAft>
+              </a:pPr>
+              <a:r>
+                <a:rPr sz="880">
+                  <a:solidFill>
+                    <a:srgbClr val="4D4D4D">
+                      <a:alpha val="100000"/>
+                    </a:srgbClr>
+                  </a:solidFill>
+                  <a:latin typeface="Helvetica"/>
+                  <a:cs typeface="Helvetica"/>
+                </a:rPr>
+                <a:t>1</a:t>
+              </a:r>
+            </a:p>
+          </p:txBody>
+        </p:sp>
+        <p:sp>
+          <p:nvSpPr>
+            <p:cNvPr id="75" name="tx75"/>
+            <p:cNvSpPr/>
+            <p:nvPr/>
+          </p:nvSpPr>
+          <p:spPr>
+            <a:xfrm>
+              <a:off x="762297" y="4954968"/>
+              <a:ext cx="62179" cy="80101"/>
+            </a:xfrm>
+            <a:prstGeom prst="rect">
+              <a:avLst/>
+            </a:prstGeom>
+            <a:noFill/>
+          </p:spPr>
+          <p:txBody>
+            <a:bodyPr lIns="0" rIns="0" tIns="0" bIns="0" anchorCtr="1" anchor="ctr" wrap="none"/>
+            <a:lstStyle/>
+            <a:p>
+              <a:pPr algn="l" marL="0" marR="0" indent="0">
+                <a:lnSpc>
+                  <a:spcPts val="880"/>
+                </a:lnSpc>
+                <a:spcBef>
+                  <a:spcPts val="0"/>
+                </a:spcBef>
+                <a:spcAft>
+                  <a:spcPts val="0"/>
+                </a:spcAft>
+              </a:pPr>
+              <a:r>
+                <a:rPr sz="880">
+                  <a:solidFill>
+                    <a:srgbClr val="4D4D4D">
+                      <a:alpha val="100000"/>
+                    </a:srgbClr>
+                  </a:solidFill>
+                  <a:latin typeface="Helvetica"/>
+                  <a:cs typeface="Helvetica"/>
+                </a:rPr>
+                <a:t>2</a:t>
+              </a:r>
+            </a:p>
+          </p:txBody>
+        </p:sp>
+        <p:sp>
+          <p:nvSpPr>
+            <p:cNvPr id="76" name="tx76"/>
+            <p:cNvSpPr/>
+            <p:nvPr/>
+          </p:nvSpPr>
+          <p:spPr>
+            <a:xfrm>
+              <a:off x="762297" y="4655634"/>
+              <a:ext cx="62179" cy="80101"/>
+            </a:xfrm>
+            <a:prstGeom prst="rect">
+              <a:avLst/>
+            </a:prstGeom>
+            <a:noFill/>
+          </p:spPr>
+          <p:txBody>
+            <a:bodyPr lIns="0" rIns="0" tIns="0" bIns="0" anchorCtr="1" anchor="ctr" wrap="none"/>
+            <a:lstStyle/>
+            <a:p>
+              <a:pPr algn="l" marL="0" marR="0" indent="0">
+                <a:lnSpc>
+                  <a:spcPts val="880"/>
+                </a:lnSpc>
+                <a:spcBef>
+                  <a:spcPts val="0"/>
+                </a:spcBef>
+                <a:spcAft>
+                  <a:spcPts val="0"/>
+                </a:spcAft>
+              </a:pPr>
+              <a:r>
+                <a:rPr sz="880">
+                  <a:solidFill>
+                    <a:srgbClr val="4D4D4D">
+                      <a:alpha val="100000"/>
+                    </a:srgbClr>
+                  </a:solidFill>
+                  <a:latin typeface="Helvetica"/>
+                  <a:cs typeface="Helvetica"/>
+                </a:rPr>
+                <a:t>3</a:t>
+              </a:r>
+            </a:p>
+          </p:txBody>
+        </p:sp>
+        <p:sp>
+          <p:nvSpPr>
+            <p:cNvPr id="77" name="tx77"/>
+            <p:cNvSpPr/>
+            <p:nvPr/>
+          </p:nvSpPr>
+          <p:spPr>
+            <a:xfrm>
+              <a:off x="762297" y="4356300"/>
+              <a:ext cx="62179" cy="80101"/>
+            </a:xfrm>
+            <a:prstGeom prst="rect">
+              <a:avLst/>
+            </a:prstGeom>
+            <a:noFill/>
+          </p:spPr>
+          <p:txBody>
+            <a:bodyPr lIns="0" rIns="0" tIns="0" bIns="0" anchorCtr="1" anchor="ctr" wrap="none"/>
+            <a:lstStyle/>
+            <a:p>
+              <a:pPr algn="l" marL="0" marR="0" indent="0">
+                <a:lnSpc>
+                  <a:spcPts val="880"/>
+                </a:lnSpc>
+                <a:spcBef>
+                  <a:spcPts val="0"/>
+                </a:spcBef>
+                <a:spcAft>
+                  <a:spcPts val="0"/>
+                </a:spcAft>
+              </a:pPr>
+              <a:r>
+                <a:rPr sz="880">
+                  <a:solidFill>
+                    <a:srgbClr val="4D4D4D">
+                      <a:alpha val="100000"/>
+                    </a:srgbClr>
+                  </a:solidFill>
+                  <a:latin typeface="Helvetica"/>
+                  <a:cs typeface="Helvetica"/>
+                </a:rPr>
+                <a:t>4</a:t>
+              </a:r>
+            </a:p>
+          </p:txBody>
+        </p:sp>
+        <p:sp>
+          <p:nvSpPr>
+            <p:cNvPr id="78" name="tx78"/>
+            <p:cNvSpPr/>
+            <p:nvPr/>
+          </p:nvSpPr>
+          <p:spPr>
+            <a:xfrm>
+              <a:off x="1306098" y="5716183"/>
+              <a:ext cx="161574" cy="80101"/>
+            </a:xfrm>
+            <a:prstGeom prst="rect">
+              <a:avLst/>
+            </a:prstGeom>
+            <a:noFill/>
+          </p:spPr>
+          <p:txBody>
+            <a:bodyPr lIns="0" rIns="0" tIns="0" bIns="0" anchorCtr="1" anchor="ctr" wrap="none"/>
+            <a:lstStyle/>
+            <a:p>
+              <a:pPr algn="l" marL="0" marR="0" indent="0">
+                <a:lnSpc>
+                  <a:spcPts val="880"/>
+                </a:lnSpc>
+                <a:spcBef>
+                  <a:spcPts val="0"/>
+                </a:spcBef>
+                <a:spcAft>
+                  <a:spcPts val="0"/>
+                </a:spcAft>
+              </a:pPr>
+              <a:r>
+                <a:rPr sz="880">
+                  <a:solidFill>
+                    <a:srgbClr val="4D4D4D">
+                      <a:alpha val="100000"/>
+                    </a:srgbClr>
+                  </a:solidFill>
+                  <a:latin typeface="Helvetica"/>
+                  <a:cs typeface="Helvetica"/>
+                </a:rPr>
+                <a:t>-40</a:t>
+              </a:r>
+            </a:p>
+          </p:txBody>
+        </p:sp>
+        <p:sp>
+          <p:nvSpPr>
+            <p:cNvPr id="79" name="tx79"/>
+            <p:cNvSpPr/>
+            <p:nvPr/>
+          </p:nvSpPr>
+          <p:spPr>
+            <a:xfrm>
+              <a:off x="2113264" y="5716183"/>
+              <a:ext cx="161574" cy="80101"/>
+            </a:xfrm>
+            <a:prstGeom prst="rect">
+              <a:avLst/>
+            </a:prstGeom>
+            <a:noFill/>
+          </p:spPr>
+          <p:txBody>
+            <a:bodyPr lIns="0" rIns="0" tIns="0" bIns="0" anchorCtr="1" anchor="ctr" wrap="none"/>
+            <a:lstStyle/>
+            <a:p>
+              <a:pPr algn="l" marL="0" marR="0" indent="0">
+                <a:lnSpc>
+                  <a:spcPts val="880"/>
+                </a:lnSpc>
+                <a:spcBef>
+                  <a:spcPts val="0"/>
+                </a:spcBef>
+                <a:spcAft>
+                  <a:spcPts val="0"/>
+                </a:spcAft>
+              </a:pPr>
+              <a:r>
+                <a:rPr sz="880">
+                  <a:solidFill>
+                    <a:srgbClr val="4D4D4D">
+                      <a:alpha val="100000"/>
+                    </a:srgbClr>
+                  </a:solidFill>
+                  <a:latin typeface="Helvetica"/>
+                  <a:cs typeface="Helvetica"/>
+                </a:rPr>
+                <a:t>-30</a:t>
+              </a:r>
+            </a:p>
+          </p:txBody>
+        </p:sp>
+        <p:sp>
+          <p:nvSpPr>
+            <p:cNvPr id="80" name="tx80"/>
+            <p:cNvSpPr/>
+            <p:nvPr/>
+          </p:nvSpPr>
+          <p:spPr>
+            <a:xfrm>
+              <a:off x="2920429" y="5716183"/>
+              <a:ext cx="161574" cy="80101"/>
+            </a:xfrm>
+            <a:prstGeom prst="rect">
+              <a:avLst/>
+            </a:prstGeom>
+            <a:noFill/>
+          </p:spPr>
+          <p:txBody>
+            <a:bodyPr lIns="0" rIns="0" tIns="0" bIns="0" anchorCtr="1" anchor="ctr" wrap="none"/>
+            <a:lstStyle/>
+            <a:p>
+              <a:pPr algn="l" marL="0" marR="0" indent="0">
+                <a:lnSpc>
+                  <a:spcPts val="880"/>
+                </a:lnSpc>
+                <a:spcBef>
+                  <a:spcPts val="0"/>
+                </a:spcBef>
+                <a:spcAft>
+                  <a:spcPts val="0"/>
+                </a:spcAft>
+              </a:pPr>
+              <a:r>
+                <a:rPr sz="880">
+                  <a:solidFill>
+                    <a:srgbClr val="4D4D4D">
+                      <a:alpha val="100000"/>
+                    </a:srgbClr>
+                  </a:solidFill>
+                  <a:latin typeface="Helvetica"/>
+                  <a:cs typeface="Helvetica"/>
+                </a:rPr>
+                <a:t>-20</a:t>
+              </a:r>
+            </a:p>
+          </p:txBody>
+        </p:sp>
+        <p:sp>
+          <p:nvSpPr>
+            <p:cNvPr id="81" name="tx81"/>
+            <p:cNvSpPr/>
+            <p:nvPr/>
+          </p:nvSpPr>
+          <p:spPr>
+            <a:xfrm>
+              <a:off x="3727595" y="5716183"/>
+              <a:ext cx="161574" cy="80101"/>
+            </a:xfrm>
+            <a:prstGeom prst="rect">
+              <a:avLst/>
+            </a:prstGeom>
+            <a:noFill/>
+          </p:spPr>
+          <p:txBody>
+            <a:bodyPr lIns="0" rIns="0" tIns="0" bIns="0" anchorCtr="1" anchor="ctr" wrap="none"/>
+            <a:lstStyle/>
+            <a:p>
+              <a:pPr algn="l" marL="0" marR="0" indent="0">
+                <a:lnSpc>
+                  <a:spcPts val="880"/>
+                </a:lnSpc>
+                <a:spcBef>
+                  <a:spcPts val="0"/>
+                </a:spcBef>
+                <a:spcAft>
+                  <a:spcPts val="0"/>
+                </a:spcAft>
+              </a:pPr>
+              <a:r>
+                <a:rPr sz="880">
+                  <a:solidFill>
+                    <a:srgbClr val="4D4D4D">
+                      <a:alpha val="100000"/>
+                    </a:srgbClr>
+                  </a:solidFill>
+                  <a:latin typeface="Helvetica"/>
+                  <a:cs typeface="Helvetica"/>
+                </a:rPr>
+                <a:t>-10</a:t>
+              </a:r>
+            </a:p>
+          </p:txBody>
+        </p:sp>
+        <p:sp>
+          <p:nvSpPr>
+            <p:cNvPr id="82" name="tx82"/>
+            <p:cNvSpPr/>
+            <p:nvPr/>
+          </p:nvSpPr>
+          <p:spPr>
+            <a:xfrm>
+              <a:off x="4584458" y="5716183"/>
+              <a:ext cx="62179" cy="80101"/>
+            </a:xfrm>
+            <a:prstGeom prst="rect">
+              <a:avLst/>
+            </a:prstGeom>
+            <a:noFill/>
+          </p:spPr>
+          <p:txBody>
+            <a:bodyPr lIns="0" rIns="0" tIns="0" bIns="0" anchorCtr="1" anchor="ctr" wrap="none"/>
+            <a:lstStyle/>
+            <a:p>
+              <a:pPr algn="l" marL="0" marR="0" indent="0">
+                <a:lnSpc>
+                  <a:spcPts val="880"/>
+                </a:lnSpc>
+                <a:spcBef>
+                  <a:spcPts val="0"/>
+                </a:spcBef>
+                <a:spcAft>
+                  <a:spcPts val="0"/>
+                </a:spcAft>
+              </a:pPr>
+              <a:r>
+                <a:rPr sz="880">
+                  <a:solidFill>
+                    <a:srgbClr val="4D4D4D">
+                      <a:alpha val="100000"/>
+                    </a:srgbClr>
+                  </a:solidFill>
+                  <a:latin typeface="Helvetica"/>
+                  <a:cs typeface="Helvetica"/>
+                </a:rPr>
+                <a:t>0</a:t>
+              </a:r>
+            </a:p>
+          </p:txBody>
+        </p:sp>
+        <p:sp>
+          <p:nvSpPr>
+            <p:cNvPr id="83" name="tx83"/>
+            <p:cNvSpPr/>
+            <p:nvPr/>
+          </p:nvSpPr>
+          <p:spPr>
+            <a:xfrm>
+              <a:off x="5360534" y="5716183"/>
+              <a:ext cx="124358" cy="80101"/>
+            </a:xfrm>
+            <a:prstGeom prst="rect">
+              <a:avLst/>
+            </a:prstGeom>
+            <a:noFill/>
+          </p:spPr>
+          <p:txBody>
+            <a:bodyPr lIns="0" rIns="0" tIns="0" bIns="0" anchorCtr="1" anchor="ctr" wrap="none"/>
+            <a:lstStyle/>
+            <a:p>
+              <a:pPr algn="l" marL="0" marR="0" indent="0">
+                <a:lnSpc>
+                  <a:spcPts val="880"/>
+                </a:lnSpc>
+                <a:spcBef>
+                  <a:spcPts val="0"/>
+                </a:spcBef>
+                <a:spcAft>
+                  <a:spcPts val="0"/>
+                </a:spcAft>
+              </a:pPr>
+              <a:r>
+                <a:rPr sz="880">
+                  <a:solidFill>
+                    <a:srgbClr val="4D4D4D">
+                      <a:alpha val="100000"/>
+                    </a:srgbClr>
+                  </a:solidFill>
+                  <a:latin typeface="Helvetica"/>
+                  <a:cs typeface="Helvetica"/>
+                </a:rPr>
+                <a:t>10</a:t>
+              </a:r>
+            </a:p>
+          </p:txBody>
+        </p:sp>
+        <p:sp>
+          <p:nvSpPr>
+            <p:cNvPr id="84" name="tx84"/>
+            <p:cNvSpPr/>
+            <p:nvPr/>
+          </p:nvSpPr>
+          <p:spPr>
+            <a:xfrm>
+              <a:off x="6167699" y="5716183"/>
+              <a:ext cx="124358" cy="80101"/>
+            </a:xfrm>
+            <a:prstGeom prst="rect">
+              <a:avLst/>
+            </a:prstGeom>
+            <a:noFill/>
+          </p:spPr>
+          <p:txBody>
+            <a:bodyPr lIns="0" rIns="0" tIns="0" bIns="0" anchorCtr="1" anchor="ctr" wrap="none"/>
+            <a:lstStyle/>
+            <a:p>
+              <a:pPr algn="l" marL="0" marR="0" indent="0">
+                <a:lnSpc>
+                  <a:spcPts val="880"/>
+                </a:lnSpc>
+                <a:spcBef>
+                  <a:spcPts val="0"/>
+                </a:spcBef>
+                <a:spcAft>
+                  <a:spcPts val="0"/>
+                </a:spcAft>
+              </a:pPr>
+              <a:r>
+                <a:rPr sz="880">
+                  <a:solidFill>
+                    <a:srgbClr val="4D4D4D">
+                      <a:alpha val="100000"/>
+                    </a:srgbClr>
+                  </a:solidFill>
+                  <a:latin typeface="Helvetica"/>
+                  <a:cs typeface="Helvetica"/>
+                </a:rPr>
+                <a:t>20</a:t>
+              </a:r>
+            </a:p>
+          </p:txBody>
+        </p:sp>
+        <p:sp>
+          <p:nvSpPr>
+            <p:cNvPr id="85" name="tx85"/>
+            <p:cNvSpPr/>
+            <p:nvPr/>
+          </p:nvSpPr>
+          <p:spPr>
+            <a:xfrm>
+              <a:off x="6974865" y="5716183"/>
+              <a:ext cx="124358" cy="80101"/>
+            </a:xfrm>
+            <a:prstGeom prst="rect">
+              <a:avLst/>
+            </a:prstGeom>
+            <a:noFill/>
+          </p:spPr>
+          <p:txBody>
+            <a:bodyPr lIns="0" rIns="0" tIns="0" bIns="0" anchorCtr="1" anchor="ctr" wrap="none"/>
+            <a:lstStyle/>
+            <a:p>
+              <a:pPr algn="l" marL="0" marR="0" indent="0">
+                <a:lnSpc>
+                  <a:spcPts val="880"/>
+                </a:lnSpc>
+                <a:spcBef>
+                  <a:spcPts val="0"/>
+                </a:spcBef>
+                <a:spcAft>
+                  <a:spcPts val="0"/>
+                </a:spcAft>
+              </a:pPr>
+              <a:r>
+                <a:rPr sz="880">
+                  <a:solidFill>
+                    <a:srgbClr val="4D4D4D">
+                      <a:alpha val="100000"/>
+                    </a:srgbClr>
+                  </a:solidFill>
+                  <a:latin typeface="Helvetica"/>
+                  <a:cs typeface="Helvetica"/>
+                </a:rPr>
+                <a:t>30</a:t>
+              </a:r>
+            </a:p>
+          </p:txBody>
+        </p:sp>
+        <p:sp>
+          <p:nvSpPr>
+            <p:cNvPr id="86" name="tx86"/>
+            <p:cNvSpPr/>
+            <p:nvPr/>
+          </p:nvSpPr>
+          <p:spPr>
+            <a:xfrm>
+              <a:off x="7782030" y="5716183"/>
+              <a:ext cx="124358" cy="80101"/>
+            </a:xfrm>
+            <a:prstGeom prst="rect">
+              <a:avLst/>
+            </a:prstGeom>
+            <a:noFill/>
+          </p:spPr>
+          <p:txBody>
+            <a:bodyPr lIns="0" rIns="0" tIns="0" bIns="0" anchorCtr="1" anchor="ctr" wrap="none"/>
+            <a:lstStyle/>
+            <a:p>
+              <a:pPr algn="l" marL="0" marR="0" indent="0">
+                <a:lnSpc>
+                  <a:spcPts val="880"/>
+                </a:lnSpc>
+                <a:spcBef>
+                  <a:spcPts val="0"/>
+                </a:spcBef>
+                <a:spcAft>
+                  <a:spcPts val="0"/>
+                </a:spcAft>
+              </a:pPr>
+              <a:r>
+                <a:rPr sz="880">
+                  <a:solidFill>
+                    <a:srgbClr val="4D4D4D">
+                      <a:alpha val="100000"/>
+                    </a:srgbClr>
+                  </a:solidFill>
+                  <a:latin typeface="Helvetica"/>
+                  <a:cs typeface="Helvetica"/>
+                </a:rPr>
+                <a:t>40</a:t>
+              </a:r>
+            </a:p>
+          </p:txBody>
+        </p:sp>
+        <p:sp>
+          <p:nvSpPr>
+            <p:cNvPr id="87" name="tx87"/>
+            <p:cNvSpPr/>
+            <p:nvPr/>
+          </p:nvSpPr>
+          <p:spPr>
+            <a:xfrm>
+              <a:off x="2928340" y="5855859"/>
+              <a:ext cx="3578047" cy="100218"/>
+            </a:xfrm>
+            <a:prstGeom prst="rect">
+              <a:avLst/>
+            </a:prstGeom>
+            <a:noFill/>
+          </p:spPr>
+          <p:txBody>
+            <a:bodyPr lIns="0" rIns="0" tIns="0" bIns="0" anchorCtr="1" anchor="ctr" wrap="none"/>
+            <a:lstStyle/>
+            <a:p>
+              <a:pPr algn="l" marL="0" marR="0" indent="0">
+                <a:lnSpc>
+                  <a:spcPts val="1100"/>
+                </a:lnSpc>
+                <a:spcBef>
+                  <a:spcPts val="0"/>
+                </a:spcBef>
+                <a:spcAft>
+                  <a:spcPts val="0"/>
+                </a:spcAft>
+              </a:pPr>
+              <a:r>
+                <a:rPr sz="1100">
+                  <a:solidFill>
+                    <a:srgbClr val="000000">
+                      <a:alpha val="100000"/>
+                    </a:srgbClr>
+                  </a:solidFill>
+                  <a:latin typeface="Helvetica"/>
+                  <a:cs typeface="Helvetica"/>
+                </a:rPr>
+                <a:t>eGFR difference (%): 100 × (CKD-EPI Cr-Cys − CG) / CG</a:t>
+              </a:r>
+            </a:p>
+          </p:txBody>
+        </p:sp>
+        <p:sp>
+          <p:nvSpPr>
+            <p:cNvPr id="88" name="tx88"/>
+            <p:cNvSpPr/>
+            <p:nvPr/>
+          </p:nvSpPr>
+          <p:spPr>
+            <a:xfrm rot="-5400000">
+              <a:off x="138035" y="4944909"/>
+              <a:ext cx="1016904" cy="100218"/>
+            </a:xfrm>
+            <a:prstGeom prst="rect">
+              <a:avLst/>
+            </a:prstGeom>
+            <a:noFill/>
+          </p:spPr>
+          <p:txBody>
+            <a:bodyPr lIns="0" rIns="0" tIns="0" bIns="0" anchorCtr="1" anchor="ctr" wrap="none"/>
+            <a:lstStyle/>
+            <a:p>
+              <a:pPr algn="l" marL="0" marR="0" indent="0">
+                <a:lnSpc>
+                  <a:spcPts val="1100"/>
+                </a:lnSpc>
+                <a:spcBef>
+                  <a:spcPts val="0"/>
+                </a:spcBef>
+                <a:spcAft>
+                  <a:spcPts val="0"/>
+                </a:spcAft>
+              </a:pPr>
+              <a:r>
+                <a:rPr sz="1100">
+                  <a:solidFill>
+                    <a:srgbClr val="000000">
+                      <a:alpha val="100000"/>
+                    </a:srgbClr>
+                  </a:solidFill>
+                  <a:latin typeface="Helvetica"/>
+                  <a:cs typeface="Helvetica"/>
+                </a:rPr>
+                <a:t>subHR (95% CI)</a:t>
+              </a:r>
+            </a:p>
+          </p:txBody>
+        </p:sp>
+        <p:sp>
+          <p:nvSpPr>
+            <p:cNvPr id="89" name="tx89"/>
+            <p:cNvSpPr/>
+            <p:nvPr/>
+          </p:nvSpPr>
+          <p:spPr>
+            <a:xfrm>
+              <a:off x="887106" y="4159544"/>
+              <a:ext cx="6385163" cy="82021"/>
+            </a:xfrm>
+            <a:prstGeom prst="rect">
+              <a:avLst/>
+            </a:prstGeom>
+            <a:noFill/>
+          </p:spPr>
+          <p:txBody>
+            <a:bodyPr lIns="0" rIns="0" tIns="0" bIns="0" anchorCtr="1" anchor="ctr" wrap="none"/>
+            <a:lstStyle/>
+            <a:p>
+              <a:pPr algn="l" marL="0" marR="0" indent="0">
+                <a:lnSpc>
+                  <a:spcPts val="900"/>
+                </a:lnSpc>
+                <a:spcBef>
+                  <a:spcPts val="0"/>
+                </a:spcBef>
+                <a:spcAft>
+                  <a:spcPts val="0"/>
+                </a:spcAft>
+              </a:pPr>
+              <a:r>
+                <a:rPr sz="900">
+                  <a:solidFill>
+                    <a:srgbClr val="404040">
+                      <a:alpha val="100000"/>
+                    </a:srgbClr>
+                  </a:solidFill>
+                  <a:latin typeface="Helvetica"/>
+                  <a:cs typeface="Helvetica"/>
+                </a:rPr>
+                <a:t>subHR per 10 % decline: 1.67 (1.15-2.43), p = 0.007  |  per IQR decline (Δ = 29.5 %): 4.54 (1.50-13.73)  |  IQR: [-15.6, 13.9] %</a:t>
+              </a:r>
+            </a:p>
+          </p:txBody>
+        </p:sp>
+        <p:sp>
+          <p:nvSpPr>
+            <p:cNvPr id="90" name="tx90"/>
+            <p:cNvSpPr/>
+            <p:nvPr/>
+          </p:nvSpPr>
+          <p:spPr>
+            <a:xfrm>
+              <a:off x="887106" y="3932770"/>
               <a:ext cx="3192444" cy="120152"/>
             </a:xfrm>
             <a:prstGeom prst="rect">
